--- a/presentation/NEM2026_workshop.pptx
+++ b/presentation/NEM2026_workshop.pptx
@@ -29171,7 +29171,7 @@
             <a:r>
               <a:rPr sz="1000" b="1" i="0">
                 <a:solidFill>
-                  <a:srgbClr val="414D5C"/>
+                  <a:srgbClr val="770000"/>
                 </a:solidFill>
                 <a:latin typeface="Arial"/>
               </a:rPr>
@@ -29254,7 +29254,7 @@
             <a:r>
               <a:rPr sz="1000" b="1" i="0">
                 <a:solidFill>
-                  <a:srgbClr val="414D5C"/>
+                  <a:srgbClr val="770000"/>
                 </a:solidFill>
                 <a:latin typeface="Arial"/>
               </a:rPr>
@@ -29595,7 +29595,7 @@
             <a:r>
               <a:rPr sz="1000" b="1" i="0">
                 <a:solidFill>
-                  <a:srgbClr val="414D5C"/>
+                  <a:srgbClr val="770000"/>
                 </a:solidFill>
                 <a:latin typeface="Arial"/>
               </a:rPr>
@@ -29678,7 +29678,7 @@
             <a:r>
               <a:rPr sz="1000" b="1" i="0">
                 <a:solidFill>
-                  <a:srgbClr val="414D5C"/>
+                  <a:srgbClr val="770000"/>
                 </a:solidFill>
                 <a:latin typeface="Arial"/>
               </a:rPr>
@@ -30015,7 +30015,7 @@
             <a:r>
               <a:rPr sz="16000" b="0" i="0">
                 <a:solidFill>
-                  <a:srgbClr val="414D5C"/>
+                  <a:srgbClr val="770000"/>
                 </a:solidFill>
                 <a:latin typeface="Georgia"/>
               </a:rPr>
@@ -30553,7 +30553,7 @@
             <a:r>
               <a:rPr sz="2200" b="1">
                 <a:solidFill>
-                  <a:srgbClr val="414D5C"/>
+                  <a:srgbClr val="770000"/>
                 </a:solidFill>
                 <a:latin typeface="Arial"/>
               </a:rPr>
@@ -30581,7 +30581,7 @@
             <a:r>
               <a:rPr sz="2200" b="1">
                 <a:solidFill>
-                  <a:srgbClr val="414D5C"/>
+                  <a:srgbClr val="770000"/>
                 </a:solidFill>
                 <a:latin typeface="Arial"/>
               </a:rPr>
@@ -30618,7 +30618,7 @@
             <a:r>
               <a:rPr sz="2200" b="1">
                 <a:solidFill>
-                  <a:srgbClr val="414D5C"/>
+                  <a:srgbClr val="770000"/>
                 </a:solidFill>
                 <a:latin typeface="Arial"/>
               </a:rPr>
@@ -30687,7 +30687,7 @@
             <a:r>
               <a:rPr sz="1000" b="1" i="0">
                 <a:solidFill>
-                  <a:srgbClr val="414D5C"/>
+                  <a:srgbClr val="770000"/>
                 </a:solidFill>
                 <a:latin typeface="Arial"/>
               </a:rPr>
@@ -30965,7 +30965,7 @@
             <a:r>
               <a:rPr sz="1000" b="1" i="0">
                 <a:solidFill>
-                  <a:srgbClr val="414D5C"/>
+                  <a:srgbClr val="770000"/>
                 </a:solidFill>
                 <a:latin typeface="Arial"/>
               </a:rPr>
@@ -31043,7 +31043,7 @@
             <a:r>
               <a:rPr sz="6400" b="1" i="0">
                 <a:solidFill>
-                  <a:srgbClr val="414D5C"/>
+                  <a:srgbClr val="770000"/>
                 </a:solidFill>
                 <a:latin typeface="Arial"/>
               </a:rPr>
@@ -31067,7 +31067,7 @@
             <a:avLst/>
           </a:prstGeom>
           <a:solidFill>
-            <a:srgbClr val="414D5C"/>
+            <a:srgbClr val="770000"/>
           </a:solidFill>
           <a:ln>
             <a:noFill/>
@@ -31126,7 +31126,7 @@
             <a:r>
               <a:rPr sz="1800" b="1">
                 <a:solidFill>
-                  <a:srgbClr val="414D5C"/>
+                  <a:srgbClr val="770000"/>
                 </a:solidFill>
                 <a:latin typeface="Arial"/>
               </a:rPr>
@@ -31154,7 +31154,7 @@
             <a:r>
               <a:rPr sz="1800" b="1">
                 <a:solidFill>
-                  <a:srgbClr val="414D5C"/>
+                  <a:srgbClr val="770000"/>
                 </a:solidFill>
                 <a:latin typeface="Arial"/>
               </a:rPr>
@@ -31191,7 +31191,7 @@
             <a:r>
               <a:rPr sz="1800" b="1">
                 <a:solidFill>
-                  <a:srgbClr val="414D5C"/>
+                  <a:srgbClr val="770000"/>
                 </a:solidFill>
                 <a:latin typeface="Arial"/>
               </a:rPr>
@@ -31660,7 +31660,7 @@
             <a:r>
               <a:rPr sz="2000" b="1">
                 <a:solidFill>
-                  <a:srgbClr val="414D5C"/>
+                  <a:srgbClr val="770000"/>
                 </a:solidFill>
                 <a:latin typeface="Arial"/>
               </a:rPr>
@@ -31697,7 +31697,7 @@
             <a:r>
               <a:rPr sz="2000" b="1">
                 <a:solidFill>
-                  <a:srgbClr val="414D5C"/>
+                  <a:srgbClr val="770000"/>
                 </a:solidFill>
                 <a:latin typeface="Arial"/>
               </a:rPr>
@@ -31734,7 +31734,7 @@
             <a:r>
               <a:rPr sz="2000" b="1">
                 <a:solidFill>
-                  <a:srgbClr val="414D5C"/>
+                  <a:srgbClr val="770000"/>
                 </a:solidFill>
                 <a:latin typeface="Arial"/>
               </a:rPr>
@@ -31803,7 +31803,7 @@
             <a:r>
               <a:rPr sz="1000" b="1" i="0">
                 <a:solidFill>
-                  <a:srgbClr val="414D5C"/>
+                  <a:srgbClr val="770000"/>
                 </a:solidFill>
                 <a:latin typeface="Arial"/>
               </a:rPr>
@@ -31881,7 +31881,7 @@
             <a:r>
               <a:rPr sz="1000" b="1" i="0">
                 <a:solidFill>
-                  <a:srgbClr val="414D5C"/>
+                  <a:srgbClr val="770000"/>
                 </a:solidFill>
                 <a:latin typeface="Arial"/>
               </a:rPr>
@@ -31959,7 +31959,7 @@
             <a:r>
               <a:rPr sz="6400" b="1" i="0">
                 <a:solidFill>
-                  <a:srgbClr val="414D5C"/>
+                  <a:srgbClr val="770000"/>
                 </a:solidFill>
                 <a:latin typeface="Arial"/>
               </a:rPr>
@@ -31983,7 +31983,7 @@
             <a:avLst/>
           </a:prstGeom>
           <a:solidFill>
-            <a:srgbClr val="414D5C"/>
+            <a:srgbClr val="770000"/>
           </a:solidFill>
           <a:ln>
             <a:noFill/>
@@ -32042,7 +32042,7 @@
             <a:r>
               <a:rPr sz="1800" b="1">
                 <a:solidFill>
-                  <a:srgbClr val="414D5C"/>
+                  <a:srgbClr val="770000"/>
                 </a:solidFill>
                 <a:latin typeface="Arial"/>
               </a:rPr>
@@ -32070,7 +32070,7 @@
             <a:r>
               <a:rPr sz="1800" b="1">
                 <a:solidFill>
-                  <a:srgbClr val="414D5C"/>
+                  <a:srgbClr val="770000"/>
                 </a:solidFill>
                 <a:latin typeface="Arial"/>
               </a:rPr>
@@ -32107,7 +32107,7 @@
             <a:r>
               <a:rPr sz="1800" b="1">
                 <a:solidFill>
-                  <a:srgbClr val="414D5C"/>
+                  <a:srgbClr val="770000"/>
                 </a:solidFill>
                 <a:latin typeface="Arial"/>
               </a:rPr>
@@ -32387,7 +32387,7 @@
             <a:r>
               <a:rPr sz="2000" b="1">
                 <a:solidFill>
-                  <a:srgbClr val="414D5C"/>
+                  <a:srgbClr val="770000"/>
                 </a:solidFill>
                 <a:latin typeface="Arial"/>
               </a:rPr>
@@ -32415,7 +32415,7 @@
             <a:r>
               <a:rPr sz="2000" b="1">
                 <a:solidFill>
-                  <a:srgbClr val="414D5C"/>
+                  <a:srgbClr val="770000"/>
                 </a:solidFill>
                 <a:latin typeface="Arial"/>
               </a:rPr>
@@ -32443,7 +32443,7 @@
             <a:r>
               <a:rPr sz="2000" b="1">
                 <a:solidFill>
-                  <a:srgbClr val="414D5C"/>
+                  <a:srgbClr val="770000"/>
                 </a:solidFill>
                 <a:latin typeface="Arial"/>
               </a:rPr>
@@ -32512,7 +32512,7 @@
             <a:r>
               <a:rPr sz="1000" b="1" i="0">
                 <a:solidFill>
-                  <a:srgbClr val="414D5C"/>
+                  <a:srgbClr val="770000"/>
                 </a:solidFill>
                 <a:latin typeface="Arial"/>
               </a:rPr>
@@ -32590,7 +32590,7 @@
             <a:r>
               <a:rPr sz="1000" b="1" i="0">
                 <a:solidFill>
-                  <a:srgbClr val="414D5C"/>
+                  <a:srgbClr val="770000"/>
                 </a:solidFill>
                 <a:latin typeface="Arial"/>
               </a:rPr>
@@ -32668,7 +32668,7 @@
             <a:r>
               <a:rPr sz="6400" b="1" i="0">
                 <a:solidFill>
-                  <a:srgbClr val="414D5C"/>
+                  <a:srgbClr val="770000"/>
                 </a:solidFill>
                 <a:latin typeface="Arial"/>
               </a:rPr>
@@ -32692,7 +32692,7 @@
             <a:avLst/>
           </a:prstGeom>
           <a:solidFill>
-            <a:srgbClr val="414D5C"/>
+            <a:srgbClr val="770000"/>
           </a:solidFill>
           <a:ln>
             <a:noFill/>
@@ -32751,7 +32751,7 @@
             <a:r>
               <a:rPr sz="1800" b="1">
                 <a:solidFill>
-                  <a:srgbClr val="414D5C"/>
+                  <a:srgbClr val="770000"/>
                 </a:solidFill>
                 <a:latin typeface="Arial"/>
               </a:rPr>
@@ -32779,7 +32779,7 @@
             <a:r>
               <a:rPr sz="1800" b="1">
                 <a:solidFill>
-                  <a:srgbClr val="414D5C"/>
+                  <a:srgbClr val="770000"/>
                 </a:solidFill>
                 <a:latin typeface="Arial"/>
               </a:rPr>
@@ -32816,7 +32816,7 @@
             <a:r>
               <a:rPr sz="1800" b="1">
                 <a:solidFill>
-                  <a:srgbClr val="414D5C"/>
+                  <a:srgbClr val="770000"/>
                 </a:solidFill>
                 <a:latin typeface="Arial"/>
               </a:rPr>
@@ -32875,7 +32875,7 @@
             <a:r>
               <a:rPr sz="2200" b="1">
                 <a:solidFill>
-                  <a:srgbClr val="414D5C"/>
+                  <a:srgbClr val="770000"/>
                 </a:solidFill>
                 <a:latin typeface="Arial"/>
               </a:rPr>
@@ -32912,7 +32912,7 @@
             <a:r>
               <a:rPr sz="2200" b="1">
                 <a:solidFill>
-                  <a:srgbClr val="414D5C"/>
+                  <a:srgbClr val="770000"/>
                 </a:solidFill>
                 <a:latin typeface="Arial"/>
               </a:rPr>
@@ -32940,7 +32940,7 @@
             <a:r>
               <a:rPr sz="2200" b="1">
                 <a:solidFill>
-                  <a:srgbClr val="414D5C"/>
+                  <a:srgbClr val="770000"/>
                 </a:solidFill>
                 <a:latin typeface="Arial"/>
               </a:rPr>
@@ -32968,7 +32968,7 @@
             <a:r>
               <a:rPr sz="2200" b="1">
                 <a:solidFill>
-                  <a:srgbClr val="414D5C"/>
+                  <a:srgbClr val="770000"/>
                 </a:solidFill>
                 <a:latin typeface="Arial"/>
               </a:rPr>
@@ -33037,7 +33037,7 @@
             <a:r>
               <a:rPr sz="1000" b="1" i="0">
                 <a:solidFill>
-                  <a:srgbClr val="414D5C"/>
+                  <a:srgbClr val="770000"/>
                 </a:solidFill>
                 <a:latin typeface="Arial"/>
               </a:rPr>
@@ -33159,7 +33159,7 @@
             <a:r>
               <a:rPr sz="1400" b="1" i="0">
                 <a:solidFill>
-                  <a:srgbClr val="414D5C"/>
+                  <a:srgbClr val="770000"/>
                 </a:solidFill>
                 <a:latin typeface="Arial"/>
               </a:rPr>
@@ -42186,7 +42186,7 @@
             <a:avLst/>
           </a:prstGeom>
           <a:solidFill>
-            <a:srgbClr val="414D5C"/>
+            <a:srgbClr val="770000"/>
           </a:solidFill>
           <a:ln>
             <a:noFill/>
@@ -42284,7 +42284,7 @@
             <a:r>
               <a:rPr sz="1800" b="1" i="0">
                 <a:solidFill>
-                  <a:srgbClr val="414D5C"/>
+                  <a:srgbClr val="770000"/>
                 </a:solidFill>
                 <a:latin typeface="Arial"/>
               </a:rPr>
@@ -46058,7 +46058,7 @@
             <a:avLst/>
           </a:prstGeom>
           <a:solidFill>
-            <a:srgbClr val="414D5C"/>
+            <a:srgbClr val="770000"/>
           </a:solidFill>
           <a:ln>
             <a:noFill/>
@@ -46156,7 +46156,7 @@
             <a:r>
               <a:rPr sz="1400" b="1">
                 <a:solidFill>
-                  <a:srgbClr val="414D5C"/>
+                  <a:srgbClr val="770000"/>
                 </a:solidFill>
                 <a:latin typeface="Arial"/>
               </a:rPr>
@@ -46184,7 +46184,7 @@
             <a:r>
               <a:rPr sz="1400" b="1">
                 <a:solidFill>
-                  <a:srgbClr val="414D5C"/>
+                  <a:srgbClr val="770000"/>
                 </a:solidFill>
                 <a:latin typeface="Arial"/>
               </a:rPr>
@@ -46212,7 +46212,7 @@
             <a:r>
               <a:rPr sz="1400" b="1">
                 <a:solidFill>
-                  <a:srgbClr val="414D5C"/>
+                  <a:srgbClr val="770000"/>
                 </a:solidFill>
                 <a:latin typeface="Arial"/>
               </a:rPr>
@@ -46240,7 +46240,7 @@
             <a:r>
               <a:rPr sz="1400" b="1">
                 <a:solidFill>
-                  <a:srgbClr val="414D5C"/>
+                  <a:srgbClr val="770000"/>
                 </a:solidFill>
                 <a:latin typeface="Arial"/>
               </a:rPr>
@@ -46268,7 +46268,7 @@
             <a:r>
               <a:rPr sz="1400" b="1">
                 <a:solidFill>
-                  <a:srgbClr val="414D5C"/>
+                  <a:srgbClr val="770000"/>
                 </a:solidFill>
                 <a:latin typeface="Arial"/>
               </a:rPr>
@@ -46873,7 +46873,7 @@
             <a:r>
               <a:rPr sz="2200" b="1">
                 <a:solidFill>
-                  <a:srgbClr val="414D5C"/>
+                  <a:srgbClr val="770000"/>
                 </a:solidFill>
                 <a:latin typeface="Arial"/>
               </a:rPr>
@@ -46910,7 +46910,7 @@
             <a:r>
               <a:rPr sz="2200" b="1">
                 <a:solidFill>
-                  <a:srgbClr val="414D5C"/>
+                  <a:srgbClr val="770000"/>
                 </a:solidFill>
                 <a:latin typeface="Arial"/>
               </a:rPr>
@@ -46947,7 +46947,7 @@
             <a:r>
               <a:rPr sz="2200" b="1">
                 <a:solidFill>
-                  <a:srgbClr val="414D5C"/>
+                  <a:srgbClr val="770000"/>
                 </a:solidFill>
                 <a:latin typeface="Arial"/>
               </a:rPr>
@@ -46984,7 +46984,7 @@
             <a:r>
               <a:rPr sz="2200" b="1">
                 <a:solidFill>
-                  <a:srgbClr val="414D5C"/>
+                  <a:srgbClr val="770000"/>
                 </a:solidFill>
                 <a:latin typeface="Arial"/>
               </a:rPr>
@@ -47062,7 +47062,7 @@
             <a:r>
               <a:rPr sz="1000" b="1" i="0">
                 <a:solidFill>
-                  <a:srgbClr val="414D5C"/>
+                  <a:srgbClr val="770000"/>
                 </a:solidFill>
                 <a:latin typeface="Arial"/>
               </a:rPr>
@@ -49941,7 +49941,7 @@
             <a:r>
               <a:rPr sz="2000" b="1">
                 <a:solidFill>
-                  <a:srgbClr val="414D5C"/>
+                  <a:srgbClr val="770000"/>
                 </a:solidFill>
                 <a:latin typeface="Arial"/>
               </a:rPr>
@@ -49978,7 +49978,7 @@
             <a:r>
               <a:rPr sz="2000" b="1">
                 <a:solidFill>
-                  <a:srgbClr val="414D5C"/>
+                  <a:srgbClr val="770000"/>
                 </a:solidFill>
                 <a:latin typeface="Arial"/>
               </a:rPr>
@@ -50015,7 +50015,7 @@
             <a:r>
               <a:rPr sz="2000" b="1">
                 <a:solidFill>
-                  <a:srgbClr val="414D5C"/>
+                  <a:srgbClr val="770000"/>
                 </a:solidFill>
                 <a:latin typeface="Arial"/>
               </a:rPr>
@@ -50052,7 +50052,7 @@
             <a:r>
               <a:rPr sz="2000" b="1">
                 <a:solidFill>
-                  <a:srgbClr val="414D5C"/>
+                  <a:srgbClr val="770000"/>
                 </a:solidFill>
                 <a:latin typeface="Arial"/>
               </a:rPr>
@@ -50089,7 +50089,7 @@
             <a:r>
               <a:rPr sz="2000" b="1">
                 <a:solidFill>
-                  <a:srgbClr val="414D5C"/>
+                  <a:srgbClr val="770000"/>
                 </a:solidFill>
                 <a:latin typeface="Arial"/>
               </a:rPr>
@@ -50167,7 +50167,7 @@
             <a:r>
               <a:rPr sz="1000" b="1" i="0">
                 <a:solidFill>
-                  <a:srgbClr val="414D5C"/>
+                  <a:srgbClr val="770000"/>
                 </a:solidFill>
                 <a:latin typeface="Arial"/>
               </a:rPr>
@@ -50217,7 +50217,7 @@
             <a:r>
               <a:rPr sz="2200" b="1">
                 <a:solidFill>
-                  <a:srgbClr val="414D5C"/>
+                  <a:srgbClr val="770000"/>
                 </a:solidFill>
                 <a:latin typeface="Arial"/>
               </a:rPr>
@@ -50254,7 +50254,7 @@
             <a:r>
               <a:rPr sz="2200" b="1">
                 <a:solidFill>
-                  <a:srgbClr val="414D5C"/>
+                  <a:srgbClr val="770000"/>
                 </a:solidFill>
                 <a:latin typeface="Arial"/>
               </a:rPr>
@@ -50291,7 +50291,7 @@
             <a:r>
               <a:rPr sz="2200" b="1">
                 <a:solidFill>
-                  <a:srgbClr val="414D5C"/>
+                  <a:srgbClr val="770000"/>
                 </a:solidFill>
                 <a:latin typeface="Arial"/>
               </a:rPr>
@@ -50369,7 +50369,7 @@
             <a:r>
               <a:rPr sz="1000" b="1" i="0">
                 <a:solidFill>
-                  <a:srgbClr val="414D5C"/>
+                  <a:srgbClr val="770000"/>
                 </a:solidFill>
                 <a:latin typeface="Arial"/>
               </a:rPr>
@@ -50447,7 +50447,7 @@
             <a:r>
               <a:rPr sz="1000" b="1" i="0">
                 <a:solidFill>
-                  <a:srgbClr val="414D5C"/>
+                  <a:srgbClr val="770000"/>
                 </a:solidFill>
                 <a:latin typeface="Arial"/>
               </a:rPr>
@@ -50530,7 +50530,7 @@
             <a:r>
               <a:rPr sz="1000" b="1" i="0">
                 <a:solidFill>
-                  <a:srgbClr val="414D5C"/>
+                  <a:srgbClr val="770000"/>
                 </a:solidFill>
                 <a:latin typeface="Arial"/>
               </a:rPr>

--- a/presentation/NEM2026_workshop.pptx
+++ b/presentation/NEM2026_workshop.pptx
@@ -6,85 +6,85 @@
     <p:sldMasterId id="2147483845" r:id="rId5"/>
   </p:sldMasterIdLst>
   <p:notesMasterIdLst>
-    <p:notesMasterId r:id="rId26"/>
+    <p:notesMasterId r:id="rId74"/>
   </p:notesMasterIdLst>
   <p:handoutMasterIdLst>
-    <p:handoutMasterId r:id="rId27"/>
+    <p:handoutMasterId r:id="rId75"/>
   </p:handoutMasterIdLst>
   <p:sldIdLst>
-    <p:sldId id="256" r:id="rId13"/>
-    <p:sldId id="257" r:id="rId14"/>
-    <p:sldId id="258" r:id="rId15"/>
-    <p:sldId id="259" r:id="rId16"/>
-    <p:sldId id="260" r:id="rId17"/>
-    <p:sldId id="261" r:id="rId18"/>
-    <p:sldId id="262" r:id="rId19"/>
-    <p:sldId id="263" r:id="rId20"/>
-    <p:sldId id="264" r:id="rId21"/>
-    <p:sldId id="265" r:id="rId22"/>
-    <p:sldId id="266" r:id="rId23"/>
-    <p:sldId id="267" r:id="rId24"/>
-    <p:sldId id="268" r:id="rId25"/>
-    <p:sldId id="269" r:id="rId12"/>
-    <p:sldId id="270" r:id="rId11"/>
-    <p:sldId id="271" r:id="rId10"/>
-    <p:sldId id="272" r:id="rId9"/>
-    <p:sldId id="273" r:id="rId8"/>
-    <p:sldId id="274" r:id="rId7"/>
-    <p:sldId id="275" r:id="rId6"/>
-    <p:sldId id="276" r:id="rId33"/>
-    <p:sldId id="277" r:id="rId34"/>
-    <p:sldId id="278" r:id="rId35"/>
-    <p:sldId id="279" r:id="rId36"/>
-    <p:sldId id="280" r:id="rId37"/>
-    <p:sldId id="281" r:id="rId38"/>
-    <p:sldId id="282" r:id="rId39"/>
-    <p:sldId id="283" r:id="rId40"/>
-    <p:sldId id="284" r:id="rId41"/>
-    <p:sldId id="285" r:id="rId42"/>
-    <p:sldId id="286" r:id="rId43"/>
-    <p:sldId id="287" r:id="rId44"/>
-    <p:sldId id="288" r:id="rId45"/>
-    <p:sldId id="289" r:id="rId46"/>
-    <p:sldId id="290" r:id="rId47"/>
-    <p:sldId id="291" r:id="rId48"/>
-    <p:sldId id="292" r:id="rId49"/>
-    <p:sldId id="293" r:id="rId50"/>
-    <p:sldId id="294" r:id="rId51"/>
-    <p:sldId id="295" r:id="rId52"/>
-    <p:sldId id="296" r:id="rId53"/>
-    <p:sldId id="297" r:id="rId54"/>
-    <p:sldId id="298" r:id="rId55"/>
-    <p:sldId id="299" r:id="rId56"/>
-    <p:sldId id="300" r:id="rId57"/>
-    <p:sldId id="301" r:id="rId58"/>
-    <p:sldId id="302" r:id="rId59"/>
-    <p:sldId id="303" r:id="rId60"/>
-    <p:sldId id="304" r:id="rId61"/>
-    <p:sldId id="305" r:id="rId62"/>
-    <p:sldId id="306" r:id="rId63"/>
-    <p:sldId id="307" r:id="rId64"/>
-    <p:sldId id="308" r:id="rId65"/>
-    <p:sldId id="309" r:id="rId66"/>
-    <p:sldId id="310" r:id="rId67"/>
-    <p:sldId id="311" r:id="rId68"/>
-    <p:sldId id="312" r:id="rId69"/>
-    <p:sldId id="313" r:id="rId70"/>
-    <p:sldId id="314" r:id="rId71"/>
-    <p:sldId id="315" r:id="rId72"/>
-    <p:sldId id="316" r:id="rId73"/>
-    <p:sldId id="317" r:id="rId74"/>
-    <p:sldId id="318" r:id="rId75"/>
-    <p:sldId id="319" r:id="rId76"/>
-    <p:sldId id="320" r:id="rId77"/>
-    <p:sldId id="321" r:id="rId78"/>
-    <p:sldId id="322" r:id="rId79"/>
-    <p:sldId id="323" r:id="rId80"/>
+    <p:sldId id="256" r:id="rId6"/>
+    <p:sldId id="257" r:id="rId7"/>
+    <p:sldId id="258" r:id="rId8"/>
+    <p:sldId id="259" r:id="rId9"/>
+    <p:sldId id="260" r:id="rId10"/>
+    <p:sldId id="261" r:id="rId11"/>
+    <p:sldId id="262" r:id="rId12"/>
+    <p:sldId id="263" r:id="rId13"/>
+    <p:sldId id="264" r:id="rId14"/>
+    <p:sldId id="265" r:id="rId15"/>
+    <p:sldId id="266" r:id="rId16"/>
+    <p:sldId id="267" r:id="rId17"/>
+    <p:sldId id="268" r:id="rId18"/>
+    <p:sldId id="269" r:id="rId19"/>
+    <p:sldId id="270" r:id="rId20"/>
+    <p:sldId id="271" r:id="rId21"/>
+    <p:sldId id="272" r:id="rId22"/>
+    <p:sldId id="273" r:id="rId23"/>
+    <p:sldId id="274" r:id="rId24"/>
+    <p:sldId id="275" r:id="rId25"/>
+    <p:sldId id="276" r:id="rId26"/>
+    <p:sldId id="277" r:id="rId27"/>
+    <p:sldId id="278" r:id="rId28"/>
+    <p:sldId id="279" r:id="rId29"/>
+    <p:sldId id="280" r:id="rId30"/>
+    <p:sldId id="281" r:id="rId31"/>
+    <p:sldId id="282" r:id="rId32"/>
+    <p:sldId id="283" r:id="rId33"/>
+    <p:sldId id="284" r:id="rId34"/>
+    <p:sldId id="285" r:id="rId35"/>
+    <p:sldId id="286" r:id="rId36"/>
+    <p:sldId id="287" r:id="rId37"/>
+    <p:sldId id="288" r:id="rId38"/>
+    <p:sldId id="289" r:id="rId39"/>
+    <p:sldId id="290" r:id="rId40"/>
+    <p:sldId id="291" r:id="rId41"/>
+    <p:sldId id="292" r:id="rId42"/>
+    <p:sldId id="293" r:id="rId43"/>
+    <p:sldId id="294" r:id="rId44"/>
+    <p:sldId id="295" r:id="rId45"/>
+    <p:sldId id="296" r:id="rId46"/>
+    <p:sldId id="297" r:id="rId47"/>
+    <p:sldId id="298" r:id="rId48"/>
+    <p:sldId id="299" r:id="rId49"/>
+    <p:sldId id="300" r:id="rId50"/>
+    <p:sldId id="301" r:id="rId51"/>
+    <p:sldId id="302" r:id="rId52"/>
+    <p:sldId id="303" r:id="rId53"/>
+    <p:sldId id="304" r:id="rId54"/>
+    <p:sldId id="305" r:id="rId55"/>
+    <p:sldId id="306" r:id="rId56"/>
+    <p:sldId id="307" r:id="rId57"/>
+    <p:sldId id="308" r:id="rId58"/>
+    <p:sldId id="309" r:id="rId59"/>
+    <p:sldId id="310" r:id="rId60"/>
+    <p:sldId id="311" r:id="rId61"/>
+    <p:sldId id="312" r:id="rId62"/>
+    <p:sldId id="313" r:id="rId63"/>
+    <p:sldId id="314" r:id="rId64"/>
+    <p:sldId id="315" r:id="rId65"/>
+    <p:sldId id="316" r:id="rId66"/>
+    <p:sldId id="317" r:id="rId67"/>
+    <p:sldId id="318" r:id="rId68"/>
+    <p:sldId id="319" r:id="rId69"/>
+    <p:sldId id="320" r:id="rId70"/>
+    <p:sldId id="321" r:id="rId71"/>
+    <p:sldId id="322" r:id="rId72"/>
+    <p:sldId id="323" r:id="rId73"/>
   </p:sldIdLst>
   <p:sldSz cx="12192000" cy="6858000"/>
   <p:notesSz cx="6797675" cy="9926638"/>
   <p:custDataLst>
-    <p:tags r:id="rId28"/>
+    <p:tags r:id="rId76"/>
   </p:custDataLst>
   <p:defaultTextStyle>
     <a:defPPr>
@@ -288,7 +288,7 @@
           <a:p>
             <a:fld id="{8F1A36FD-08A9-47F7-8F4B-E50EC98C36E7}" type="datetime1">
               <a:rPr lang="de-DE" smtClean="0"/>
-              <a:t>12.05.2026</a:t>
+              <a:t>19.05.2026</a:t>
             </a:fld>
             <a:endParaRPr lang="de-DE"/>
           </a:p>
@@ -470,7 +470,7 @@
           <a:p>
             <a:fld id="{0A2346E5-778D-4A7C-BA30-768202CBF653}" type="datetime1">
               <a:rPr lang="de-DE" smtClean="0"/>
-              <a:t>12.05.2026</a:t>
+              <a:t>19.05.2026</a:t>
             </a:fld>
             <a:endParaRPr lang="de-DE"/>
           </a:p>
@@ -756,7 +756,7 @@
 </file>
 
 <file path=ppt/notesSlides/notesSlide1.xml><?xml version="1.0" encoding="utf-8"?>
-<p:notes xmlns:a="http://schemas.openxmlformats.org/drawingml/2006/main" xmlns:p="http://schemas.openxmlformats.org/presentationml/2006/main" xmlns:r="http://schemas.openxmlformats.org/officeDocument/2006/relationships">
+<p:notes xmlns:a="http://schemas.openxmlformats.org/drawingml/2006/main" xmlns:r="http://schemas.openxmlformats.org/officeDocument/2006/relationships" xmlns:p="http://schemas.openxmlformats.org/presentationml/2006/main">
   <p:cSld>
     <p:spTree>
       <p:nvGrpSpPr>
@@ -779,7 +779,7 @@
             <a:spLocks noGrp="1"/>
           </p:cNvSpPr>
           <p:nvPr>
-            <p:ph type="sldNum" idx="5" sz="quarter"/>
+            <p:ph type="sldNum" sz="quarter" idx="5"/>
           </p:nvPr>
         </p:nvSpPr>
         <p:spPr/>
@@ -788,31 +788,36 @@
         <p:nvSpPr>
           <p:cNvPr id="3" name="Slide Image Placeholder 2"/>
           <p:cNvSpPr>
-            <a:spLocks noGrp="1"/>
+            <a:spLocks noGrp="1" noRot="1" noChangeAspect="1"/>
           </p:cNvSpPr>
           <p:nvPr>
             <p:ph type="sldImg" idx="2"/>
           </p:nvPr>
         </p:nvSpPr>
+        <p:spPr>
+          <a:xfrm>
+            <a:off x="0" y="0"/>
+            <a:ext cx="6796088" cy="3822700"/>
+          </a:xfrm>
+        </p:spPr>
+      </p:sp>
+      <p:sp>
+        <p:nvSpPr>
+          <p:cNvPr id="4" name="Notes Placeholder 3"/>
+          <p:cNvSpPr>
+            <a:spLocks noGrp="1"/>
+          </p:cNvSpPr>
+          <p:nvPr>
+            <p:ph type="body" sz="quarter" idx="3"/>
+          </p:nvPr>
+        </p:nvSpPr>
         <p:spPr/>
-      </p:sp>
-      <p:sp>
-        <p:nvSpPr>
-          <p:cNvPr id="4" name="Notes Placeholder 3"/>
-          <p:cNvSpPr>
-            <a:spLocks noGrp="1"/>
-          </p:cNvSpPr>
-          <p:nvPr>
-            <p:ph type="body" idx="3" sz="quarter"/>
-          </p:nvPr>
-        </p:nvSpPr>
-        <p:spPr/>
         <p:txBody>
           <a:bodyPr/>
           <a:lstStyle/>
           <a:p>
             <a:r>
-              <a:rPr sz="1200">
+              <a:rPr sz="1200" dirty="0">
                 <a:latin typeface="Arial"/>
               </a:rPr>
               <a:t>[BEFORE] Up while attendees settle. Don't speak to it.</a:t>
@@ -820,15 +825,32 @@
           </a:p>
           <a:p>
             <a:r>
-              <a:rPr sz="1200">
+              <a:rPr sz="1200" dirty="0">
                 <a:latin typeface="Arial"/>
               </a:rPr>
               <a:t>[CHECK — first action of the day] Confirm everyone has the repo cloned and a working XAE. Hands up. Anyone who can't build, surface NOW — there's a 5-minute Block 0 budget for env triage.</a:t>
             </a:r>
-          </a:p>
-          <a:p>
-            <a:r>
-              <a:rPr sz="1200">
+            <a:r>
+              <a:rPr lang="en-US" sz="1200" dirty="0">
+                <a:latin typeface="Arial"/>
+              </a:rPr>
+              <a:t>  </a:t>
+            </a:r>
+          </a:p>
+          <a:p>
+            <a:r>
+              <a:rPr lang="en-US" sz="1200" dirty="0">
+                <a:latin typeface="Arial"/>
+              </a:rPr>
+              <a:t>[CHECK] – ask for feedback on which Git client people use and what their general familiarity with repos/git/git clients is to help identify who in the class is going to have trouble switching branches</a:t>
+            </a:r>
+            <a:endParaRPr sz="1200" dirty="0">
+              <a:latin typeface="Arial"/>
+            </a:endParaRPr>
+          </a:p>
+          <a:p>
+            <a:r>
+              <a:rPr sz="1200" dirty="0">
                 <a:latin typeface="Arial"/>
               </a:rPr>
               <a:t>[SAY — 30-second frame, when you click forward]
@@ -846,7 +868,7 @@
 </file>
 
 <file path=ppt/notesSlides/notesSlide10.xml><?xml version="1.0" encoding="utf-8"?>
-<p:notes xmlns:a="http://schemas.openxmlformats.org/drawingml/2006/main" xmlns:p="http://schemas.openxmlformats.org/presentationml/2006/main" xmlns:r="http://schemas.openxmlformats.org/officeDocument/2006/relationships">
+<p:notes xmlns:a="http://schemas.openxmlformats.org/drawingml/2006/main" xmlns:r="http://schemas.openxmlformats.org/officeDocument/2006/relationships" xmlns:p="http://schemas.openxmlformats.org/presentationml/2006/main">
   <p:cSld>
     <p:spTree>
       <p:nvGrpSpPr>
@@ -869,7 +891,7 @@
             <a:spLocks noGrp="1"/>
           </p:cNvSpPr>
           <p:nvPr>
-            <p:ph type="sldNum" idx="5" sz="quarter"/>
+            <p:ph type="sldNum" sz="quarter" idx="5"/>
           </p:nvPr>
         </p:nvSpPr>
         <p:spPr/>
@@ -878,7 +900,7 @@
         <p:nvSpPr>
           <p:cNvPr id="3" name="Slide Image Placeholder 2"/>
           <p:cNvSpPr>
-            <a:spLocks noGrp="1"/>
+            <a:spLocks noGrp="1" noRot="1" noChangeAspect="1"/>
           </p:cNvSpPr>
           <p:nvPr>
             <p:ph type="sldImg" idx="2"/>
@@ -893,7 +915,7 @@
             <a:spLocks noGrp="1"/>
           </p:cNvSpPr>
           <p:nvPr>
-            <p:ph type="body" idx="3" sz="quarter"/>
+            <p:ph type="body" sz="quarter" idx="3"/>
           </p:nvPr>
         </p:nvSpPr>
         <p:spPr/>
@@ -943,7 +965,7 @@
 </file>
 
 <file path=ppt/notesSlides/notesSlide11.xml><?xml version="1.0" encoding="utf-8"?>
-<p:notes xmlns:a="http://schemas.openxmlformats.org/drawingml/2006/main" xmlns:p="http://schemas.openxmlformats.org/presentationml/2006/main" xmlns:r="http://schemas.openxmlformats.org/officeDocument/2006/relationships">
+<p:notes xmlns:a="http://schemas.openxmlformats.org/drawingml/2006/main" xmlns:r="http://schemas.openxmlformats.org/officeDocument/2006/relationships" xmlns:p="http://schemas.openxmlformats.org/presentationml/2006/main">
   <p:cSld>
     <p:spTree>
       <p:nvGrpSpPr>
@@ -966,7 +988,7 @@
             <a:spLocks noGrp="1"/>
           </p:cNvSpPr>
           <p:nvPr>
-            <p:ph type="sldNum" idx="5" sz="quarter"/>
+            <p:ph type="sldNum" sz="quarter" idx="5"/>
           </p:nvPr>
         </p:nvSpPr>
         <p:spPr/>
@@ -975,7 +997,7 @@
         <p:nvSpPr>
           <p:cNvPr id="3" name="Slide Image Placeholder 2"/>
           <p:cNvSpPr>
-            <a:spLocks noGrp="1"/>
+            <a:spLocks noGrp="1" noRot="1" noChangeAspect="1"/>
           </p:cNvSpPr>
           <p:nvPr>
             <p:ph type="sldImg" idx="2"/>
@@ -990,7 +1012,7 @@
             <a:spLocks noGrp="1"/>
           </p:cNvSpPr>
           <p:nvPr>
-            <p:ph type="body" idx="3" sz="quarter"/>
+            <p:ph type="body" sz="quarter" idx="3"/>
           </p:nvPr>
         </p:nvSpPr>
         <p:spPr/>
@@ -1032,7 +1054,7 @@
 </file>
 
 <file path=ppt/notesSlides/notesSlide12.xml><?xml version="1.0" encoding="utf-8"?>
-<p:notes xmlns:a="http://schemas.openxmlformats.org/drawingml/2006/main" xmlns:p="http://schemas.openxmlformats.org/presentationml/2006/main" xmlns:r="http://schemas.openxmlformats.org/officeDocument/2006/relationships">
+<p:notes xmlns:a="http://schemas.openxmlformats.org/drawingml/2006/main" xmlns:r="http://schemas.openxmlformats.org/officeDocument/2006/relationships" xmlns:p="http://schemas.openxmlformats.org/presentationml/2006/main">
   <p:cSld>
     <p:spTree>
       <p:nvGrpSpPr>
@@ -1055,7 +1077,7 @@
             <a:spLocks noGrp="1"/>
           </p:cNvSpPr>
           <p:nvPr>
-            <p:ph type="sldNum" idx="5" sz="quarter"/>
+            <p:ph type="sldNum" sz="quarter" idx="5"/>
           </p:nvPr>
         </p:nvSpPr>
         <p:spPr/>
@@ -1064,7 +1086,7 @@
         <p:nvSpPr>
           <p:cNvPr id="3" name="Slide Image Placeholder 2"/>
           <p:cNvSpPr>
-            <a:spLocks noGrp="1"/>
+            <a:spLocks noGrp="1" noRot="1" noChangeAspect="1"/>
           </p:cNvSpPr>
           <p:nvPr>
             <p:ph type="sldImg" idx="2"/>
@@ -1079,7 +1101,7 @@
             <a:spLocks noGrp="1"/>
           </p:cNvSpPr>
           <p:nvPr>
-            <p:ph type="body" idx="3" sz="quarter"/>
+            <p:ph type="body" sz="quarter" idx="3"/>
           </p:nvPr>
         </p:nvSpPr>
         <p:spPr/>
@@ -1124,7 +1146,7 @@
 </file>
 
 <file path=ppt/notesSlides/notesSlide13.xml><?xml version="1.0" encoding="utf-8"?>
-<p:notes xmlns:a="http://schemas.openxmlformats.org/drawingml/2006/main" xmlns:p="http://schemas.openxmlformats.org/presentationml/2006/main" xmlns:r="http://schemas.openxmlformats.org/officeDocument/2006/relationships">
+<p:notes xmlns:a="http://schemas.openxmlformats.org/drawingml/2006/main" xmlns:r="http://schemas.openxmlformats.org/officeDocument/2006/relationships" xmlns:p="http://schemas.openxmlformats.org/presentationml/2006/main">
   <p:cSld>
     <p:spTree>
       <p:nvGrpSpPr>
@@ -1147,7 +1169,7 @@
             <a:spLocks noGrp="1"/>
           </p:cNvSpPr>
           <p:nvPr>
-            <p:ph type="sldNum" idx="5" sz="quarter"/>
+            <p:ph type="sldNum" sz="quarter" idx="5"/>
           </p:nvPr>
         </p:nvSpPr>
         <p:spPr/>
@@ -1156,7 +1178,7 @@
         <p:nvSpPr>
           <p:cNvPr id="3" name="Slide Image Placeholder 2"/>
           <p:cNvSpPr>
-            <a:spLocks noGrp="1"/>
+            <a:spLocks noGrp="1" noRot="1" noChangeAspect="1"/>
           </p:cNvSpPr>
           <p:nvPr>
             <p:ph type="sldImg" idx="2"/>
@@ -1171,7 +1193,7 @@
             <a:spLocks noGrp="1"/>
           </p:cNvSpPr>
           <p:nvPr>
-            <p:ph type="body" idx="3" sz="quarter"/>
+            <p:ph type="body" sz="quarter" idx="3"/>
           </p:nvPr>
         </p:nvSpPr>
         <p:spPr/>
@@ -1213,7 +1235,7 @@
 </file>
 
 <file path=ppt/notesSlides/notesSlide14.xml><?xml version="1.0" encoding="utf-8"?>
-<p:notes xmlns:a="http://schemas.openxmlformats.org/drawingml/2006/main" xmlns:p="http://schemas.openxmlformats.org/presentationml/2006/main" xmlns:r="http://schemas.openxmlformats.org/officeDocument/2006/relationships">
+<p:notes xmlns:a="http://schemas.openxmlformats.org/drawingml/2006/main" xmlns:r="http://schemas.openxmlformats.org/officeDocument/2006/relationships" xmlns:p="http://schemas.openxmlformats.org/presentationml/2006/main">
   <p:cSld>
     <p:spTree>
       <p:nvGrpSpPr>
@@ -1236,7 +1258,7 @@
             <a:spLocks noGrp="1"/>
           </p:cNvSpPr>
           <p:nvPr>
-            <p:ph type="sldNum" idx="5" sz="quarter"/>
+            <p:ph type="sldNum" sz="quarter" idx="5"/>
           </p:nvPr>
         </p:nvSpPr>
         <p:spPr/>
@@ -1245,7 +1267,7 @@
         <p:nvSpPr>
           <p:cNvPr id="3" name="Slide Image Placeholder 2"/>
           <p:cNvSpPr>
-            <a:spLocks noGrp="1"/>
+            <a:spLocks noGrp="1" noRot="1" noChangeAspect="1"/>
           </p:cNvSpPr>
           <p:nvPr>
             <p:ph type="sldImg" idx="2"/>
@@ -1260,7 +1282,7 @@
             <a:spLocks noGrp="1"/>
           </p:cNvSpPr>
           <p:nvPr>
-            <p:ph type="body" idx="3" sz="quarter"/>
+            <p:ph type="body" sz="quarter" idx="3"/>
           </p:nvPr>
         </p:nvSpPr>
         <p:spPr/>
@@ -1306,7 +1328,7 @@
 </file>
 
 <file path=ppt/notesSlides/notesSlide15.xml><?xml version="1.0" encoding="utf-8"?>
-<p:notes xmlns:a="http://schemas.openxmlformats.org/drawingml/2006/main" xmlns:p="http://schemas.openxmlformats.org/presentationml/2006/main" xmlns:r="http://schemas.openxmlformats.org/officeDocument/2006/relationships">
+<p:notes xmlns:a="http://schemas.openxmlformats.org/drawingml/2006/main" xmlns:r="http://schemas.openxmlformats.org/officeDocument/2006/relationships" xmlns:p="http://schemas.openxmlformats.org/presentationml/2006/main">
   <p:cSld>
     <p:spTree>
       <p:nvGrpSpPr>
@@ -1329,7 +1351,7 @@
             <a:spLocks noGrp="1"/>
           </p:cNvSpPr>
           <p:nvPr>
-            <p:ph type="sldNum" idx="5" sz="quarter"/>
+            <p:ph type="sldNum" sz="quarter" idx="5"/>
           </p:nvPr>
         </p:nvSpPr>
         <p:spPr/>
@@ -1338,7 +1360,7 @@
         <p:nvSpPr>
           <p:cNvPr id="3" name="Slide Image Placeholder 2"/>
           <p:cNvSpPr>
-            <a:spLocks noGrp="1"/>
+            <a:spLocks noGrp="1" noRot="1" noChangeAspect="1"/>
           </p:cNvSpPr>
           <p:nvPr>
             <p:ph type="sldImg" idx="2"/>
@@ -1353,7 +1375,7 @@
             <a:spLocks noGrp="1"/>
           </p:cNvSpPr>
           <p:nvPr>
-            <p:ph type="body" idx="3" sz="quarter"/>
+            <p:ph type="body" sz="quarter" idx="3"/>
           </p:nvPr>
         </p:nvSpPr>
         <p:spPr/>
@@ -1406,7 +1428,7 @@
 </file>
 
 <file path=ppt/notesSlides/notesSlide16.xml><?xml version="1.0" encoding="utf-8"?>
-<p:notes xmlns:a="http://schemas.openxmlformats.org/drawingml/2006/main" xmlns:p="http://schemas.openxmlformats.org/presentationml/2006/main" xmlns:r="http://schemas.openxmlformats.org/officeDocument/2006/relationships">
+<p:notes xmlns:a="http://schemas.openxmlformats.org/drawingml/2006/main" xmlns:r="http://schemas.openxmlformats.org/officeDocument/2006/relationships" xmlns:p="http://schemas.openxmlformats.org/presentationml/2006/main">
   <p:cSld>
     <p:spTree>
       <p:nvGrpSpPr>
@@ -1429,7 +1451,7 @@
             <a:spLocks noGrp="1"/>
           </p:cNvSpPr>
           <p:nvPr>
-            <p:ph type="sldNum" idx="5" sz="quarter"/>
+            <p:ph type="sldNum" sz="quarter" idx="5"/>
           </p:nvPr>
         </p:nvSpPr>
         <p:spPr/>
@@ -1438,7 +1460,7 @@
         <p:nvSpPr>
           <p:cNvPr id="3" name="Slide Image Placeholder 2"/>
           <p:cNvSpPr>
-            <a:spLocks noGrp="1"/>
+            <a:spLocks noGrp="1" noRot="1" noChangeAspect="1"/>
           </p:cNvSpPr>
           <p:nvPr>
             <p:ph type="sldImg" idx="2"/>
@@ -1453,7 +1475,7 @@
             <a:spLocks noGrp="1"/>
           </p:cNvSpPr>
           <p:nvPr>
-            <p:ph type="body" idx="3" sz="quarter"/>
+            <p:ph type="body" sz="quarter" idx="3"/>
           </p:nvPr>
         </p:nvSpPr>
         <p:spPr/>
@@ -1511,7 +1533,7 @@
 </file>
 
 <file path=ppt/notesSlides/notesSlide17.xml><?xml version="1.0" encoding="utf-8"?>
-<p:notes xmlns:a="http://schemas.openxmlformats.org/drawingml/2006/main" xmlns:p="http://schemas.openxmlformats.org/presentationml/2006/main" xmlns:r="http://schemas.openxmlformats.org/officeDocument/2006/relationships">
+<p:notes xmlns:a="http://schemas.openxmlformats.org/drawingml/2006/main" xmlns:r="http://schemas.openxmlformats.org/officeDocument/2006/relationships" xmlns:p="http://schemas.openxmlformats.org/presentationml/2006/main">
   <p:cSld>
     <p:spTree>
       <p:nvGrpSpPr>
@@ -1534,7 +1556,7 @@
             <a:spLocks noGrp="1"/>
           </p:cNvSpPr>
           <p:nvPr>
-            <p:ph type="sldNum" idx="5" sz="quarter"/>
+            <p:ph type="sldNum" sz="quarter" idx="5"/>
           </p:nvPr>
         </p:nvSpPr>
         <p:spPr/>
@@ -1543,7 +1565,7 @@
         <p:nvSpPr>
           <p:cNvPr id="3" name="Slide Image Placeholder 2"/>
           <p:cNvSpPr>
-            <a:spLocks noGrp="1"/>
+            <a:spLocks noGrp="1" noRot="1" noChangeAspect="1"/>
           </p:cNvSpPr>
           <p:nvPr>
             <p:ph type="sldImg" idx="2"/>
@@ -1558,7 +1580,7 @@
             <a:spLocks noGrp="1"/>
           </p:cNvSpPr>
           <p:nvPr>
-            <p:ph type="body" idx="3" sz="quarter"/>
+            <p:ph type="body" sz="quarter" idx="3"/>
           </p:nvPr>
         </p:nvSpPr>
         <p:spPr/>
@@ -1592,7 +1614,7 @@
 </file>
 
 <file path=ppt/notesSlides/notesSlide18.xml><?xml version="1.0" encoding="utf-8"?>
-<p:notes xmlns:a="http://schemas.openxmlformats.org/drawingml/2006/main" xmlns:p="http://schemas.openxmlformats.org/presentationml/2006/main" xmlns:r="http://schemas.openxmlformats.org/officeDocument/2006/relationships">
+<p:notes xmlns:a="http://schemas.openxmlformats.org/drawingml/2006/main" xmlns:r="http://schemas.openxmlformats.org/officeDocument/2006/relationships" xmlns:p="http://schemas.openxmlformats.org/presentationml/2006/main">
   <p:cSld>
     <p:spTree>
       <p:nvGrpSpPr>
@@ -1615,7 +1637,7 @@
             <a:spLocks noGrp="1"/>
           </p:cNvSpPr>
           <p:nvPr>
-            <p:ph type="sldNum" idx="5" sz="quarter"/>
+            <p:ph type="sldNum" sz="quarter" idx="5"/>
           </p:nvPr>
         </p:nvSpPr>
         <p:spPr/>
@@ -1624,7 +1646,7 @@
         <p:nvSpPr>
           <p:cNvPr id="3" name="Slide Image Placeholder 2"/>
           <p:cNvSpPr>
-            <a:spLocks noGrp="1"/>
+            <a:spLocks noGrp="1" noRot="1" noChangeAspect="1"/>
           </p:cNvSpPr>
           <p:nvPr>
             <p:ph type="sldImg" idx="2"/>
@@ -1639,7 +1661,7 @@
             <a:spLocks noGrp="1"/>
           </p:cNvSpPr>
           <p:nvPr>
-            <p:ph type="body" idx="3" sz="quarter"/>
+            <p:ph type="body" sz="quarter" idx="3"/>
           </p:nvPr>
         </p:nvSpPr>
         <p:spPr/>
@@ -1691,7 +1713,7 @@
 </file>
 
 <file path=ppt/notesSlides/notesSlide19.xml><?xml version="1.0" encoding="utf-8"?>
-<p:notes xmlns:a="http://schemas.openxmlformats.org/drawingml/2006/main" xmlns:p="http://schemas.openxmlformats.org/presentationml/2006/main" xmlns:r="http://schemas.openxmlformats.org/officeDocument/2006/relationships">
+<p:notes xmlns:a="http://schemas.openxmlformats.org/drawingml/2006/main" xmlns:r="http://schemas.openxmlformats.org/officeDocument/2006/relationships" xmlns:p="http://schemas.openxmlformats.org/presentationml/2006/main">
   <p:cSld>
     <p:spTree>
       <p:nvGrpSpPr>
@@ -1714,7 +1736,7 @@
             <a:spLocks noGrp="1"/>
           </p:cNvSpPr>
           <p:nvPr>
-            <p:ph type="sldNum" idx="5" sz="quarter"/>
+            <p:ph type="sldNum" sz="quarter" idx="5"/>
           </p:nvPr>
         </p:nvSpPr>
         <p:spPr/>
@@ -1723,7 +1745,7 @@
         <p:nvSpPr>
           <p:cNvPr id="3" name="Slide Image Placeholder 2"/>
           <p:cNvSpPr>
-            <a:spLocks noGrp="1"/>
+            <a:spLocks noGrp="1" noRot="1" noChangeAspect="1"/>
           </p:cNvSpPr>
           <p:nvPr>
             <p:ph type="sldImg" idx="2"/>
@@ -1738,7 +1760,7 @@
             <a:spLocks noGrp="1"/>
           </p:cNvSpPr>
           <p:nvPr>
-            <p:ph type="body" idx="3" sz="quarter"/>
+            <p:ph type="body" sz="quarter" idx="3"/>
           </p:nvPr>
         </p:nvSpPr>
         <p:spPr/>
@@ -1772,7 +1794,7 @@
 </file>
 
 <file path=ppt/notesSlides/notesSlide2.xml><?xml version="1.0" encoding="utf-8"?>
-<p:notes xmlns:a="http://schemas.openxmlformats.org/drawingml/2006/main" xmlns:p="http://schemas.openxmlformats.org/presentationml/2006/main" xmlns:r="http://schemas.openxmlformats.org/officeDocument/2006/relationships">
+<p:notes xmlns:a="http://schemas.openxmlformats.org/drawingml/2006/main" xmlns:r="http://schemas.openxmlformats.org/officeDocument/2006/relationships" xmlns:p="http://schemas.openxmlformats.org/presentationml/2006/main">
   <p:cSld>
     <p:spTree>
       <p:nvGrpSpPr>
@@ -1795,7 +1817,7 @@
             <a:spLocks noGrp="1"/>
           </p:cNvSpPr>
           <p:nvPr>
-            <p:ph type="sldNum" idx="5" sz="quarter"/>
+            <p:ph type="sldNum" sz="quarter" idx="5"/>
           </p:nvPr>
         </p:nvSpPr>
         <p:spPr/>
@@ -1804,31 +1826,36 @@
         <p:nvSpPr>
           <p:cNvPr id="3" name="Slide Image Placeholder 2"/>
           <p:cNvSpPr>
-            <a:spLocks noGrp="1"/>
+            <a:spLocks noGrp="1" noRot="1" noChangeAspect="1"/>
           </p:cNvSpPr>
           <p:nvPr>
             <p:ph type="sldImg" idx="2"/>
           </p:nvPr>
         </p:nvSpPr>
+        <p:spPr>
+          <a:xfrm>
+            <a:off x="0" y="0"/>
+            <a:ext cx="6796088" cy="3822700"/>
+          </a:xfrm>
+        </p:spPr>
+      </p:sp>
+      <p:sp>
+        <p:nvSpPr>
+          <p:cNvPr id="4" name="Notes Placeholder 3"/>
+          <p:cNvSpPr>
+            <a:spLocks noGrp="1"/>
+          </p:cNvSpPr>
+          <p:nvPr>
+            <p:ph type="body" sz="quarter" idx="3"/>
+          </p:nvPr>
+        </p:nvSpPr>
         <p:spPr/>
-      </p:sp>
-      <p:sp>
-        <p:nvSpPr>
-          <p:cNvPr id="4" name="Notes Placeholder 3"/>
-          <p:cNvSpPr>
-            <a:spLocks noGrp="1"/>
-          </p:cNvSpPr>
-          <p:nvPr>
-            <p:ph type="body" idx="3" sz="quarter"/>
-          </p:nvPr>
-        </p:nvSpPr>
-        <p:spPr/>
         <p:txBody>
           <a:bodyPr/>
           <a:lstStyle/>
           <a:p>
             <a:r>
-              <a:rPr sz="1200">
+              <a:rPr sz="1200" dirty="0">
                 <a:latin typeface="Arial"/>
               </a:rPr>
               <a:t>[SAY] Read the four lines slowly. The framing controls the whole day.</a:t>
@@ -1836,15 +1863,30 @@
           </a:p>
           <a:p>
             <a:r>
-              <a:rPr sz="1200">
+              <a:rPr sz="1200" dirty="0">
                 <a:latin typeface="Arial"/>
               </a:rPr>
               <a:t>[KEY PHRASE] "The diffs tell the story." We are not lecturing about SOLID. We are running a controlled experiment — same inputs, three different blast radii.</a:t>
             </a:r>
-          </a:p>
-          <a:p>
-            <a:r>
-              <a:rPr sz="1200">
+            <a:r>
+              <a:rPr lang="en-US" sz="1200" dirty="0">
+                <a:latin typeface="Arial"/>
+              </a:rPr>
+              <a:t>  Define diffs = actual code changes (e.g. what lines were added, removed, and/or what files changed).  Use the number of changes, types of changes, complexity of changes as metric to judge which solution strategy is most effective.  So, also define pay off – efficiency, ease, fastest, least likely to introduce other bugs, </a:t>
+            </a:r>
+            <a:r>
+              <a:rPr lang="en-US" sz="1200" dirty="0" err="1">
+                <a:latin typeface="Arial"/>
+              </a:rPr>
+              <a:t>etc</a:t>
+            </a:r>
+            <a:endParaRPr sz="1200" dirty="0">
+              <a:latin typeface="Arial"/>
+            </a:endParaRPr>
+          </a:p>
+          <a:p>
+            <a:r>
+              <a:rPr sz="1200" dirty="0">
                 <a:latin typeface="Arial"/>
               </a:rPr>
               <a:t>[DO] Coax discussion early so the precedent is set. If they sit silent, the workshop fails.</a:t>
@@ -1852,7 +1894,7 @@
           </a:p>
           <a:p>
             <a:r>
-              <a:rPr sz="1200">
+              <a:rPr sz="1200" dirty="0">
                 <a:latin typeface="Arial"/>
               </a:rPr>
               <a:t>[NEXT] Branch tree comes after the schedule slide — don't dive in yet.</a:t>
@@ -1869,7 +1911,7 @@
 </file>
 
 <file path=ppt/notesSlides/notesSlide20.xml><?xml version="1.0" encoding="utf-8"?>
-<p:notes xmlns:a="http://schemas.openxmlformats.org/drawingml/2006/main" xmlns:p="http://schemas.openxmlformats.org/presentationml/2006/main" xmlns:r="http://schemas.openxmlformats.org/officeDocument/2006/relationships">
+<p:notes xmlns:a="http://schemas.openxmlformats.org/drawingml/2006/main" xmlns:r="http://schemas.openxmlformats.org/officeDocument/2006/relationships" xmlns:p="http://schemas.openxmlformats.org/presentationml/2006/main">
   <p:cSld>
     <p:spTree>
       <p:nvGrpSpPr>
@@ -1892,7 +1934,7 @@
             <a:spLocks noGrp="1"/>
           </p:cNvSpPr>
           <p:nvPr>
-            <p:ph type="sldNum" idx="5" sz="quarter"/>
+            <p:ph type="sldNum" sz="quarter" idx="5"/>
           </p:nvPr>
         </p:nvSpPr>
         <p:spPr/>
@@ -1901,7 +1943,7 @@
         <p:nvSpPr>
           <p:cNvPr id="3" name="Slide Image Placeholder 2"/>
           <p:cNvSpPr>
-            <a:spLocks noGrp="1"/>
+            <a:spLocks noGrp="1" noRot="1" noChangeAspect="1"/>
           </p:cNvSpPr>
           <p:nvPr>
             <p:ph type="sldImg" idx="2"/>
@@ -1916,7 +1958,7 @@
             <a:spLocks noGrp="1"/>
           </p:cNvSpPr>
           <p:nvPr>
-            <p:ph type="body" idx="3" sz="quarter"/>
+            <p:ph type="body" sz="quarter" idx="3"/>
           </p:nvPr>
         </p:nvSpPr>
         <p:spPr/>
@@ -1950,7 +1992,7 @@
 </file>
 
 <file path=ppt/notesSlides/notesSlide21.xml><?xml version="1.0" encoding="utf-8"?>
-<p:notes xmlns:a="http://schemas.openxmlformats.org/drawingml/2006/main" xmlns:p="http://schemas.openxmlformats.org/presentationml/2006/main" xmlns:r="http://schemas.openxmlformats.org/officeDocument/2006/relationships">
+<p:notes xmlns:a="http://schemas.openxmlformats.org/drawingml/2006/main" xmlns:r="http://schemas.openxmlformats.org/officeDocument/2006/relationships" xmlns:p="http://schemas.openxmlformats.org/presentationml/2006/main">
   <p:cSld>
     <p:spTree>
       <p:nvGrpSpPr>
@@ -1973,7 +2015,7 @@
             <a:spLocks noGrp="1"/>
           </p:cNvSpPr>
           <p:nvPr>
-            <p:ph type="sldNum" idx="5" sz="quarter"/>
+            <p:ph type="sldNum" sz="quarter" idx="5"/>
           </p:nvPr>
         </p:nvSpPr>
         <p:spPr/>
@@ -1982,7 +2024,7 @@
         <p:nvSpPr>
           <p:cNvPr id="3" name="Slide Image Placeholder 2"/>
           <p:cNvSpPr>
-            <a:spLocks noGrp="1"/>
+            <a:spLocks noGrp="1" noRot="1" noChangeAspect="1"/>
           </p:cNvSpPr>
           <p:nvPr>
             <p:ph type="sldImg" idx="2"/>
@@ -1997,7 +2039,7 @@
             <a:spLocks noGrp="1"/>
           </p:cNvSpPr>
           <p:nvPr>
-            <p:ph type="body" idx="3" sz="quarter"/>
+            <p:ph type="body" sz="quarter" idx="3"/>
           </p:nvPr>
         </p:nvSpPr>
         <p:spPr/>
@@ -2039,7 +2081,7 @@
 </file>
 
 <file path=ppt/notesSlides/notesSlide22.xml><?xml version="1.0" encoding="utf-8"?>
-<p:notes xmlns:a="http://schemas.openxmlformats.org/drawingml/2006/main" xmlns:p="http://schemas.openxmlformats.org/presentationml/2006/main" xmlns:r="http://schemas.openxmlformats.org/officeDocument/2006/relationships">
+<p:notes xmlns:a="http://schemas.openxmlformats.org/drawingml/2006/main" xmlns:r="http://schemas.openxmlformats.org/officeDocument/2006/relationships" xmlns:p="http://schemas.openxmlformats.org/presentationml/2006/main">
   <p:cSld>
     <p:spTree>
       <p:nvGrpSpPr>
@@ -2062,7 +2104,7 @@
             <a:spLocks noGrp="1"/>
           </p:cNvSpPr>
           <p:nvPr>
-            <p:ph type="sldNum" idx="5" sz="quarter"/>
+            <p:ph type="sldNum" sz="quarter" idx="5"/>
           </p:nvPr>
         </p:nvSpPr>
         <p:spPr/>
@@ -2071,7 +2113,7 @@
         <p:nvSpPr>
           <p:cNvPr id="3" name="Slide Image Placeholder 2"/>
           <p:cNvSpPr>
-            <a:spLocks noGrp="1"/>
+            <a:spLocks noGrp="1" noRot="1" noChangeAspect="1"/>
           </p:cNvSpPr>
           <p:nvPr>
             <p:ph type="sldImg" idx="2"/>
@@ -2086,7 +2128,7 @@
             <a:spLocks noGrp="1"/>
           </p:cNvSpPr>
           <p:nvPr>
-            <p:ph type="body" idx="3" sz="quarter"/>
+            <p:ph type="body" sz="quarter" idx="3"/>
           </p:nvPr>
         </p:nvSpPr>
         <p:spPr/>
@@ -2155,7 +2197,7 @@
 </file>
 
 <file path=ppt/notesSlides/notesSlide23.xml><?xml version="1.0" encoding="utf-8"?>
-<p:notes xmlns:a="http://schemas.openxmlformats.org/drawingml/2006/main" xmlns:p="http://schemas.openxmlformats.org/presentationml/2006/main" xmlns:r="http://schemas.openxmlformats.org/officeDocument/2006/relationships">
+<p:notes xmlns:a="http://schemas.openxmlformats.org/drawingml/2006/main" xmlns:r="http://schemas.openxmlformats.org/officeDocument/2006/relationships" xmlns:p="http://schemas.openxmlformats.org/presentationml/2006/main">
   <p:cSld>
     <p:spTree>
       <p:nvGrpSpPr>
@@ -2178,7 +2220,7 @@
             <a:spLocks noGrp="1"/>
           </p:cNvSpPr>
           <p:nvPr>
-            <p:ph type="sldNum" idx="5" sz="quarter"/>
+            <p:ph type="sldNum" sz="quarter" idx="5"/>
           </p:nvPr>
         </p:nvSpPr>
         <p:spPr/>
@@ -2187,7 +2229,7 @@
         <p:nvSpPr>
           <p:cNvPr id="3" name="Slide Image Placeholder 2"/>
           <p:cNvSpPr>
-            <a:spLocks noGrp="1"/>
+            <a:spLocks noGrp="1" noRot="1" noChangeAspect="1"/>
           </p:cNvSpPr>
           <p:nvPr>
             <p:ph type="sldImg" idx="2"/>
@@ -2202,7 +2244,7 @@
             <a:spLocks noGrp="1"/>
           </p:cNvSpPr>
           <p:nvPr>
-            <p:ph type="body" idx="3" sz="quarter"/>
+            <p:ph type="body" sz="quarter" idx="3"/>
           </p:nvPr>
         </p:nvSpPr>
         <p:spPr/>
@@ -2236,7 +2278,7 @@
 </file>
 
 <file path=ppt/notesSlides/notesSlide24.xml><?xml version="1.0" encoding="utf-8"?>
-<p:notes xmlns:a="http://schemas.openxmlformats.org/drawingml/2006/main" xmlns:p="http://schemas.openxmlformats.org/presentationml/2006/main" xmlns:r="http://schemas.openxmlformats.org/officeDocument/2006/relationships">
+<p:notes xmlns:a="http://schemas.openxmlformats.org/drawingml/2006/main" xmlns:r="http://schemas.openxmlformats.org/officeDocument/2006/relationships" xmlns:p="http://schemas.openxmlformats.org/presentationml/2006/main">
   <p:cSld>
     <p:spTree>
       <p:nvGrpSpPr>
@@ -2259,7 +2301,7 @@
             <a:spLocks noGrp="1"/>
           </p:cNvSpPr>
           <p:nvPr>
-            <p:ph type="sldNum" idx="5" sz="quarter"/>
+            <p:ph type="sldNum" sz="quarter" idx="5"/>
           </p:nvPr>
         </p:nvSpPr>
         <p:spPr/>
@@ -2268,7 +2310,7 @@
         <p:nvSpPr>
           <p:cNvPr id="3" name="Slide Image Placeholder 2"/>
           <p:cNvSpPr>
-            <a:spLocks noGrp="1"/>
+            <a:spLocks noGrp="1" noRot="1" noChangeAspect="1"/>
           </p:cNvSpPr>
           <p:nvPr>
             <p:ph type="sldImg" idx="2"/>
@@ -2283,7 +2325,7 @@
             <a:spLocks noGrp="1"/>
           </p:cNvSpPr>
           <p:nvPr>
-            <p:ph type="body" idx="3" sz="quarter"/>
+            <p:ph type="body" sz="quarter" idx="3"/>
           </p:nvPr>
         </p:nvSpPr>
         <p:spPr/>
@@ -2317,7 +2359,7 @@
 </file>
 
 <file path=ppt/notesSlides/notesSlide25.xml><?xml version="1.0" encoding="utf-8"?>
-<p:notes xmlns:a="http://schemas.openxmlformats.org/drawingml/2006/main" xmlns:p="http://schemas.openxmlformats.org/presentationml/2006/main" xmlns:r="http://schemas.openxmlformats.org/officeDocument/2006/relationships">
+<p:notes xmlns:a="http://schemas.openxmlformats.org/drawingml/2006/main" xmlns:r="http://schemas.openxmlformats.org/officeDocument/2006/relationships" xmlns:p="http://schemas.openxmlformats.org/presentationml/2006/main">
   <p:cSld>
     <p:spTree>
       <p:nvGrpSpPr>
@@ -2340,7 +2382,7 @@
             <a:spLocks noGrp="1"/>
           </p:cNvSpPr>
           <p:nvPr>
-            <p:ph type="sldNum" idx="5" sz="quarter"/>
+            <p:ph type="sldNum" sz="quarter" idx="5"/>
           </p:nvPr>
         </p:nvSpPr>
         <p:spPr/>
@@ -2349,7 +2391,7 @@
         <p:nvSpPr>
           <p:cNvPr id="3" name="Slide Image Placeholder 2"/>
           <p:cNvSpPr>
-            <a:spLocks noGrp="1"/>
+            <a:spLocks noGrp="1" noRot="1" noChangeAspect="1"/>
           </p:cNvSpPr>
           <p:nvPr>
             <p:ph type="sldImg" idx="2"/>
@@ -2364,7 +2406,7 @@
             <a:spLocks noGrp="1"/>
           </p:cNvSpPr>
           <p:nvPr>
-            <p:ph type="body" idx="3" sz="quarter"/>
+            <p:ph type="body" sz="quarter" idx="3"/>
           </p:nvPr>
         </p:nvSpPr>
         <p:spPr/>
@@ -2414,7 +2456,7 @@
 </file>
 
 <file path=ppt/notesSlides/notesSlide26.xml><?xml version="1.0" encoding="utf-8"?>
-<p:notes xmlns:a="http://schemas.openxmlformats.org/drawingml/2006/main" xmlns:p="http://schemas.openxmlformats.org/presentationml/2006/main" xmlns:r="http://schemas.openxmlformats.org/officeDocument/2006/relationships">
+<p:notes xmlns:a="http://schemas.openxmlformats.org/drawingml/2006/main" xmlns:r="http://schemas.openxmlformats.org/officeDocument/2006/relationships" xmlns:p="http://schemas.openxmlformats.org/presentationml/2006/main">
   <p:cSld>
     <p:spTree>
       <p:nvGrpSpPr>
@@ -2437,7 +2479,7 @@
             <a:spLocks noGrp="1"/>
           </p:cNvSpPr>
           <p:nvPr>
-            <p:ph type="sldNum" idx="5" sz="quarter"/>
+            <p:ph type="sldNum" sz="quarter" idx="5"/>
           </p:nvPr>
         </p:nvSpPr>
         <p:spPr/>
@@ -2446,7 +2488,7 @@
         <p:nvSpPr>
           <p:cNvPr id="3" name="Slide Image Placeholder 2"/>
           <p:cNvSpPr>
-            <a:spLocks noGrp="1"/>
+            <a:spLocks noGrp="1" noRot="1" noChangeAspect="1"/>
           </p:cNvSpPr>
           <p:nvPr>
             <p:ph type="sldImg" idx="2"/>
@@ -2461,7 +2503,7 @@
             <a:spLocks noGrp="1"/>
           </p:cNvSpPr>
           <p:nvPr>
-            <p:ph type="body" idx="3" sz="quarter"/>
+            <p:ph type="body" sz="quarter" idx="3"/>
           </p:nvPr>
         </p:nvSpPr>
         <p:spPr/>
@@ -2511,7 +2553,7 @@
 </file>
 
 <file path=ppt/notesSlides/notesSlide27.xml><?xml version="1.0" encoding="utf-8"?>
-<p:notes xmlns:a="http://schemas.openxmlformats.org/drawingml/2006/main" xmlns:p="http://schemas.openxmlformats.org/presentationml/2006/main" xmlns:r="http://schemas.openxmlformats.org/officeDocument/2006/relationships">
+<p:notes xmlns:a="http://schemas.openxmlformats.org/drawingml/2006/main" xmlns:r="http://schemas.openxmlformats.org/officeDocument/2006/relationships" xmlns:p="http://schemas.openxmlformats.org/presentationml/2006/main">
   <p:cSld>
     <p:spTree>
       <p:nvGrpSpPr>
@@ -2534,7 +2576,7 @@
             <a:spLocks noGrp="1"/>
           </p:cNvSpPr>
           <p:nvPr>
-            <p:ph type="sldNum" idx="5" sz="quarter"/>
+            <p:ph type="sldNum" sz="quarter" idx="5"/>
           </p:nvPr>
         </p:nvSpPr>
         <p:spPr/>
@@ -2543,7 +2585,7 @@
         <p:nvSpPr>
           <p:cNvPr id="3" name="Slide Image Placeholder 2"/>
           <p:cNvSpPr>
-            <a:spLocks noGrp="1"/>
+            <a:spLocks noGrp="1" noRot="1" noChangeAspect="1"/>
           </p:cNvSpPr>
           <p:nvPr>
             <p:ph type="sldImg" idx="2"/>
@@ -2558,7 +2600,7 @@
             <a:spLocks noGrp="1"/>
           </p:cNvSpPr>
           <p:nvPr>
-            <p:ph type="body" idx="3" sz="quarter"/>
+            <p:ph type="body" sz="quarter" idx="3"/>
           </p:nvPr>
         </p:nvSpPr>
         <p:spPr/>
@@ -2600,7 +2642,7 @@
 </file>
 
 <file path=ppt/notesSlides/notesSlide28.xml><?xml version="1.0" encoding="utf-8"?>
-<p:notes xmlns:a="http://schemas.openxmlformats.org/drawingml/2006/main" xmlns:p="http://schemas.openxmlformats.org/presentationml/2006/main" xmlns:r="http://schemas.openxmlformats.org/officeDocument/2006/relationships">
+<p:notes xmlns:a="http://schemas.openxmlformats.org/drawingml/2006/main" xmlns:r="http://schemas.openxmlformats.org/officeDocument/2006/relationships" xmlns:p="http://schemas.openxmlformats.org/presentationml/2006/main">
   <p:cSld>
     <p:spTree>
       <p:nvGrpSpPr>
@@ -2623,7 +2665,7 @@
             <a:spLocks noGrp="1"/>
           </p:cNvSpPr>
           <p:nvPr>
-            <p:ph type="sldNum" idx="5" sz="quarter"/>
+            <p:ph type="sldNum" sz="quarter" idx="5"/>
           </p:nvPr>
         </p:nvSpPr>
         <p:spPr/>
@@ -2632,7 +2674,7 @@
         <p:nvSpPr>
           <p:cNvPr id="3" name="Slide Image Placeholder 2"/>
           <p:cNvSpPr>
-            <a:spLocks noGrp="1"/>
+            <a:spLocks noGrp="1" noRot="1" noChangeAspect="1"/>
           </p:cNvSpPr>
           <p:nvPr>
             <p:ph type="sldImg" idx="2"/>
@@ -2647,7 +2689,7 @@
             <a:spLocks noGrp="1"/>
           </p:cNvSpPr>
           <p:nvPr>
-            <p:ph type="body" idx="3" sz="quarter"/>
+            <p:ph type="body" sz="quarter" idx="3"/>
           </p:nvPr>
         </p:nvSpPr>
         <p:spPr/>
@@ -2681,7 +2723,7 @@
 </file>
 
 <file path=ppt/notesSlides/notesSlide29.xml><?xml version="1.0" encoding="utf-8"?>
-<p:notes xmlns:a="http://schemas.openxmlformats.org/drawingml/2006/main" xmlns:p="http://schemas.openxmlformats.org/presentationml/2006/main" xmlns:r="http://schemas.openxmlformats.org/officeDocument/2006/relationships">
+<p:notes xmlns:a="http://schemas.openxmlformats.org/drawingml/2006/main" xmlns:r="http://schemas.openxmlformats.org/officeDocument/2006/relationships" xmlns:p="http://schemas.openxmlformats.org/presentationml/2006/main">
   <p:cSld>
     <p:spTree>
       <p:nvGrpSpPr>
@@ -2704,7 +2746,7 @@
             <a:spLocks noGrp="1"/>
           </p:cNvSpPr>
           <p:nvPr>
-            <p:ph type="sldNum" idx="5" sz="quarter"/>
+            <p:ph type="sldNum" sz="quarter" idx="5"/>
           </p:nvPr>
         </p:nvSpPr>
         <p:spPr/>
@@ -2713,7 +2755,7 @@
         <p:nvSpPr>
           <p:cNvPr id="3" name="Slide Image Placeholder 2"/>
           <p:cNvSpPr>
-            <a:spLocks noGrp="1"/>
+            <a:spLocks noGrp="1" noRot="1" noChangeAspect="1"/>
           </p:cNvSpPr>
           <p:nvPr>
             <p:ph type="sldImg" idx="2"/>
@@ -2728,7 +2770,7 @@
             <a:spLocks noGrp="1"/>
           </p:cNvSpPr>
           <p:nvPr>
-            <p:ph type="body" idx="3" sz="quarter"/>
+            <p:ph type="body" sz="quarter" idx="3"/>
           </p:nvPr>
         </p:nvSpPr>
         <p:spPr/>
@@ -2779,7 +2821,7 @@
 </file>
 
 <file path=ppt/notesSlides/notesSlide3.xml><?xml version="1.0" encoding="utf-8"?>
-<p:notes xmlns:a="http://schemas.openxmlformats.org/drawingml/2006/main" xmlns:p="http://schemas.openxmlformats.org/presentationml/2006/main" xmlns:r="http://schemas.openxmlformats.org/officeDocument/2006/relationships">
+<p:notes xmlns:a="http://schemas.openxmlformats.org/drawingml/2006/main" xmlns:r="http://schemas.openxmlformats.org/officeDocument/2006/relationships" xmlns:p="http://schemas.openxmlformats.org/presentationml/2006/main">
   <p:cSld>
     <p:spTree>
       <p:nvGrpSpPr>
@@ -2802,7 +2844,7 @@
             <a:spLocks noGrp="1"/>
           </p:cNvSpPr>
           <p:nvPr>
-            <p:ph type="sldNum" idx="5" sz="quarter"/>
+            <p:ph type="sldNum" sz="quarter" idx="5"/>
           </p:nvPr>
         </p:nvSpPr>
         <p:spPr/>
@@ -2811,7 +2853,7 @@
         <p:nvSpPr>
           <p:cNvPr id="3" name="Slide Image Placeholder 2"/>
           <p:cNvSpPr>
-            <a:spLocks noGrp="1"/>
+            <a:spLocks noGrp="1" noRot="1" noChangeAspect="1"/>
           </p:cNvSpPr>
           <p:nvPr>
             <p:ph type="sldImg" idx="2"/>
@@ -2826,7 +2868,7 @@
             <a:spLocks noGrp="1"/>
           </p:cNvSpPr>
           <p:nvPr>
-            <p:ph type="body" idx="3" sz="quarter"/>
+            <p:ph type="body" sz="quarter" idx="3"/>
           </p:nvPr>
         </p:nvSpPr>
         <p:spPr/>
@@ -2835,7 +2877,7 @@
           <a:lstStyle/>
           <a:p>
             <a:r>
-              <a:rPr sz="1200">
+              <a:rPr sz="1200" dirty="0">
                 <a:latin typeface="Arial"/>
               </a:rPr>
               <a:t>[DO] Walk this in 60 seconds. Don't dwell.</a:t>
@@ -2843,7 +2885,7 @@
           </a:p>
           <a:p>
             <a:r>
-              <a:rPr sz="1200">
+              <a:rPr sz="1200" dirty="0">
                 <a:latin typeface="Arial"/>
               </a:rPr>
               <a:t>[SAY] "We'll be done by hour 4. Breaks are real."</a:t>
@@ -2851,7 +2893,7 @@
           </a:p>
           <a:p>
             <a:r>
-              <a:rPr sz="1200">
+              <a:rPr sz="1200" dirty="0">
                 <a:latin typeface="Arial"/>
               </a:rPr>
               <a:t>[STRETCH ZONES — flag verbally]
@@ -2863,7 +2905,7 @@
           </a:p>
           <a:p>
             <a:r>
-              <a:rPr sz="1200">
+              <a:rPr sz="1200" dirty="0">
                 <a:latin typeface="Arial"/>
               </a:rPr>
               <a:t>[BUDGET] On paper 4:30 — plan to land in 4:00.</a:t>
@@ -2871,7 +2913,7 @@
           </a:p>
           <a:p>
             <a:r>
-              <a:rPr sz="1200">
+              <a:rPr sz="1200" dirty="0">
                 <a:latin typeface="Arial"/>
               </a:rPr>
               <a:t>[BONUS] If asked about the testing demo: "Bonus content if we finish ahead. Don't count on it."</a:t>
@@ -2888,7 +2930,7 @@
 </file>
 
 <file path=ppt/notesSlides/notesSlide30.xml><?xml version="1.0" encoding="utf-8"?>
-<p:notes xmlns:a="http://schemas.openxmlformats.org/drawingml/2006/main" xmlns:p="http://schemas.openxmlformats.org/presentationml/2006/main" xmlns:r="http://schemas.openxmlformats.org/officeDocument/2006/relationships">
+<p:notes xmlns:a="http://schemas.openxmlformats.org/drawingml/2006/main" xmlns:r="http://schemas.openxmlformats.org/officeDocument/2006/relationships" xmlns:p="http://schemas.openxmlformats.org/presentationml/2006/main">
   <p:cSld>
     <p:spTree>
       <p:nvGrpSpPr>
@@ -2911,7 +2953,7 @@
             <a:spLocks noGrp="1"/>
           </p:cNvSpPr>
           <p:nvPr>
-            <p:ph type="sldNum" idx="5" sz="quarter"/>
+            <p:ph type="sldNum" sz="quarter" idx="5"/>
           </p:nvPr>
         </p:nvSpPr>
         <p:spPr/>
@@ -2920,7 +2962,7 @@
         <p:nvSpPr>
           <p:cNvPr id="3" name="Slide Image Placeholder 2"/>
           <p:cNvSpPr>
-            <a:spLocks noGrp="1"/>
+            <a:spLocks noGrp="1" noRot="1" noChangeAspect="1"/>
           </p:cNvSpPr>
           <p:nvPr>
             <p:ph type="sldImg" idx="2"/>
@@ -2935,7 +2977,7 @@
             <a:spLocks noGrp="1"/>
           </p:cNvSpPr>
           <p:nvPr>
-            <p:ph type="body" idx="3" sz="quarter"/>
+            <p:ph type="body" sz="quarter" idx="3"/>
           </p:nvPr>
         </p:nvSpPr>
         <p:spPr/>
@@ -2985,7 +3027,7 @@
 </file>
 
 <file path=ppt/notesSlides/notesSlide31.xml><?xml version="1.0" encoding="utf-8"?>
-<p:notes xmlns:a="http://schemas.openxmlformats.org/drawingml/2006/main" xmlns:p="http://schemas.openxmlformats.org/presentationml/2006/main" xmlns:r="http://schemas.openxmlformats.org/officeDocument/2006/relationships">
+<p:notes xmlns:a="http://schemas.openxmlformats.org/drawingml/2006/main" xmlns:r="http://schemas.openxmlformats.org/officeDocument/2006/relationships" xmlns:p="http://schemas.openxmlformats.org/presentationml/2006/main">
   <p:cSld>
     <p:spTree>
       <p:nvGrpSpPr>
@@ -3008,7 +3050,7 @@
             <a:spLocks noGrp="1"/>
           </p:cNvSpPr>
           <p:nvPr>
-            <p:ph type="sldNum" idx="5" sz="quarter"/>
+            <p:ph type="sldNum" sz="quarter" idx="5"/>
           </p:nvPr>
         </p:nvSpPr>
         <p:spPr/>
@@ -3017,7 +3059,7 @@
         <p:nvSpPr>
           <p:cNvPr id="3" name="Slide Image Placeholder 2"/>
           <p:cNvSpPr>
-            <a:spLocks noGrp="1"/>
+            <a:spLocks noGrp="1" noRot="1" noChangeAspect="1"/>
           </p:cNvSpPr>
           <p:nvPr>
             <p:ph type="sldImg" idx="2"/>
@@ -3032,7 +3074,7 @@
             <a:spLocks noGrp="1"/>
           </p:cNvSpPr>
           <p:nvPr>
-            <p:ph type="body" idx="3" sz="quarter"/>
+            <p:ph type="body" sz="quarter" idx="3"/>
           </p:nvPr>
         </p:nvSpPr>
         <p:spPr/>
@@ -3085,7 +3127,7 @@
 </file>
 
 <file path=ppt/notesSlides/notesSlide32.xml><?xml version="1.0" encoding="utf-8"?>
-<p:notes xmlns:a="http://schemas.openxmlformats.org/drawingml/2006/main" xmlns:p="http://schemas.openxmlformats.org/presentationml/2006/main" xmlns:r="http://schemas.openxmlformats.org/officeDocument/2006/relationships">
+<p:notes xmlns:a="http://schemas.openxmlformats.org/drawingml/2006/main" xmlns:r="http://schemas.openxmlformats.org/officeDocument/2006/relationships" xmlns:p="http://schemas.openxmlformats.org/presentationml/2006/main">
   <p:cSld>
     <p:spTree>
       <p:nvGrpSpPr>
@@ -3108,7 +3150,7 @@
             <a:spLocks noGrp="1"/>
           </p:cNvSpPr>
           <p:nvPr>
-            <p:ph type="sldNum" idx="5" sz="quarter"/>
+            <p:ph type="sldNum" sz="quarter" idx="5"/>
           </p:nvPr>
         </p:nvSpPr>
         <p:spPr/>
@@ -3117,7 +3159,7 @@
         <p:nvSpPr>
           <p:cNvPr id="3" name="Slide Image Placeholder 2"/>
           <p:cNvSpPr>
-            <a:spLocks noGrp="1"/>
+            <a:spLocks noGrp="1" noRot="1" noChangeAspect="1"/>
           </p:cNvSpPr>
           <p:nvPr>
             <p:ph type="sldImg" idx="2"/>
@@ -3132,7 +3174,7 @@
             <a:spLocks noGrp="1"/>
           </p:cNvSpPr>
           <p:nvPr>
-            <p:ph type="body" idx="3" sz="quarter"/>
+            <p:ph type="body" sz="quarter" idx="3"/>
           </p:nvPr>
         </p:nvSpPr>
         <p:spPr/>
@@ -3187,7 +3229,7 @@
 </file>
 
 <file path=ppt/notesSlides/notesSlide33.xml><?xml version="1.0" encoding="utf-8"?>
-<p:notes xmlns:a="http://schemas.openxmlformats.org/drawingml/2006/main" xmlns:p="http://schemas.openxmlformats.org/presentationml/2006/main" xmlns:r="http://schemas.openxmlformats.org/officeDocument/2006/relationships">
+<p:notes xmlns:a="http://schemas.openxmlformats.org/drawingml/2006/main" xmlns:r="http://schemas.openxmlformats.org/officeDocument/2006/relationships" xmlns:p="http://schemas.openxmlformats.org/presentationml/2006/main">
   <p:cSld>
     <p:spTree>
       <p:nvGrpSpPr>
@@ -3210,7 +3252,7 @@
             <a:spLocks noGrp="1"/>
           </p:cNvSpPr>
           <p:nvPr>
-            <p:ph type="sldNum" idx="5" sz="quarter"/>
+            <p:ph type="sldNum" sz="quarter" idx="5"/>
           </p:nvPr>
         </p:nvSpPr>
         <p:spPr/>
@@ -3219,7 +3261,7 @@
         <p:nvSpPr>
           <p:cNvPr id="3" name="Slide Image Placeholder 2"/>
           <p:cNvSpPr>
-            <a:spLocks noGrp="1"/>
+            <a:spLocks noGrp="1" noRot="1" noChangeAspect="1"/>
           </p:cNvSpPr>
           <p:nvPr>
             <p:ph type="sldImg" idx="2"/>
@@ -3234,7 +3276,7 @@
             <a:spLocks noGrp="1"/>
           </p:cNvSpPr>
           <p:nvPr>
-            <p:ph type="body" idx="3" sz="quarter"/>
+            <p:ph type="body" sz="quarter" idx="3"/>
           </p:nvPr>
         </p:nvSpPr>
         <p:spPr/>
@@ -3284,7 +3326,7 @@
 </file>
 
 <file path=ppt/notesSlides/notesSlide34.xml><?xml version="1.0" encoding="utf-8"?>
-<p:notes xmlns:a="http://schemas.openxmlformats.org/drawingml/2006/main" xmlns:p="http://schemas.openxmlformats.org/presentationml/2006/main" xmlns:r="http://schemas.openxmlformats.org/officeDocument/2006/relationships">
+<p:notes xmlns:a="http://schemas.openxmlformats.org/drawingml/2006/main" xmlns:r="http://schemas.openxmlformats.org/officeDocument/2006/relationships" xmlns:p="http://schemas.openxmlformats.org/presentationml/2006/main">
   <p:cSld>
     <p:spTree>
       <p:nvGrpSpPr>
@@ -3307,7 +3349,7 @@
             <a:spLocks noGrp="1"/>
           </p:cNvSpPr>
           <p:nvPr>
-            <p:ph type="sldNum" idx="5" sz="quarter"/>
+            <p:ph type="sldNum" sz="quarter" idx="5"/>
           </p:nvPr>
         </p:nvSpPr>
         <p:spPr/>
@@ -3316,7 +3358,7 @@
         <p:nvSpPr>
           <p:cNvPr id="3" name="Slide Image Placeholder 2"/>
           <p:cNvSpPr>
-            <a:spLocks noGrp="1"/>
+            <a:spLocks noGrp="1" noRot="1" noChangeAspect="1"/>
           </p:cNvSpPr>
           <p:nvPr>
             <p:ph type="sldImg" idx="2"/>
@@ -3331,7 +3373,7 @@
             <a:spLocks noGrp="1"/>
           </p:cNvSpPr>
           <p:nvPr>
-            <p:ph type="body" idx="3" sz="quarter"/>
+            <p:ph type="body" sz="quarter" idx="3"/>
           </p:nvPr>
         </p:nvSpPr>
         <p:spPr/>
@@ -3381,7 +3423,7 @@
 </file>
 
 <file path=ppt/notesSlides/notesSlide35.xml><?xml version="1.0" encoding="utf-8"?>
-<p:notes xmlns:a="http://schemas.openxmlformats.org/drawingml/2006/main" xmlns:p="http://schemas.openxmlformats.org/presentationml/2006/main" xmlns:r="http://schemas.openxmlformats.org/officeDocument/2006/relationships">
+<p:notes xmlns:a="http://schemas.openxmlformats.org/drawingml/2006/main" xmlns:r="http://schemas.openxmlformats.org/officeDocument/2006/relationships" xmlns:p="http://schemas.openxmlformats.org/presentationml/2006/main">
   <p:cSld>
     <p:spTree>
       <p:nvGrpSpPr>
@@ -3404,7 +3446,7 @@
             <a:spLocks noGrp="1"/>
           </p:cNvSpPr>
           <p:nvPr>
-            <p:ph type="sldNum" idx="5" sz="quarter"/>
+            <p:ph type="sldNum" sz="quarter" idx="5"/>
           </p:nvPr>
         </p:nvSpPr>
         <p:spPr/>
@@ -3413,7 +3455,7 @@
         <p:nvSpPr>
           <p:cNvPr id="3" name="Slide Image Placeholder 2"/>
           <p:cNvSpPr>
-            <a:spLocks noGrp="1"/>
+            <a:spLocks noGrp="1" noRot="1" noChangeAspect="1"/>
           </p:cNvSpPr>
           <p:nvPr>
             <p:ph type="sldImg" idx="2"/>
@@ -3428,7 +3470,7 @@
             <a:spLocks noGrp="1"/>
           </p:cNvSpPr>
           <p:nvPr>
-            <p:ph type="body" idx="3" sz="quarter"/>
+            <p:ph type="body" sz="quarter" idx="3"/>
           </p:nvPr>
         </p:nvSpPr>
         <p:spPr/>
@@ -3470,7 +3512,7 @@
 </file>
 
 <file path=ppt/notesSlides/notesSlide36.xml><?xml version="1.0" encoding="utf-8"?>
-<p:notes xmlns:a="http://schemas.openxmlformats.org/drawingml/2006/main" xmlns:p="http://schemas.openxmlformats.org/presentationml/2006/main" xmlns:r="http://schemas.openxmlformats.org/officeDocument/2006/relationships">
+<p:notes xmlns:a="http://schemas.openxmlformats.org/drawingml/2006/main" xmlns:r="http://schemas.openxmlformats.org/officeDocument/2006/relationships" xmlns:p="http://schemas.openxmlformats.org/presentationml/2006/main">
   <p:cSld>
     <p:spTree>
       <p:nvGrpSpPr>
@@ -3493,7 +3535,7 @@
             <a:spLocks noGrp="1"/>
           </p:cNvSpPr>
           <p:nvPr>
-            <p:ph type="sldNum" idx="5" sz="quarter"/>
+            <p:ph type="sldNum" sz="quarter" idx="5"/>
           </p:nvPr>
         </p:nvSpPr>
         <p:spPr/>
@@ -3502,7 +3544,7 @@
         <p:nvSpPr>
           <p:cNvPr id="3" name="Slide Image Placeholder 2"/>
           <p:cNvSpPr>
-            <a:spLocks noGrp="1"/>
+            <a:spLocks noGrp="1" noRot="1" noChangeAspect="1"/>
           </p:cNvSpPr>
           <p:nvPr>
             <p:ph type="sldImg" idx="2"/>
@@ -3517,7 +3559,7 @@
             <a:spLocks noGrp="1"/>
           </p:cNvSpPr>
           <p:nvPr>
-            <p:ph type="body" idx="3" sz="quarter"/>
+            <p:ph type="body" sz="quarter" idx="3"/>
           </p:nvPr>
         </p:nvSpPr>
         <p:spPr/>
@@ -3567,7 +3609,7 @@
 </file>
 
 <file path=ppt/notesSlides/notesSlide37.xml><?xml version="1.0" encoding="utf-8"?>
-<p:notes xmlns:a="http://schemas.openxmlformats.org/drawingml/2006/main" xmlns:p="http://schemas.openxmlformats.org/presentationml/2006/main" xmlns:r="http://schemas.openxmlformats.org/officeDocument/2006/relationships">
+<p:notes xmlns:a="http://schemas.openxmlformats.org/drawingml/2006/main" xmlns:r="http://schemas.openxmlformats.org/officeDocument/2006/relationships" xmlns:p="http://schemas.openxmlformats.org/presentationml/2006/main">
   <p:cSld>
     <p:spTree>
       <p:nvGrpSpPr>
@@ -3590,7 +3632,7 @@
             <a:spLocks noGrp="1"/>
           </p:cNvSpPr>
           <p:nvPr>
-            <p:ph type="sldNum" idx="5" sz="quarter"/>
+            <p:ph type="sldNum" sz="quarter" idx="5"/>
           </p:nvPr>
         </p:nvSpPr>
         <p:spPr/>
@@ -3599,7 +3641,7 @@
         <p:nvSpPr>
           <p:cNvPr id="3" name="Slide Image Placeholder 2"/>
           <p:cNvSpPr>
-            <a:spLocks noGrp="1"/>
+            <a:spLocks noGrp="1" noRot="1" noChangeAspect="1"/>
           </p:cNvSpPr>
           <p:nvPr>
             <p:ph type="sldImg" idx="2"/>
@@ -3614,7 +3656,7 @@
             <a:spLocks noGrp="1"/>
           </p:cNvSpPr>
           <p:nvPr>
-            <p:ph type="body" idx="3" sz="quarter"/>
+            <p:ph type="body" sz="quarter" idx="3"/>
           </p:nvPr>
         </p:nvSpPr>
         <p:spPr/>
@@ -3675,7 +3717,7 @@
 </file>
 
 <file path=ppt/notesSlides/notesSlide38.xml><?xml version="1.0" encoding="utf-8"?>
-<p:notes xmlns:a="http://schemas.openxmlformats.org/drawingml/2006/main" xmlns:p="http://schemas.openxmlformats.org/presentationml/2006/main" xmlns:r="http://schemas.openxmlformats.org/officeDocument/2006/relationships">
+<p:notes xmlns:a="http://schemas.openxmlformats.org/drawingml/2006/main" xmlns:r="http://schemas.openxmlformats.org/officeDocument/2006/relationships" xmlns:p="http://schemas.openxmlformats.org/presentationml/2006/main">
   <p:cSld>
     <p:spTree>
       <p:nvGrpSpPr>
@@ -3698,7 +3740,7 @@
             <a:spLocks noGrp="1"/>
           </p:cNvSpPr>
           <p:nvPr>
-            <p:ph type="sldNum" idx="5" sz="quarter"/>
+            <p:ph type="sldNum" sz="quarter" idx="5"/>
           </p:nvPr>
         </p:nvSpPr>
         <p:spPr/>
@@ -3707,7 +3749,7 @@
         <p:nvSpPr>
           <p:cNvPr id="3" name="Slide Image Placeholder 2"/>
           <p:cNvSpPr>
-            <a:spLocks noGrp="1"/>
+            <a:spLocks noGrp="1" noRot="1" noChangeAspect="1"/>
           </p:cNvSpPr>
           <p:nvPr>
             <p:ph type="sldImg" idx="2"/>
@@ -3722,7 +3764,7 @@
             <a:spLocks noGrp="1"/>
           </p:cNvSpPr>
           <p:nvPr>
-            <p:ph type="body" idx="3" sz="quarter"/>
+            <p:ph type="body" sz="quarter" idx="3"/>
           </p:nvPr>
         </p:nvSpPr>
         <p:spPr/>
@@ -3756,7 +3798,7 @@
 </file>
 
 <file path=ppt/notesSlides/notesSlide39.xml><?xml version="1.0" encoding="utf-8"?>
-<p:notes xmlns:a="http://schemas.openxmlformats.org/drawingml/2006/main" xmlns:p="http://schemas.openxmlformats.org/presentationml/2006/main" xmlns:r="http://schemas.openxmlformats.org/officeDocument/2006/relationships">
+<p:notes xmlns:a="http://schemas.openxmlformats.org/drawingml/2006/main" xmlns:r="http://schemas.openxmlformats.org/officeDocument/2006/relationships" xmlns:p="http://schemas.openxmlformats.org/presentationml/2006/main">
   <p:cSld>
     <p:spTree>
       <p:nvGrpSpPr>
@@ -3779,7 +3821,7 @@
             <a:spLocks noGrp="1"/>
           </p:cNvSpPr>
           <p:nvPr>
-            <p:ph type="sldNum" idx="5" sz="quarter"/>
+            <p:ph type="sldNum" sz="quarter" idx="5"/>
           </p:nvPr>
         </p:nvSpPr>
         <p:spPr/>
@@ -3788,7 +3830,7 @@
         <p:nvSpPr>
           <p:cNvPr id="3" name="Slide Image Placeholder 2"/>
           <p:cNvSpPr>
-            <a:spLocks noGrp="1"/>
+            <a:spLocks noGrp="1" noRot="1" noChangeAspect="1"/>
           </p:cNvSpPr>
           <p:nvPr>
             <p:ph type="sldImg" idx="2"/>
@@ -3803,7 +3845,7 @@
             <a:spLocks noGrp="1"/>
           </p:cNvSpPr>
           <p:nvPr>
-            <p:ph type="body" idx="3" sz="quarter"/>
+            <p:ph type="body" sz="quarter" idx="3"/>
           </p:nvPr>
         </p:nvSpPr>
         <p:spPr/>
@@ -3837,7 +3879,7 @@
 </file>
 
 <file path=ppt/notesSlides/notesSlide4.xml><?xml version="1.0" encoding="utf-8"?>
-<p:notes xmlns:a="http://schemas.openxmlformats.org/drawingml/2006/main" xmlns:p="http://schemas.openxmlformats.org/presentationml/2006/main" xmlns:r="http://schemas.openxmlformats.org/officeDocument/2006/relationships">
+<p:notes xmlns:a="http://schemas.openxmlformats.org/drawingml/2006/main" xmlns:r="http://schemas.openxmlformats.org/officeDocument/2006/relationships" xmlns:p="http://schemas.openxmlformats.org/presentationml/2006/main">
   <p:cSld>
     <p:spTree>
       <p:nvGrpSpPr>
@@ -3860,7 +3902,7 @@
             <a:spLocks noGrp="1"/>
           </p:cNvSpPr>
           <p:nvPr>
-            <p:ph type="sldNum" idx="5" sz="quarter"/>
+            <p:ph type="sldNum" sz="quarter" idx="5"/>
           </p:nvPr>
         </p:nvSpPr>
         <p:spPr/>
@@ -3869,7 +3911,7 @@
         <p:nvSpPr>
           <p:cNvPr id="3" name="Slide Image Placeholder 2"/>
           <p:cNvSpPr>
-            <a:spLocks noGrp="1"/>
+            <a:spLocks noGrp="1" noRot="1" noChangeAspect="1"/>
           </p:cNvSpPr>
           <p:nvPr>
             <p:ph type="sldImg" idx="2"/>
@@ -3884,7 +3926,7 @@
             <a:spLocks noGrp="1"/>
           </p:cNvSpPr>
           <p:nvPr>
-            <p:ph type="body" idx="3" sz="quarter"/>
+            <p:ph type="body" sz="quarter" idx="3"/>
           </p:nvPr>
         </p:nvSpPr>
         <p:spPr/>
@@ -3927,7 +3969,7 @@
 </file>
 
 <file path=ppt/notesSlides/notesSlide40.xml><?xml version="1.0" encoding="utf-8"?>
-<p:notes xmlns:a="http://schemas.openxmlformats.org/drawingml/2006/main" xmlns:p="http://schemas.openxmlformats.org/presentationml/2006/main" xmlns:r="http://schemas.openxmlformats.org/officeDocument/2006/relationships">
+<p:notes xmlns:a="http://schemas.openxmlformats.org/drawingml/2006/main" xmlns:r="http://schemas.openxmlformats.org/officeDocument/2006/relationships" xmlns:p="http://schemas.openxmlformats.org/presentationml/2006/main">
   <p:cSld>
     <p:spTree>
       <p:nvGrpSpPr>
@@ -3950,7 +3992,7 @@
             <a:spLocks noGrp="1"/>
           </p:cNvSpPr>
           <p:nvPr>
-            <p:ph type="sldNum" idx="5" sz="quarter"/>
+            <p:ph type="sldNum" sz="quarter" idx="5"/>
           </p:nvPr>
         </p:nvSpPr>
         <p:spPr/>
@@ -3959,7 +4001,7 @@
         <p:nvSpPr>
           <p:cNvPr id="3" name="Slide Image Placeholder 2"/>
           <p:cNvSpPr>
-            <a:spLocks noGrp="1"/>
+            <a:spLocks noGrp="1" noRot="1" noChangeAspect="1"/>
           </p:cNvSpPr>
           <p:nvPr>
             <p:ph type="sldImg" idx="2"/>
@@ -3974,7 +4016,7 @@
             <a:spLocks noGrp="1"/>
           </p:cNvSpPr>
           <p:nvPr>
-            <p:ph type="body" idx="3" sz="quarter"/>
+            <p:ph type="body" sz="quarter" idx="3"/>
           </p:nvPr>
         </p:nvSpPr>
         <p:spPr/>
@@ -4024,7 +4066,7 @@
 </file>
 
 <file path=ppt/notesSlides/notesSlide41.xml><?xml version="1.0" encoding="utf-8"?>
-<p:notes xmlns:a="http://schemas.openxmlformats.org/drawingml/2006/main" xmlns:p="http://schemas.openxmlformats.org/presentationml/2006/main" xmlns:r="http://schemas.openxmlformats.org/officeDocument/2006/relationships">
+<p:notes xmlns:a="http://schemas.openxmlformats.org/drawingml/2006/main" xmlns:r="http://schemas.openxmlformats.org/officeDocument/2006/relationships" xmlns:p="http://schemas.openxmlformats.org/presentationml/2006/main">
   <p:cSld>
     <p:spTree>
       <p:nvGrpSpPr>
@@ -4047,7 +4089,7 @@
             <a:spLocks noGrp="1"/>
           </p:cNvSpPr>
           <p:nvPr>
-            <p:ph type="sldNum" idx="5" sz="quarter"/>
+            <p:ph type="sldNum" sz="quarter" idx="5"/>
           </p:nvPr>
         </p:nvSpPr>
         <p:spPr/>
@@ -4056,7 +4098,7 @@
         <p:nvSpPr>
           <p:cNvPr id="3" name="Slide Image Placeholder 2"/>
           <p:cNvSpPr>
-            <a:spLocks noGrp="1"/>
+            <a:spLocks noGrp="1" noRot="1" noChangeAspect="1"/>
           </p:cNvSpPr>
           <p:nvPr>
             <p:ph type="sldImg" idx="2"/>
@@ -4071,7 +4113,7 @@
             <a:spLocks noGrp="1"/>
           </p:cNvSpPr>
           <p:nvPr>
-            <p:ph type="body" idx="3" sz="quarter"/>
+            <p:ph type="body" sz="quarter" idx="3"/>
           </p:nvPr>
         </p:nvSpPr>
         <p:spPr/>
@@ -4113,7 +4155,7 @@
 </file>
 
 <file path=ppt/notesSlides/notesSlide42.xml><?xml version="1.0" encoding="utf-8"?>
-<p:notes xmlns:a="http://schemas.openxmlformats.org/drawingml/2006/main" xmlns:p="http://schemas.openxmlformats.org/presentationml/2006/main" xmlns:r="http://schemas.openxmlformats.org/officeDocument/2006/relationships">
+<p:notes xmlns:a="http://schemas.openxmlformats.org/drawingml/2006/main" xmlns:r="http://schemas.openxmlformats.org/officeDocument/2006/relationships" xmlns:p="http://schemas.openxmlformats.org/presentationml/2006/main">
   <p:cSld>
     <p:spTree>
       <p:nvGrpSpPr>
@@ -4136,7 +4178,7 @@
             <a:spLocks noGrp="1"/>
           </p:cNvSpPr>
           <p:nvPr>
-            <p:ph type="sldNum" idx="5" sz="quarter"/>
+            <p:ph type="sldNum" sz="quarter" idx="5"/>
           </p:nvPr>
         </p:nvSpPr>
         <p:spPr/>
@@ -4145,7 +4187,7 @@
         <p:nvSpPr>
           <p:cNvPr id="3" name="Slide Image Placeholder 2"/>
           <p:cNvSpPr>
-            <a:spLocks noGrp="1"/>
+            <a:spLocks noGrp="1" noRot="1" noChangeAspect="1"/>
           </p:cNvSpPr>
           <p:nvPr>
             <p:ph type="sldImg" idx="2"/>
@@ -4160,7 +4202,7 @@
             <a:spLocks noGrp="1"/>
           </p:cNvSpPr>
           <p:nvPr>
-            <p:ph type="body" idx="3" sz="quarter"/>
+            <p:ph type="body" sz="quarter" idx="3"/>
           </p:nvPr>
         </p:nvSpPr>
         <p:spPr/>
@@ -4202,7 +4244,7 @@
 </file>
 
 <file path=ppt/notesSlides/notesSlide43.xml><?xml version="1.0" encoding="utf-8"?>
-<p:notes xmlns:a="http://schemas.openxmlformats.org/drawingml/2006/main" xmlns:p="http://schemas.openxmlformats.org/presentationml/2006/main" xmlns:r="http://schemas.openxmlformats.org/officeDocument/2006/relationships">
+<p:notes xmlns:a="http://schemas.openxmlformats.org/drawingml/2006/main" xmlns:r="http://schemas.openxmlformats.org/officeDocument/2006/relationships" xmlns:p="http://schemas.openxmlformats.org/presentationml/2006/main">
   <p:cSld>
     <p:spTree>
       <p:nvGrpSpPr>
@@ -4225,7 +4267,7 @@
             <a:spLocks noGrp="1"/>
           </p:cNvSpPr>
           <p:nvPr>
-            <p:ph type="sldNum" idx="5" sz="quarter"/>
+            <p:ph type="sldNum" sz="quarter" idx="5"/>
           </p:nvPr>
         </p:nvSpPr>
         <p:spPr/>
@@ -4234,7 +4276,7 @@
         <p:nvSpPr>
           <p:cNvPr id="3" name="Slide Image Placeholder 2"/>
           <p:cNvSpPr>
-            <a:spLocks noGrp="1"/>
+            <a:spLocks noGrp="1" noRot="1" noChangeAspect="1"/>
           </p:cNvSpPr>
           <p:nvPr>
             <p:ph type="sldImg" idx="2"/>
@@ -4249,7 +4291,7 @@
             <a:spLocks noGrp="1"/>
           </p:cNvSpPr>
           <p:nvPr>
-            <p:ph type="body" idx="3" sz="quarter"/>
+            <p:ph type="body" sz="quarter" idx="3"/>
           </p:nvPr>
         </p:nvSpPr>
         <p:spPr/>
@@ -4291,7 +4333,7 @@
 </file>
 
 <file path=ppt/notesSlides/notesSlide44.xml><?xml version="1.0" encoding="utf-8"?>
-<p:notes xmlns:a="http://schemas.openxmlformats.org/drawingml/2006/main" xmlns:p="http://schemas.openxmlformats.org/presentationml/2006/main" xmlns:r="http://schemas.openxmlformats.org/officeDocument/2006/relationships">
+<p:notes xmlns:a="http://schemas.openxmlformats.org/drawingml/2006/main" xmlns:r="http://schemas.openxmlformats.org/officeDocument/2006/relationships" xmlns:p="http://schemas.openxmlformats.org/presentationml/2006/main">
   <p:cSld>
     <p:spTree>
       <p:nvGrpSpPr>
@@ -4314,7 +4356,7 @@
             <a:spLocks noGrp="1"/>
           </p:cNvSpPr>
           <p:nvPr>
-            <p:ph type="sldNum" idx="5" sz="quarter"/>
+            <p:ph type="sldNum" sz="quarter" idx="5"/>
           </p:nvPr>
         </p:nvSpPr>
         <p:spPr/>
@@ -4323,7 +4365,7 @@
         <p:nvSpPr>
           <p:cNvPr id="3" name="Slide Image Placeholder 2"/>
           <p:cNvSpPr>
-            <a:spLocks noGrp="1"/>
+            <a:spLocks noGrp="1" noRot="1" noChangeAspect="1"/>
           </p:cNvSpPr>
           <p:nvPr>
             <p:ph type="sldImg" idx="2"/>
@@ -4338,7 +4380,7 @@
             <a:spLocks noGrp="1"/>
           </p:cNvSpPr>
           <p:nvPr>
-            <p:ph type="body" idx="3" sz="quarter"/>
+            <p:ph type="body" sz="quarter" idx="3"/>
           </p:nvPr>
         </p:nvSpPr>
         <p:spPr/>
@@ -4380,7 +4422,7 @@
 </file>
 
 <file path=ppt/notesSlides/notesSlide45.xml><?xml version="1.0" encoding="utf-8"?>
-<p:notes xmlns:a="http://schemas.openxmlformats.org/drawingml/2006/main" xmlns:p="http://schemas.openxmlformats.org/presentationml/2006/main" xmlns:r="http://schemas.openxmlformats.org/officeDocument/2006/relationships">
+<p:notes xmlns:a="http://schemas.openxmlformats.org/drawingml/2006/main" xmlns:r="http://schemas.openxmlformats.org/officeDocument/2006/relationships" xmlns:p="http://schemas.openxmlformats.org/presentationml/2006/main">
   <p:cSld>
     <p:spTree>
       <p:nvGrpSpPr>
@@ -4403,7 +4445,7 @@
             <a:spLocks noGrp="1"/>
           </p:cNvSpPr>
           <p:nvPr>
-            <p:ph type="sldNum" idx="5" sz="quarter"/>
+            <p:ph type="sldNum" sz="quarter" idx="5"/>
           </p:nvPr>
         </p:nvSpPr>
         <p:spPr/>
@@ -4412,7 +4454,7 @@
         <p:nvSpPr>
           <p:cNvPr id="3" name="Slide Image Placeholder 2"/>
           <p:cNvSpPr>
-            <a:spLocks noGrp="1"/>
+            <a:spLocks noGrp="1" noRot="1" noChangeAspect="1"/>
           </p:cNvSpPr>
           <p:nvPr>
             <p:ph type="sldImg" idx="2"/>
@@ -4427,7 +4469,7 @@
             <a:spLocks noGrp="1"/>
           </p:cNvSpPr>
           <p:nvPr>
-            <p:ph type="body" idx="3" sz="quarter"/>
+            <p:ph type="body" sz="quarter" idx="3"/>
           </p:nvPr>
         </p:nvSpPr>
         <p:spPr/>
@@ -4469,7 +4511,7 @@
 </file>
 
 <file path=ppt/notesSlides/notesSlide46.xml><?xml version="1.0" encoding="utf-8"?>
-<p:notes xmlns:a="http://schemas.openxmlformats.org/drawingml/2006/main" xmlns:p="http://schemas.openxmlformats.org/presentationml/2006/main" xmlns:r="http://schemas.openxmlformats.org/officeDocument/2006/relationships">
+<p:notes xmlns:a="http://schemas.openxmlformats.org/drawingml/2006/main" xmlns:r="http://schemas.openxmlformats.org/officeDocument/2006/relationships" xmlns:p="http://schemas.openxmlformats.org/presentationml/2006/main">
   <p:cSld>
     <p:spTree>
       <p:nvGrpSpPr>
@@ -4492,7 +4534,7 @@
             <a:spLocks noGrp="1"/>
           </p:cNvSpPr>
           <p:nvPr>
-            <p:ph type="sldNum" idx="5" sz="quarter"/>
+            <p:ph type="sldNum" sz="quarter" idx="5"/>
           </p:nvPr>
         </p:nvSpPr>
         <p:spPr/>
@@ -4501,7 +4543,7 @@
         <p:nvSpPr>
           <p:cNvPr id="3" name="Slide Image Placeholder 2"/>
           <p:cNvSpPr>
-            <a:spLocks noGrp="1"/>
+            <a:spLocks noGrp="1" noRot="1" noChangeAspect="1"/>
           </p:cNvSpPr>
           <p:nvPr>
             <p:ph type="sldImg" idx="2"/>
@@ -4516,7 +4558,7 @@
             <a:spLocks noGrp="1"/>
           </p:cNvSpPr>
           <p:nvPr>
-            <p:ph type="body" idx="3" sz="quarter"/>
+            <p:ph type="body" sz="quarter" idx="3"/>
           </p:nvPr>
         </p:nvSpPr>
         <p:spPr/>
@@ -4558,7 +4600,7 @@
 </file>
 
 <file path=ppt/notesSlides/notesSlide47.xml><?xml version="1.0" encoding="utf-8"?>
-<p:notes xmlns:a="http://schemas.openxmlformats.org/drawingml/2006/main" xmlns:p="http://schemas.openxmlformats.org/presentationml/2006/main" xmlns:r="http://schemas.openxmlformats.org/officeDocument/2006/relationships">
+<p:notes xmlns:a="http://schemas.openxmlformats.org/drawingml/2006/main" xmlns:r="http://schemas.openxmlformats.org/officeDocument/2006/relationships" xmlns:p="http://schemas.openxmlformats.org/presentationml/2006/main">
   <p:cSld>
     <p:spTree>
       <p:nvGrpSpPr>
@@ -4581,7 +4623,7 @@
             <a:spLocks noGrp="1"/>
           </p:cNvSpPr>
           <p:nvPr>
-            <p:ph type="sldNum" idx="5" sz="quarter"/>
+            <p:ph type="sldNum" sz="quarter" idx="5"/>
           </p:nvPr>
         </p:nvSpPr>
         <p:spPr/>
@@ -4590,7 +4632,7 @@
         <p:nvSpPr>
           <p:cNvPr id="3" name="Slide Image Placeholder 2"/>
           <p:cNvSpPr>
-            <a:spLocks noGrp="1"/>
+            <a:spLocks noGrp="1" noRot="1" noChangeAspect="1"/>
           </p:cNvSpPr>
           <p:nvPr>
             <p:ph type="sldImg" idx="2"/>
@@ -4605,7 +4647,7 @@
             <a:spLocks noGrp="1"/>
           </p:cNvSpPr>
           <p:nvPr>
-            <p:ph type="body" idx="3" sz="quarter"/>
+            <p:ph type="body" sz="quarter" idx="3"/>
           </p:nvPr>
         </p:nvSpPr>
         <p:spPr/>
@@ -4647,7 +4689,7 @@
 </file>
 
 <file path=ppt/notesSlides/notesSlide48.xml><?xml version="1.0" encoding="utf-8"?>
-<p:notes xmlns:a="http://schemas.openxmlformats.org/drawingml/2006/main" xmlns:p="http://schemas.openxmlformats.org/presentationml/2006/main" xmlns:r="http://schemas.openxmlformats.org/officeDocument/2006/relationships">
+<p:notes xmlns:a="http://schemas.openxmlformats.org/drawingml/2006/main" xmlns:r="http://schemas.openxmlformats.org/officeDocument/2006/relationships" xmlns:p="http://schemas.openxmlformats.org/presentationml/2006/main">
   <p:cSld>
     <p:spTree>
       <p:nvGrpSpPr>
@@ -4670,7 +4712,7 @@
             <a:spLocks noGrp="1"/>
           </p:cNvSpPr>
           <p:nvPr>
-            <p:ph type="sldNum" idx="5" sz="quarter"/>
+            <p:ph type="sldNum" sz="quarter" idx="5"/>
           </p:nvPr>
         </p:nvSpPr>
         <p:spPr/>
@@ -4679,7 +4721,7 @@
         <p:nvSpPr>
           <p:cNvPr id="3" name="Slide Image Placeholder 2"/>
           <p:cNvSpPr>
-            <a:spLocks noGrp="1"/>
+            <a:spLocks noGrp="1" noRot="1" noChangeAspect="1"/>
           </p:cNvSpPr>
           <p:nvPr>
             <p:ph type="sldImg" idx="2"/>
@@ -4694,7 +4736,7 @@
             <a:spLocks noGrp="1"/>
           </p:cNvSpPr>
           <p:nvPr>
-            <p:ph type="body" idx="3" sz="quarter"/>
+            <p:ph type="body" sz="quarter" idx="3"/>
           </p:nvPr>
         </p:nvSpPr>
         <p:spPr/>
@@ -4744,7 +4786,7 @@
 </file>
 
 <file path=ppt/notesSlides/notesSlide49.xml><?xml version="1.0" encoding="utf-8"?>
-<p:notes xmlns:a="http://schemas.openxmlformats.org/drawingml/2006/main" xmlns:p="http://schemas.openxmlformats.org/presentationml/2006/main" xmlns:r="http://schemas.openxmlformats.org/officeDocument/2006/relationships">
+<p:notes xmlns:a="http://schemas.openxmlformats.org/drawingml/2006/main" xmlns:r="http://schemas.openxmlformats.org/officeDocument/2006/relationships" xmlns:p="http://schemas.openxmlformats.org/presentationml/2006/main">
   <p:cSld>
     <p:spTree>
       <p:nvGrpSpPr>
@@ -4767,7 +4809,7 @@
             <a:spLocks noGrp="1"/>
           </p:cNvSpPr>
           <p:nvPr>
-            <p:ph type="sldNum" idx="5" sz="quarter"/>
+            <p:ph type="sldNum" sz="quarter" idx="5"/>
           </p:nvPr>
         </p:nvSpPr>
         <p:spPr/>
@@ -4776,7 +4818,7 @@
         <p:nvSpPr>
           <p:cNvPr id="3" name="Slide Image Placeholder 2"/>
           <p:cNvSpPr>
-            <a:spLocks noGrp="1"/>
+            <a:spLocks noGrp="1" noRot="1" noChangeAspect="1"/>
           </p:cNvSpPr>
           <p:nvPr>
             <p:ph type="sldImg" idx="2"/>
@@ -4791,7 +4833,7 @@
             <a:spLocks noGrp="1"/>
           </p:cNvSpPr>
           <p:nvPr>
-            <p:ph type="body" idx="3" sz="quarter"/>
+            <p:ph type="body" sz="quarter" idx="3"/>
           </p:nvPr>
         </p:nvSpPr>
         <p:spPr/>
@@ -4833,7 +4875,7 @@
 </file>
 
 <file path=ppt/notesSlides/notesSlide5.xml><?xml version="1.0" encoding="utf-8"?>
-<p:notes xmlns:a="http://schemas.openxmlformats.org/drawingml/2006/main" xmlns:p="http://schemas.openxmlformats.org/presentationml/2006/main" xmlns:r="http://schemas.openxmlformats.org/officeDocument/2006/relationships">
+<p:notes xmlns:a="http://schemas.openxmlformats.org/drawingml/2006/main" xmlns:r="http://schemas.openxmlformats.org/officeDocument/2006/relationships" xmlns:p="http://schemas.openxmlformats.org/presentationml/2006/main">
   <p:cSld>
     <p:spTree>
       <p:nvGrpSpPr>
@@ -4856,7 +4898,7 @@
             <a:spLocks noGrp="1"/>
           </p:cNvSpPr>
           <p:nvPr>
-            <p:ph type="sldNum" idx="5" sz="quarter"/>
+            <p:ph type="sldNum" sz="quarter" idx="5"/>
           </p:nvPr>
         </p:nvSpPr>
         <p:spPr/>
@@ -4865,7 +4907,7 @@
         <p:nvSpPr>
           <p:cNvPr id="3" name="Slide Image Placeholder 2"/>
           <p:cNvSpPr>
-            <a:spLocks noGrp="1"/>
+            <a:spLocks noGrp="1" noRot="1" noChangeAspect="1"/>
           </p:cNvSpPr>
           <p:nvPr>
             <p:ph type="sldImg" idx="2"/>
@@ -4880,7 +4922,7 @@
             <a:spLocks noGrp="1"/>
           </p:cNvSpPr>
           <p:nvPr>
-            <p:ph type="body" idx="3" sz="quarter"/>
+            <p:ph type="body" sz="quarter" idx="3"/>
           </p:nvPr>
         </p:nvSpPr>
         <p:spPr/>
@@ -4923,7 +4965,7 @@
 </file>
 
 <file path=ppt/notesSlides/notesSlide50.xml><?xml version="1.0" encoding="utf-8"?>
-<p:notes xmlns:a="http://schemas.openxmlformats.org/drawingml/2006/main" xmlns:p="http://schemas.openxmlformats.org/presentationml/2006/main" xmlns:r="http://schemas.openxmlformats.org/officeDocument/2006/relationships">
+<p:notes xmlns:a="http://schemas.openxmlformats.org/drawingml/2006/main" xmlns:r="http://schemas.openxmlformats.org/officeDocument/2006/relationships" xmlns:p="http://schemas.openxmlformats.org/presentationml/2006/main">
   <p:cSld>
     <p:spTree>
       <p:nvGrpSpPr>
@@ -4946,7 +4988,7 @@
             <a:spLocks noGrp="1"/>
           </p:cNvSpPr>
           <p:nvPr>
-            <p:ph type="sldNum" idx="5" sz="quarter"/>
+            <p:ph type="sldNum" sz="quarter" idx="5"/>
           </p:nvPr>
         </p:nvSpPr>
         <p:spPr/>
@@ -4955,7 +4997,7 @@
         <p:nvSpPr>
           <p:cNvPr id="3" name="Slide Image Placeholder 2"/>
           <p:cNvSpPr>
-            <a:spLocks noGrp="1"/>
+            <a:spLocks noGrp="1" noRot="1" noChangeAspect="1"/>
           </p:cNvSpPr>
           <p:nvPr>
             <p:ph type="sldImg" idx="2"/>
@@ -4970,7 +5012,7 @@
             <a:spLocks noGrp="1"/>
           </p:cNvSpPr>
           <p:nvPr>
-            <p:ph type="body" idx="3" sz="quarter"/>
+            <p:ph type="body" sz="quarter" idx="3"/>
           </p:nvPr>
         </p:nvSpPr>
         <p:spPr/>
@@ -5027,7 +5069,7 @@
 </file>
 
 <file path=ppt/notesSlides/notesSlide51.xml><?xml version="1.0" encoding="utf-8"?>
-<p:notes xmlns:a="http://schemas.openxmlformats.org/drawingml/2006/main" xmlns:p="http://schemas.openxmlformats.org/presentationml/2006/main" xmlns:r="http://schemas.openxmlformats.org/officeDocument/2006/relationships">
+<p:notes xmlns:a="http://schemas.openxmlformats.org/drawingml/2006/main" xmlns:r="http://schemas.openxmlformats.org/officeDocument/2006/relationships" xmlns:p="http://schemas.openxmlformats.org/presentationml/2006/main">
   <p:cSld>
     <p:spTree>
       <p:nvGrpSpPr>
@@ -5050,7 +5092,7 @@
             <a:spLocks noGrp="1"/>
           </p:cNvSpPr>
           <p:nvPr>
-            <p:ph type="sldNum" idx="5" sz="quarter"/>
+            <p:ph type="sldNum" sz="quarter" idx="5"/>
           </p:nvPr>
         </p:nvSpPr>
         <p:spPr/>
@@ -5059,7 +5101,7 @@
         <p:nvSpPr>
           <p:cNvPr id="3" name="Slide Image Placeholder 2"/>
           <p:cNvSpPr>
-            <a:spLocks noGrp="1"/>
+            <a:spLocks noGrp="1" noRot="1" noChangeAspect="1"/>
           </p:cNvSpPr>
           <p:nvPr>
             <p:ph type="sldImg" idx="2"/>
@@ -5074,7 +5116,7 @@
             <a:spLocks noGrp="1"/>
           </p:cNvSpPr>
           <p:nvPr>
-            <p:ph type="body" idx="3" sz="quarter"/>
+            <p:ph type="body" sz="quarter" idx="3"/>
           </p:nvPr>
         </p:nvSpPr>
         <p:spPr/>
@@ -5116,7 +5158,7 @@
 </file>
 
 <file path=ppt/notesSlides/notesSlide52.xml><?xml version="1.0" encoding="utf-8"?>
-<p:notes xmlns:a="http://schemas.openxmlformats.org/drawingml/2006/main" xmlns:p="http://schemas.openxmlformats.org/presentationml/2006/main" xmlns:r="http://schemas.openxmlformats.org/officeDocument/2006/relationships">
+<p:notes xmlns:a="http://schemas.openxmlformats.org/drawingml/2006/main" xmlns:r="http://schemas.openxmlformats.org/officeDocument/2006/relationships" xmlns:p="http://schemas.openxmlformats.org/presentationml/2006/main">
   <p:cSld>
     <p:spTree>
       <p:nvGrpSpPr>
@@ -5139,7 +5181,7 @@
             <a:spLocks noGrp="1"/>
           </p:cNvSpPr>
           <p:nvPr>
-            <p:ph type="sldNum" idx="5" sz="quarter"/>
+            <p:ph type="sldNum" sz="quarter" idx="5"/>
           </p:nvPr>
         </p:nvSpPr>
         <p:spPr/>
@@ -5148,7 +5190,7 @@
         <p:nvSpPr>
           <p:cNvPr id="3" name="Slide Image Placeholder 2"/>
           <p:cNvSpPr>
-            <a:spLocks noGrp="1"/>
+            <a:spLocks noGrp="1" noRot="1" noChangeAspect="1"/>
           </p:cNvSpPr>
           <p:nvPr>
             <p:ph type="sldImg" idx="2"/>
@@ -5163,7 +5205,7 @@
             <a:spLocks noGrp="1"/>
           </p:cNvSpPr>
           <p:nvPr>
-            <p:ph type="body" idx="3" sz="quarter"/>
+            <p:ph type="body" sz="quarter" idx="3"/>
           </p:nvPr>
         </p:nvSpPr>
         <p:spPr/>
@@ -5213,7 +5255,7 @@
 </file>
 
 <file path=ppt/notesSlides/notesSlide53.xml><?xml version="1.0" encoding="utf-8"?>
-<p:notes xmlns:a="http://schemas.openxmlformats.org/drawingml/2006/main" xmlns:p="http://schemas.openxmlformats.org/presentationml/2006/main" xmlns:r="http://schemas.openxmlformats.org/officeDocument/2006/relationships">
+<p:notes xmlns:a="http://schemas.openxmlformats.org/drawingml/2006/main" xmlns:r="http://schemas.openxmlformats.org/officeDocument/2006/relationships" xmlns:p="http://schemas.openxmlformats.org/presentationml/2006/main">
   <p:cSld>
     <p:spTree>
       <p:nvGrpSpPr>
@@ -5236,7 +5278,7 @@
             <a:spLocks noGrp="1"/>
           </p:cNvSpPr>
           <p:nvPr>
-            <p:ph type="sldNum" idx="5" sz="quarter"/>
+            <p:ph type="sldNum" sz="quarter" idx="5"/>
           </p:nvPr>
         </p:nvSpPr>
         <p:spPr/>
@@ -5245,7 +5287,7 @@
         <p:nvSpPr>
           <p:cNvPr id="3" name="Slide Image Placeholder 2"/>
           <p:cNvSpPr>
-            <a:spLocks noGrp="1"/>
+            <a:spLocks noGrp="1" noRot="1" noChangeAspect="1"/>
           </p:cNvSpPr>
           <p:nvPr>
             <p:ph type="sldImg" idx="2"/>
@@ -5260,7 +5302,7 @@
             <a:spLocks noGrp="1"/>
           </p:cNvSpPr>
           <p:nvPr>
-            <p:ph type="body" idx="3" sz="quarter"/>
+            <p:ph type="body" sz="quarter" idx="3"/>
           </p:nvPr>
         </p:nvSpPr>
         <p:spPr/>
@@ -5310,7 +5352,7 @@
 </file>
 
 <file path=ppt/notesSlides/notesSlide54.xml><?xml version="1.0" encoding="utf-8"?>
-<p:notes xmlns:a="http://schemas.openxmlformats.org/drawingml/2006/main" xmlns:p="http://schemas.openxmlformats.org/presentationml/2006/main" xmlns:r="http://schemas.openxmlformats.org/officeDocument/2006/relationships">
+<p:notes xmlns:a="http://schemas.openxmlformats.org/drawingml/2006/main" xmlns:r="http://schemas.openxmlformats.org/officeDocument/2006/relationships" xmlns:p="http://schemas.openxmlformats.org/presentationml/2006/main">
   <p:cSld>
     <p:spTree>
       <p:nvGrpSpPr>
@@ -5333,7 +5375,7 @@
             <a:spLocks noGrp="1"/>
           </p:cNvSpPr>
           <p:nvPr>
-            <p:ph type="sldNum" idx="5" sz="quarter"/>
+            <p:ph type="sldNum" sz="quarter" idx="5"/>
           </p:nvPr>
         </p:nvSpPr>
         <p:spPr/>
@@ -5342,7 +5384,7 @@
         <p:nvSpPr>
           <p:cNvPr id="3" name="Slide Image Placeholder 2"/>
           <p:cNvSpPr>
-            <a:spLocks noGrp="1"/>
+            <a:spLocks noGrp="1" noRot="1" noChangeAspect="1"/>
           </p:cNvSpPr>
           <p:nvPr>
             <p:ph type="sldImg" idx="2"/>
@@ -5357,7 +5399,7 @@
             <a:spLocks noGrp="1"/>
           </p:cNvSpPr>
           <p:nvPr>
-            <p:ph type="body" idx="3" sz="quarter"/>
+            <p:ph type="body" sz="quarter" idx="3"/>
           </p:nvPr>
         </p:nvSpPr>
         <p:spPr/>
@@ -5399,7 +5441,7 @@
 </file>
 
 <file path=ppt/notesSlides/notesSlide55.xml><?xml version="1.0" encoding="utf-8"?>
-<p:notes xmlns:a="http://schemas.openxmlformats.org/drawingml/2006/main" xmlns:p="http://schemas.openxmlformats.org/presentationml/2006/main" xmlns:r="http://schemas.openxmlformats.org/officeDocument/2006/relationships">
+<p:notes xmlns:a="http://schemas.openxmlformats.org/drawingml/2006/main" xmlns:r="http://schemas.openxmlformats.org/officeDocument/2006/relationships" xmlns:p="http://schemas.openxmlformats.org/presentationml/2006/main">
   <p:cSld>
     <p:spTree>
       <p:nvGrpSpPr>
@@ -5422,7 +5464,7 @@
             <a:spLocks noGrp="1"/>
           </p:cNvSpPr>
           <p:nvPr>
-            <p:ph type="sldNum" idx="5" sz="quarter"/>
+            <p:ph type="sldNum" sz="quarter" idx="5"/>
           </p:nvPr>
         </p:nvSpPr>
         <p:spPr/>
@@ -5431,7 +5473,7 @@
         <p:nvSpPr>
           <p:cNvPr id="3" name="Slide Image Placeholder 2"/>
           <p:cNvSpPr>
-            <a:spLocks noGrp="1"/>
+            <a:spLocks noGrp="1" noRot="1" noChangeAspect="1"/>
           </p:cNvSpPr>
           <p:nvPr>
             <p:ph type="sldImg" idx="2"/>
@@ -5446,7 +5488,7 @@
             <a:spLocks noGrp="1"/>
           </p:cNvSpPr>
           <p:nvPr>
-            <p:ph type="body" idx="3" sz="quarter"/>
+            <p:ph type="body" sz="quarter" idx="3"/>
           </p:nvPr>
         </p:nvSpPr>
         <p:spPr/>
@@ -5480,7 +5522,7 @@
 </file>
 
 <file path=ppt/notesSlides/notesSlide56.xml><?xml version="1.0" encoding="utf-8"?>
-<p:notes xmlns:a="http://schemas.openxmlformats.org/drawingml/2006/main" xmlns:p="http://schemas.openxmlformats.org/presentationml/2006/main" xmlns:r="http://schemas.openxmlformats.org/officeDocument/2006/relationships">
+<p:notes xmlns:a="http://schemas.openxmlformats.org/drawingml/2006/main" xmlns:r="http://schemas.openxmlformats.org/officeDocument/2006/relationships" xmlns:p="http://schemas.openxmlformats.org/presentationml/2006/main">
   <p:cSld>
     <p:spTree>
       <p:nvGrpSpPr>
@@ -5503,7 +5545,7 @@
             <a:spLocks noGrp="1"/>
           </p:cNvSpPr>
           <p:nvPr>
-            <p:ph type="sldNum" idx="5" sz="quarter"/>
+            <p:ph type="sldNum" sz="quarter" idx="5"/>
           </p:nvPr>
         </p:nvSpPr>
         <p:spPr/>
@@ -5512,7 +5554,7 @@
         <p:nvSpPr>
           <p:cNvPr id="3" name="Slide Image Placeholder 2"/>
           <p:cNvSpPr>
-            <a:spLocks noGrp="1"/>
+            <a:spLocks noGrp="1" noRot="1" noChangeAspect="1"/>
           </p:cNvSpPr>
           <p:nvPr>
             <p:ph type="sldImg" idx="2"/>
@@ -5527,7 +5569,7 @@
             <a:spLocks noGrp="1"/>
           </p:cNvSpPr>
           <p:nvPr>
-            <p:ph type="body" idx="3" sz="quarter"/>
+            <p:ph type="body" sz="quarter" idx="3"/>
           </p:nvPr>
         </p:nvSpPr>
         <p:spPr/>
@@ -5572,7 +5614,7 @@
 </file>
 
 <file path=ppt/notesSlides/notesSlide57.xml><?xml version="1.0" encoding="utf-8"?>
-<p:notes xmlns:a="http://schemas.openxmlformats.org/drawingml/2006/main" xmlns:p="http://schemas.openxmlformats.org/presentationml/2006/main" xmlns:r="http://schemas.openxmlformats.org/officeDocument/2006/relationships">
+<p:notes xmlns:a="http://schemas.openxmlformats.org/drawingml/2006/main" xmlns:r="http://schemas.openxmlformats.org/officeDocument/2006/relationships" xmlns:p="http://schemas.openxmlformats.org/presentationml/2006/main">
   <p:cSld>
     <p:spTree>
       <p:nvGrpSpPr>
@@ -5595,7 +5637,7 @@
             <a:spLocks noGrp="1"/>
           </p:cNvSpPr>
           <p:nvPr>
-            <p:ph type="sldNum" idx="5" sz="quarter"/>
+            <p:ph type="sldNum" sz="quarter" idx="5"/>
           </p:nvPr>
         </p:nvSpPr>
         <p:spPr/>
@@ -5604,7 +5646,7 @@
         <p:nvSpPr>
           <p:cNvPr id="3" name="Slide Image Placeholder 2"/>
           <p:cNvSpPr>
-            <a:spLocks noGrp="1"/>
+            <a:spLocks noGrp="1" noRot="1" noChangeAspect="1"/>
           </p:cNvSpPr>
           <p:nvPr>
             <p:ph type="sldImg" idx="2"/>
@@ -5619,7 +5661,7 @@
             <a:spLocks noGrp="1"/>
           </p:cNvSpPr>
           <p:nvPr>
-            <p:ph type="body" idx="3" sz="quarter"/>
+            <p:ph type="body" sz="quarter" idx="3"/>
           </p:nvPr>
         </p:nvSpPr>
         <p:spPr/>
@@ -5671,7 +5713,7 @@
 </file>
 
 <file path=ppt/notesSlides/notesSlide58.xml><?xml version="1.0" encoding="utf-8"?>
-<p:notes xmlns:a="http://schemas.openxmlformats.org/drawingml/2006/main" xmlns:p="http://schemas.openxmlformats.org/presentationml/2006/main" xmlns:r="http://schemas.openxmlformats.org/officeDocument/2006/relationships">
+<p:notes xmlns:a="http://schemas.openxmlformats.org/drawingml/2006/main" xmlns:r="http://schemas.openxmlformats.org/officeDocument/2006/relationships" xmlns:p="http://schemas.openxmlformats.org/presentationml/2006/main">
   <p:cSld>
     <p:spTree>
       <p:nvGrpSpPr>
@@ -5694,7 +5736,7 @@
             <a:spLocks noGrp="1"/>
           </p:cNvSpPr>
           <p:nvPr>
-            <p:ph type="sldNum" idx="5" sz="quarter"/>
+            <p:ph type="sldNum" sz="quarter" idx="5"/>
           </p:nvPr>
         </p:nvSpPr>
         <p:spPr/>
@@ -5703,7 +5745,7 @@
         <p:nvSpPr>
           <p:cNvPr id="3" name="Slide Image Placeholder 2"/>
           <p:cNvSpPr>
-            <a:spLocks noGrp="1"/>
+            <a:spLocks noGrp="1" noRot="1" noChangeAspect="1"/>
           </p:cNvSpPr>
           <p:nvPr>
             <p:ph type="sldImg" idx="2"/>
@@ -5718,7 +5760,7 @@
             <a:spLocks noGrp="1"/>
           </p:cNvSpPr>
           <p:nvPr>
-            <p:ph type="body" idx="3" sz="quarter"/>
+            <p:ph type="body" sz="quarter" idx="3"/>
           </p:nvPr>
         </p:nvSpPr>
         <p:spPr/>
@@ -5781,7 +5823,7 @@
 </file>
 
 <file path=ppt/notesSlides/notesSlide59.xml><?xml version="1.0" encoding="utf-8"?>
-<p:notes xmlns:a="http://schemas.openxmlformats.org/drawingml/2006/main" xmlns:p="http://schemas.openxmlformats.org/presentationml/2006/main" xmlns:r="http://schemas.openxmlformats.org/officeDocument/2006/relationships">
+<p:notes xmlns:a="http://schemas.openxmlformats.org/drawingml/2006/main" xmlns:r="http://schemas.openxmlformats.org/officeDocument/2006/relationships" xmlns:p="http://schemas.openxmlformats.org/presentationml/2006/main">
   <p:cSld>
     <p:spTree>
       <p:nvGrpSpPr>
@@ -5804,7 +5846,7 @@
             <a:spLocks noGrp="1"/>
           </p:cNvSpPr>
           <p:nvPr>
-            <p:ph type="sldNum" idx="5" sz="quarter"/>
+            <p:ph type="sldNum" sz="quarter" idx="5"/>
           </p:nvPr>
         </p:nvSpPr>
         <p:spPr/>
@@ -5813,7 +5855,7 @@
         <p:nvSpPr>
           <p:cNvPr id="3" name="Slide Image Placeholder 2"/>
           <p:cNvSpPr>
-            <a:spLocks noGrp="1"/>
+            <a:spLocks noGrp="1" noRot="1" noChangeAspect="1"/>
           </p:cNvSpPr>
           <p:nvPr>
             <p:ph type="sldImg" idx="2"/>
@@ -5828,7 +5870,7 @@
             <a:spLocks noGrp="1"/>
           </p:cNvSpPr>
           <p:nvPr>
-            <p:ph type="body" idx="3" sz="quarter"/>
+            <p:ph type="body" sz="quarter" idx="3"/>
           </p:nvPr>
         </p:nvSpPr>
         <p:spPr/>
@@ -5881,7 +5923,7 @@
 </file>
 
 <file path=ppt/notesSlides/notesSlide6.xml><?xml version="1.0" encoding="utf-8"?>
-<p:notes xmlns:a="http://schemas.openxmlformats.org/drawingml/2006/main" xmlns:p="http://schemas.openxmlformats.org/presentationml/2006/main" xmlns:r="http://schemas.openxmlformats.org/officeDocument/2006/relationships">
+<p:notes xmlns:a="http://schemas.openxmlformats.org/drawingml/2006/main" xmlns:r="http://schemas.openxmlformats.org/officeDocument/2006/relationships" xmlns:p="http://schemas.openxmlformats.org/presentationml/2006/main">
   <p:cSld>
     <p:spTree>
       <p:nvGrpSpPr>
@@ -5904,7 +5946,7 @@
             <a:spLocks noGrp="1"/>
           </p:cNvSpPr>
           <p:nvPr>
-            <p:ph type="sldNum" idx="5" sz="quarter"/>
+            <p:ph type="sldNum" sz="quarter" idx="5"/>
           </p:nvPr>
         </p:nvSpPr>
         <p:spPr/>
@@ -5913,7 +5955,7 @@
         <p:nvSpPr>
           <p:cNvPr id="3" name="Slide Image Placeholder 2"/>
           <p:cNvSpPr>
-            <a:spLocks noGrp="1"/>
+            <a:spLocks noGrp="1" noRot="1" noChangeAspect="1"/>
           </p:cNvSpPr>
           <p:nvPr>
             <p:ph type="sldImg" idx="2"/>
@@ -5928,7 +5970,7 @@
             <a:spLocks noGrp="1"/>
           </p:cNvSpPr>
           <p:nvPr>
-            <p:ph type="body" idx="3" sz="quarter"/>
+            <p:ph type="body" sz="quarter" idx="3"/>
           </p:nvPr>
         </p:nvSpPr>
         <p:spPr/>
@@ -5974,7 +6016,7 @@
 </file>
 
 <file path=ppt/notesSlides/notesSlide60.xml><?xml version="1.0" encoding="utf-8"?>
-<p:notes xmlns:a="http://schemas.openxmlformats.org/drawingml/2006/main" xmlns:p="http://schemas.openxmlformats.org/presentationml/2006/main" xmlns:r="http://schemas.openxmlformats.org/officeDocument/2006/relationships">
+<p:notes xmlns:a="http://schemas.openxmlformats.org/drawingml/2006/main" xmlns:r="http://schemas.openxmlformats.org/officeDocument/2006/relationships" xmlns:p="http://schemas.openxmlformats.org/presentationml/2006/main">
   <p:cSld>
     <p:spTree>
       <p:nvGrpSpPr>
@@ -5997,7 +6039,7 @@
             <a:spLocks noGrp="1"/>
           </p:cNvSpPr>
           <p:nvPr>
-            <p:ph type="sldNum" idx="5" sz="quarter"/>
+            <p:ph type="sldNum" sz="quarter" idx="5"/>
           </p:nvPr>
         </p:nvSpPr>
         <p:spPr/>
@@ -6006,7 +6048,7 @@
         <p:nvSpPr>
           <p:cNvPr id="3" name="Slide Image Placeholder 2"/>
           <p:cNvSpPr>
-            <a:spLocks noGrp="1"/>
+            <a:spLocks noGrp="1" noRot="1" noChangeAspect="1"/>
           </p:cNvSpPr>
           <p:nvPr>
             <p:ph type="sldImg" idx="2"/>
@@ -6021,7 +6063,7 @@
             <a:spLocks noGrp="1"/>
           </p:cNvSpPr>
           <p:nvPr>
-            <p:ph type="body" idx="3" sz="quarter"/>
+            <p:ph type="body" sz="quarter" idx="3"/>
           </p:nvPr>
         </p:nvSpPr>
         <p:spPr/>
@@ -6075,7 +6117,7 @@
 </file>
 
 <file path=ppt/notesSlides/notesSlide61.xml><?xml version="1.0" encoding="utf-8"?>
-<p:notes xmlns:a="http://schemas.openxmlformats.org/drawingml/2006/main" xmlns:p="http://schemas.openxmlformats.org/presentationml/2006/main" xmlns:r="http://schemas.openxmlformats.org/officeDocument/2006/relationships">
+<p:notes xmlns:a="http://schemas.openxmlformats.org/drawingml/2006/main" xmlns:r="http://schemas.openxmlformats.org/officeDocument/2006/relationships" xmlns:p="http://schemas.openxmlformats.org/presentationml/2006/main">
   <p:cSld>
     <p:spTree>
       <p:nvGrpSpPr>
@@ -6098,7 +6140,7 @@
             <a:spLocks noGrp="1"/>
           </p:cNvSpPr>
           <p:nvPr>
-            <p:ph type="sldNum" idx="5" sz="quarter"/>
+            <p:ph type="sldNum" sz="quarter" idx="5"/>
           </p:nvPr>
         </p:nvSpPr>
         <p:spPr/>
@@ -6107,7 +6149,7 @@
         <p:nvSpPr>
           <p:cNvPr id="3" name="Slide Image Placeholder 2"/>
           <p:cNvSpPr>
-            <a:spLocks noGrp="1"/>
+            <a:spLocks noGrp="1" noRot="1" noChangeAspect="1"/>
           </p:cNvSpPr>
           <p:nvPr>
             <p:ph type="sldImg" idx="2"/>
@@ -6122,7 +6164,7 @@
             <a:spLocks noGrp="1"/>
           </p:cNvSpPr>
           <p:nvPr>
-            <p:ph type="body" idx="3" sz="quarter"/>
+            <p:ph type="body" sz="quarter" idx="3"/>
           </p:nvPr>
         </p:nvSpPr>
         <p:spPr/>
@@ -6172,7 +6214,7 @@
 </file>
 
 <file path=ppt/notesSlides/notesSlide62.xml><?xml version="1.0" encoding="utf-8"?>
-<p:notes xmlns:a="http://schemas.openxmlformats.org/drawingml/2006/main" xmlns:p="http://schemas.openxmlformats.org/presentationml/2006/main" xmlns:r="http://schemas.openxmlformats.org/officeDocument/2006/relationships">
+<p:notes xmlns:a="http://schemas.openxmlformats.org/drawingml/2006/main" xmlns:r="http://schemas.openxmlformats.org/officeDocument/2006/relationships" xmlns:p="http://schemas.openxmlformats.org/presentationml/2006/main">
   <p:cSld>
     <p:spTree>
       <p:nvGrpSpPr>
@@ -6195,7 +6237,7 @@
             <a:spLocks noGrp="1"/>
           </p:cNvSpPr>
           <p:nvPr>
-            <p:ph type="sldNum" idx="5" sz="quarter"/>
+            <p:ph type="sldNum" sz="quarter" idx="5"/>
           </p:nvPr>
         </p:nvSpPr>
         <p:spPr/>
@@ -6204,7 +6246,7 @@
         <p:nvSpPr>
           <p:cNvPr id="3" name="Slide Image Placeholder 2"/>
           <p:cNvSpPr>
-            <a:spLocks noGrp="1"/>
+            <a:spLocks noGrp="1" noRot="1" noChangeAspect="1"/>
           </p:cNvSpPr>
           <p:nvPr>
             <p:ph type="sldImg" idx="2"/>
@@ -6219,7 +6261,7 @@
             <a:spLocks noGrp="1"/>
           </p:cNvSpPr>
           <p:nvPr>
-            <p:ph type="body" idx="3" sz="quarter"/>
+            <p:ph type="body" sz="quarter" idx="3"/>
           </p:nvPr>
         </p:nvSpPr>
         <p:spPr/>
@@ -6261,7 +6303,7 @@
 </file>
 
 <file path=ppt/notesSlides/notesSlide63.xml><?xml version="1.0" encoding="utf-8"?>
-<p:notes xmlns:a="http://schemas.openxmlformats.org/drawingml/2006/main" xmlns:p="http://schemas.openxmlformats.org/presentationml/2006/main" xmlns:r="http://schemas.openxmlformats.org/officeDocument/2006/relationships">
+<p:notes xmlns:a="http://schemas.openxmlformats.org/drawingml/2006/main" xmlns:r="http://schemas.openxmlformats.org/officeDocument/2006/relationships" xmlns:p="http://schemas.openxmlformats.org/presentationml/2006/main">
   <p:cSld>
     <p:spTree>
       <p:nvGrpSpPr>
@@ -6284,7 +6326,7 @@
             <a:spLocks noGrp="1"/>
           </p:cNvSpPr>
           <p:nvPr>
-            <p:ph type="sldNum" idx="5" sz="quarter"/>
+            <p:ph type="sldNum" sz="quarter" idx="5"/>
           </p:nvPr>
         </p:nvSpPr>
         <p:spPr/>
@@ -6293,7 +6335,7 @@
         <p:nvSpPr>
           <p:cNvPr id="3" name="Slide Image Placeholder 2"/>
           <p:cNvSpPr>
-            <a:spLocks noGrp="1"/>
+            <a:spLocks noGrp="1" noRot="1" noChangeAspect="1"/>
           </p:cNvSpPr>
           <p:nvPr>
             <p:ph type="sldImg" idx="2"/>
@@ -6308,7 +6350,7 @@
             <a:spLocks noGrp="1"/>
           </p:cNvSpPr>
           <p:nvPr>
-            <p:ph type="body" idx="3" sz="quarter"/>
+            <p:ph type="body" sz="quarter" idx="3"/>
           </p:nvPr>
         </p:nvSpPr>
         <p:spPr/>
@@ -6358,7 +6400,7 @@
 </file>
 
 <file path=ppt/notesSlides/notesSlide64.xml><?xml version="1.0" encoding="utf-8"?>
-<p:notes xmlns:a="http://schemas.openxmlformats.org/drawingml/2006/main" xmlns:p="http://schemas.openxmlformats.org/presentationml/2006/main" xmlns:r="http://schemas.openxmlformats.org/officeDocument/2006/relationships">
+<p:notes xmlns:a="http://schemas.openxmlformats.org/drawingml/2006/main" xmlns:r="http://schemas.openxmlformats.org/officeDocument/2006/relationships" xmlns:p="http://schemas.openxmlformats.org/presentationml/2006/main">
   <p:cSld>
     <p:spTree>
       <p:nvGrpSpPr>
@@ -6381,7 +6423,7 @@
             <a:spLocks noGrp="1"/>
           </p:cNvSpPr>
           <p:nvPr>
-            <p:ph type="sldNum" idx="5" sz="quarter"/>
+            <p:ph type="sldNum" sz="quarter" idx="5"/>
           </p:nvPr>
         </p:nvSpPr>
         <p:spPr/>
@@ -6390,7 +6432,7 @@
         <p:nvSpPr>
           <p:cNvPr id="3" name="Slide Image Placeholder 2"/>
           <p:cNvSpPr>
-            <a:spLocks noGrp="1"/>
+            <a:spLocks noGrp="1" noRot="1" noChangeAspect="1"/>
           </p:cNvSpPr>
           <p:nvPr>
             <p:ph type="sldImg" idx="2"/>
@@ -6405,7 +6447,7 @@
             <a:spLocks noGrp="1"/>
           </p:cNvSpPr>
           <p:nvPr>
-            <p:ph type="body" idx="3" sz="quarter"/>
+            <p:ph type="body" sz="quarter" idx="3"/>
           </p:nvPr>
         </p:nvSpPr>
         <p:spPr/>
@@ -6439,7 +6481,7 @@
 </file>
 
 <file path=ppt/notesSlides/notesSlide65.xml><?xml version="1.0" encoding="utf-8"?>
-<p:notes xmlns:a="http://schemas.openxmlformats.org/drawingml/2006/main" xmlns:p="http://schemas.openxmlformats.org/presentationml/2006/main" xmlns:r="http://schemas.openxmlformats.org/officeDocument/2006/relationships">
+<p:notes xmlns:a="http://schemas.openxmlformats.org/drawingml/2006/main" xmlns:r="http://schemas.openxmlformats.org/officeDocument/2006/relationships" xmlns:p="http://schemas.openxmlformats.org/presentationml/2006/main">
   <p:cSld>
     <p:spTree>
       <p:nvGrpSpPr>
@@ -6462,7 +6504,7 @@
             <a:spLocks noGrp="1"/>
           </p:cNvSpPr>
           <p:nvPr>
-            <p:ph type="sldNum" idx="5" sz="quarter"/>
+            <p:ph type="sldNum" sz="quarter" idx="5"/>
           </p:nvPr>
         </p:nvSpPr>
         <p:spPr/>
@@ -6471,7 +6513,7 @@
         <p:nvSpPr>
           <p:cNvPr id="3" name="Slide Image Placeholder 2"/>
           <p:cNvSpPr>
-            <a:spLocks noGrp="1"/>
+            <a:spLocks noGrp="1" noRot="1" noChangeAspect="1"/>
           </p:cNvSpPr>
           <p:nvPr>
             <p:ph type="sldImg" idx="2"/>
@@ -6486,7 +6528,7 @@
             <a:spLocks noGrp="1"/>
           </p:cNvSpPr>
           <p:nvPr>
-            <p:ph type="body" idx="3" sz="quarter"/>
+            <p:ph type="body" sz="quarter" idx="3"/>
           </p:nvPr>
         </p:nvSpPr>
         <p:spPr/>
@@ -6520,7 +6562,7 @@
 </file>
 
 <file path=ppt/notesSlides/notesSlide66.xml><?xml version="1.0" encoding="utf-8"?>
-<p:notes xmlns:a="http://schemas.openxmlformats.org/drawingml/2006/main" xmlns:p="http://schemas.openxmlformats.org/presentationml/2006/main" xmlns:r="http://schemas.openxmlformats.org/officeDocument/2006/relationships">
+<p:notes xmlns:a="http://schemas.openxmlformats.org/drawingml/2006/main" xmlns:r="http://schemas.openxmlformats.org/officeDocument/2006/relationships" xmlns:p="http://schemas.openxmlformats.org/presentationml/2006/main">
   <p:cSld>
     <p:spTree>
       <p:nvGrpSpPr>
@@ -6543,7 +6585,7 @@
             <a:spLocks noGrp="1"/>
           </p:cNvSpPr>
           <p:nvPr>
-            <p:ph type="sldNum" idx="5" sz="quarter"/>
+            <p:ph type="sldNum" sz="quarter" idx="5"/>
           </p:nvPr>
         </p:nvSpPr>
         <p:spPr/>
@@ -6552,7 +6594,7 @@
         <p:nvSpPr>
           <p:cNvPr id="3" name="Slide Image Placeholder 2"/>
           <p:cNvSpPr>
-            <a:spLocks noGrp="1"/>
+            <a:spLocks noGrp="1" noRot="1" noChangeAspect="1"/>
           </p:cNvSpPr>
           <p:nvPr>
             <p:ph type="sldImg" idx="2"/>
@@ -6567,7 +6609,7 @@
             <a:spLocks noGrp="1"/>
           </p:cNvSpPr>
           <p:nvPr>
-            <p:ph type="body" idx="3" sz="quarter"/>
+            <p:ph type="body" sz="quarter" idx="3"/>
           </p:nvPr>
         </p:nvSpPr>
         <p:spPr/>
@@ -6632,7 +6674,7 @@
 </file>
 
 <file path=ppt/notesSlides/notesSlide67.xml><?xml version="1.0" encoding="utf-8"?>
-<p:notes xmlns:a="http://schemas.openxmlformats.org/drawingml/2006/main" xmlns:p="http://schemas.openxmlformats.org/presentationml/2006/main" xmlns:r="http://schemas.openxmlformats.org/officeDocument/2006/relationships">
+<p:notes xmlns:a="http://schemas.openxmlformats.org/drawingml/2006/main" xmlns:r="http://schemas.openxmlformats.org/officeDocument/2006/relationships" xmlns:p="http://schemas.openxmlformats.org/presentationml/2006/main">
   <p:cSld>
     <p:spTree>
       <p:nvGrpSpPr>
@@ -6655,7 +6697,7 @@
             <a:spLocks noGrp="1"/>
           </p:cNvSpPr>
           <p:nvPr>
-            <p:ph type="sldNum" idx="5" sz="quarter"/>
+            <p:ph type="sldNum" sz="quarter" idx="5"/>
           </p:nvPr>
         </p:nvSpPr>
         <p:spPr/>
@@ -6664,7 +6706,7 @@
         <p:nvSpPr>
           <p:cNvPr id="3" name="Slide Image Placeholder 2"/>
           <p:cNvSpPr>
-            <a:spLocks noGrp="1"/>
+            <a:spLocks noGrp="1" noRot="1" noChangeAspect="1"/>
           </p:cNvSpPr>
           <p:nvPr>
             <p:ph type="sldImg" idx="2"/>
@@ -6679,7 +6721,7 @@
             <a:spLocks noGrp="1"/>
           </p:cNvSpPr>
           <p:nvPr>
-            <p:ph type="body" idx="3" sz="quarter"/>
+            <p:ph type="body" sz="quarter" idx="3"/>
           </p:nvPr>
         </p:nvSpPr>
         <p:spPr/>
@@ -6713,7 +6755,7 @@
 </file>
 
 <file path=ppt/notesSlides/notesSlide68.xml><?xml version="1.0" encoding="utf-8"?>
-<p:notes xmlns:a="http://schemas.openxmlformats.org/drawingml/2006/main" xmlns:p="http://schemas.openxmlformats.org/presentationml/2006/main" xmlns:r="http://schemas.openxmlformats.org/officeDocument/2006/relationships">
+<p:notes xmlns:a="http://schemas.openxmlformats.org/drawingml/2006/main" xmlns:r="http://schemas.openxmlformats.org/officeDocument/2006/relationships" xmlns:p="http://schemas.openxmlformats.org/presentationml/2006/main">
   <p:cSld>
     <p:spTree>
       <p:nvGrpSpPr>
@@ -6736,7 +6778,7 @@
             <a:spLocks noGrp="1"/>
           </p:cNvSpPr>
           <p:nvPr>
-            <p:ph type="sldNum" idx="5" sz="quarter"/>
+            <p:ph type="sldNum" sz="quarter" idx="5"/>
           </p:nvPr>
         </p:nvSpPr>
         <p:spPr/>
@@ -6745,7 +6787,7 @@
         <p:nvSpPr>
           <p:cNvPr id="3" name="Slide Image Placeholder 2"/>
           <p:cNvSpPr>
-            <a:spLocks noGrp="1"/>
+            <a:spLocks noGrp="1" noRot="1" noChangeAspect="1"/>
           </p:cNvSpPr>
           <p:nvPr>
             <p:ph type="sldImg" idx="2"/>
@@ -6760,7 +6802,7 @@
             <a:spLocks noGrp="1"/>
           </p:cNvSpPr>
           <p:nvPr>
-            <p:ph type="body" idx="3" sz="quarter"/>
+            <p:ph type="body" sz="quarter" idx="3"/>
           </p:nvPr>
         </p:nvSpPr>
         <p:spPr/>
@@ -6805,7 +6847,7 @@
 </file>
 
 <file path=ppt/notesSlides/notesSlide7.xml><?xml version="1.0" encoding="utf-8"?>
-<p:notes xmlns:a="http://schemas.openxmlformats.org/drawingml/2006/main" xmlns:p="http://schemas.openxmlformats.org/presentationml/2006/main" xmlns:r="http://schemas.openxmlformats.org/officeDocument/2006/relationships">
+<p:notes xmlns:a="http://schemas.openxmlformats.org/drawingml/2006/main" xmlns:r="http://schemas.openxmlformats.org/officeDocument/2006/relationships" xmlns:p="http://schemas.openxmlformats.org/presentationml/2006/main">
   <p:cSld>
     <p:spTree>
       <p:nvGrpSpPr>
@@ -6828,7 +6870,7 @@
             <a:spLocks noGrp="1"/>
           </p:cNvSpPr>
           <p:nvPr>
-            <p:ph type="sldNum" idx="5" sz="quarter"/>
+            <p:ph type="sldNum" sz="quarter" idx="5"/>
           </p:nvPr>
         </p:nvSpPr>
         <p:spPr/>
@@ -6837,7 +6879,7 @@
         <p:nvSpPr>
           <p:cNvPr id="3" name="Slide Image Placeholder 2"/>
           <p:cNvSpPr>
-            <a:spLocks noGrp="1"/>
+            <a:spLocks noGrp="1" noRot="1" noChangeAspect="1"/>
           </p:cNvSpPr>
           <p:nvPr>
             <p:ph type="sldImg" idx="2"/>
@@ -6852,7 +6894,7 @@
             <a:spLocks noGrp="1"/>
           </p:cNvSpPr>
           <p:nvPr>
-            <p:ph type="body" idx="3" sz="quarter"/>
+            <p:ph type="body" sz="quarter" idx="3"/>
           </p:nvPr>
         </p:nvSpPr>
         <p:spPr/>
@@ -6894,7 +6936,7 @@
 </file>
 
 <file path=ppt/notesSlides/notesSlide8.xml><?xml version="1.0" encoding="utf-8"?>
-<p:notes xmlns:a="http://schemas.openxmlformats.org/drawingml/2006/main" xmlns:p="http://schemas.openxmlformats.org/presentationml/2006/main" xmlns:r="http://schemas.openxmlformats.org/officeDocument/2006/relationships">
+<p:notes xmlns:a="http://schemas.openxmlformats.org/drawingml/2006/main" xmlns:r="http://schemas.openxmlformats.org/officeDocument/2006/relationships" xmlns:p="http://schemas.openxmlformats.org/presentationml/2006/main">
   <p:cSld>
     <p:spTree>
       <p:nvGrpSpPr>
@@ -6917,7 +6959,7 @@
             <a:spLocks noGrp="1"/>
           </p:cNvSpPr>
           <p:nvPr>
-            <p:ph type="sldNum" idx="5" sz="quarter"/>
+            <p:ph type="sldNum" sz="quarter" idx="5"/>
           </p:nvPr>
         </p:nvSpPr>
         <p:spPr/>
@@ -6926,7 +6968,7 @@
         <p:nvSpPr>
           <p:cNvPr id="3" name="Slide Image Placeholder 2"/>
           <p:cNvSpPr>
-            <a:spLocks noGrp="1"/>
+            <a:spLocks noGrp="1" noRot="1" noChangeAspect="1"/>
           </p:cNvSpPr>
           <p:nvPr>
             <p:ph type="sldImg" idx="2"/>
@@ -6941,7 +6983,7 @@
             <a:spLocks noGrp="1"/>
           </p:cNvSpPr>
           <p:nvPr>
-            <p:ph type="body" idx="3" sz="quarter"/>
+            <p:ph type="body" sz="quarter" idx="3"/>
           </p:nvPr>
         </p:nvSpPr>
         <p:spPr/>
@@ -6992,7 +7034,7 @@
 </file>
 
 <file path=ppt/notesSlides/notesSlide9.xml><?xml version="1.0" encoding="utf-8"?>
-<p:notes xmlns:a="http://schemas.openxmlformats.org/drawingml/2006/main" xmlns:p="http://schemas.openxmlformats.org/presentationml/2006/main" xmlns:r="http://schemas.openxmlformats.org/officeDocument/2006/relationships">
+<p:notes xmlns:a="http://schemas.openxmlformats.org/drawingml/2006/main" xmlns:r="http://schemas.openxmlformats.org/officeDocument/2006/relationships" xmlns:p="http://schemas.openxmlformats.org/presentationml/2006/main">
   <p:cSld>
     <p:spTree>
       <p:nvGrpSpPr>
@@ -7015,7 +7057,7 @@
             <a:spLocks noGrp="1"/>
           </p:cNvSpPr>
           <p:nvPr>
-            <p:ph type="sldNum" idx="5" sz="quarter"/>
+            <p:ph type="sldNum" sz="quarter" idx="5"/>
           </p:nvPr>
         </p:nvSpPr>
         <p:spPr/>
@@ -7024,7 +7066,7 @@
         <p:nvSpPr>
           <p:cNvPr id="3" name="Slide Image Placeholder 2"/>
           <p:cNvSpPr>
-            <a:spLocks noGrp="1"/>
+            <a:spLocks noGrp="1" noRot="1" noChangeAspect="1"/>
           </p:cNvSpPr>
           <p:nvPr>
             <p:ph type="sldImg" idx="2"/>
@@ -7039,7 +7081,7 @@
             <a:spLocks noGrp="1"/>
           </p:cNvSpPr>
           <p:nvPr>
-            <p:ph type="body" idx="3" sz="quarter"/>
+            <p:ph type="body" sz="quarter" idx="3"/>
           </p:nvPr>
         </p:nvSpPr>
         <p:spPr/>
@@ -28955,7 +28997,7 @@
 </file>
 
 <file path=ppt/slides/slide1.xml><?xml version="1.0" encoding="utf-8"?>
-<p:sld xmlns:a="http://schemas.openxmlformats.org/drawingml/2006/main" xmlns:p="http://schemas.openxmlformats.org/presentationml/2006/main" xmlns:r="http://schemas.openxmlformats.org/officeDocument/2006/relationships">
+<p:sld xmlns:a="http://schemas.openxmlformats.org/drawingml/2006/main" xmlns:r="http://schemas.openxmlformats.org/officeDocument/2006/relationships" xmlns:p="http://schemas.openxmlformats.org/presentationml/2006/main">
   <p:cSld>
     <p:spTree>
       <p:nvGrpSpPr>
@@ -28963,7 +29005,14 @@
         <p:cNvGrpSpPr/>
         <p:nvPr/>
       </p:nvGrpSpPr>
-      <p:grpSpPr/>
+      <p:grpSpPr>
+        <a:xfrm>
+          <a:off x="0" y="0"/>
+          <a:ext cx="0" cy="0"/>
+          <a:chOff x="0" y="0"/>
+          <a:chExt cx="0" cy="0"/>
+        </a:xfrm>
+      </p:grpSpPr>
       <p:sp>
         <p:nvSpPr>
           <p:cNvPr id="2" name="Title 1"/>
@@ -29002,7 +29051,7 @@
           <a:noFill/>
         </p:spPr>
         <p:txBody>
-          <a:bodyPr wrap="square" lIns="0" rIns="0" tIns="0" bIns="0" anchor="t">
+          <a:bodyPr wrap="square" lIns="0" tIns="0" rIns="0" bIns="0" anchor="t">
             <a:spAutoFit/>
           </a:bodyPr>
           <a:lstStyle/>
@@ -29041,7 +29090,7 @@
           <a:noFill/>
         </p:spPr>
         <p:txBody>
-          <a:bodyPr wrap="square" lIns="0" rIns="0" tIns="0" bIns="0" anchor="t">
+          <a:bodyPr wrap="square" lIns="0" tIns="0" rIns="0" bIns="0" anchor="t">
             <a:spAutoFit/>
           </a:bodyPr>
           <a:lstStyle/>
@@ -29080,7 +29129,7 @@
           <a:noFill/>
         </p:spPr>
         <p:txBody>
-          <a:bodyPr wrap="square" lIns="0" rIns="0" tIns="0" bIns="0" anchor="t">
+          <a:bodyPr wrap="square" lIns="0" tIns="0" rIns="0" bIns="0" anchor="t">
             <a:spAutoFit/>
           </a:bodyPr>
           <a:lstStyle/>
@@ -29111,7 +29160,7 @@
 </file>
 
 <file path=ppt/slides/slide10.xml><?xml version="1.0" encoding="utf-8"?>
-<p:sld xmlns:a="http://schemas.openxmlformats.org/drawingml/2006/main" xmlns:p="http://schemas.openxmlformats.org/presentationml/2006/main" xmlns:r="http://schemas.openxmlformats.org/officeDocument/2006/relationships">
+<p:sld xmlns:a="http://schemas.openxmlformats.org/drawingml/2006/main" xmlns:r="http://schemas.openxmlformats.org/officeDocument/2006/relationships" xmlns:p="http://schemas.openxmlformats.org/presentationml/2006/main">
   <p:cSld>
     <p:spTree>
       <p:nvGrpSpPr>
@@ -29119,7 +29168,14 @@
         <p:cNvGrpSpPr/>
         <p:nvPr/>
       </p:nvGrpSpPr>
-      <p:grpSpPr/>
+      <p:grpSpPr>
+        <a:xfrm>
+          <a:off x="0" y="0"/>
+          <a:ext cx="0" cy="0"/>
+          <a:chOff x="0" y="0"/>
+          <a:chExt cx="0" cy="0"/>
+        </a:xfrm>
+      </p:grpSpPr>
       <p:sp>
         <p:nvSpPr>
           <p:cNvPr id="2" name="Title 1"/>
@@ -29158,7 +29214,7 @@
           <a:noFill/>
         </p:spPr>
         <p:txBody>
-          <a:bodyPr wrap="square" lIns="0" rIns="0" tIns="0" bIns="0" anchor="t">
+          <a:bodyPr wrap="square" lIns="0" tIns="0" rIns="0" bIns="0" anchor="t">
             <a:spAutoFit/>
           </a:bodyPr>
           <a:lstStyle/>
@@ -29221,6 +29277,7 @@
           <a:lstStyle/>
           <a:p>
             <a:pPr algn="ctr"/>
+            <a:endParaRPr/>
           </a:p>
         </p:txBody>
       </p:sp>
@@ -29241,7 +29298,7 @@
           <a:noFill/>
         </p:spPr>
         <p:txBody>
-          <a:bodyPr wrap="square" lIns="0" rIns="0" tIns="0" bIns="0" anchor="t">
+          <a:bodyPr wrap="square" lIns="0" tIns="0" rIns="0" bIns="0" anchor="t">
             <a:spAutoFit/>
           </a:bodyPr>
           <a:lstStyle/>
@@ -29280,7 +29337,7 @@
           <a:noFill/>
         </p:spPr>
         <p:txBody>
-          <a:bodyPr wrap="square" lIns="0" rIns="0" tIns="0" bIns="0" anchor="t">
+          <a:bodyPr wrap="square" lIns="0" tIns="0" rIns="0" bIns="0" anchor="t">
             <a:spAutoFit/>
           </a:bodyPr>
           <a:lstStyle/>
@@ -29402,15 +29459,12 @@
                 <a:spcPct val="125000"/>
               </a:lnSpc>
             </a:pPr>
-            <a:r>
-              <a:rPr sz="1300" b="0" i="0">
-                <a:solidFill>
-                  <a:srgbClr val="E6E8EB"/>
-                </a:solidFill>
-                <a:latin typeface="Consolas"/>
-              </a:rPr>
-              <a:t/>
-            </a:r>
+            <a:endParaRPr sz="1300" b="0" i="0">
+              <a:solidFill>
+                <a:srgbClr val="E6E8EB"/>
+              </a:solidFill>
+              <a:latin typeface="Consolas"/>
+            </a:endParaRPr>
           </a:p>
           <a:p>
             <a:pPr algn="l">
@@ -29535,7 +29589,7 @@
 </file>
 
 <file path=ppt/slides/slide11.xml><?xml version="1.0" encoding="utf-8"?>
-<p:sld xmlns:a="http://schemas.openxmlformats.org/drawingml/2006/main" xmlns:p="http://schemas.openxmlformats.org/presentationml/2006/main" xmlns:r="http://schemas.openxmlformats.org/officeDocument/2006/relationships">
+<p:sld xmlns:a="http://schemas.openxmlformats.org/drawingml/2006/main" xmlns:r="http://schemas.openxmlformats.org/officeDocument/2006/relationships" xmlns:p="http://schemas.openxmlformats.org/presentationml/2006/main">
   <p:cSld>
     <p:spTree>
       <p:nvGrpSpPr>
@@ -29543,7 +29597,14 @@
         <p:cNvGrpSpPr/>
         <p:nvPr/>
       </p:nvGrpSpPr>
-      <p:grpSpPr/>
+      <p:grpSpPr>
+        <a:xfrm>
+          <a:off x="0" y="0"/>
+          <a:ext cx="0" cy="0"/>
+          <a:chOff x="0" y="0"/>
+          <a:chExt cx="0" cy="0"/>
+        </a:xfrm>
+      </p:grpSpPr>
       <p:sp>
         <p:nvSpPr>
           <p:cNvPr id="2" name="Title 1"/>
@@ -29582,7 +29643,7 @@
           <a:noFill/>
         </p:spPr>
         <p:txBody>
-          <a:bodyPr wrap="square" lIns="0" rIns="0" tIns="0" bIns="0" anchor="t">
+          <a:bodyPr wrap="square" lIns="0" tIns="0" rIns="0" bIns="0" anchor="t">
             <a:spAutoFit/>
           </a:bodyPr>
           <a:lstStyle/>
@@ -29645,6 +29706,7 @@
           <a:lstStyle/>
           <a:p>
             <a:pPr algn="ctr"/>
+            <a:endParaRPr/>
           </a:p>
         </p:txBody>
       </p:sp>
@@ -29665,7 +29727,7 @@
           <a:noFill/>
         </p:spPr>
         <p:txBody>
-          <a:bodyPr wrap="square" lIns="0" rIns="0" tIns="0" bIns="0" anchor="t">
+          <a:bodyPr wrap="square" lIns="0" tIns="0" rIns="0" bIns="0" anchor="t">
             <a:spAutoFit/>
           </a:bodyPr>
           <a:lstStyle/>
@@ -29704,7 +29766,7 @@
           <a:noFill/>
         </p:spPr>
         <p:txBody>
-          <a:bodyPr wrap="square" lIns="0" rIns="0" tIns="0" bIns="0" anchor="t">
+          <a:bodyPr wrap="square" lIns="0" tIns="0" rIns="0" bIns="0" anchor="t">
             <a:spAutoFit/>
           </a:bodyPr>
           <a:lstStyle/>
@@ -29858,15 +29920,12 @@
                 <a:spcPct val="125000"/>
               </a:lnSpc>
             </a:pPr>
-            <a:r>
-              <a:rPr sz="1600" b="0" i="0">
-                <a:solidFill>
-                  <a:srgbClr val="E6E8EB"/>
-                </a:solidFill>
-                <a:latin typeface="Consolas"/>
-              </a:rPr>
-              <a:t/>
-            </a:r>
+            <a:endParaRPr sz="1600" b="0" i="0">
+              <a:solidFill>
+                <a:srgbClr val="E6E8EB"/>
+              </a:solidFill>
+              <a:latin typeface="Consolas"/>
+            </a:endParaRPr>
           </a:p>
           <a:p>
             <a:pPr algn="l">
@@ -29911,7 +29970,7 @@
 </file>
 
 <file path=ppt/slides/slide12.xml><?xml version="1.0" encoding="utf-8"?>
-<p:sld xmlns:a="http://schemas.openxmlformats.org/drawingml/2006/main" xmlns:p="http://schemas.openxmlformats.org/presentationml/2006/main" xmlns:r="http://schemas.openxmlformats.org/officeDocument/2006/relationships">
+<p:sld xmlns:a="http://schemas.openxmlformats.org/drawingml/2006/main" xmlns:r="http://schemas.openxmlformats.org/officeDocument/2006/relationships" xmlns:p="http://schemas.openxmlformats.org/presentationml/2006/main">
   <p:cSld>
     <p:spTree>
       <p:nvGrpSpPr>
@@ -29919,7 +29978,14 @@
         <p:cNvGrpSpPr/>
         <p:nvPr/>
       </p:nvGrpSpPr>
-      <p:grpSpPr/>
+      <p:grpSpPr>
+        <a:xfrm>
+          <a:off x="0" y="0"/>
+          <a:ext cx="0" cy="0"/>
+          <a:chOff x="0" y="0"/>
+          <a:chExt cx="0" cy="0"/>
+        </a:xfrm>
+      </p:grpSpPr>
       <p:sp>
         <p:nvSpPr>
           <p:cNvPr id="2" name="Title 1"/>
@@ -29982,6 +30048,7 @@
           <a:lstStyle/>
           <a:p>
             <a:pPr algn="ctr"/>
+            <a:endParaRPr/>
           </a:p>
         </p:txBody>
       </p:sp>
@@ -30002,7 +30069,7 @@
           <a:noFill/>
         </p:spPr>
         <p:txBody>
-          <a:bodyPr wrap="square" lIns="0" rIns="0" tIns="0" bIns="0" anchor="t">
+          <a:bodyPr wrap="square" lIns="0" tIns="0" rIns="0" bIns="0" anchor="t">
             <a:spAutoFit/>
           </a:bodyPr>
           <a:lstStyle/>
@@ -30041,7 +30108,7 @@
           <a:noFill/>
         </p:spPr>
         <p:txBody>
-          <a:bodyPr wrap="square" lIns="0" rIns="0" tIns="0" bIns="0" anchor="t">
+          <a:bodyPr wrap="square" lIns="0" tIns="0" rIns="0" bIns="0" anchor="t">
             <a:spAutoFit/>
           </a:bodyPr>
           <a:lstStyle/>
@@ -30080,7 +30147,7 @@
           <a:noFill/>
         </p:spPr>
         <p:txBody>
-          <a:bodyPr wrap="square" lIns="0" rIns="0" tIns="0" bIns="0" anchor="t">
+          <a:bodyPr wrap="square" lIns="0" tIns="0" rIns="0" bIns="0" anchor="t">
             <a:spAutoFit/>
           </a:bodyPr>
           <a:lstStyle/>
@@ -30111,7 +30178,7 @@
 </file>
 
 <file path=ppt/slides/slide13.xml><?xml version="1.0" encoding="utf-8"?>
-<p:sld xmlns:a="http://schemas.openxmlformats.org/drawingml/2006/main" xmlns:p="http://schemas.openxmlformats.org/presentationml/2006/main" xmlns:r="http://schemas.openxmlformats.org/officeDocument/2006/relationships">
+<p:sld xmlns:a="http://schemas.openxmlformats.org/drawingml/2006/main" xmlns:r="http://schemas.openxmlformats.org/officeDocument/2006/relationships" xmlns:p="http://schemas.openxmlformats.org/presentationml/2006/main">
   <p:cSld>
     <p:spTree>
       <p:nvGrpSpPr>
@@ -30119,7 +30186,14 @@
         <p:cNvGrpSpPr/>
         <p:nvPr/>
       </p:nvGrpSpPr>
-      <p:grpSpPr/>
+      <p:grpSpPr>
+        <a:xfrm>
+          <a:off x="0" y="0"/>
+          <a:ext cx="0" cy="0"/>
+          <a:chOff x="0" y="0"/>
+          <a:chExt cx="0" cy="0"/>
+        </a:xfrm>
+      </p:grpSpPr>
       <p:sp>
         <p:nvSpPr>
           <p:cNvPr id="2" name="Title 1"/>
@@ -30158,7 +30232,7 @@
           <a:noFill/>
         </p:spPr>
         <p:txBody>
-          <a:bodyPr wrap="square" lIns="0" rIns="0" tIns="0" bIns="0" anchor="t">
+          <a:bodyPr wrap="square" lIns="0" tIns="0" rIns="0" bIns="0" anchor="t">
             <a:spAutoFit/>
           </a:bodyPr>
           <a:lstStyle/>
@@ -30221,6 +30295,7 @@
           <a:lstStyle/>
           <a:p>
             <a:pPr algn="ctr"/>
+            <a:endParaRPr/>
           </a:p>
         </p:txBody>
       </p:sp>
@@ -30265,6 +30340,7 @@
           <a:lstStyle/>
           <a:p>
             <a:pPr algn="ctr"/>
+            <a:endParaRPr/>
           </a:p>
         </p:txBody>
       </p:sp>
@@ -30285,7 +30361,7 @@
           <a:noFill/>
         </p:spPr>
         <p:txBody>
-          <a:bodyPr wrap="square" lIns="0" rIns="0" tIns="0" bIns="0" anchor="t">
+          <a:bodyPr wrap="square" lIns="0" tIns="0" rIns="0" bIns="0" anchor="t">
             <a:spAutoFit/>
           </a:bodyPr>
           <a:lstStyle/>
@@ -30324,7 +30400,7 @@
           <a:noFill/>
         </p:spPr>
         <p:txBody>
-          <a:bodyPr wrap="square" lIns="0" rIns="0" tIns="0" bIns="0" anchor="t">
+          <a:bodyPr wrap="square" lIns="0" tIns="0" rIns="0" bIns="0" anchor="t">
             <a:spAutoFit/>
           </a:bodyPr>
           <a:lstStyle/>
@@ -30387,6 +30463,7 @@
           <a:lstStyle/>
           <a:p>
             <a:pPr algn="ctr"/>
+            <a:endParaRPr/>
           </a:p>
         </p:txBody>
       </p:sp>
@@ -30431,6 +30508,7 @@
           <a:lstStyle/>
           <a:p>
             <a:pPr algn="ctr"/>
+            <a:endParaRPr/>
           </a:p>
         </p:txBody>
       </p:sp>
@@ -30451,7 +30529,7 @@
           <a:noFill/>
         </p:spPr>
         <p:txBody>
-          <a:bodyPr wrap="square" lIns="0" rIns="0" tIns="0" bIns="0" anchor="t">
+          <a:bodyPr wrap="square" lIns="0" tIns="0" rIns="0" bIns="0" anchor="t">
             <a:spAutoFit/>
           </a:bodyPr>
           <a:lstStyle/>
@@ -30490,7 +30568,7 @@
           <a:noFill/>
         </p:spPr>
         <p:txBody>
-          <a:bodyPr wrap="square" lIns="0" rIns="0" tIns="0" bIns="0" anchor="t">
+          <a:bodyPr wrap="square" lIns="0" tIns="0" rIns="0" bIns="0" anchor="t">
             <a:spAutoFit/>
           </a:bodyPr>
           <a:lstStyle/>
@@ -30521,7 +30599,7 @@
 </file>
 
 <file path=ppt/slides/slide14.xml><?xml version="1.0" encoding="utf-8"?>
-<p:sld xmlns:a="http://schemas.openxmlformats.org/drawingml/2006/main" xmlns:p="http://schemas.openxmlformats.org/presentationml/2006/main" xmlns:r="http://schemas.openxmlformats.org/officeDocument/2006/relationships">
+<p:sld xmlns:a="http://schemas.openxmlformats.org/drawingml/2006/main" xmlns:r="http://schemas.openxmlformats.org/officeDocument/2006/relationships" xmlns:p="http://schemas.openxmlformats.org/presentationml/2006/main">
   <p:cSld>
     <p:spTree>
       <p:nvGrpSpPr>
@@ -30529,7 +30607,14 @@
         <p:cNvGrpSpPr/>
         <p:nvPr/>
       </p:nvGrpSpPr>
-      <p:grpSpPr/>
+      <p:grpSpPr>
+        <a:xfrm>
+          <a:off x="0" y="0"/>
+          <a:ext cx="0" cy="0"/>
+          <a:chOff x="0" y="0"/>
+          <a:chExt cx="0" cy="0"/>
+        </a:xfrm>
+      </p:grpSpPr>
       <p:sp>
         <p:nvSpPr>
           <p:cNvPr id="2" name="Text Placeholder 1"/>
@@ -30537,7 +30622,7 @@
             <a:spLocks noGrp="1"/>
           </p:cNvSpPr>
           <p:nvPr>
-            <p:ph type="body" idx="15" sz="quarter"/>
+            <p:ph type="body" sz="quarter" idx="15"/>
           </p:nvPr>
         </p:nvSpPr>
         <p:spPr/>
@@ -30674,7 +30759,7 @@
           <a:noFill/>
         </p:spPr>
         <p:txBody>
-          <a:bodyPr wrap="square" lIns="0" rIns="0" tIns="0" bIns="0" anchor="t">
+          <a:bodyPr wrap="square" lIns="0" tIns="0" rIns="0" bIns="0" anchor="t">
             <a:spAutoFit/>
           </a:bodyPr>
           <a:lstStyle/>
@@ -30705,7 +30790,7 @@
 </file>
 
 <file path=ppt/slides/slide15.xml><?xml version="1.0" encoding="utf-8"?>
-<p:sld xmlns:a="http://schemas.openxmlformats.org/drawingml/2006/main" xmlns:p="http://schemas.openxmlformats.org/presentationml/2006/main" xmlns:r="http://schemas.openxmlformats.org/officeDocument/2006/relationships">
+<p:sld xmlns:a="http://schemas.openxmlformats.org/drawingml/2006/main" xmlns:r="http://schemas.openxmlformats.org/officeDocument/2006/relationships" xmlns:p="http://schemas.openxmlformats.org/presentationml/2006/main">
   <p:cSld>
     <p:spTree>
       <p:nvGrpSpPr>
@@ -30713,7 +30798,14 @@
         <p:cNvGrpSpPr/>
         <p:nvPr/>
       </p:nvGrpSpPr>
-      <p:grpSpPr/>
+      <p:grpSpPr>
+        <a:xfrm>
+          <a:off x="0" y="0"/>
+          <a:ext cx="0" cy="0"/>
+          <a:chOff x="0" y="0"/>
+          <a:chExt cx="0" cy="0"/>
+        </a:xfrm>
+      </p:grpSpPr>
       <p:sp>
         <p:nvSpPr>
           <p:cNvPr id="2" name="Title 1"/>
@@ -30776,6 +30868,7 @@
           <a:lstStyle/>
           <a:p>
             <a:pPr algn="ctr"/>
+            <a:endParaRPr/>
           </a:p>
         </p:txBody>
       </p:sp>
@@ -30796,7 +30889,7 @@
           <a:noFill/>
         </p:spPr>
         <p:txBody>
-          <a:bodyPr wrap="square" lIns="0" rIns="0" tIns="0" bIns="0" anchor="t">
+          <a:bodyPr wrap="square" lIns="0" tIns="0" rIns="0" bIns="0" anchor="t">
             <a:spAutoFit/>
           </a:bodyPr>
           <a:lstStyle/>
@@ -30835,7 +30928,7 @@
           <a:noFill/>
         </p:spPr>
         <p:txBody>
-          <a:bodyPr wrap="square" lIns="0" rIns="0" tIns="0" bIns="0" anchor="t">
+          <a:bodyPr wrap="square" lIns="0" tIns="0" rIns="0" bIns="0" anchor="t">
             <a:spAutoFit/>
           </a:bodyPr>
           <a:lstStyle/>
@@ -30874,7 +30967,7 @@
           <a:noFill/>
         </p:spPr>
         <p:txBody>
-          <a:bodyPr wrap="square" lIns="0" rIns="0" tIns="0" bIns="0" anchor="t">
+          <a:bodyPr wrap="square" lIns="0" tIns="0" rIns="0" bIns="0" anchor="t">
             <a:spAutoFit/>
           </a:bodyPr>
           <a:lstStyle/>
@@ -30905,7 +30998,7 @@
 </file>
 
 <file path=ppt/slides/slide16.xml><?xml version="1.0" encoding="utf-8"?>
-<p:sld xmlns:a="http://schemas.openxmlformats.org/drawingml/2006/main" xmlns:p="http://schemas.openxmlformats.org/presentationml/2006/main" xmlns:r="http://schemas.openxmlformats.org/officeDocument/2006/relationships">
+<p:sld xmlns:a="http://schemas.openxmlformats.org/drawingml/2006/main" xmlns:r="http://schemas.openxmlformats.org/officeDocument/2006/relationships" xmlns:p="http://schemas.openxmlformats.org/presentationml/2006/main">
   <p:cSld>
     <p:spTree>
       <p:nvGrpSpPr>
@@ -30913,7 +31006,14 @@
         <p:cNvGrpSpPr/>
         <p:nvPr/>
       </p:nvGrpSpPr>
-      <p:grpSpPr/>
+      <p:grpSpPr>
+        <a:xfrm>
+          <a:off x="0" y="0"/>
+          <a:ext cx="0" cy="0"/>
+          <a:chOff x="0" y="0"/>
+          <a:chExt cx="0" cy="0"/>
+        </a:xfrm>
+      </p:grpSpPr>
       <p:sp>
         <p:nvSpPr>
           <p:cNvPr id="2" name="Title 1"/>
@@ -30952,7 +31052,7 @@
           <a:noFill/>
         </p:spPr>
         <p:txBody>
-          <a:bodyPr wrap="square" lIns="0" rIns="0" tIns="0" bIns="0" anchor="t">
+          <a:bodyPr wrap="square" lIns="0" tIns="0" rIns="0" bIns="0" anchor="t">
             <a:spAutoFit/>
           </a:bodyPr>
           <a:lstStyle/>
@@ -30991,7 +31091,7 @@
           <a:noFill/>
         </p:spPr>
         <p:txBody>
-          <a:bodyPr wrap="square" lIns="0" rIns="0" tIns="0" bIns="0" anchor="t">
+          <a:bodyPr wrap="square" lIns="0" tIns="0" rIns="0" bIns="0" anchor="t">
             <a:spAutoFit/>
           </a:bodyPr>
           <a:lstStyle/>
@@ -31030,7 +31130,7 @@
           <a:noFill/>
         </p:spPr>
         <p:txBody>
-          <a:bodyPr wrap="square" lIns="0" rIns="0" tIns="0" bIns="0" anchor="t">
+          <a:bodyPr wrap="square" lIns="0" tIns="0" rIns="0" bIns="0" anchor="t">
             <a:spAutoFit/>
           </a:bodyPr>
           <a:lstStyle/>
@@ -31093,6 +31193,7 @@
           <a:lstStyle/>
           <a:p>
             <a:pPr algn="ctr"/>
+            <a:endParaRPr/>
           </a:p>
         </p:txBody>
       </p:sp>
@@ -31113,7 +31214,7 @@
           <a:noFill/>
         </p:spPr>
         <p:txBody>
-          <a:bodyPr wrap="square" lIns="0" rIns="0" tIns="0" bIns="0">
+          <a:bodyPr wrap="square" lIns="0" tIns="0" rIns="0" bIns="0">
             <a:spAutoFit/>
           </a:bodyPr>
           <a:lstStyle/>
@@ -31218,7 +31319,7 @@
 </file>
 
 <file path=ppt/slides/slide17.xml><?xml version="1.0" encoding="utf-8"?>
-<p:sld xmlns:a="http://schemas.openxmlformats.org/drawingml/2006/main" xmlns:p="http://schemas.openxmlformats.org/presentationml/2006/main" xmlns:r="http://schemas.openxmlformats.org/officeDocument/2006/relationships">
+<p:sld xmlns:a="http://schemas.openxmlformats.org/drawingml/2006/main" xmlns:r="http://schemas.openxmlformats.org/officeDocument/2006/relationships" xmlns:p="http://schemas.openxmlformats.org/presentationml/2006/main">
   <p:cSld>
     <p:spTree>
       <p:nvGrpSpPr>
@@ -31226,7 +31327,14 @@
         <p:cNvGrpSpPr/>
         <p:nvPr/>
       </p:nvGrpSpPr>
-      <p:grpSpPr/>
+      <p:grpSpPr>
+        <a:xfrm>
+          <a:off x="0" y="0"/>
+          <a:ext cx="0" cy="0"/>
+          <a:chOff x="0" y="0"/>
+          <a:chExt cx="0" cy="0"/>
+        </a:xfrm>
+      </p:grpSpPr>
       <p:sp>
         <p:nvSpPr>
           <p:cNvPr id="2" name="Title 1"/>
@@ -31265,7 +31373,7 @@
           <a:noFill/>
         </p:spPr>
         <p:txBody>
-          <a:bodyPr wrap="square" lIns="0" rIns="0" tIns="0" bIns="0" anchor="t">
+          <a:bodyPr wrap="square" lIns="0" tIns="0" rIns="0" bIns="0" anchor="t">
             <a:spAutoFit/>
           </a:bodyPr>
           <a:lstStyle/>
@@ -31328,6 +31436,7 @@
           <a:lstStyle/>
           <a:p>
             <a:pPr algn="ctr"/>
+            <a:endParaRPr/>
           </a:p>
         </p:txBody>
       </p:sp>
@@ -31372,6 +31481,7 @@
           <a:lstStyle/>
           <a:p>
             <a:pPr algn="ctr"/>
+            <a:endParaRPr/>
           </a:p>
         </p:txBody>
       </p:sp>
@@ -31392,7 +31502,7 @@
           <a:noFill/>
         </p:spPr>
         <p:txBody>
-          <a:bodyPr wrap="square" lIns="0" rIns="0" tIns="0" bIns="0" anchor="t">
+          <a:bodyPr wrap="square" lIns="0" tIns="0" rIns="0" bIns="0" anchor="t">
             <a:spAutoFit/>
           </a:bodyPr>
           <a:lstStyle/>
@@ -31431,7 +31541,7 @@
           <a:noFill/>
         </p:spPr>
         <p:txBody>
-          <a:bodyPr wrap="square" lIns="0" rIns="0" tIns="0" bIns="0" anchor="t">
+          <a:bodyPr wrap="square" lIns="0" tIns="0" rIns="0" bIns="0" anchor="t">
             <a:spAutoFit/>
           </a:bodyPr>
           <a:lstStyle/>
@@ -31494,6 +31604,7 @@
           <a:lstStyle/>
           <a:p>
             <a:pPr algn="ctr"/>
+            <a:endParaRPr/>
           </a:p>
         </p:txBody>
       </p:sp>
@@ -31538,6 +31649,7 @@
           <a:lstStyle/>
           <a:p>
             <a:pPr algn="ctr"/>
+            <a:endParaRPr/>
           </a:p>
         </p:txBody>
       </p:sp>
@@ -31558,7 +31670,7 @@
           <a:noFill/>
         </p:spPr>
         <p:txBody>
-          <a:bodyPr wrap="square" lIns="0" rIns="0" tIns="0" bIns="0" anchor="t">
+          <a:bodyPr wrap="square" lIns="0" tIns="0" rIns="0" bIns="0" anchor="t">
             <a:spAutoFit/>
           </a:bodyPr>
           <a:lstStyle/>
@@ -31597,7 +31709,7 @@
           <a:noFill/>
         </p:spPr>
         <p:txBody>
-          <a:bodyPr wrap="square" lIns="0" rIns="0" tIns="0" bIns="0" anchor="t">
+          <a:bodyPr wrap="square" lIns="0" tIns="0" rIns="0" bIns="0" anchor="t">
             <a:spAutoFit/>
           </a:bodyPr>
           <a:lstStyle/>
@@ -31628,7 +31740,7 @@
 </file>
 
 <file path=ppt/slides/slide18.xml><?xml version="1.0" encoding="utf-8"?>
-<p:sld xmlns:a="http://schemas.openxmlformats.org/drawingml/2006/main" xmlns:p="http://schemas.openxmlformats.org/presentationml/2006/main" xmlns:r="http://schemas.openxmlformats.org/officeDocument/2006/relationships">
+<p:sld xmlns:a="http://schemas.openxmlformats.org/drawingml/2006/main" xmlns:r="http://schemas.openxmlformats.org/officeDocument/2006/relationships" xmlns:p="http://schemas.openxmlformats.org/presentationml/2006/main">
   <p:cSld>
     <p:spTree>
       <p:nvGrpSpPr>
@@ -31636,7 +31748,14 @@
         <p:cNvGrpSpPr/>
         <p:nvPr/>
       </p:nvGrpSpPr>
-      <p:grpSpPr/>
+      <p:grpSpPr>
+        <a:xfrm>
+          <a:off x="0" y="0"/>
+          <a:ext cx="0" cy="0"/>
+          <a:chOff x="0" y="0"/>
+          <a:chExt cx="0" cy="0"/>
+        </a:xfrm>
+      </p:grpSpPr>
       <p:sp>
         <p:nvSpPr>
           <p:cNvPr id="2" name="Text Placeholder 1"/>
@@ -31644,7 +31763,7 @@
             <a:spLocks noGrp="1"/>
           </p:cNvSpPr>
           <p:nvPr>
-            <p:ph type="body" idx="15" sz="quarter"/>
+            <p:ph type="body" sz="quarter" idx="15"/>
           </p:nvPr>
         </p:nvSpPr>
         <p:spPr/>
@@ -31790,7 +31909,7 @@
           <a:noFill/>
         </p:spPr>
         <p:txBody>
-          <a:bodyPr wrap="square" lIns="0" rIns="0" tIns="0" bIns="0" anchor="t">
+          <a:bodyPr wrap="square" lIns="0" tIns="0" rIns="0" bIns="0" anchor="t">
             <a:spAutoFit/>
           </a:bodyPr>
           <a:lstStyle/>
@@ -31821,7 +31940,7 @@
 </file>
 
 <file path=ppt/slides/slide19.xml><?xml version="1.0" encoding="utf-8"?>
-<p:sld xmlns:a="http://schemas.openxmlformats.org/drawingml/2006/main" xmlns:p="http://schemas.openxmlformats.org/presentationml/2006/main" xmlns:r="http://schemas.openxmlformats.org/officeDocument/2006/relationships">
+<p:sld xmlns:a="http://schemas.openxmlformats.org/drawingml/2006/main" xmlns:r="http://schemas.openxmlformats.org/officeDocument/2006/relationships" xmlns:p="http://schemas.openxmlformats.org/presentationml/2006/main">
   <p:cSld>
     <p:spTree>
       <p:nvGrpSpPr>
@@ -31829,7 +31948,14 @@
         <p:cNvGrpSpPr/>
         <p:nvPr/>
       </p:nvGrpSpPr>
-      <p:grpSpPr/>
+      <p:grpSpPr>
+        <a:xfrm>
+          <a:off x="0" y="0"/>
+          <a:ext cx="0" cy="0"/>
+          <a:chOff x="0" y="0"/>
+          <a:chExt cx="0" cy="0"/>
+        </a:xfrm>
+      </p:grpSpPr>
       <p:sp>
         <p:nvSpPr>
           <p:cNvPr id="2" name="Title 1"/>
@@ -31868,7 +31994,7 @@
           <a:noFill/>
         </p:spPr>
         <p:txBody>
-          <a:bodyPr wrap="square" lIns="0" rIns="0" tIns="0" bIns="0" anchor="t">
+          <a:bodyPr wrap="square" lIns="0" tIns="0" rIns="0" bIns="0" anchor="t">
             <a:spAutoFit/>
           </a:bodyPr>
           <a:lstStyle/>
@@ -31907,7 +32033,7 @@
           <a:noFill/>
         </p:spPr>
         <p:txBody>
-          <a:bodyPr wrap="square" lIns="0" rIns="0" tIns="0" bIns="0" anchor="t">
+          <a:bodyPr wrap="square" lIns="0" tIns="0" rIns="0" bIns="0" anchor="t">
             <a:spAutoFit/>
           </a:bodyPr>
           <a:lstStyle/>
@@ -31946,7 +32072,7 @@
           <a:noFill/>
         </p:spPr>
         <p:txBody>
-          <a:bodyPr wrap="square" lIns="0" rIns="0" tIns="0" bIns="0" anchor="t">
+          <a:bodyPr wrap="square" lIns="0" tIns="0" rIns="0" bIns="0" anchor="t">
             <a:spAutoFit/>
           </a:bodyPr>
           <a:lstStyle/>
@@ -32009,6 +32135,7 @@
           <a:lstStyle/>
           <a:p>
             <a:pPr algn="ctr"/>
+            <a:endParaRPr/>
           </a:p>
         </p:txBody>
       </p:sp>
@@ -32029,7 +32156,7 @@
           <a:noFill/>
         </p:spPr>
         <p:txBody>
-          <a:bodyPr wrap="square" lIns="0" rIns="0" tIns="0" bIns="0">
+          <a:bodyPr wrap="square" lIns="0" tIns="0" rIns="0" bIns="0">
             <a:spAutoFit/>
           </a:bodyPr>
           <a:lstStyle/>
@@ -32134,7 +32261,7 @@
 </file>
 
 <file path=ppt/slides/slide2.xml><?xml version="1.0" encoding="utf-8"?>
-<p:sld xmlns:a="http://schemas.openxmlformats.org/drawingml/2006/main" xmlns:p="http://schemas.openxmlformats.org/presentationml/2006/main" xmlns:r="http://schemas.openxmlformats.org/officeDocument/2006/relationships">
+<p:sld xmlns:a="http://schemas.openxmlformats.org/drawingml/2006/main" xmlns:r="http://schemas.openxmlformats.org/officeDocument/2006/relationships" xmlns:p="http://schemas.openxmlformats.org/presentationml/2006/main">
   <p:cSld>
     <p:spTree>
       <p:nvGrpSpPr>
@@ -32142,7 +32269,14 @@
         <p:cNvGrpSpPr/>
         <p:nvPr/>
       </p:nvGrpSpPr>
-      <p:grpSpPr/>
+      <p:grpSpPr>
+        <a:xfrm>
+          <a:off x="0" y="0"/>
+          <a:ext cx="0" cy="0"/>
+          <a:chOff x="0" y="0"/>
+          <a:chExt cx="0" cy="0"/>
+        </a:xfrm>
+      </p:grpSpPr>
       <p:sp>
         <p:nvSpPr>
           <p:cNvPr id="2" name="Text Placeholder 1"/>
@@ -32150,7 +32284,7 @@
             <a:spLocks noGrp="1"/>
           </p:cNvSpPr>
           <p:nvPr>
-            <p:ph type="body" idx="15" sz="quarter"/>
+            <p:ph type="body" sz="quarter" idx="15"/>
           </p:nvPr>
         </p:nvSpPr>
         <p:spPr/>
@@ -32324,7 +32458,7 @@
           <a:noFill/>
         </p:spPr>
         <p:txBody>
-          <a:bodyPr wrap="square" lIns="0" rIns="0" tIns="0" bIns="0" anchor="t">
+          <a:bodyPr wrap="square" lIns="0" tIns="0" rIns="0" bIns="0" anchor="t">
             <a:spAutoFit/>
           </a:bodyPr>
           <a:lstStyle/>
@@ -32355,7 +32489,7 @@
 </file>
 
 <file path=ppt/slides/slide20.xml><?xml version="1.0" encoding="utf-8"?>
-<p:sld xmlns:a="http://schemas.openxmlformats.org/drawingml/2006/main" xmlns:p="http://schemas.openxmlformats.org/presentationml/2006/main" xmlns:r="http://schemas.openxmlformats.org/officeDocument/2006/relationships">
+<p:sld xmlns:a="http://schemas.openxmlformats.org/drawingml/2006/main" xmlns:r="http://schemas.openxmlformats.org/officeDocument/2006/relationships" xmlns:p="http://schemas.openxmlformats.org/presentationml/2006/main">
   <p:cSld>
     <p:spTree>
       <p:nvGrpSpPr>
@@ -32363,7 +32497,14 @@
         <p:cNvGrpSpPr/>
         <p:nvPr/>
       </p:nvGrpSpPr>
-      <p:grpSpPr/>
+      <p:grpSpPr>
+        <a:xfrm>
+          <a:off x="0" y="0"/>
+          <a:ext cx="0" cy="0"/>
+          <a:chOff x="0" y="0"/>
+          <a:chExt cx="0" cy="0"/>
+        </a:xfrm>
+      </p:grpSpPr>
       <p:sp>
         <p:nvSpPr>
           <p:cNvPr id="2" name="Text Placeholder 1"/>
@@ -32371,7 +32512,7 @@
             <a:spLocks noGrp="1"/>
           </p:cNvSpPr>
           <p:nvPr>
-            <p:ph type="body" idx="15" sz="quarter"/>
+            <p:ph type="body" sz="quarter" idx="15"/>
           </p:nvPr>
         </p:nvSpPr>
         <p:spPr/>
@@ -32499,7 +32640,7 @@
           <a:noFill/>
         </p:spPr>
         <p:txBody>
-          <a:bodyPr wrap="square" lIns="0" rIns="0" tIns="0" bIns="0" anchor="t">
+          <a:bodyPr wrap="square" lIns="0" tIns="0" rIns="0" bIns="0" anchor="t">
             <a:spAutoFit/>
           </a:bodyPr>
           <a:lstStyle/>
@@ -32530,7 +32671,7 @@
 </file>
 
 <file path=ppt/slides/slide21.xml><?xml version="1.0" encoding="utf-8"?>
-<p:sld xmlns:a="http://schemas.openxmlformats.org/drawingml/2006/main" xmlns:p="http://schemas.openxmlformats.org/presentationml/2006/main" xmlns:r="http://schemas.openxmlformats.org/officeDocument/2006/relationships">
+<p:sld xmlns:a="http://schemas.openxmlformats.org/drawingml/2006/main" xmlns:r="http://schemas.openxmlformats.org/officeDocument/2006/relationships" xmlns:p="http://schemas.openxmlformats.org/presentationml/2006/main">
   <p:cSld>
     <p:spTree>
       <p:nvGrpSpPr>
@@ -32538,7 +32679,14 @@
         <p:cNvGrpSpPr/>
         <p:nvPr/>
       </p:nvGrpSpPr>
-      <p:grpSpPr/>
+      <p:grpSpPr>
+        <a:xfrm>
+          <a:off x="0" y="0"/>
+          <a:ext cx="0" cy="0"/>
+          <a:chOff x="0" y="0"/>
+          <a:chExt cx="0" cy="0"/>
+        </a:xfrm>
+      </p:grpSpPr>
       <p:sp>
         <p:nvSpPr>
           <p:cNvPr id="2" name="Title 1"/>
@@ -32577,7 +32725,7 @@
           <a:noFill/>
         </p:spPr>
         <p:txBody>
-          <a:bodyPr wrap="square" lIns="0" rIns="0" tIns="0" bIns="0" anchor="t">
+          <a:bodyPr wrap="square" lIns="0" tIns="0" rIns="0" bIns="0" anchor="t">
             <a:spAutoFit/>
           </a:bodyPr>
           <a:lstStyle/>
@@ -32616,7 +32764,7 @@
           <a:noFill/>
         </p:spPr>
         <p:txBody>
-          <a:bodyPr wrap="square" lIns="0" rIns="0" tIns="0" bIns="0" anchor="t">
+          <a:bodyPr wrap="square" lIns="0" tIns="0" rIns="0" bIns="0" anchor="t">
             <a:spAutoFit/>
           </a:bodyPr>
           <a:lstStyle/>
@@ -32655,7 +32803,7 @@
           <a:noFill/>
         </p:spPr>
         <p:txBody>
-          <a:bodyPr wrap="square" lIns="0" rIns="0" tIns="0" bIns="0" anchor="t">
+          <a:bodyPr wrap="square" lIns="0" tIns="0" rIns="0" bIns="0" anchor="t">
             <a:spAutoFit/>
           </a:bodyPr>
           <a:lstStyle/>
@@ -32718,6 +32866,7 @@
           <a:lstStyle/>
           <a:p>
             <a:pPr algn="ctr"/>
+            <a:endParaRPr/>
           </a:p>
         </p:txBody>
       </p:sp>
@@ -32738,7 +32887,7 @@
           <a:noFill/>
         </p:spPr>
         <p:txBody>
-          <a:bodyPr wrap="square" lIns="0" rIns="0" tIns="0" bIns="0">
+          <a:bodyPr wrap="square" lIns="0" tIns="0" rIns="0" bIns="0">
             <a:spAutoFit/>
           </a:bodyPr>
           <a:lstStyle/>
@@ -32843,7 +32992,7 @@
 </file>
 
 <file path=ppt/slides/slide22.xml><?xml version="1.0" encoding="utf-8"?>
-<p:sld xmlns:a="http://schemas.openxmlformats.org/drawingml/2006/main" xmlns:p="http://schemas.openxmlformats.org/presentationml/2006/main" xmlns:r="http://schemas.openxmlformats.org/officeDocument/2006/relationships">
+<p:sld xmlns:a="http://schemas.openxmlformats.org/drawingml/2006/main" xmlns:r="http://schemas.openxmlformats.org/officeDocument/2006/relationships" xmlns:p="http://schemas.openxmlformats.org/presentationml/2006/main">
   <p:cSld>
     <p:spTree>
       <p:nvGrpSpPr>
@@ -32851,7 +33000,14 @@
         <p:cNvGrpSpPr/>
         <p:nvPr/>
       </p:nvGrpSpPr>
-      <p:grpSpPr/>
+      <p:grpSpPr>
+        <a:xfrm>
+          <a:off x="0" y="0"/>
+          <a:ext cx="0" cy="0"/>
+          <a:chOff x="0" y="0"/>
+          <a:chExt cx="0" cy="0"/>
+        </a:xfrm>
+      </p:grpSpPr>
       <p:sp>
         <p:nvSpPr>
           <p:cNvPr id="2" name="Text Placeholder 1"/>
@@ -32859,7 +33015,7 @@
             <a:spLocks noGrp="1"/>
           </p:cNvSpPr>
           <p:nvPr>
-            <p:ph type="body" idx="15" sz="quarter"/>
+            <p:ph type="body" sz="quarter" idx="15"/>
           </p:nvPr>
         </p:nvSpPr>
         <p:spPr/>
@@ -33024,7 +33180,7 @@
           <a:noFill/>
         </p:spPr>
         <p:txBody>
-          <a:bodyPr wrap="square" lIns="0" rIns="0" tIns="0" bIns="0" anchor="t">
+          <a:bodyPr wrap="square" lIns="0" tIns="0" rIns="0" bIns="0" anchor="t">
             <a:spAutoFit/>
           </a:bodyPr>
           <a:lstStyle/>
@@ -33055,7 +33211,7 @@
 </file>
 
 <file path=ppt/slides/slide23.xml><?xml version="1.0" encoding="utf-8"?>
-<p:sld xmlns:a="http://schemas.openxmlformats.org/drawingml/2006/main" xmlns:p="http://schemas.openxmlformats.org/presentationml/2006/main" xmlns:r="http://schemas.openxmlformats.org/officeDocument/2006/relationships">
+<p:sld xmlns:a="http://schemas.openxmlformats.org/drawingml/2006/main" xmlns:r="http://schemas.openxmlformats.org/officeDocument/2006/relationships" xmlns:p="http://schemas.openxmlformats.org/presentationml/2006/main">
   <p:cSld>
     <p:spTree>
       <p:nvGrpSpPr>
@@ -33063,7 +33219,14 @@
         <p:cNvGrpSpPr/>
         <p:nvPr/>
       </p:nvGrpSpPr>
-      <p:grpSpPr/>
+      <p:grpSpPr>
+        <a:xfrm>
+          <a:off x="0" y="0"/>
+          <a:ext cx="0" cy="0"/>
+          <a:chOff x="0" y="0"/>
+          <a:chExt cx="0" cy="0"/>
+        </a:xfrm>
+      </p:grpSpPr>
       <p:sp>
         <p:nvSpPr>
           <p:cNvPr id="2" name="Title 1"/>
@@ -33126,6 +33289,7 @@
           <a:lstStyle/>
           <a:p>
             <a:pPr algn="ctr"/>
+            <a:endParaRPr/>
           </a:p>
         </p:txBody>
       </p:sp>
@@ -33146,7 +33310,7 @@
           <a:noFill/>
         </p:spPr>
         <p:txBody>
-          <a:bodyPr wrap="square" lIns="0" rIns="0" tIns="0" bIns="0" anchor="t">
+          <a:bodyPr wrap="square" lIns="0" tIns="0" rIns="0" bIns="0" anchor="t">
             <a:spAutoFit/>
           </a:bodyPr>
           <a:lstStyle/>
@@ -33185,7 +33349,7 @@
           <a:noFill/>
         </p:spPr>
         <p:txBody>
-          <a:bodyPr wrap="square" lIns="0" rIns="0" tIns="0" bIns="0" anchor="t">
+          <a:bodyPr wrap="square" lIns="0" tIns="0" rIns="0" bIns="0" anchor="t">
             <a:spAutoFit/>
           </a:bodyPr>
           <a:lstStyle/>
@@ -33224,7 +33388,7 @@
           <a:noFill/>
         </p:spPr>
         <p:txBody>
-          <a:bodyPr wrap="square" lIns="0" rIns="0" tIns="0" bIns="0" anchor="t">
+          <a:bodyPr wrap="square" lIns="0" tIns="0" rIns="0" bIns="0" anchor="t">
             <a:spAutoFit/>
           </a:bodyPr>
           <a:lstStyle/>
@@ -33255,7 +33419,7 @@
 </file>
 
 <file path=ppt/slides/slide24.xml><?xml version="1.0" encoding="utf-8"?>
-<p:sld xmlns:a="http://schemas.openxmlformats.org/drawingml/2006/main" xmlns:p="http://schemas.openxmlformats.org/presentationml/2006/main" xmlns:r="http://schemas.openxmlformats.org/officeDocument/2006/relationships">
+<p:sld xmlns:a="http://schemas.openxmlformats.org/drawingml/2006/main" xmlns:r="http://schemas.openxmlformats.org/officeDocument/2006/relationships" xmlns:p="http://schemas.openxmlformats.org/presentationml/2006/main">
   <p:cSld>
     <p:spTree>
       <p:nvGrpSpPr>
@@ -33263,7 +33427,14 @@
         <p:cNvGrpSpPr/>
         <p:nvPr/>
       </p:nvGrpSpPr>
-      <p:grpSpPr/>
+      <p:grpSpPr>
+        <a:xfrm>
+          <a:off x="0" y="0"/>
+          <a:ext cx="0" cy="0"/>
+          <a:chOff x="0" y="0"/>
+          <a:chExt cx="0" cy="0"/>
+        </a:xfrm>
+      </p:grpSpPr>
       <p:sp>
         <p:nvSpPr>
           <p:cNvPr id="3" name="Title 2"/>
@@ -33326,6 +33497,7 @@
           <a:lstStyle/>
           <a:p>
             <a:pPr algn="ctr"/>
+            <a:endParaRPr/>
           </a:p>
         </p:txBody>
       </p:sp>
@@ -33346,7 +33518,7 @@
           <a:noFill/>
         </p:spPr>
         <p:txBody>
-          <a:bodyPr wrap="square" lIns="0" rIns="0" tIns="0" bIns="0" anchor="t">
+          <a:bodyPr wrap="square" lIns="0" tIns="0" rIns="0" bIns="0" anchor="t">
             <a:spAutoFit/>
           </a:bodyPr>
           <a:lstStyle/>
@@ -33385,7 +33557,7 @@
           <a:noFill/>
         </p:spPr>
         <p:txBody>
-          <a:bodyPr wrap="square" lIns="0" rIns="0" tIns="0" bIns="0" anchor="t">
+          <a:bodyPr wrap="square" lIns="0" tIns="0" rIns="0" bIns="0" anchor="t">
             <a:spAutoFit/>
           </a:bodyPr>
           <a:lstStyle/>
@@ -33424,7 +33596,7 @@
           <a:noFill/>
         </p:spPr>
         <p:txBody>
-          <a:bodyPr wrap="square" lIns="0" rIns="0" tIns="0" bIns="0" anchor="t">
+          <a:bodyPr wrap="square" lIns="0" tIns="0" rIns="0" bIns="0" anchor="t">
             <a:spAutoFit/>
           </a:bodyPr>
           <a:lstStyle/>
@@ -33471,7 +33643,7 @@
 </file>
 
 <file path=ppt/slides/slide25.xml><?xml version="1.0" encoding="utf-8"?>
-<p:sld xmlns:a="http://schemas.openxmlformats.org/drawingml/2006/main" xmlns:p="http://schemas.openxmlformats.org/presentationml/2006/main" xmlns:r="http://schemas.openxmlformats.org/officeDocument/2006/relationships">
+<p:sld xmlns:a="http://schemas.openxmlformats.org/drawingml/2006/main" xmlns:r="http://schemas.openxmlformats.org/officeDocument/2006/relationships" xmlns:p="http://schemas.openxmlformats.org/presentationml/2006/main">
   <p:cSld>
     <p:spTree>
       <p:nvGrpSpPr>
@@ -33479,7 +33651,14 @@
         <p:cNvGrpSpPr/>
         <p:nvPr/>
       </p:nvGrpSpPr>
-      <p:grpSpPr/>
+      <p:grpSpPr>
+        <a:xfrm>
+          <a:off x="0" y="0"/>
+          <a:ext cx="0" cy="0"/>
+          <a:chOff x="0" y="0"/>
+          <a:chExt cx="0" cy="0"/>
+        </a:xfrm>
+      </p:grpSpPr>
       <p:sp>
         <p:nvSpPr>
           <p:cNvPr id="2" name="Text Placeholder 1"/>
@@ -33487,7 +33666,7 @@
             <a:spLocks noGrp="1"/>
           </p:cNvSpPr>
           <p:nvPr>
-            <p:ph type="body" idx="15" sz="quarter"/>
+            <p:ph type="body" sz="quarter" idx="15"/>
           </p:nvPr>
         </p:nvSpPr>
         <p:spPr/>
@@ -33716,7 +33895,7 @@
           <a:noFill/>
         </p:spPr>
         <p:txBody>
-          <a:bodyPr wrap="square" lIns="0" rIns="0" tIns="0" bIns="0" anchor="t">
+          <a:bodyPr wrap="square" lIns="0" tIns="0" rIns="0" bIns="0" anchor="t">
             <a:spAutoFit/>
           </a:bodyPr>
           <a:lstStyle/>
@@ -33747,7 +33926,7 @@
 </file>
 
 <file path=ppt/slides/slide26.xml><?xml version="1.0" encoding="utf-8"?>
-<p:sld xmlns:a="http://schemas.openxmlformats.org/drawingml/2006/main" xmlns:p="http://schemas.openxmlformats.org/presentationml/2006/main" xmlns:r="http://schemas.openxmlformats.org/officeDocument/2006/relationships">
+<p:sld xmlns:a="http://schemas.openxmlformats.org/drawingml/2006/main" xmlns:r="http://schemas.openxmlformats.org/officeDocument/2006/relationships" xmlns:p="http://schemas.openxmlformats.org/presentationml/2006/main">
   <p:cSld>
     <p:spTree>
       <p:nvGrpSpPr>
@@ -33755,7 +33934,14 @@
         <p:cNvGrpSpPr/>
         <p:nvPr/>
       </p:nvGrpSpPr>
-      <p:grpSpPr/>
+      <p:grpSpPr>
+        <a:xfrm>
+          <a:off x="0" y="0"/>
+          <a:ext cx="0" cy="0"/>
+          <a:chOff x="0" y="0"/>
+          <a:chExt cx="0" cy="0"/>
+        </a:xfrm>
+      </p:grpSpPr>
       <p:sp>
         <p:nvSpPr>
           <p:cNvPr id="2" name="Text Placeholder 1"/>
@@ -33763,7 +33949,7 @@
             <a:spLocks noGrp="1"/>
           </p:cNvSpPr>
           <p:nvPr>
-            <p:ph type="body" idx="15" sz="quarter"/>
+            <p:ph type="body" sz="quarter" idx="15"/>
           </p:nvPr>
         </p:nvSpPr>
         <p:spPr/>
@@ -33955,7 +34141,7 @@
           <a:noFill/>
         </p:spPr>
         <p:txBody>
-          <a:bodyPr wrap="square" lIns="0" rIns="0" tIns="0" bIns="0" anchor="t">
+          <a:bodyPr wrap="square" lIns="0" tIns="0" rIns="0" bIns="0" anchor="t">
             <a:spAutoFit/>
           </a:bodyPr>
           <a:lstStyle/>
@@ -33986,7 +34172,7 @@
 </file>
 
 <file path=ppt/slides/slide27.xml><?xml version="1.0" encoding="utf-8"?>
-<p:sld xmlns:a="http://schemas.openxmlformats.org/drawingml/2006/main" xmlns:p="http://schemas.openxmlformats.org/presentationml/2006/main" xmlns:r="http://schemas.openxmlformats.org/officeDocument/2006/relationships">
+<p:sld xmlns:a="http://schemas.openxmlformats.org/drawingml/2006/main" xmlns:r="http://schemas.openxmlformats.org/officeDocument/2006/relationships" xmlns:p="http://schemas.openxmlformats.org/presentationml/2006/main">
   <p:cSld>
     <p:spTree>
       <p:nvGrpSpPr>
@@ -33994,7 +34180,14 @@
         <p:cNvGrpSpPr/>
         <p:nvPr/>
       </p:nvGrpSpPr>
-      <p:grpSpPr/>
+      <p:grpSpPr>
+        <a:xfrm>
+          <a:off x="0" y="0"/>
+          <a:ext cx="0" cy="0"/>
+          <a:chOff x="0" y="0"/>
+          <a:chExt cx="0" cy="0"/>
+        </a:xfrm>
+      </p:grpSpPr>
       <p:sp>
         <p:nvSpPr>
           <p:cNvPr id="2" name="Title 1"/>
@@ -34033,7 +34226,7 @@
           <a:noFill/>
         </p:spPr>
         <p:txBody>
-          <a:bodyPr wrap="square" lIns="0" rIns="0" tIns="0" bIns="0" anchor="t">
+          <a:bodyPr wrap="square" lIns="0" tIns="0" rIns="0" bIns="0" anchor="t">
             <a:spAutoFit/>
           </a:bodyPr>
           <a:lstStyle/>
@@ -34096,6 +34289,7 @@
           <a:lstStyle/>
           <a:p>
             <a:pPr algn="ctr"/>
+            <a:endParaRPr/>
           </a:p>
         </p:txBody>
       </p:sp>
@@ -34116,7 +34310,7 @@
           <a:noFill/>
         </p:spPr>
         <p:txBody>
-          <a:bodyPr wrap="square" lIns="0" rIns="0" tIns="0" bIns="0" anchor="t">
+          <a:bodyPr wrap="square" lIns="0" tIns="0" rIns="0" bIns="0" anchor="t">
             <a:spAutoFit/>
           </a:bodyPr>
           <a:lstStyle/>
@@ -34155,7 +34349,7 @@
           <a:noFill/>
         </p:spPr>
         <p:txBody>
-          <a:bodyPr wrap="square" lIns="0" rIns="0" tIns="0" bIns="0" anchor="t">
+          <a:bodyPr wrap="square" lIns="0" tIns="0" rIns="0" bIns="0" anchor="t">
             <a:spAutoFit/>
           </a:bodyPr>
           <a:lstStyle/>
@@ -34197,6 +34391,19 @@
                 <a:spcPct val="125000"/>
               </a:lnSpc>
             </a:pPr>
+            <a:endParaRPr sz="1200" b="0" i="0">
+              <a:solidFill>
+                <a:srgbClr val="E6E8EB"/>
+              </a:solidFill>
+              <a:latin typeface="Consolas"/>
+            </a:endParaRPr>
+          </a:p>
+          <a:p>
+            <a:pPr algn="l">
+              <a:lnSpc>
+                <a:spcPct val="125000"/>
+              </a:lnSpc>
+            </a:pPr>
             <a:r>
               <a:rPr sz="1200" b="0" i="0">
                 <a:solidFill>
@@ -34204,7 +34411,7 @@
                 </a:solidFill>
                 <a:latin typeface="Consolas"/>
               </a:rPr>
-              <a:t/>
+              <a:t>// 2. SUPER^ — explicit base call</a:t>
             </a:r>
           </a:p>
           <a:p>
@@ -34220,7 +34427,7 @@
                 </a:solidFill>
                 <a:latin typeface="Consolas"/>
               </a:rPr>
-              <a:t>// 2. SUPER^ — explicit base call</a:t>
+              <a:t>METHOD PROTECTED CyclicLogic</a:t>
             </a:r>
           </a:p>
           <a:p>
@@ -34236,7 +34443,7 @@
                 </a:solidFill>
                 <a:latin typeface="Consolas"/>
               </a:rPr>
-              <a:t>METHOD PROTECTED CyclicLogic</a:t>
+              <a:t>    SUPER^.CyclicLogic();    // run the base's mode/ack/reset</a:t>
             </a:r>
           </a:p>
           <a:p>
@@ -34252,7 +34459,7 @@
                 </a:solidFill>
                 <a:latin typeface="Consolas"/>
               </a:rPr>
-              <a:t>    SUPER^.CyclicLogic();    // run the base's mode/ack/reset</a:t>
+              <a:t>    THIS^.ExecuteSequence(); // then run my sequence</a:t>
             </a:r>
           </a:p>
           <a:p>
@@ -34261,6 +34468,19 @@
                 <a:spcPct val="125000"/>
               </a:lnSpc>
             </a:pPr>
+            <a:endParaRPr sz="1200" b="0" i="0">
+              <a:solidFill>
+                <a:srgbClr val="E6E8EB"/>
+              </a:solidFill>
+              <a:latin typeface="Consolas"/>
+            </a:endParaRPr>
+          </a:p>
+          <a:p>
+            <a:pPr algn="l">
+              <a:lnSpc>
+                <a:spcPct val="125000"/>
+              </a:lnSpc>
+            </a:pPr>
             <a:r>
               <a:rPr sz="1200" b="0" i="0">
                 <a:solidFill>
@@ -34268,7 +34488,7 @@
                 </a:solidFill>
                 <a:latin typeface="Consolas"/>
               </a:rPr>
-              <a:t>    THIS^.ExecuteSequence(); // then run my sequence</a:t>
+              <a:t>// 3. Method override — child's version replaces base's</a:t>
             </a:r>
           </a:p>
           <a:p>
@@ -34284,7 +34504,7 @@
                 </a:solidFill>
                 <a:latin typeface="Consolas"/>
               </a:rPr>
-              <a:t/>
+              <a:t>METHOD PROTECTED ExecuteSequence</a:t>
             </a:r>
           </a:p>
           <a:p>
@@ -34300,7 +34520,7 @@
                 </a:solidFill>
                 <a:latin typeface="Consolas"/>
               </a:rPr>
-              <a:t>// 3. Method override — child's version replaces base's</a:t>
+              <a:t>    CASE State OF</a:t>
             </a:r>
           </a:p>
           <a:p>
@@ -34316,7 +34536,7 @@
                 </a:solidFill>
                 <a:latin typeface="Consolas"/>
               </a:rPr>
-              <a:t>METHOD PROTECTED ExecuteSequence</a:t>
+              <a:t>        0:  IF Mode.AllowRun THEN State := 10; END_IF</a:t>
             </a:r>
           </a:p>
           <a:p>
@@ -34332,7 +34552,7 @@
                 </a:solidFill>
                 <a:latin typeface="Consolas"/>
               </a:rPr>
-              <a:t>    CASE State OF</a:t>
+              <a:t>        10: // ... fill logic</a:t>
             </a:r>
           </a:p>
           <a:p>
@@ -34348,7 +34568,7 @@
                 </a:solidFill>
                 <a:latin typeface="Consolas"/>
               </a:rPr>
-              <a:t>        0:  IF Mode.AllowRun THEN State := 10; END_IF</a:t>
+              <a:t>        20: State := 0;</a:t>
             </a:r>
           </a:p>
           <a:p>
@@ -34364,7 +34584,7 @@
                 </a:solidFill>
                 <a:latin typeface="Consolas"/>
               </a:rPr>
-              <a:t>        10: // ... fill logic</a:t>
+              <a:t>    END_CASE</a:t>
             </a:r>
           </a:p>
           <a:p>
@@ -34373,47 +34593,12 @@
                 <a:spcPct val="125000"/>
               </a:lnSpc>
             </a:pPr>
-            <a:r>
-              <a:rPr sz="1200" b="0" i="0">
-                <a:solidFill>
-                  <a:srgbClr val="E6E8EB"/>
-                </a:solidFill>
-                <a:latin typeface="Consolas"/>
-              </a:rPr>
-              <a:t>        20: State := 0;</a:t>
-            </a:r>
-          </a:p>
-          <a:p>
-            <a:pPr algn="l">
-              <a:lnSpc>
-                <a:spcPct val="125000"/>
-              </a:lnSpc>
-            </a:pPr>
-            <a:r>
-              <a:rPr sz="1200" b="0" i="0">
-                <a:solidFill>
-                  <a:srgbClr val="E6E8EB"/>
-                </a:solidFill>
-                <a:latin typeface="Consolas"/>
-              </a:rPr>
-              <a:t>    END_CASE</a:t>
-            </a:r>
-          </a:p>
-          <a:p>
-            <a:pPr algn="l">
-              <a:lnSpc>
-                <a:spcPct val="125000"/>
-              </a:lnSpc>
-            </a:pPr>
-            <a:r>
-              <a:rPr sz="1200" b="0" i="0">
-                <a:solidFill>
-                  <a:srgbClr val="E6E8EB"/>
-                </a:solidFill>
-                <a:latin typeface="Consolas"/>
-              </a:rPr>
-              <a:t/>
-            </a:r>
+            <a:endParaRPr sz="1200" b="0" i="0">
+              <a:solidFill>
+                <a:srgbClr val="E6E8EB"/>
+              </a:solidFill>
+              <a:latin typeface="Consolas"/>
+            </a:endParaRPr>
           </a:p>
           <a:p>
             <a:pPr algn="l">
@@ -34570,7 +34755,7 @@
 </file>
 
 <file path=ppt/slides/slide28.xml><?xml version="1.0" encoding="utf-8"?>
-<p:sld xmlns:a="http://schemas.openxmlformats.org/drawingml/2006/main" xmlns:p="http://schemas.openxmlformats.org/presentationml/2006/main" xmlns:r="http://schemas.openxmlformats.org/officeDocument/2006/relationships">
+<p:sld xmlns:a="http://schemas.openxmlformats.org/drawingml/2006/main" xmlns:r="http://schemas.openxmlformats.org/officeDocument/2006/relationships" xmlns:p="http://schemas.openxmlformats.org/presentationml/2006/main">
   <p:cSld>
     <p:spTree>
       <p:nvGrpSpPr>
@@ -34578,7 +34763,14 @@
         <p:cNvGrpSpPr/>
         <p:nvPr/>
       </p:nvGrpSpPr>
-      <p:grpSpPr/>
+      <p:grpSpPr>
+        <a:xfrm>
+          <a:off x="0" y="0"/>
+          <a:ext cx="0" cy="0"/>
+          <a:chOff x="0" y="0"/>
+          <a:chExt cx="0" cy="0"/>
+        </a:xfrm>
+      </p:grpSpPr>
       <p:sp>
         <p:nvSpPr>
           <p:cNvPr id="2" name="Title 1"/>
@@ -34617,7 +34809,7 @@
           <a:noFill/>
         </p:spPr>
         <p:txBody>
-          <a:bodyPr wrap="square" lIns="0" rIns="0" tIns="0" bIns="0" anchor="t">
+          <a:bodyPr wrap="square" lIns="0" tIns="0" rIns="0" bIns="0" anchor="t">
             <a:spAutoFit/>
           </a:bodyPr>
           <a:lstStyle/>
@@ -34680,6 +34872,7 @@
           <a:lstStyle/>
           <a:p>
             <a:pPr algn="ctr"/>
+            <a:endParaRPr/>
           </a:p>
         </p:txBody>
       </p:sp>
@@ -34724,6 +34917,7 @@
           <a:lstStyle/>
           <a:p>
             <a:pPr algn="ctr"/>
+            <a:endParaRPr/>
           </a:p>
         </p:txBody>
       </p:sp>
@@ -34744,7 +34938,7 @@
           <a:noFill/>
         </p:spPr>
         <p:txBody>
-          <a:bodyPr wrap="square" lIns="0" rIns="0" tIns="0" bIns="0" anchor="t">
+          <a:bodyPr wrap="square" lIns="0" tIns="0" rIns="0" bIns="0" anchor="t">
             <a:spAutoFit/>
           </a:bodyPr>
           <a:lstStyle/>
@@ -34783,7 +34977,7 @@
           <a:noFill/>
         </p:spPr>
         <p:txBody>
-          <a:bodyPr wrap="square" lIns="0" rIns="0" tIns="0" bIns="0" anchor="t">
+          <a:bodyPr wrap="square" lIns="0" tIns="0" rIns="0" bIns="0" anchor="t">
             <a:spAutoFit/>
           </a:bodyPr>
           <a:lstStyle/>
@@ -34846,6 +35040,7 @@
           <a:lstStyle/>
           <a:p>
             <a:pPr algn="ctr"/>
+            <a:endParaRPr/>
           </a:p>
         </p:txBody>
       </p:sp>
@@ -34890,6 +35085,7 @@
           <a:lstStyle/>
           <a:p>
             <a:pPr algn="ctr"/>
+            <a:endParaRPr/>
           </a:p>
         </p:txBody>
       </p:sp>
@@ -34910,7 +35106,7 @@
           <a:noFill/>
         </p:spPr>
         <p:txBody>
-          <a:bodyPr wrap="square" lIns="0" rIns="0" tIns="0" bIns="0" anchor="t">
+          <a:bodyPr wrap="square" lIns="0" tIns="0" rIns="0" bIns="0" anchor="t">
             <a:spAutoFit/>
           </a:bodyPr>
           <a:lstStyle/>
@@ -34949,7 +35145,7 @@
           <a:noFill/>
         </p:spPr>
         <p:txBody>
-          <a:bodyPr wrap="square" lIns="0" rIns="0" tIns="0" bIns="0" anchor="t">
+          <a:bodyPr wrap="square" lIns="0" tIns="0" rIns="0" bIns="0" anchor="t">
             <a:spAutoFit/>
           </a:bodyPr>
           <a:lstStyle/>
@@ -34980,7 +35176,7 @@
 </file>
 
 <file path=ppt/slides/slide29.xml><?xml version="1.0" encoding="utf-8"?>
-<p:sld xmlns:a="http://schemas.openxmlformats.org/drawingml/2006/main" xmlns:p="http://schemas.openxmlformats.org/presentationml/2006/main" xmlns:r="http://schemas.openxmlformats.org/officeDocument/2006/relationships">
+<p:sld xmlns:a="http://schemas.openxmlformats.org/drawingml/2006/main" xmlns:r="http://schemas.openxmlformats.org/officeDocument/2006/relationships" xmlns:p="http://schemas.openxmlformats.org/presentationml/2006/main">
   <p:cSld>
     <p:spTree>
       <p:nvGrpSpPr>
@@ -34988,7 +35184,14 @@
         <p:cNvGrpSpPr/>
         <p:nvPr/>
       </p:nvGrpSpPr>
-      <p:grpSpPr/>
+      <p:grpSpPr>
+        <a:xfrm>
+          <a:off x="0" y="0"/>
+          <a:ext cx="0" cy="0"/>
+          <a:chOff x="0" y="0"/>
+          <a:chExt cx="0" cy="0"/>
+        </a:xfrm>
+      </p:grpSpPr>
       <p:sp>
         <p:nvSpPr>
           <p:cNvPr id="2" name="Text Placeholder 1"/>
@@ -34996,7 +35199,7 @@
             <a:spLocks noGrp="1"/>
           </p:cNvSpPr>
           <p:nvPr>
-            <p:ph type="body" idx="15" sz="quarter"/>
+            <p:ph type="body" sz="quarter" idx="15"/>
           </p:nvPr>
         </p:nvSpPr>
         <p:spPr/>
@@ -35170,7 +35373,7 @@
           <a:noFill/>
         </p:spPr>
         <p:txBody>
-          <a:bodyPr wrap="square" lIns="0" rIns="0" tIns="0" bIns="0" anchor="t">
+          <a:bodyPr wrap="square" lIns="0" tIns="0" rIns="0" bIns="0" anchor="t">
             <a:spAutoFit/>
           </a:bodyPr>
           <a:lstStyle/>
@@ -35201,7 +35404,7 @@
 </file>
 
 <file path=ppt/slides/slide3.xml><?xml version="1.0" encoding="utf-8"?>
-<p:sld xmlns:a="http://schemas.openxmlformats.org/drawingml/2006/main" xmlns:p="http://schemas.openxmlformats.org/presentationml/2006/main" xmlns:r="http://schemas.openxmlformats.org/officeDocument/2006/relationships">
+<p:sld xmlns:a="http://schemas.openxmlformats.org/drawingml/2006/main" xmlns:r="http://schemas.openxmlformats.org/officeDocument/2006/relationships" xmlns:p="http://schemas.openxmlformats.org/presentationml/2006/main">
   <p:cSld>
     <p:spTree>
       <p:nvGrpSpPr>
@@ -35209,7 +35412,14 @@
         <p:cNvGrpSpPr/>
         <p:nvPr/>
       </p:nvGrpSpPr>
-      <p:grpSpPr/>
+      <p:grpSpPr>
+        <a:xfrm>
+          <a:off x="0" y="0"/>
+          <a:ext cx="0" cy="0"/>
+          <a:chOff x="0" y="0"/>
+          <a:chExt cx="0" cy="0"/>
+        </a:xfrm>
+      </p:grpSpPr>
       <p:sp>
         <p:nvSpPr>
           <p:cNvPr id="2" name="Text Placeholder 1"/>
@@ -35217,7 +35427,7 @@
             <a:spLocks noGrp="1"/>
           </p:cNvSpPr>
           <p:nvPr>
-            <p:ph type="body" idx="15" sz="quarter"/>
+            <p:ph type="body" sz="quarter" idx="15"/>
           </p:nvPr>
         </p:nvSpPr>
         <p:spPr/>
@@ -35484,7 +35694,7 @@
           <a:noFill/>
         </p:spPr>
         <p:txBody>
-          <a:bodyPr wrap="square" lIns="0" rIns="0" tIns="0" bIns="0" anchor="t">
+          <a:bodyPr wrap="square" lIns="0" tIns="0" rIns="0" bIns="0" anchor="t">
             <a:spAutoFit/>
           </a:bodyPr>
           <a:lstStyle/>
@@ -35515,7 +35725,7 @@
 </file>
 
 <file path=ppt/slides/slide30.xml><?xml version="1.0" encoding="utf-8"?>
-<p:sld xmlns:a="http://schemas.openxmlformats.org/drawingml/2006/main" xmlns:p="http://schemas.openxmlformats.org/presentationml/2006/main" xmlns:r="http://schemas.openxmlformats.org/officeDocument/2006/relationships">
+<p:sld xmlns:a="http://schemas.openxmlformats.org/drawingml/2006/main" xmlns:r="http://schemas.openxmlformats.org/officeDocument/2006/relationships" xmlns:p="http://schemas.openxmlformats.org/presentationml/2006/main">
   <p:cSld>
     <p:spTree>
       <p:nvGrpSpPr>
@@ -35523,7 +35733,14 @@
         <p:cNvGrpSpPr/>
         <p:nvPr/>
       </p:nvGrpSpPr>
-      <p:grpSpPr/>
+      <p:grpSpPr>
+        <a:xfrm>
+          <a:off x="0" y="0"/>
+          <a:ext cx="0" cy="0"/>
+          <a:chOff x="0" y="0"/>
+          <a:chExt cx="0" cy="0"/>
+        </a:xfrm>
+      </p:grpSpPr>
       <p:sp>
         <p:nvSpPr>
           <p:cNvPr id="2" name="Title 1"/>
@@ -35562,7 +35779,7 @@
           <a:noFill/>
         </p:spPr>
         <p:txBody>
-          <a:bodyPr wrap="square" lIns="0" rIns="0" tIns="0" bIns="0" anchor="t">
+          <a:bodyPr wrap="square" lIns="0" tIns="0" rIns="0" bIns="0" anchor="t">
             <a:spAutoFit/>
           </a:bodyPr>
           <a:lstStyle/>
@@ -35601,7 +35818,7 @@
           <a:noFill/>
         </p:spPr>
         <p:txBody>
-          <a:bodyPr wrap="square" lIns="0" rIns="0" tIns="0" bIns="0" anchor="t">
+          <a:bodyPr wrap="square" lIns="0" tIns="0" rIns="0" bIns="0" anchor="t">
             <a:spAutoFit/>
           </a:bodyPr>
           <a:lstStyle/>
@@ -35640,7 +35857,7 @@
           <a:noFill/>
         </p:spPr>
         <p:txBody>
-          <a:bodyPr wrap="square" lIns="0" rIns="0" tIns="0" bIns="0" anchor="t">
+          <a:bodyPr wrap="square" lIns="0" tIns="0" rIns="0" bIns="0" anchor="t">
             <a:spAutoFit/>
           </a:bodyPr>
           <a:lstStyle/>
@@ -35703,6 +35920,7 @@
           <a:lstStyle/>
           <a:p>
             <a:pPr algn="ctr"/>
+            <a:endParaRPr/>
           </a:p>
         </p:txBody>
       </p:sp>
@@ -35723,7 +35941,7 @@
           <a:noFill/>
         </p:spPr>
         <p:txBody>
-          <a:bodyPr wrap="square" lIns="0" rIns="0" tIns="0" bIns="0">
+          <a:bodyPr wrap="square" lIns="0" tIns="0" rIns="0" bIns="0">
             <a:spAutoFit/>
           </a:bodyPr>
           <a:lstStyle/>
@@ -35828,7 +36046,7 @@
 </file>
 
 <file path=ppt/slides/slide31.xml><?xml version="1.0" encoding="utf-8"?>
-<p:sld xmlns:a="http://schemas.openxmlformats.org/drawingml/2006/main" xmlns:p="http://schemas.openxmlformats.org/presentationml/2006/main" xmlns:r="http://schemas.openxmlformats.org/officeDocument/2006/relationships">
+<p:sld xmlns:a="http://schemas.openxmlformats.org/drawingml/2006/main" xmlns:r="http://schemas.openxmlformats.org/officeDocument/2006/relationships" xmlns:p="http://schemas.openxmlformats.org/presentationml/2006/main">
   <p:cSld>
     <p:spTree>
       <p:nvGrpSpPr>
@@ -35836,7 +36054,14 @@
         <p:cNvGrpSpPr/>
         <p:nvPr/>
       </p:nvGrpSpPr>
-      <p:grpSpPr/>
+      <p:grpSpPr>
+        <a:xfrm>
+          <a:off x="0" y="0"/>
+          <a:ext cx="0" cy="0"/>
+          <a:chOff x="0" y="0"/>
+          <a:chExt cx="0" cy="0"/>
+        </a:xfrm>
+      </p:grpSpPr>
       <p:sp>
         <p:nvSpPr>
           <p:cNvPr id="3" name="Title 2"/>
@@ -35899,6 +36124,7 @@
           <a:lstStyle/>
           <a:p>
             <a:pPr algn="ctr"/>
+            <a:endParaRPr/>
           </a:p>
         </p:txBody>
       </p:sp>
@@ -35919,7 +36145,7 @@
           <a:noFill/>
         </p:spPr>
         <p:txBody>
-          <a:bodyPr wrap="square" lIns="0" rIns="0" tIns="0" bIns="0" anchor="t">
+          <a:bodyPr wrap="square" lIns="0" tIns="0" rIns="0" bIns="0" anchor="t">
             <a:spAutoFit/>
           </a:bodyPr>
           <a:lstStyle/>
@@ -35958,7 +36184,7 @@
           <a:noFill/>
         </p:spPr>
         <p:txBody>
-          <a:bodyPr wrap="square" lIns="0" rIns="0" tIns="0" bIns="0" anchor="t">
+          <a:bodyPr wrap="square" lIns="0" tIns="0" rIns="0" bIns="0" anchor="t">
             <a:spAutoFit/>
           </a:bodyPr>
           <a:lstStyle/>
@@ -35997,7 +36223,7 @@
           <a:noFill/>
         </p:spPr>
         <p:txBody>
-          <a:bodyPr wrap="square" lIns="0" rIns="0" tIns="0" bIns="0" anchor="t">
+          <a:bodyPr wrap="square" lIns="0" tIns="0" rIns="0" bIns="0" anchor="t">
             <a:spAutoFit/>
           </a:bodyPr>
           <a:lstStyle/>
@@ -36044,7 +36270,7 @@
 </file>
 
 <file path=ppt/slides/slide32.xml><?xml version="1.0" encoding="utf-8"?>
-<p:sld xmlns:a="http://schemas.openxmlformats.org/drawingml/2006/main" xmlns:p="http://schemas.openxmlformats.org/presentationml/2006/main" xmlns:r="http://schemas.openxmlformats.org/officeDocument/2006/relationships">
+<p:sld xmlns:a="http://schemas.openxmlformats.org/drawingml/2006/main" xmlns:r="http://schemas.openxmlformats.org/officeDocument/2006/relationships" xmlns:p="http://schemas.openxmlformats.org/presentationml/2006/main">
   <p:cSld>
     <p:spTree>
       <p:nvGrpSpPr>
@@ -36052,7 +36278,14 @@
         <p:cNvGrpSpPr/>
         <p:nvPr/>
       </p:nvGrpSpPr>
-      <p:grpSpPr/>
+      <p:grpSpPr>
+        <a:xfrm>
+          <a:off x="0" y="0"/>
+          <a:ext cx="0" cy="0"/>
+          <a:chOff x="0" y="0"/>
+          <a:chExt cx="0" cy="0"/>
+        </a:xfrm>
+      </p:grpSpPr>
       <p:sp>
         <p:nvSpPr>
           <p:cNvPr id="2" name="Text Placeholder 1"/>
@@ -36060,7 +36293,7 @@
             <a:spLocks noGrp="1"/>
           </p:cNvSpPr>
           <p:nvPr>
-            <p:ph type="body" idx="15" sz="quarter"/>
+            <p:ph type="body" sz="quarter" idx="15"/>
           </p:nvPr>
         </p:nvSpPr>
         <p:spPr/>
@@ -36216,7 +36449,7 @@
           <a:noFill/>
         </p:spPr>
         <p:txBody>
-          <a:bodyPr wrap="square" lIns="0" rIns="0" tIns="0" bIns="0" anchor="t">
+          <a:bodyPr wrap="square" lIns="0" tIns="0" rIns="0" bIns="0" anchor="t">
             <a:spAutoFit/>
           </a:bodyPr>
           <a:lstStyle/>
@@ -36247,7 +36480,7 @@
 </file>
 
 <file path=ppt/slides/slide33.xml><?xml version="1.0" encoding="utf-8"?>
-<p:sld xmlns:a="http://schemas.openxmlformats.org/drawingml/2006/main" xmlns:p="http://schemas.openxmlformats.org/presentationml/2006/main" xmlns:r="http://schemas.openxmlformats.org/officeDocument/2006/relationships">
+<p:sld xmlns:a="http://schemas.openxmlformats.org/drawingml/2006/main" xmlns:r="http://schemas.openxmlformats.org/officeDocument/2006/relationships" xmlns:p="http://schemas.openxmlformats.org/presentationml/2006/main">
   <p:cSld>
     <p:spTree>
       <p:nvGrpSpPr>
@@ -36255,7 +36488,14 @@
         <p:cNvGrpSpPr/>
         <p:nvPr/>
       </p:nvGrpSpPr>
-      <p:grpSpPr/>
+      <p:grpSpPr>
+        <a:xfrm>
+          <a:off x="0" y="0"/>
+          <a:ext cx="0" cy="0"/>
+          <a:chOff x="0" y="0"/>
+          <a:chExt cx="0" cy="0"/>
+        </a:xfrm>
+      </p:grpSpPr>
       <p:sp>
         <p:nvSpPr>
           <p:cNvPr id="2" name="Title 1"/>
@@ -36318,6 +36558,7 @@
           <a:lstStyle/>
           <a:p>
             <a:pPr algn="ctr"/>
+            <a:endParaRPr/>
           </a:p>
         </p:txBody>
       </p:sp>
@@ -36338,7 +36579,7 @@
           <a:noFill/>
         </p:spPr>
         <p:txBody>
-          <a:bodyPr wrap="square" lIns="0" rIns="0" tIns="0" bIns="0" anchor="t">
+          <a:bodyPr wrap="square" lIns="0" tIns="0" rIns="0" bIns="0" anchor="t">
             <a:spAutoFit/>
           </a:bodyPr>
           <a:lstStyle/>
@@ -36377,7 +36618,7 @@
           <a:noFill/>
         </p:spPr>
         <p:txBody>
-          <a:bodyPr wrap="square" lIns="0" rIns="0" tIns="0" bIns="0" anchor="t">
+          <a:bodyPr wrap="square" lIns="0" tIns="0" rIns="0" bIns="0" anchor="t">
             <a:spAutoFit/>
           </a:bodyPr>
           <a:lstStyle/>
@@ -36416,7 +36657,7 @@
           <a:noFill/>
         </p:spPr>
         <p:txBody>
-          <a:bodyPr wrap="square" lIns="0" rIns="0" tIns="0" bIns="0" anchor="t">
+          <a:bodyPr wrap="square" lIns="0" tIns="0" rIns="0" bIns="0" anchor="t">
             <a:spAutoFit/>
           </a:bodyPr>
           <a:lstStyle/>
@@ -36447,7 +36688,7 @@
 </file>
 
 <file path=ppt/slides/slide34.xml><?xml version="1.0" encoding="utf-8"?>
-<p:sld xmlns:a="http://schemas.openxmlformats.org/drawingml/2006/main" xmlns:p="http://schemas.openxmlformats.org/presentationml/2006/main" xmlns:r="http://schemas.openxmlformats.org/officeDocument/2006/relationships">
+<p:sld xmlns:a="http://schemas.openxmlformats.org/drawingml/2006/main" xmlns:r="http://schemas.openxmlformats.org/officeDocument/2006/relationships" xmlns:p="http://schemas.openxmlformats.org/presentationml/2006/main">
   <p:cSld>
     <p:spTree>
       <p:nvGrpSpPr>
@@ -36455,7 +36696,14 @@
         <p:cNvGrpSpPr/>
         <p:nvPr/>
       </p:nvGrpSpPr>
-      <p:grpSpPr/>
+      <p:grpSpPr>
+        <a:xfrm>
+          <a:off x="0" y="0"/>
+          <a:ext cx="0" cy="0"/>
+          <a:chOff x="0" y="0"/>
+          <a:chExt cx="0" cy="0"/>
+        </a:xfrm>
+      </p:grpSpPr>
       <p:sp>
         <p:nvSpPr>
           <p:cNvPr id="2" name="Title 1"/>
@@ -36494,7 +36742,7 @@
           <a:noFill/>
         </p:spPr>
         <p:txBody>
-          <a:bodyPr wrap="square" lIns="0" rIns="0" tIns="0" bIns="0" anchor="t">
+          <a:bodyPr wrap="square" lIns="0" tIns="0" rIns="0" bIns="0" anchor="t">
             <a:spAutoFit/>
           </a:bodyPr>
           <a:lstStyle/>
@@ -36533,7 +36781,7 @@
           <a:noFill/>
         </p:spPr>
         <p:txBody>
-          <a:bodyPr wrap="square" lIns="0" rIns="0" tIns="0" bIns="0" anchor="t">
+          <a:bodyPr wrap="square" lIns="0" tIns="0" rIns="0" bIns="0" anchor="t">
             <a:spAutoFit/>
           </a:bodyPr>
           <a:lstStyle/>
@@ -36572,7 +36820,7 @@
           <a:noFill/>
         </p:spPr>
         <p:txBody>
-          <a:bodyPr wrap="square" lIns="0" rIns="0" tIns="0" bIns="0" anchor="t">
+          <a:bodyPr wrap="square" lIns="0" tIns="0" rIns="0" bIns="0" anchor="t">
             <a:spAutoFit/>
           </a:bodyPr>
           <a:lstStyle/>
@@ -36635,6 +36883,7 @@
           <a:lstStyle/>
           <a:p>
             <a:pPr algn="ctr"/>
+            <a:endParaRPr/>
           </a:p>
         </p:txBody>
       </p:sp>
@@ -36655,7 +36904,7 @@
           <a:noFill/>
         </p:spPr>
         <p:txBody>
-          <a:bodyPr wrap="square" lIns="0" rIns="0" tIns="0" bIns="0">
+          <a:bodyPr wrap="square" lIns="0" tIns="0" rIns="0" bIns="0">
             <a:spAutoFit/>
           </a:bodyPr>
           <a:lstStyle/>
@@ -36751,7 +37000,7 @@
 </file>
 
 <file path=ppt/slides/slide35.xml><?xml version="1.0" encoding="utf-8"?>
-<p:sld xmlns:a="http://schemas.openxmlformats.org/drawingml/2006/main" xmlns:p="http://schemas.openxmlformats.org/presentationml/2006/main" xmlns:r="http://schemas.openxmlformats.org/officeDocument/2006/relationships">
+<p:sld xmlns:a="http://schemas.openxmlformats.org/drawingml/2006/main" xmlns:r="http://schemas.openxmlformats.org/officeDocument/2006/relationships" xmlns:p="http://schemas.openxmlformats.org/presentationml/2006/main">
   <p:cSld>
     <p:spTree>
       <p:nvGrpSpPr>
@@ -36759,7 +37008,14 @@
         <p:cNvGrpSpPr/>
         <p:nvPr/>
       </p:nvGrpSpPr>
-      <p:grpSpPr/>
+      <p:grpSpPr>
+        <a:xfrm>
+          <a:off x="0" y="0"/>
+          <a:ext cx="0" cy="0"/>
+          <a:chOff x="0" y="0"/>
+          <a:chExt cx="0" cy="0"/>
+        </a:xfrm>
+      </p:grpSpPr>
       <p:sp>
         <p:nvSpPr>
           <p:cNvPr id="2" name="Title 1"/>
@@ -36798,7 +37054,7 @@
           <a:noFill/>
         </p:spPr>
         <p:txBody>
-          <a:bodyPr wrap="square" lIns="0" rIns="0" tIns="0" bIns="0" anchor="t">
+          <a:bodyPr wrap="square" lIns="0" tIns="0" rIns="0" bIns="0" anchor="t">
             <a:spAutoFit/>
           </a:bodyPr>
           <a:lstStyle/>
@@ -36861,6 +37117,7 @@
           <a:lstStyle/>
           <a:p>
             <a:pPr algn="ctr"/>
+            <a:endParaRPr/>
           </a:p>
         </p:txBody>
       </p:sp>
@@ -36905,6 +37162,7 @@
           <a:lstStyle/>
           <a:p>
             <a:pPr algn="ctr"/>
+            <a:endParaRPr/>
           </a:p>
         </p:txBody>
       </p:sp>
@@ -36925,7 +37183,7 @@
           <a:noFill/>
         </p:spPr>
         <p:txBody>
-          <a:bodyPr wrap="square" lIns="0" rIns="0" tIns="0" bIns="0" anchor="t">
+          <a:bodyPr wrap="square" lIns="0" tIns="0" rIns="0" bIns="0" anchor="t">
             <a:spAutoFit/>
           </a:bodyPr>
           <a:lstStyle/>
@@ -36964,7 +37222,7 @@
           <a:noFill/>
         </p:spPr>
         <p:txBody>
-          <a:bodyPr wrap="square" lIns="0" rIns="0" tIns="0" bIns="0" anchor="t">
+          <a:bodyPr wrap="square" lIns="0" tIns="0" rIns="0" bIns="0" anchor="t">
             <a:spAutoFit/>
           </a:bodyPr>
           <a:lstStyle/>
@@ -37027,6 +37285,7 @@
           <a:lstStyle/>
           <a:p>
             <a:pPr algn="ctr"/>
+            <a:endParaRPr/>
           </a:p>
         </p:txBody>
       </p:sp>
@@ -37071,6 +37330,7 @@
           <a:lstStyle/>
           <a:p>
             <a:pPr algn="ctr"/>
+            <a:endParaRPr/>
           </a:p>
         </p:txBody>
       </p:sp>
@@ -37091,7 +37351,7 @@
           <a:noFill/>
         </p:spPr>
         <p:txBody>
-          <a:bodyPr wrap="square" lIns="0" rIns="0" tIns="0" bIns="0" anchor="t">
+          <a:bodyPr wrap="square" lIns="0" tIns="0" rIns="0" bIns="0" anchor="t">
             <a:spAutoFit/>
           </a:bodyPr>
           <a:lstStyle/>
@@ -37130,7 +37390,7 @@
           <a:noFill/>
         </p:spPr>
         <p:txBody>
-          <a:bodyPr wrap="square" lIns="0" rIns="0" tIns="0" bIns="0" anchor="t">
+          <a:bodyPr wrap="square" lIns="0" tIns="0" rIns="0" bIns="0" anchor="t">
             <a:spAutoFit/>
           </a:bodyPr>
           <a:lstStyle/>
@@ -37161,7 +37421,7 @@
 </file>
 
 <file path=ppt/slides/slide36.xml><?xml version="1.0" encoding="utf-8"?>
-<p:sld xmlns:a="http://schemas.openxmlformats.org/drawingml/2006/main" xmlns:p="http://schemas.openxmlformats.org/presentationml/2006/main" xmlns:r="http://schemas.openxmlformats.org/officeDocument/2006/relationships">
+<p:sld xmlns:a="http://schemas.openxmlformats.org/drawingml/2006/main" xmlns:r="http://schemas.openxmlformats.org/officeDocument/2006/relationships" xmlns:p="http://schemas.openxmlformats.org/presentationml/2006/main">
   <p:cSld>
     <p:spTree>
       <p:nvGrpSpPr>
@@ -37169,7 +37429,14 @@
         <p:cNvGrpSpPr/>
         <p:nvPr/>
       </p:nvGrpSpPr>
-      <p:grpSpPr/>
+      <p:grpSpPr>
+        <a:xfrm>
+          <a:off x="0" y="0"/>
+          <a:ext cx="0" cy="0"/>
+          <a:chOff x="0" y="0"/>
+          <a:chExt cx="0" cy="0"/>
+        </a:xfrm>
+      </p:grpSpPr>
       <p:sp>
         <p:nvSpPr>
           <p:cNvPr id="2" name="Title 1"/>
@@ -37208,7 +37475,7 @@
           <a:noFill/>
         </p:spPr>
         <p:txBody>
-          <a:bodyPr wrap="square" lIns="0" rIns="0" tIns="0" bIns="0" anchor="t">
+          <a:bodyPr wrap="square" lIns="0" tIns="0" rIns="0" bIns="0" anchor="t">
             <a:spAutoFit/>
           </a:bodyPr>
           <a:lstStyle/>
@@ -37247,7 +37514,7 @@
           <a:noFill/>
         </p:spPr>
         <p:txBody>
-          <a:bodyPr wrap="square" lIns="0" rIns="0" tIns="0" bIns="0" anchor="t">
+          <a:bodyPr wrap="square" lIns="0" tIns="0" rIns="0" bIns="0" anchor="t">
             <a:spAutoFit/>
           </a:bodyPr>
           <a:lstStyle/>
@@ -37286,7 +37553,7 @@
           <a:noFill/>
         </p:spPr>
         <p:txBody>
-          <a:bodyPr wrap="square" lIns="0" rIns="0" tIns="0" bIns="0" anchor="t">
+          <a:bodyPr wrap="square" lIns="0" tIns="0" rIns="0" bIns="0" anchor="t">
             <a:spAutoFit/>
           </a:bodyPr>
           <a:lstStyle/>
@@ -37349,6 +37616,7 @@
           <a:lstStyle/>
           <a:p>
             <a:pPr algn="ctr"/>
+            <a:endParaRPr/>
           </a:p>
         </p:txBody>
       </p:sp>
@@ -37369,7 +37637,7 @@
           <a:noFill/>
         </p:spPr>
         <p:txBody>
-          <a:bodyPr wrap="square" lIns="0" rIns="0" tIns="0" bIns="0">
+          <a:bodyPr wrap="square" lIns="0" tIns="0" rIns="0" bIns="0">
             <a:spAutoFit/>
           </a:bodyPr>
           <a:lstStyle/>
@@ -37465,7 +37733,7 @@
 </file>
 
 <file path=ppt/slides/slide37.xml><?xml version="1.0" encoding="utf-8"?>
-<p:sld xmlns:a="http://schemas.openxmlformats.org/drawingml/2006/main" xmlns:p="http://schemas.openxmlformats.org/presentationml/2006/main" xmlns:r="http://schemas.openxmlformats.org/officeDocument/2006/relationships">
+<p:sld xmlns:a="http://schemas.openxmlformats.org/drawingml/2006/main" xmlns:r="http://schemas.openxmlformats.org/officeDocument/2006/relationships" xmlns:p="http://schemas.openxmlformats.org/presentationml/2006/main">
   <p:cSld>
     <p:spTree>
       <p:nvGrpSpPr>
@@ -37473,7 +37741,14 @@
         <p:cNvGrpSpPr/>
         <p:nvPr/>
       </p:nvGrpSpPr>
-      <p:grpSpPr/>
+      <p:grpSpPr>
+        <a:xfrm>
+          <a:off x="0" y="0"/>
+          <a:ext cx="0" cy="0"/>
+          <a:chOff x="0" y="0"/>
+          <a:chExt cx="0" cy="0"/>
+        </a:xfrm>
+      </p:grpSpPr>
       <p:sp>
         <p:nvSpPr>
           <p:cNvPr id="2" name="Text Placeholder 1"/>
@@ -37481,7 +37756,7 @@
             <a:spLocks noGrp="1"/>
           </p:cNvSpPr>
           <p:nvPr>
-            <p:ph type="body" idx="15" sz="quarter"/>
+            <p:ph type="body" sz="quarter" idx="15"/>
           </p:nvPr>
         </p:nvSpPr>
         <p:spPr/>
@@ -37636,7 +37911,7 @@
           <a:noFill/>
         </p:spPr>
         <p:txBody>
-          <a:bodyPr wrap="square" lIns="0" rIns="0" tIns="0" bIns="0" anchor="t">
+          <a:bodyPr wrap="square" lIns="0" tIns="0" rIns="0" bIns="0" anchor="t">
             <a:spAutoFit/>
           </a:bodyPr>
           <a:lstStyle/>
@@ -37667,7 +37942,7 @@
 </file>
 
 <file path=ppt/slides/slide38.xml><?xml version="1.0" encoding="utf-8"?>
-<p:sld xmlns:a="http://schemas.openxmlformats.org/drawingml/2006/main" xmlns:p="http://schemas.openxmlformats.org/presentationml/2006/main" xmlns:r="http://schemas.openxmlformats.org/officeDocument/2006/relationships">
+<p:sld xmlns:a="http://schemas.openxmlformats.org/drawingml/2006/main" xmlns:r="http://schemas.openxmlformats.org/officeDocument/2006/relationships" xmlns:p="http://schemas.openxmlformats.org/presentationml/2006/main">
   <p:cSld>
     <p:spTree>
       <p:nvGrpSpPr>
@@ -37675,7 +37950,14 @@
         <p:cNvGrpSpPr/>
         <p:nvPr/>
       </p:nvGrpSpPr>
-      <p:grpSpPr/>
+      <p:grpSpPr>
+        <a:xfrm>
+          <a:off x="0" y="0"/>
+          <a:ext cx="0" cy="0"/>
+          <a:chOff x="0" y="0"/>
+          <a:chExt cx="0" cy="0"/>
+        </a:xfrm>
+      </p:grpSpPr>
       <p:sp>
         <p:nvSpPr>
           <p:cNvPr id="2" name="Title 1"/>
@@ -37738,6 +38020,7 @@
           <a:lstStyle/>
           <a:p>
             <a:pPr algn="ctr"/>
+            <a:endParaRPr/>
           </a:p>
         </p:txBody>
       </p:sp>
@@ -37758,7 +38041,7 @@
           <a:noFill/>
         </p:spPr>
         <p:txBody>
-          <a:bodyPr wrap="square" lIns="0" rIns="0" tIns="0" bIns="0" anchor="t">
+          <a:bodyPr wrap="square" lIns="0" tIns="0" rIns="0" bIns="0" anchor="t">
             <a:spAutoFit/>
           </a:bodyPr>
           <a:lstStyle/>
@@ -37797,7 +38080,7 @@
           <a:noFill/>
         </p:spPr>
         <p:txBody>
-          <a:bodyPr wrap="square" lIns="0" rIns="0" tIns="0" bIns="0" anchor="t">
+          <a:bodyPr wrap="square" lIns="0" tIns="0" rIns="0" bIns="0" anchor="t">
             <a:spAutoFit/>
           </a:bodyPr>
           <a:lstStyle/>
@@ -37836,7 +38119,7 @@
           <a:noFill/>
         </p:spPr>
         <p:txBody>
-          <a:bodyPr wrap="square" lIns="0" rIns="0" tIns="0" bIns="0" anchor="t">
+          <a:bodyPr wrap="square" lIns="0" tIns="0" rIns="0" bIns="0" anchor="t">
             <a:spAutoFit/>
           </a:bodyPr>
           <a:lstStyle/>
@@ -37867,7 +38150,7 @@
 </file>
 
 <file path=ppt/slides/slide39.xml><?xml version="1.0" encoding="utf-8"?>
-<p:sld xmlns:a="http://schemas.openxmlformats.org/drawingml/2006/main" xmlns:p="http://schemas.openxmlformats.org/presentationml/2006/main" xmlns:r="http://schemas.openxmlformats.org/officeDocument/2006/relationships">
+<p:sld xmlns:a="http://schemas.openxmlformats.org/drawingml/2006/main" xmlns:r="http://schemas.openxmlformats.org/officeDocument/2006/relationships" xmlns:p="http://schemas.openxmlformats.org/presentationml/2006/main">
   <p:cSld>
     <p:spTree>
       <p:nvGrpSpPr>
@@ -37875,7 +38158,14 @@
         <p:cNvGrpSpPr/>
         <p:nvPr/>
       </p:nvGrpSpPr>
-      <p:grpSpPr/>
+      <p:grpSpPr>
+        <a:xfrm>
+          <a:off x="0" y="0"/>
+          <a:ext cx="0" cy="0"/>
+          <a:chOff x="0" y="0"/>
+          <a:chExt cx="0" cy="0"/>
+        </a:xfrm>
+      </p:grpSpPr>
       <p:sp>
         <p:nvSpPr>
           <p:cNvPr id="3" name="Title 2"/>
@@ -37938,6 +38228,7 @@
           <a:lstStyle/>
           <a:p>
             <a:pPr algn="ctr"/>
+            <a:endParaRPr/>
           </a:p>
         </p:txBody>
       </p:sp>
@@ -37958,7 +38249,7 @@
           <a:noFill/>
         </p:spPr>
         <p:txBody>
-          <a:bodyPr wrap="square" lIns="0" rIns="0" tIns="0" bIns="0" anchor="t">
+          <a:bodyPr wrap="square" lIns="0" tIns="0" rIns="0" bIns="0" anchor="t">
             <a:spAutoFit/>
           </a:bodyPr>
           <a:lstStyle/>
@@ -37997,7 +38288,7 @@
           <a:noFill/>
         </p:spPr>
         <p:txBody>
-          <a:bodyPr wrap="square" lIns="0" rIns="0" tIns="0" bIns="0" anchor="t">
+          <a:bodyPr wrap="square" lIns="0" tIns="0" rIns="0" bIns="0" anchor="t">
             <a:spAutoFit/>
           </a:bodyPr>
           <a:lstStyle/>
@@ -38036,7 +38327,7 @@
           <a:noFill/>
         </p:spPr>
         <p:txBody>
-          <a:bodyPr wrap="square" lIns="0" rIns="0" tIns="0" bIns="0" anchor="t">
+          <a:bodyPr wrap="square" lIns="0" tIns="0" rIns="0" bIns="0" anchor="t">
             <a:spAutoFit/>
           </a:bodyPr>
           <a:lstStyle/>
@@ -38083,7 +38374,7 @@
 </file>
 
 <file path=ppt/slides/slide4.xml><?xml version="1.0" encoding="utf-8"?>
-<p:sld xmlns:a="http://schemas.openxmlformats.org/drawingml/2006/main" xmlns:p="http://schemas.openxmlformats.org/presentationml/2006/main" xmlns:r="http://schemas.openxmlformats.org/officeDocument/2006/relationships">
+<p:sld xmlns:a="http://schemas.openxmlformats.org/drawingml/2006/main" xmlns:r="http://schemas.openxmlformats.org/officeDocument/2006/relationships" xmlns:p="http://schemas.openxmlformats.org/presentationml/2006/main">
   <p:cSld>
     <p:spTree>
       <p:nvGrpSpPr>
@@ -38091,7 +38382,14 @@
         <p:cNvGrpSpPr/>
         <p:nvPr/>
       </p:nvGrpSpPr>
-      <p:grpSpPr/>
+      <p:grpSpPr>
+        <a:xfrm>
+          <a:off x="0" y="0"/>
+          <a:ext cx="0" cy="0"/>
+          <a:chOff x="0" y="0"/>
+          <a:chExt cx="0" cy="0"/>
+        </a:xfrm>
+      </p:grpSpPr>
       <p:sp>
         <p:nvSpPr>
           <p:cNvPr id="2" name="Title 1"/>
@@ -38154,6 +38452,7 @@
           <a:lstStyle/>
           <a:p>
             <a:pPr algn="ctr"/>
+            <a:endParaRPr/>
           </a:p>
         </p:txBody>
       </p:sp>
@@ -38174,7 +38473,7 @@
           <a:noFill/>
         </p:spPr>
         <p:txBody>
-          <a:bodyPr wrap="square" lIns="0" rIns="0" tIns="0" bIns="0" anchor="t">
+          <a:bodyPr wrap="square" lIns="0" tIns="0" rIns="0" bIns="0" anchor="t">
             <a:spAutoFit/>
           </a:bodyPr>
           <a:lstStyle/>
@@ -38213,7 +38512,7 @@
           <a:noFill/>
         </p:spPr>
         <p:txBody>
-          <a:bodyPr wrap="square" lIns="0" rIns="0" tIns="0" bIns="0" anchor="t">
+          <a:bodyPr wrap="square" lIns="0" tIns="0" rIns="0" bIns="0" anchor="t">
             <a:spAutoFit/>
           </a:bodyPr>
           <a:lstStyle/>
@@ -38252,7 +38551,7 @@
           <a:noFill/>
         </p:spPr>
         <p:txBody>
-          <a:bodyPr wrap="square" lIns="0" rIns="0" tIns="0" bIns="0" anchor="t">
+          <a:bodyPr wrap="square" lIns="0" tIns="0" rIns="0" bIns="0" anchor="t">
             <a:spAutoFit/>
           </a:bodyPr>
           <a:lstStyle/>
@@ -38283,7 +38582,7 @@
 </file>
 
 <file path=ppt/slides/slide40.xml><?xml version="1.0" encoding="utf-8"?>
-<p:sld xmlns:a="http://schemas.openxmlformats.org/drawingml/2006/main" xmlns:p="http://schemas.openxmlformats.org/presentationml/2006/main" xmlns:r="http://schemas.openxmlformats.org/officeDocument/2006/relationships">
+<p:sld xmlns:a="http://schemas.openxmlformats.org/drawingml/2006/main" xmlns:r="http://schemas.openxmlformats.org/officeDocument/2006/relationships" xmlns:p="http://schemas.openxmlformats.org/presentationml/2006/main">
   <p:cSld>
     <p:spTree>
       <p:nvGrpSpPr>
@@ -38291,7 +38590,14 @@
         <p:cNvGrpSpPr/>
         <p:nvPr/>
       </p:nvGrpSpPr>
-      <p:grpSpPr/>
+      <p:grpSpPr>
+        <a:xfrm>
+          <a:off x="0" y="0"/>
+          <a:ext cx="0" cy="0"/>
+          <a:chOff x="0" y="0"/>
+          <a:chExt cx="0" cy="0"/>
+        </a:xfrm>
+      </p:grpSpPr>
       <p:sp>
         <p:nvSpPr>
           <p:cNvPr id="2" name="Text Placeholder 1"/>
@@ -38299,7 +38605,7 @@
             <a:spLocks noGrp="1"/>
           </p:cNvSpPr>
           <p:nvPr>
-            <p:ph type="body" idx="15" sz="quarter"/>
+            <p:ph type="body" sz="quarter" idx="15"/>
           </p:nvPr>
         </p:nvSpPr>
         <p:spPr/>
@@ -38528,7 +38834,7 @@
           <a:noFill/>
         </p:spPr>
         <p:txBody>
-          <a:bodyPr wrap="square" lIns="0" rIns="0" tIns="0" bIns="0" anchor="t">
+          <a:bodyPr wrap="square" lIns="0" tIns="0" rIns="0" bIns="0" anchor="t">
             <a:spAutoFit/>
           </a:bodyPr>
           <a:lstStyle/>
@@ -38559,7 +38865,7 @@
 </file>
 
 <file path=ppt/slides/slide41.xml><?xml version="1.0" encoding="utf-8"?>
-<p:sld xmlns:a="http://schemas.openxmlformats.org/drawingml/2006/main" xmlns:p="http://schemas.openxmlformats.org/presentationml/2006/main" xmlns:r="http://schemas.openxmlformats.org/officeDocument/2006/relationships">
+<p:sld xmlns:a="http://schemas.openxmlformats.org/drawingml/2006/main" xmlns:r="http://schemas.openxmlformats.org/officeDocument/2006/relationships" xmlns:p="http://schemas.openxmlformats.org/presentationml/2006/main">
   <p:cSld>
     <p:spTree>
       <p:nvGrpSpPr>
@@ -38567,7 +38873,14 @@
         <p:cNvGrpSpPr/>
         <p:nvPr/>
       </p:nvGrpSpPr>
-      <p:grpSpPr/>
+      <p:grpSpPr>
+        <a:xfrm>
+          <a:off x="0" y="0"/>
+          <a:ext cx="0" cy="0"/>
+          <a:chOff x="0" y="0"/>
+          <a:chExt cx="0" cy="0"/>
+        </a:xfrm>
+      </p:grpSpPr>
       <p:sp>
         <p:nvSpPr>
           <p:cNvPr id="2" name="Text Placeholder 1"/>
@@ -38575,7 +38888,7 @@
             <a:spLocks noGrp="1"/>
           </p:cNvSpPr>
           <p:nvPr>
-            <p:ph type="body" idx="15" sz="quarter"/>
+            <p:ph type="body" sz="quarter" idx="15"/>
           </p:nvPr>
         </p:nvSpPr>
         <p:spPr/>
@@ -38767,7 +39080,7 @@
           <a:noFill/>
         </p:spPr>
         <p:txBody>
-          <a:bodyPr wrap="square" lIns="0" rIns="0" tIns="0" bIns="0" anchor="t">
+          <a:bodyPr wrap="square" lIns="0" tIns="0" rIns="0" bIns="0" anchor="t">
             <a:spAutoFit/>
           </a:bodyPr>
           <a:lstStyle/>
@@ -38798,7 +39111,7 @@
 </file>
 
 <file path=ppt/slides/slide42.xml><?xml version="1.0" encoding="utf-8"?>
-<p:sld xmlns:a="http://schemas.openxmlformats.org/drawingml/2006/main" xmlns:p="http://schemas.openxmlformats.org/presentationml/2006/main" xmlns:r="http://schemas.openxmlformats.org/officeDocument/2006/relationships">
+<p:sld xmlns:a="http://schemas.openxmlformats.org/drawingml/2006/main" xmlns:r="http://schemas.openxmlformats.org/officeDocument/2006/relationships" xmlns:p="http://schemas.openxmlformats.org/presentationml/2006/main">
   <p:cSld>
     <p:spTree>
       <p:nvGrpSpPr>
@@ -38806,7 +39119,14 @@
         <p:cNvGrpSpPr/>
         <p:nvPr/>
       </p:nvGrpSpPr>
-      <p:grpSpPr/>
+      <p:grpSpPr>
+        <a:xfrm>
+          <a:off x="0" y="0"/>
+          <a:ext cx="0" cy="0"/>
+          <a:chOff x="0" y="0"/>
+          <a:chExt cx="0" cy="0"/>
+        </a:xfrm>
+      </p:grpSpPr>
       <p:sp>
         <p:nvSpPr>
           <p:cNvPr id="2" name="Title 1"/>
@@ -38845,7 +39165,7 @@
           <a:noFill/>
         </p:spPr>
         <p:txBody>
-          <a:bodyPr wrap="square" lIns="0" rIns="0" tIns="0" bIns="0" anchor="t">
+          <a:bodyPr wrap="square" lIns="0" tIns="0" rIns="0" bIns="0" anchor="t">
             <a:spAutoFit/>
           </a:bodyPr>
           <a:lstStyle/>
@@ -38908,6 +39228,7 @@
           <a:lstStyle/>
           <a:p>
             <a:pPr algn="ctr"/>
+            <a:endParaRPr/>
           </a:p>
         </p:txBody>
       </p:sp>
@@ -38928,7 +39249,7 @@
           <a:noFill/>
         </p:spPr>
         <p:txBody>
-          <a:bodyPr wrap="square" lIns="0" rIns="0" tIns="0" bIns="0" anchor="t">
+          <a:bodyPr wrap="square" lIns="0" tIns="0" rIns="0" bIns="0" anchor="t">
             <a:spAutoFit/>
           </a:bodyPr>
           <a:lstStyle/>
@@ -38967,7 +39288,7 @@
           <a:noFill/>
         </p:spPr>
         <p:txBody>
-          <a:bodyPr wrap="square" lIns="0" rIns="0" tIns="0" bIns="0" anchor="t">
+          <a:bodyPr wrap="square" lIns="0" tIns="0" rIns="0" bIns="0" anchor="t">
             <a:spAutoFit/>
           </a:bodyPr>
           <a:lstStyle/>
@@ -38993,6 +39314,19 @@
                 <a:spcPct val="125000"/>
               </a:lnSpc>
             </a:pPr>
+            <a:endParaRPr sz="1300" b="0" i="0">
+              <a:solidFill>
+                <a:srgbClr val="E6E8EB"/>
+              </a:solidFill>
+              <a:latin typeface="Consolas"/>
+            </a:endParaRPr>
+          </a:p>
+          <a:p>
+            <a:pPr algn="l">
+              <a:lnSpc>
+                <a:spcPct val="125000"/>
+              </a:lnSpc>
+            </a:pPr>
             <a:r>
               <a:rPr sz="1300" b="0" i="0">
                 <a:solidFill>
@@ -39000,7 +39334,7 @@
                 </a:solidFill>
                 <a:latin typeface="Consolas"/>
               </a:rPr>
-              <a:t/>
+              <a:t>INTERFACE I_AlarmHandler</a:t>
             </a:r>
           </a:p>
           <a:p>
@@ -39009,6 +39343,19 @@
                 <a:spcPct val="125000"/>
               </a:lnSpc>
             </a:pPr>
+            <a:endParaRPr sz="1300" b="0" i="0">
+              <a:solidFill>
+                <a:srgbClr val="E6E8EB"/>
+              </a:solidFill>
+              <a:latin typeface="Consolas"/>
+            </a:endParaRPr>
+          </a:p>
+          <a:p>
+            <a:pPr algn="l">
+              <a:lnSpc>
+                <a:spcPct val="125000"/>
+              </a:lnSpc>
+            </a:pPr>
             <a:r>
               <a:rPr sz="1300" b="0" i="0">
                 <a:solidFill>
@@ -39016,7 +39363,7 @@
                 </a:solidFill>
                 <a:latin typeface="Consolas"/>
               </a:rPr>
-              <a:t>INTERFACE I_AlarmHandler</a:t>
+              <a:t>PROPERTY IsActive : BOOL    // is an alarm currently latched?</a:t>
             </a:r>
           </a:p>
           <a:p>
@@ -39032,7 +39379,7 @@
                 </a:solidFill>
                 <a:latin typeface="Consolas"/>
               </a:rPr>
-              <a:t/>
+              <a:t>PROPERTY StopsLine : BOOL   // should this alarm stop the line?</a:t>
             </a:r>
           </a:p>
           <a:p>
@@ -39048,7 +39395,7 @@
                 </a:solidFill>
                 <a:latin typeface="Consolas"/>
               </a:rPr>
-              <a:t>PROPERTY IsActive : BOOL    // is an alarm currently latched?</a:t>
+              <a:t>                            // (TRUE for line faults, FALSE for quality flags)</a:t>
             </a:r>
           </a:p>
           <a:p>
@@ -39057,6 +39404,19 @@
                 <a:spcPct val="125000"/>
               </a:lnSpc>
             </a:pPr>
+            <a:endParaRPr sz="1300" b="0" i="0">
+              <a:solidFill>
+                <a:srgbClr val="E6E8EB"/>
+              </a:solidFill>
+              <a:latin typeface="Consolas"/>
+            </a:endParaRPr>
+          </a:p>
+          <a:p>
+            <a:pPr algn="l">
+              <a:lnSpc>
+                <a:spcPct val="125000"/>
+              </a:lnSpc>
+            </a:pPr>
             <a:r>
               <a:rPr sz="1300" b="0" i="0">
                 <a:solidFill>
@@ -39064,7 +39424,7 @@
                 </a:solidFill>
                 <a:latin typeface="Consolas"/>
               </a:rPr>
-              <a:t>PROPERTY StopsLine : BOOL   // should this alarm stop the line?</a:t>
+              <a:t>METHOD Raise</a:t>
             </a:r>
           </a:p>
           <a:p>
@@ -39080,7 +39440,7 @@
                 </a:solidFill>
                 <a:latin typeface="Consolas"/>
               </a:rPr>
-              <a:t>                            // (TRUE for line faults, FALSE for quality flags)</a:t>
+              <a:t>VAR_INPUT</a:t>
             </a:r>
           </a:p>
           <a:p>
@@ -39096,7 +39456,7 @@
                 </a:solidFill>
                 <a:latin typeface="Consolas"/>
               </a:rPr>
-              <a:t/>
+              <a:t>    Code   : INT;</a:t>
             </a:r>
           </a:p>
           <a:p>
@@ -39112,7 +39472,7 @@
                 </a:solidFill>
                 <a:latin typeface="Consolas"/>
               </a:rPr>
-              <a:t>METHOD Raise</a:t>
+              <a:t>    Text   : STRING(80);</a:t>
             </a:r>
           </a:p>
           <a:p>
@@ -39128,7 +39488,7 @@
                 </a:solidFill>
                 <a:latin typeface="Consolas"/>
               </a:rPr>
-              <a:t>VAR_INPUT</a:t>
+              <a:t>END_VAR</a:t>
             </a:r>
           </a:p>
           <a:p>
@@ -39137,6 +39497,19 @@
                 <a:spcPct val="125000"/>
               </a:lnSpc>
             </a:pPr>
+            <a:endParaRPr sz="1300" b="0" i="0">
+              <a:solidFill>
+                <a:srgbClr val="E6E8EB"/>
+              </a:solidFill>
+              <a:latin typeface="Consolas"/>
+            </a:endParaRPr>
+          </a:p>
+          <a:p>
+            <a:pPr algn="l">
+              <a:lnSpc>
+                <a:spcPct val="125000"/>
+              </a:lnSpc>
+            </a:pPr>
             <a:r>
               <a:rPr sz="1300" b="0" i="0">
                 <a:solidFill>
@@ -39144,7 +39517,7 @@
                 </a:solidFill>
                 <a:latin typeface="Consolas"/>
               </a:rPr>
-              <a:t>    Code   : INT;</a:t>
+              <a:t>METHOD Acknowledge</a:t>
             </a:r>
           </a:p>
           <a:p>
@@ -39160,7 +39533,7 @@
                 </a:solidFill>
                 <a:latin typeface="Consolas"/>
               </a:rPr>
-              <a:t>    Text   : STRING(80);</a:t>
+              <a:t>END_METHOD</a:t>
             </a:r>
           </a:p>
           <a:p>
@@ -39169,79 +39542,12 @@
                 <a:spcPct val="125000"/>
               </a:lnSpc>
             </a:pPr>
-            <a:r>
-              <a:rPr sz="1300" b="0" i="0">
-                <a:solidFill>
-                  <a:srgbClr val="E6E8EB"/>
-                </a:solidFill>
-                <a:latin typeface="Consolas"/>
-              </a:rPr>
-              <a:t>END_VAR</a:t>
-            </a:r>
-          </a:p>
-          <a:p>
-            <a:pPr algn="l">
-              <a:lnSpc>
-                <a:spcPct val="125000"/>
-              </a:lnSpc>
-            </a:pPr>
-            <a:r>
-              <a:rPr sz="1300" b="0" i="0">
-                <a:solidFill>
-                  <a:srgbClr val="E6E8EB"/>
-                </a:solidFill>
-                <a:latin typeface="Consolas"/>
-              </a:rPr>
-              <a:t/>
-            </a:r>
-          </a:p>
-          <a:p>
-            <a:pPr algn="l">
-              <a:lnSpc>
-                <a:spcPct val="125000"/>
-              </a:lnSpc>
-            </a:pPr>
-            <a:r>
-              <a:rPr sz="1300" b="0" i="0">
-                <a:solidFill>
-                  <a:srgbClr val="E6E8EB"/>
-                </a:solidFill>
-                <a:latin typeface="Consolas"/>
-              </a:rPr>
-              <a:t>METHOD Acknowledge</a:t>
-            </a:r>
-          </a:p>
-          <a:p>
-            <a:pPr algn="l">
-              <a:lnSpc>
-                <a:spcPct val="125000"/>
-              </a:lnSpc>
-            </a:pPr>
-            <a:r>
-              <a:rPr sz="1300" b="0" i="0">
-                <a:solidFill>
-                  <a:srgbClr val="E6E8EB"/>
-                </a:solidFill>
-                <a:latin typeface="Consolas"/>
-              </a:rPr>
-              <a:t>END_METHOD</a:t>
-            </a:r>
-          </a:p>
-          <a:p>
-            <a:pPr algn="l">
-              <a:lnSpc>
-                <a:spcPct val="125000"/>
-              </a:lnSpc>
-            </a:pPr>
-            <a:r>
-              <a:rPr sz="1300" b="0" i="0">
-                <a:solidFill>
-                  <a:srgbClr val="E6E8EB"/>
-                </a:solidFill>
-                <a:latin typeface="Consolas"/>
-              </a:rPr>
-              <a:t/>
-            </a:r>
+            <a:endParaRPr sz="1300" b="0" i="0">
+              <a:solidFill>
+                <a:srgbClr val="E6E8EB"/>
+              </a:solidFill>
+              <a:latin typeface="Consolas"/>
+            </a:endParaRPr>
           </a:p>
           <a:p>
             <a:pPr algn="l">
@@ -39302,7 +39608,7 @@
 </file>
 
 <file path=ppt/slides/slide43.xml><?xml version="1.0" encoding="utf-8"?>
-<p:sld xmlns:a="http://schemas.openxmlformats.org/drawingml/2006/main" xmlns:p="http://schemas.openxmlformats.org/presentationml/2006/main" xmlns:r="http://schemas.openxmlformats.org/officeDocument/2006/relationships">
+<p:sld xmlns:a="http://schemas.openxmlformats.org/drawingml/2006/main" xmlns:r="http://schemas.openxmlformats.org/officeDocument/2006/relationships" xmlns:p="http://schemas.openxmlformats.org/presentationml/2006/main">
   <p:cSld>
     <p:spTree>
       <p:nvGrpSpPr>
@@ -39310,7 +39616,14 @@
         <p:cNvGrpSpPr/>
         <p:nvPr/>
       </p:nvGrpSpPr>
-      <p:grpSpPr/>
+      <p:grpSpPr>
+        <a:xfrm>
+          <a:off x="0" y="0"/>
+          <a:ext cx="0" cy="0"/>
+          <a:chOff x="0" y="0"/>
+          <a:chExt cx="0" cy="0"/>
+        </a:xfrm>
+      </p:grpSpPr>
       <p:sp>
         <p:nvSpPr>
           <p:cNvPr id="2" name="Title 1"/>
@@ -39349,7 +39662,7 @@
           <a:noFill/>
         </p:spPr>
         <p:txBody>
-          <a:bodyPr wrap="square" lIns="0" rIns="0" tIns="0" bIns="0" anchor="t">
+          <a:bodyPr wrap="square" lIns="0" tIns="0" rIns="0" bIns="0" anchor="t">
             <a:spAutoFit/>
           </a:bodyPr>
           <a:lstStyle/>
@@ -39412,6 +39725,7 @@
           <a:lstStyle/>
           <a:p>
             <a:pPr algn="ctr"/>
+            <a:endParaRPr/>
           </a:p>
         </p:txBody>
       </p:sp>
@@ -39432,7 +39746,7 @@
           <a:noFill/>
         </p:spPr>
         <p:txBody>
-          <a:bodyPr wrap="square" lIns="0" rIns="0" tIns="0" bIns="0" anchor="t">
+          <a:bodyPr wrap="square" lIns="0" tIns="0" rIns="0" bIns="0" anchor="t">
             <a:spAutoFit/>
           </a:bodyPr>
           <a:lstStyle/>
@@ -39471,7 +39785,7 @@
           <a:noFill/>
         </p:spPr>
         <p:txBody>
-          <a:bodyPr wrap="square" lIns="0" rIns="0" tIns="0" bIns="0">
+          <a:bodyPr wrap="square" lIns="0" tIns="0" rIns="0" bIns="0">
             <a:spAutoFit/>
           </a:bodyPr>
           <a:lstStyle/>
@@ -39639,7 +39953,7 @@
           <a:noFill/>
         </p:spPr>
         <p:txBody>
-          <a:bodyPr wrap="square" lIns="0" rIns="0" tIns="0" bIns="0" anchor="t">
+          <a:bodyPr wrap="square" lIns="0" tIns="0" rIns="0" bIns="0" anchor="t">
             <a:spAutoFit/>
           </a:bodyPr>
           <a:lstStyle/>
@@ -39678,7 +39992,7 @@
           <a:noFill/>
         </p:spPr>
         <p:txBody>
-          <a:bodyPr wrap="square" lIns="0" rIns="0" tIns="0" bIns="0">
+          <a:bodyPr wrap="square" lIns="0" tIns="0" rIns="0" bIns="0">
             <a:spAutoFit/>
           </a:bodyPr>
           <a:lstStyle/>
@@ -39838,7 +40152,7 @@
 </file>
 
 <file path=ppt/slides/slide44.xml><?xml version="1.0" encoding="utf-8"?>
-<p:sld xmlns:a="http://schemas.openxmlformats.org/drawingml/2006/main" xmlns:p="http://schemas.openxmlformats.org/presentationml/2006/main" xmlns:r="http://schemas.openxmlformats.org/officeDocument/2006/relationships">
+<p:sld xmlns:a="http://schemas.openxmlformats.org/drawingml/2006/main" xmlns:r="http://schemas.openxmlformats.org/officeDocument/2006/relationships" xmlns:p="http://schemas.openxmlformats.org/presentationml/2006/main">
   <p:cSld>
     <p:spTree>
       <p:nvGrpSpPr>
@@ -39846,7 +40160,14 @@
         <p:cNvGrpSpPr/>
         <p:nvPr/>
       </p:nvGrpSpPr>
-      <p:grpSpPr/>
+      <p:grpSpPr>
+        <a:xfrm>
+          <a:off x="0" y="0"/>
+          <a:ext cx="0" cy="0"/>
+          <a:chOff x="0" y="0"/>
+          <a:chExt cx="0" cy="0"/>
+        </a:xfrm>
+      </p:grpSpPr>
       <p:sp>
         <p:nvSpPr>
           <p:cNvPr id="2" name="Title 1"/>
@@ -39885,7 +40206,7 @@
           <a:noFill/>
         </p:spPr>
         <p:txBody>
-          <a:bodyPr wrap="square" lIns="0" rIns="0" tIns="0" bIns="0" anchor="t">
+          <a:bodyPr wrap="square" lIns="0" tIns="0" rIns="0" bIns="0" anchor="t">
             <a:spAutoFit/>
           </a:bodyPr>
           <a:lstStyle/>
@@ -39948,6 +40269,7 @@
           <a:lstStyle/>
           <a:p>
             <a:pPr algn="ctr"/>
+            <a:endParaRPr/>
           </a:p>
         </p:txBody>
       </p:sp>
@@ -39968,7 +40290,7 @@
           <a:noFill/>
         </p:spPr>
         <p:txBody>
-          <a:bodyPr wrap="square" lIns="0" rIns="0" tIns="0" bIns="0" anchor="t">
+          <a:bodyPr wrap="square" lIns="0" tIns="0" rIns="0" bIns="0" anchor="t">
             <a:spAutoFit/>
           </a:bodyPr>
           <a:lstStyle/>
@@ -40007,7 +40329,7 @@
           <a:noFill/>
         </p:spPr>
         <p:txBody>
-          <a:bodyPr wrap="square" lIns="0" rIns="0" tIns="0" bIns="0" anchor="t">
+          <a:bodyPr wrap="square" lIns="0" tIns="0" rIns="0" bIns="0" anchor="t">
             <a:spAutoFit/>
           </a:bodyPr>
           <a:lstStyle/>
@@ -40033,6 +40355,19 @@
                 <a:spcPct val="125000"/>
               </a:lnSpc>
             </a:pPr>
+            <a:endParaRPr sz="1200" b="0" i="0">
+              <a:solidFill>
+                <a:srgbClr val="E6E8EB"/>
+              </a:solidFill>
+              <a:latin typeface="Consolas"/>
+            </a:endParaRPr>
+          </a:p>
+          <a:p>
+            <a:pPr algn="l">
+              <a:lnSpc>
+                <a:spcPct val="125000"/>
+              </a:lnSpc>
+            </a:pPr>
             <a:r>
               <a:rPr sz="1200" b="0" i="0">
                 <a:solidFill>
@@ -40040,7 +40375,7 @@
                 </a:solidFill>
                 <a:latin typeface="Consolas"/>
               </a:rPr>
-              <a:t/>
+              <a:t>VAR</a:t>
             </a:r>
           </a:p>
           <a:p>
@@ -40056,7 +40391,7 @@
                 </a:solidFill>
                 <a:latin typeface="Consolas"/>
               </a:rPr>
-              <a:t>VAR</a:t>
+              <a:t>    Mode    : REFERENCE TO FB_ModeManager;</a:t>
             </a:r>
           </a:p>
           <a:p>
@@ -40072,7 +40407,7 @@
                 </a:solidFill>
                 <a:latin typeface="Consolas"/>
               </a:rPr>
-              <a:t>    Mode    : REFERENCE TO FB_ModeManager;</a:t>
+              <a:t>    Alarm   : I_AlarmHandler;        // &lt;-- depends on the INTERFACE</a:t>
             </a:r>
           </a:p>
           <a:p>
@@ -40088,7 +40423,7 @@
                 </a:solidFill>
                 <a:latin typeface="Consolas"/>
               </a:rPr>
-              <a:t>    Alarm   : I_AlarmHandler;        // &lt;-- depends on the INTERFACE</a:t>
+              <a:t>    Logger  : I_DataLogger;          // &lt;-- same</a:t>
             </a:r>
           </a:p>
           <a:p>
@@ -40104,7 +40439,7 @@
                 </a:solidFill>
                 <a:latin typeface="Consolas"/>
               </a:rPr>
-              <a:t>    Logger  : I_DataLogger;          // &lt;-- same</a:t>
+              <a:t>    Seq     : FB_StepSequencer;</a:t>
             </a:r>
           </a:p>
           <a:p>
@@ -40120,7 +40455,7 @@
                 </a:solidFill>
                 <a:latin typeface="Consolas"/>
               </a:rPr>
-              <a:t>    Seq     : FB_StepSequencer;</a:t>
+              <a:t>END_VAR</a:t>
             </a:r>
           </a:p>
           <a:p>
@@ -40129,6 +40464,19 @@
                 <a:spcPct val="125000"/>
               </a:lnSpc>
             </a:pPr>
+            <a:endParaRPr sz="1200" b="0" i="0">
+              <a:solidFill>
+                <a:srgbClr val="E6E8EB"/>
+              </a:solidFill>
+              <a:latin typeface="Consolas"/>
+            </a:endParaRPr>
+          </a:p>
+          <a:p>
+            <a:pPr algn="l">
+              <a:lnSpc>
+                <a:spcPct val="125000"/>
+              </a:lnSpc>
+            </a:pPr>
             <a:r>
               <a:rPr sz="1200" b="0" i="0">
                 <a:solidFill>
@@ -40136,6 +40484,118 @@
                 </a:solidFill>
                 <a:latin typeface="Consolas"/>
               </a:rPr>
+              <a:t>METHOD FB_init : BOOL</a:t>
+            </a:r>
+          </a:p>
+          <a:p>
+            <a:pPr algn="l">
+              <a:lnSpc>
+                <a:spcPct val="125000"/>
+              </a:lnSpc>
+            </a:pPr>
+            <a:r>
+              <a:rPr sz="1200" b="0" i="0">
+                <a:solidFill>
+                  <a:srgbClr val="E6E8EB"/>
+                </a:solidFill>
+                <a:latin typeface="Consolas"/>
+              </a:rPr>
+              <a:t>VAR_INPUT</a:t>
+            </a:r>
+          </a:p>
+          <a:p>
+            <a:pPr algn="l">
+              <a:lnSpc>
+                <a:spcPct val="125000"/>
+              </a:lnSpc>
+            </a:pPr>
+            <a:r>
+              <a:rPr sz="1200" b="0" i="0">
+                <a:solidFill>
+                  <a:srgbClr val="E6E8EB"/>
+                </a:solidFill>
+                <a:latin typeface="Consolas"/>
+              </a:rPr>
+              <a:t>    bInitRetains  : BOOL;</a:t>
+            </a:r>
+          </a:p>
+          <a:p>
+            <a:pPr algn="l">
+              <a:lnSpc>
+                <a:spcPct val="125000"/>
+              </a:lnSpc>
+            </a:pPr>
+            <a:r>
+              <a:rPr sz="1200" b="0" i="0">
+                <a:solidFill>
+                  <a:srgbClr val="E6E8EB"/>
+                </a:solidFill>
+                <a:latin typeface="Consolas"/>
+              </a:rPr>
+              <a:t>    bInCopyCode   : BOOL;</a:t>
+            </a:r>
+          </a:p>
+          <a:p>
+            <a:pPr algn="l">
+              <a:lnSpc>
+                <a:spcPct val="125000"/>
+              </a:lnSpc>
+            </a:pPr>
+            <a:r>
+              <a:rPr sz="1200" b="0" i="0">
+                <a:solidFill>
+                  <a:srgbClr val="E6E8EB"/>
+                </a:solidFill>
+                <a:latin typeface="Consolas"/>
+              </a:rPr>
+              <a:t>    ModeRef       : REFERENCE TO FB_ModeManager;</a:t>
+            </a:r>
+          </a:p>
+          <a:p>
+            <a:pPr algn="l">
+              <a:lnSpc>
+                <a:spcPct val="125000"/>
+              </a:lnSpc>
+            </a:pPr>
+            <a:r>
+              <a:rPr sz="1200" b="0" i="0">
+                <a:solidFill>
+                  <a:srgbClr val="E6E8EB"/>
+                </a:solidFill>
+                <a:latin typeface="Consolas"/>
+              </a:rPr>
+              <a:t>    AlarmHandler  : I_AlarmHandler;     // &lt;-- injected at construction</a:t>
+            </a:r>
+          </a:p>
+          <a:p>
+            <a:pPr algn="l">
+              <a:lnSpc>
+                <a:spcPct val="125000"/>
+              </a:lnSpc>
+            </a:pPr>
+            <a:r>
+              <a:rPr sz="1200" b="0" i="0">
+                <a:solidFill>
+                  <a:srgbClr val="E6E8EB"/>
+                </a:solidFill>
+                <a:latin typeface="Consolas"/>
+              </a:rPr>
+              <a:t>    DataLogger    : I_DataLogger;       // &lt;-- injected at construction</a:t>
+            </a:r>
+          </a:p>
+          <a:p>
+            <a:pPr algn="l">
+              <a:lnSpc>
+                <a:spcPct val="125000"/>
+              </a:lnSpc>
+            </a:pPr>
+            <a:r>
+              <a:rPr sz="1200" b="0" i="0">
+                <a:solidFill>
+                  <a:srgbClr val="E6E8EB"/>
+                </a:solidFill>
+                <a:latin typeface="Consolas"/>
+              </a:rPr>
               <a:t>END_VAR</a:t>
             </a:r>
           </a:p>
@@ -40152,7 +40612,7 @@
                 </a:solidFill>
                 <a:latin typeface="Consolas"/>
               </a:rPr>
-              <a:t/>
+              <a:t>THIS^.Mode  REF= ModeRef;</a:t>
             </a:r>
           </a:p>
           <a:p>
@@ -40168,7 +40628,7 @@
                 </a:solidFill>
                 <a:latin typeface="Consolas"/>
               </a:rPr>
-              <a:t>METHOD FB_init : BOOL</a:t>
+              <a:t>THIS^.Alarm := AlarmHandler;</a:t>
             </a:r>
           </a:p>
           <a:p>
@@ -40184,7 +40644,7 @@
                 </a:solidFill>
                 <a:latin typeface="Consolas"/>
               </a:rPr>
-              <a:t>VAR_INPUT</a:t>
+              <a:t>THIS^.Logger := DataLogger;</a:t>
             </a:r>
           </a:p>
           <a:p>
@@ -40193,159 +40653,12 @@
                 <a:spcPct val="125000"/>
               </a:lnSpc>
             </a:pPr>
-            <a:r>
-              <a:rPr sz="1200" b="0" i="0">
-                <a:solidFill>
-                  <a:srgbClr val="E6E8EB"/>
-                </a:solidFill>
-                <a:latin typeface="Consolas"/>
-              </a:rPr>
-              <a:t>    bInitRetains  : BOOL;</a:t>
-            </a:r>
-          </a:p>
-          <a:p>
-            <a:pPr algn="l">
-              <a:lnSpc>
-                <a:spcPct val="125000"/>
-              </a:lnSpc>
-            </a:pPr>
-            <a:r>
-              <a:rPr sz="1200" b="0" i="0">
-                <a:solidFill>
-                  <a:srgbClr val="E6E8EB"/>
-                </a:solidFill>
-                <a:latin typeface="Consolas"/>
-              </a:rPr>
-              <a:t>    bInCopyCode   : BOOL;</a:t>
-            </a:r>
-          </a:p>
-          <a:p>
-            <a:pPr algn="l">
-              <a:lnSpc>
-                <a:spcPct val="125000"/>
-              </a:lnSpc>
-            </a:pPr>
-            <a:r>
-              <a:rPr sz="1200" b="0" i="0">
-                <a:solidFill>
-                  <a:srgbClr val="E6E8EB"/>
-                </a:solidFill>
-                <a:latin typeface="Consolas"/>
-              </a:rPr>
-              <a:t>    ModeRef       : REFERENCE TO FB_ModeManager;</a:t>
-            </a:r>
-          </a:p>
-          <a:p>
-            <a:pPr algn="l">
-              <a:lnSpc>
-                <a:spcPct val="125000"/>
-              </a:lnSpc>
-            </a:pPr>
-            <a:r>
-              <a:rPr sz="1200" b="0" i="0">
-                <a:solidFill>
-                  <a:srgbClr val="E6E8EB"/>
-                </a:solidFill>
-                <a:latin typeface="Consolas"/>
-              </a:rPr>
-              <a:t>    AlarmHandler  : I_AlarmHandler;     // &lt;-- injected at construction</a:t>
-            </a:r>
-          </a:p>
-          <a:p>
-            <a:pPr algn="l">
-              <a:lnSpc>
-                <a:spcPct val="125000"/>
-              </a:lnSpc>
-            </a:pPr>
-            <a:r>
-              <a:rPr sz="1200" b="0" i="0">
-                <a:solidFill>
-                  <a:srgbClr val="E6E8EB"/>
-                </a:solidFill>
-                <a:latin typeface="Consolas"/>
-              </a:rPr>
-              <a:t>    DataLogger    : I_DataLogger;       // &lt;-- injected at construction</a:t>
-            </a:r>
-          </a:p>
-          <a:p>
-            <a:pPr algn="l">
-              <a:lnSpc>
-                <a:spcPct val="125000"/>
-              </a:lnSpc>
-            </a:pPr>
-            <a:r>
-              <a:rPr sz="1200" b="0" i="0">
-                <a:solidFill>
-                  <a:srgbClr val="E6E8EB"/>
-                </a:solidFill>
-                <a:latin typeface="Consolas"/>
-              </a:rPr>
-              <a:t>END_VAR</a:t>
-            </a:r>
-          </a:p>
-          <a:p>
-            <a:pPr algn="l">
-              <a:lnSpc>
-                <a:spcPct val="125000"/>
-              </a:lnSpc>
-            </a:pPr>
-            <a:r>
-              <a:rPr sz="1200" b="0" i="0">
-                <a:solidFill>
-                  <a:srgbClr val="E6E8EB"/>
-                </a:solidFill>
-                <a:latin typeface="Consolas"/>
-              </a:rPr>
-              <a:t>THIS^.Mode  REF= ModeRef;</a:t>
-            </a:r>
-          </a:p>
-          <a:p>
-            <a:pPr algn="l">
-              <a:lnSpc>
-                <a:spcPct val="125000"/>
-              </a:lnSpc>
-            </a:pPr>
-            <a:r>
-              <a:rPr sz="1200" b="0" i="0">
-                <a:solidFill>
-                  <a:srgbClr val="E6E8EB"/>
-                </a:solidFill>
-                <a:latin typeface="Consolas"/>
-              </a:rPr>
-              <a:t>THIS^.Alarm := AlarmHandler;</a:t>
-            </a:r>
-          </a:p>
-          <a:p>
-            <a:pPr algn="l">
-              <a:lnSpc>
-                <a:spcPct val="125000"/>
-              </a:lnSpc>
-            </a:pPr>
-            <a:r>
-              <a:rPr sz="1200" b="0" i="0">
-                <a:solidFill>
-                  <a:srgbClr val="E6E8EB"/>
-                </a:solidFill>
-                <a:latin typeface="Consolas"/>
-              </a:rPr>
-              <a:t>THIS^.Logger := DataLogger;</a:t>
-            </a:r>
-          </a:p>
-          <a:p>
-            <a:pPr algn="l">
-              <a:lnSpc>
-                <a:spcPct val="125000"/>
-              </a:lnSpc>
-            </a:pPr>
-            <a:r>
-              <a:rPr sz="1200" b="0" i="0">
-                <a:solidFill>
-                  <a:srgbClr val="E6E8EB"/>
-                </a:solidFill>
-                <a:latin typeface="Consolas"/>
-              </a:rPr>
-              <a:t/>
-            </a:r>
+            <a:endParaRPr sz="1200" b="0" i="0">
+              <a:solidFill>
+                <a:srgbClr val="E6E8EB"/>
+              </a:solidFill>
+              <a:latin typeface="Consolas"/>
+            </a:endParaRPr>
           </a:p>
           <a:p>
             <a:pPr algn="l">
@@ -40390,7 +40703,7 @@
 </file>
 
 <file path=ppt/slides/slide45.xml><?xml version="1.0" encoding="utf-8"?>
-<p:sld xmlns:a="http://schemas.openxmlformats.org/drawingml/2006/main" xmlns:p="http://schemas.openxmlformats.org/presentationml/2006/main" xmlns:r="http://schemas.openxmlformats.org/officeDocument/2006/relationships">
+<p:sld xmlns:a="http://schemas.openxmlformats.org/drawingml/2006/main" xmlns:r="http://schemas.openxmlformats.org/officeDocument/2006/relationships" xmlns:p="http://schemas.openxmlformats.org/presentationml/2006/main">
   <p:cSld>
     <p:spTree>
       <p:nvGrpSpPr>
@@ -40398,7 +40711,14 @@
         <p:cNvGrpSpPr/>
         <p:nvPr/>
       </p:nvGrpSpPr>
-      <p:grpSpPr/>
+      <p:grpSpPr>
+        <a:xfrm>
+          <a:off x="0" y="0"/>
+          <a:ext cx="0" cy="0"/>
+          <a:chOff x="0" y="0"/>
+          <a:chExt cx="0" cy="0"/>
+        </a:xfrm>
+      </p:grpSpPr>
       <p:sp>
         <p:nvSpPr>
           <p:cNvPr id="2" name="Title 1"/>
@@ -40437,7 +40757,7 @@
           <a:noFill/>
         </p:spPr>
         <p:txBody>
-          <a:bodyPr wrap="square" lIns="0" rIns="0" tIns="0" bIns="0" anchor="t">
+          <a:bodyPr wrap="square" lIns="0" tIns="0" rIns="0" bIns="0" anchor="t">
             <a:spAutoFit/>
           </a:bodyPr>
           <a:lstStyle/>
@@ -40500,6 +40820,7 @@
           <a:lstStyle/>
           <a:p>
             <a:pPr algn="ctr"/>
+            <a:endParaRPr/>
           </a:p>
         </p:txBody>
       </p:sp>
@@ -40520,7 +40841,7 @@
           <a:noFill/>
         </p:spPr>
         <p:txBody>
-          <a:bodyPr wrap="square" lIns="0" rIns="0" tIns="0" bIns="0" anchor="t">
+          <a:bodyPr wrap="square" lIns="0" tIns="0" rIns="0" bIns="0" anchor="t">
             <a:spAutoFit/>
           </a:bodyPr>
           <a:lstStyle/>
@@ -40559,7 +40880,7 @@
           <a:noFill/>
         </p:spPr>
         <p:txBody>
-          <a:bodyPr wrap="square" lIns="0" rIns="0" tIns="0" bIns="0" anchor="t">
+          <a:bodyPr wrap="square" lIns="0" tIns="0" rIns="0" bIns="0" anchor="t">
             <a:spAutoFit/>
           </a:bodyPr>
           <a:lstStyle/>
@@ -40665,15 +40986,12 @@
                 <a:spcPct val="125000"/>
               </a:lnSpc>
             </a:pPr>
-            <a:r>
-              <a:rPr sz="1200" b="0" i="0">
-                <a:solidFill>
-                  <a:srgbClr val="E6E8EB"/>
-                </a:solidFill>
-                <a:latin typeface="Consolas"/>
-              </a:rPr>
-              <a:t/>
-            </a:r>
+            <a:endParaRPr sz="1200" b="0" i="0">
+              <a:solidFill>
+                <a:srgbClr val="E6E8EB"/>
+              </a:solidFill>
+              <a:latin typeface="Consolas"/>
+            </a:endParaRPr>
           </a:p>
           <a:p>
             <a:pPr algn="l">
@@ -40926,7 +41244,7 @@
 </file>
 
 <file path=ppt/slides/slide46.xml><?xml version="1.0" encoding="utf-8"?>
-<p:sld xmlns:a="http://schemas.openxmlformats.org/drawingml/2006/main" xmlns:p="http://schemas.openxmlformats.org/presentationml/2006/main" xmlns:r="http://schemas.openxmlformats.org/officeDocument/2006/relationships">
+<p:sld xmlns:a="http://schemas.openxmlformats.org/drawingml/2006/main" xmlns:r="http://schemas.openxmlformats.org/officeDocument/2006/relationships" xmlns:p="http://schemas.openxmlformats.org/presentationml/2006/main">
   <p:cSld>
     <p:spTree>
       <p:nvGrpSpPr>
@@ -40934,7 +41252,14 @@
         <p:cNvGrpSpPr/>
         <p:nvPr/>
       </p:nvGrpSpPr>
-      <p:grpSpPr/>
+      <p:grpSpPr>
+        <a:xfrm>
+          <a:off x="0" y="0"/>
+          <a:ext cx="0" cy="0"/>
+          <a:chOff x="0" y="0"/>
+          <a:chExt cx="0" cy="0"/>
+        </a:xfrm>
+      </p:grpSpPr>
       <p:sp>
         <p:nvSpPr>
           <p:cNvPr id="2" name="Text Placeholder 1"/>
@@ -40942,7 +41267,7 @@
             <a:spLocks noGrp="1"/>
           </p:cNvSpPr>
           <p:nvPr>
-            <p:ph type="body" idx="15" sz="quarter"/>
+            <p:ph type="body" sz="quarter" idx="15"/>
           </p:nvPr>
         </p:nvSpPr>
         <p:spPr/>
@@ -41171,7 +41496,7 @@
           <a:noFill/>
         </p:spPr>
         <p:txBody>
-          <a:bodyPr wrap="square" lIns="0" rIns="0" tIns="0" bIns="0" anchor="t">
+          <a:bodyPr wrap="square" lIns="0" tIns="0" rIns="0" bIns="0" anchor="t">
             <a:spAutoFit/>
           </a:bodyPr>
           <a:lstStyle/>
@@ -41202,7 +41527,7 @@
 </file>
 
 <file path=ppt/slides/slide47.xml><?xml version="1.0" encoding="utf-8"?>
-<p:sld xmlns:a="http://schemas.openxmlformats.org/drawingml/2006/main" xmlns:p="http://schemas.openxmlformats.org/presentationml/2006/main" xmlns:r="http://schemas.openxmlformats.org/officeDocument/2006/relationships">
+<p:sld xmlns:a="http://schemas.openxmlformats.org/drawingml/2006/main" xmlns:r="http://schemas.openxmlformats.org/officeDocument/2006/relationships" xmlns:p="http://schemas.openxmlformats.org/presentationml/2006/main">
   <p:cSld>
     <p:spTree>
       <p:nvGrpSpPr>
@@ -41210,7 +41535,14 @@
         <p:cNvGrpSpPr/>
         <p:nvPr/>
       </p:nvGrpSpPr>
-      <p:grpSpPr/>
+      <p:grpSpPr>
+        <a:xfrm>
+          <a:off x="0" y="0"/>
+          <a:ext cx="0" cy="0"/>
+          <a:chOff x="0" y="0"/>
+          <a:chExt cx="0" cy="0"/>
+        </a:xfrm>
+      </p:grpSpPr>
       <p:sp>
         <p:nvSpPr>
           <p:cNvPr id="2" name="Title 1"/>
@@ -41249,7 +41581,7 @@
           <a:noFill/>
         </p:spPr>
         <p:txBody>
-          <a:bodyPr wrap="square" lIns="0" rIns="0" tIns="0" bIns="0" anchor="t">
+          <a:bodyPr wrap="square" lIns="0" tIns="0" rIns="0" bIns="0" anchor="t">
             <a:spAutoFit/>
           </a:bodyPr>
           <a:lstStyle/>
@@ -41312,6 +41644,7 @@
           <a:lstStyle/>
           <a:p>
             <a:pPr algn="ctr"/>
+            <a:endParaRPr/>
           </a:p>
         </p:txBody>
       </p:sp>
@@ -41356,6 +41689,7 @@
           <a:lstStyle/>
           <a:p>
             <a:pPr algn="ctr"/>
+            <a:endParaRPr/>
           </a:p>
         </p:txBody>
       </p:sp>
@@ -41376,7 +41710,7 @@
           <a:noFill/>
         </p:spPr>
         <p:txBody>
-          <a:bodyPr wrap="square" lIns="0" rIns="0" tIns="0" bIns="0" anchor="t">
+          <a:bodyPr wrap="square" lIns="0" tIns="0" rIns="0" bIns="0" anchor="t">
             <a:spAutoFit/>
           </a:bodyPr>
           <a:lstStyle/>
@@ -41415,7 +41749,7 @@
           <a:noFill/>
         </p:spPr>
         <p:txBody>
-          <a:bodyPr wrap="square" lIns="0" rIns="0" tIns="0" bIns="0" anchor="t">
+          <a:bodyPr wrap="square" lIns="0" tIns="0" rIns="0" bIns="0" anchor="t">
             <a:spAutoFit/>
           </a:bodyPr>
           <a:lstStyle/>
@@ -41478,6 +41812,7 @@
           <a:lstStyle/>
           <a:p>
             <a:pPr algn="ctr"/>
+            <a:endParaRPr/>
           </a:p>
         </p:txBody>
       </p:sp>
@@ -41522,6 +41857,7 @@
           <a:lstStyle/>
           <a:p>
             <a:pPr algn="ctr"/>
+            <a:endParaRPr/>
           </a:p>
         </p:txBody>
       </p:sp>
@@ -41542,7 +41878,7 @@
           <a:noFill/>
         </p:spPr>
         <p:txBody>
-          <a:bodyPr wrap="square" lIns="0" rIns="0" tIns="0" bIns="0" anchor="t">
+          <a:bodyPr wrap="square" lIns="0" tIns="0" rIns="0" bIns="0" anchor="t">
             <a:spAutoFit/>
           </a:bodyPr>
           <a:lstStyle/>
@@ -41581,7 +41917,7 @@
           <a:noFill/>
         </p:spPr>
         <p:txBody>
-          <a:bodyPr wrap="square" lIns="0" rIns="0" tIns="0" bIns="0" anchor="t">
+          <a:bodyPr wrap="square" lIns="0" tIns="0" rIns="0" bIns="0" anchor="t">
             <a:spAutoFit/>
           </a:bodyPr>
           <a:lstStyle/>
@@ -41612,7 +41948,7 @@
 </file>
 
 <file path=ppt/slides/slide48.xml><?xml version="1.0" encoding="utf-8"?>
-<p:sld xmlns:a="http://schemas.openxmlformats.org/drawingml/2006/main" xmlns:p="http://schemas.openxmlformats.org/presentationml/2006/main" xmlns:r="http://schemas.openxmlformats.org/officeDocument/2006/relationships">
+<p:sld xmlns:a="http://schemas.openxmlformats.org/drawingml/2006/main" xmlns:r="http://schemas.openxmlformats.org/officeDocument/2006/relationships" xmlns:p="http://schemas.openxmlformats.org/presentationml/2006/main">
   <p:cSld>
     <p:spTree>
       <p:nvGrpSpPr>
@@ -41620,7 +41956,14 @@
         <p:cNvGrpSpPr/>
         <p:nvPr/>
       </p:nvGrpSpPr>
-      <p:grpSpPr/>
+      <p:grpSpPr>
+        <a:xfrm>
+          <a:off x="0" y="0"/>
+          <a:ext cx="0" cy="0"/>
+          <a:chOff x="0" y="0"/>
+          <a:chExt cx="0" cy="0"/>
+        </a:xfrm>
+      </p:grpSpPr>
       <p:sp>
         <p:nvSpPr>
           <p:cNvPr id="2" name="Title 1"/>
@@ -41659,7 +42002,7 @@
           <a:noFill/>
         </p:spPr>
         <p:txBody>
-          <a:bodyPr wrap="square" lIns="0" rIns="0" tIns="0" bIns="0" anchor="t">
+          <a:bodyPr wrap="square" lIns="0" tIns="0" rIns="0" bIns="0" anchor="t">
             <a:spAutoFit/>
           </a:bodyPr>
           <a:lstStyle/>
@@ -41698,7 +42041,7 @@
           <a:noFill/>
         </p:spPr>
         <p:txBody>
-          <a:bodyPr wrap="square" lIns="0" rIns="0" tIns="0" bIns="0" anchor="t">
+          <a:bodyPr wrap="square" lIns="0" tIns="0" rIns="0" bIns="0" anchor="t">
             <a:spAutoFit/>
           </a:bodyPr>
           <a:lstStyle/>
@@ -41737,7 +42080,7 @@
           <a:noFill/>
         </p:spPr>
         <p:txBody>
-          <a:bodyPr wrap="square" lIns="0" rIns="0" tIns="0" bIns="0" anchor="t">
+          <a:bodyPr wrap="square" lIns="0" tIns="0" rIns="0" bIns="0" anchor="t">
             <a:spAutoFit/>
           </a:bodyPr>
           <a:lstStyle/>
@@ -41800,6 +42143,7 @@
           <a:lstStyle/>
           <a:p>
             <a:pPr algn="ctr"/>
+            <a:endParaRPr/>
           </a:p>
         </p:txBody>
       </p:sp>
@@ -41820,7 +42164,7 @@
           <a:noFill/>
         </p:spPr>
         <p:txBody>
-          <a:bodyPr wrap="square" lIns="0" rIns="0" tIns="0" bIns="0">
+          <a:bodyPr wrap="square" lIns="0" tIns="0" rIns="0" bIns="0">
             <a:spAutoFit/>
           </a:bodyPr>
           <a:lstStyle/>
@@ -41925,7 +42269,7 @@
 </file>
 
 <file path=ppt/slides/slide49.xml><?xml version="1.0" encoding="utf-8"?>
-<p:sld xmlns:a="http://schemas.openxmlformats.org/drawingml/2006/main" xmlns:p="http://schemas.openxmlformats.org/presentationml/2006/main" xmlns:r="http://schemas.openxmlformats.org/officeDocument/2006/relationships">
+<p:sld xmlns:a="http://schemas.openxmlformats.org/drawingml/2006/main" xmlns:r="http://schemas.openxmlformats.org/officeDocument/2006/relationships" xmlns:p="http://schemas.openxmlformats.org/presentationml/2006/main">
   <p:cSld>
     <p:spTree>
       <p:nvGrpSpPr>
@@ -41933,7 +42277,14 @@
         <p:cNvGrpSpPr/>
         <p:nvPr/>
       </p:nvGrpSpPr>
-      <p:grpSpPr/>
+      <p:grpSpPr>
+        <a:xfrm>
+          <a:off x="0" y="0"/>
+          <a:ext cx="0" cy="0"/>
+          <a:chOff x="0" y="0"/>
+          <a:chExt cx="0" cy="0"/>
+        </a:xfrm>
+      </p:grpSpPr>
       <p:sp>
         <p:nvSpPr>
           <p:cNvPr id="3" name="Title 2"/>
@@ -41996,6 +42347,7 @@
           <a:lstStyle/>
           <a:p>
             <a:pPr algn="ctr"/>
+            <a:endParaRPr/>
           </a:p>
         </p:txBody>
       </p:sp>
@@ -42016,7 +42368,7 @@
           <a:noFill/>
         </p:spPr>
         <p:txBody>
-          <a:bodyPr wrap="square" lIns="0" rIns="0" tIns="0" bIns="0" anchor="t">
+          <a:bodyPr wrap="square" lIns="0" tIns="0" rIns="0" bIns="0" anchor="t">
             <a:spAutoFit/>
           </a:bodyPr>
           <a:lstStyle/>
@@ -42055,7 +42407,7 @@
           <a:noFill/>
         </p:spPr>
         <p:txBody>
-          <a:bodyPr wrap="square" lIns="0" rIns="0" tIns="0" bIns="0" anchor="t">
+          <a:bodyPr wrap="square" lIns="0" tIns="0" rIns="0" bIns="0" anchor="t">
             <a:spAutoFit/>
           </a:bodyPr>
           <a:lstStyle/>
@@ -42094,7 +42446,7 @@
           <a:noFill/>
         </p:spPr>
         <p:txBody>
-          <a:bodyPr wrap="square" lIns="0" rIns="0" tIns="0" bIns="0" anchor="t">
+          <a:bodyPr wrap="square" lIns="0" tIns="0" rIns="0" bIns="0" anchor="t">
             <a:spAutoFit/>
           </a:bodyPr>
           <a:lstStyle/>
@@ -42141,7 +42493,7 @@
 </file>
 
 <file path=ppt/slides/slide5.xml><?xml version="1.0" encoding="utf-8"?>
-<p:sld xmlns:a="http://schemas.openxmlformats.org/drawingml/2006/main" xmlns:p="http://schemas.openxmlformats.org/presentationml/2006/main" xmlns:r="http://schemas.openxmlformats.org/officeDocument/2006/relationships">
+<p:sld xmlns:a="http://schemas.openxmlformats.org/drawingml/2006/main" xmlns:r="http://schemas.openxmlformats.org/officeDocument/2006/relationships" xmlns:p="http://schemas.openxmlformats.org/presentationml/2006/main">
   <p:cSld>
     <p:spTree>
       <p:nvGrpSpPr>
@@ -42149,7 +42501,14 @@
         <p:cNvGrpSpPr/>
         <p:nvPr/>
       </p:nvGrpSpPr>
-      <p:grpSpPr/>
+      <p:grpSpPr>
+        <a:xfrm>
+          <a:off x="0" y="0"/>
+          <a:ext cx="0" cy="0"/>
+          <a:chOff x="0" y="0"/>
+          <a:chExt cx="0" cy="0"/>
+        </a:xfrm>
+      </p:grpSpPr>
       <p:sp>
         <p:nvSpPr>
           <p:cNvPr id="3" name="Title 2"/>
@@ -42212,6 +42571,7 @@
           <a:lstStyle/>
           <a:p>
             <a:pPr algn="ctr"/>
+            <a:endParaRPr/>
           </a:p>
         </p:txBody>
       </p:sp>
@@ -42232,7 +42592,7 @@
           <a:noFill/>
         </p:spPr>
         <p:txBody>
-          <a:bodyPr wrap="square" lIns="0" rIns="0" tIns="0" bIns="0" anchor="t">
+          <a:bodyPr wrap="square" lIns="0" tIns="0" rIns="0" bIns="0" anchor="t">
             <a:spAutoFit/>
           </a:bodyPr>
           <a:lstStyle/>
@@ -42271,7 +42631,7 @@
           <a:noFill/>
         </p:spPr>
         <p:txBody>
-          <a:bodyPr wrap="square" lIns="0" rIns="0" tIns="0" bIns="0" anchor="t">
+          <a:bodyPr wrap="square" lIns="0" tIns="0" rIns="0" bIns="0" anchor="t">
             <a:spAutoFit/>
           </a:bodyPr>
           <a:lstStyle/>
@@ -42310,7 +42670,7 @@
           <a:noFill/>
         </p:spPr>
         <p:txBody>
-          <a:bodyPr wrap="square" lIns="0" rIns="0" tIns="0" bIns="0" anchor="t">
+          <a:bodyPr wrap="square" lIns="0" tIns="0" rIns="0" bIns="0" anchor="t">
             <a:spAutoFit/>
           </a:bodyPr>
           <a:lstStyle/>
@@ -42341,7 +42701,7 @@
 </file>
 
 <file path=ppt/slides/slide50.xml><?xml version="1.0" encoding="utf-8"?>
-<p:sld xmlns:a="http://schemas.openxmlformats.org/drawingml/2006/main" xmlns:p="http://schemas.openxmlformats.org/presentationml/2006/main" xmlns:r="http://schemas.openxmlformats.org/officeDocument/2006/relationships">
+<p:sld xmlns:a="http://schemas.openxmlformats.org/drawingml/2006/main" xmlns:r="http://schemas.openxmlformats.org/officeDocument/2006/relationships" xmlns:p="http://schemas.openxmlformats.org/presentationml/2006/main">
   <p:cSld>
     <p:spTree>
       <p:nvGrpSpPr>
@@ -42349,7 +42709,14 @@
         <p:cNvGrpSpPr/>
         <p:nvPr/>
       </p:nvGrpSpPr>
-      <p:grpSpPr/>
+      <p:grpSpPr>
+        <a:xfrm>
+          <a:off x="0" y="0"/>
+          <a:ext cx="0" cy="0"/>
+          <a:chOff x="0" y="0"/>
+          <a:chExt cx="0" cy="0"/>
+        </a:xfrm>
+      </p:grpSpPr>
       <p:sp>
         <p:nvSpPr>
           <p:cNvPr id="2" name="Title 1"/>
@@ -42388,7 +42755,7 @@
           <a:noFill/>
         </p:spPr>
         <p:txBody>
-          <a:bodyPr wrap="square" lIns="0" rIns="0" tIns="0" bIns="0" anchor="t">
+          <a:bodyPr wrap="square" lIns="0" tIns="0" rIns="0" bIns="0" anchor="t">
             <a:spAutoFit/>
           </a:bodyPr>
           <a:lstStyle/>
@@ -42451,6 +42818,7 @@
           <a:lstStyle/>
           <a:p>
             <a:pPr algn="ctr"/>
+            <a:endParaRPr/>
           </a:p>
         </p:txBody>
       </p:sp>
@@ -42471,7 +42839,7 @@
           <a:noFill/>
         </p:spPr>
         <p:txBody>
-          <a:bodyPr wrap="square" lIns="0" rIns="0" tIns="0" bIns="0" anchor="t">
+          <a:bodyPr wrap="square" lIns="0" tIns="0" rIns="0" bIns="0" anchor="t">
             <a:spAutoFit/>
           </a:bodyPr>
           <a:lstStyle/>
@@ -42510,7 +42878,7 @@
           <a:noFill/>
         </p:spPr>
         <p:txBody>
-          <a:bodyPr wrap="square" lIns="0" rIns="0" tIns="0" bIns="0" anchor="t">
+          <a:bodyPr wrap="square" lIns="0" tIns="0" rIns="0" bIns="0" anchor="t">
             <a:spAutoFit/>
           </a:bodyPr>
           <a:lstStyle/>
@@ -42536,6 +42904,19 @@
                 <a:spcPct val="125000"/>
               </a:lnSpc>
             </a:pPr>
+            <a:endParaRPr sz="1300" b="0" i="0">
+              <a:solidFill>
+                <a:srgbClr val="E6E8EB"/>
+              </a:solidFill>
+              <a:latin typeface="Consolas"/>
+            </a:endParaRPr>
+          </a:p>
+          <a:p>
+            <a:pPr algn="l">
+              <a:lnSpc>
+                <a:spcPct val="125000"/>
+              </a:lnSpc>
+            </a:pPr>
             <a:r>
               <a:rPr sz="1300" b="0" i="0">
                 <a:solidFill>
@@ -42543,7 +42924,7 @@
                 </a:solidFill>
                 <a:latin typeface="Consolas"/>
               </a:rPr>
-              <a:t/>
+              <a:t>Inspect       : FB_StationInspect(</a:t>
             </a:r>
           </a:p>
           <a:p>
@@ -42559,6 +42940,80 @@
                 </a:solidFill>
                 <a:latin typeface="Consolas"/>
               </a:rPr>
+              <a:t>                    ModeRef       := Mode,</a:t>
+            </a:r>
+          </a:p>
+          <a:p>
+            <a:pPr algn="l">
+              <a:lnSpc>
+                <a:spcPct val="125000"/>
+              </a:lnSpc>
+            </a:pPr>
+            <a:r>
+              <a:rPr sz="1300" b="0" i="0">
+                <a:solidFill>
+                  <a:srgbClr val="E6E8EB"/>
+                </a:solidFill>
+                <a:latin typeface="Consolas"/>
+              </a:rPr>
+              <a:t>                    AlarmHandler  := LineFault);     // &lt;-- this</a:t>
+            </a:r>
+          </a:p>
+          <a:p>
+            <a:pPr algn="l">
+              <a:lnSpc>
+                <a:spcPct val="125000"/>
+              </a:lnSpc>
+            </a:pPr>
+            <a:endParaRPr sz="1300" b="0" i="0">
+              <a:solidFill>
+                <a:srgbClr val="E6E8EB"/>
+              </a:solidFill>
+              <a:latin typeface="Consolas"/>
+            </a:endParaRPr>
+          </a:p>
+          <a:p>
+            <a:pPr algn="l">
+              <a:lnSpc>
+                <a:spcPct val="125000"/>
+              </a:lnSpc>
+            </a:pPr>
+            <a:r>
+              <a:rPr sz="1300" b="0" i="0">
+                <a:solidFill>
+                  <a:srgbClr val="E6E8EB"/>
+                </a:solidFill>
+                <a:latin typeface="Consolas"/>
+              </a:rPr>
+              <a:t>// Change to:</a:t>
+            </a:r>
+          </a:p>
+          <a:p>
+            <a:pPr algn="l">
+              <a:lnSpc>
+                <a:spcPct val="125000"/>
+              </a:lnSpc>
+            </a:pPr>
+            <a:endParaRPr sz="1300" b="0" i="0">
+              <a:solidFill>
+                <a:srgbClr val="E6E8EB"/>
+              </a:solidFill>
+              <a:latin typeface="Consolas"/>
+            </a:endParaRPr>
+          </a:p>
+          <a:p>
+            <a:pPr algn="l">
+              <a:lnSpc>
+                <a:spcPct val="125000"/>
+              </a:lnSpc>
+            </a:pPr>
+            <a:r>
+              <a:rPr sz="1300" b="0" i="0">
+                <a:solidFill>
+                  <a:srgbClr val="E6E8EB"/>
+                </a:solidFill>
+                <a:latin typeface="Consolas"/>
+              </a:rPr>
               <a:t>Inspect       : FB_StationInspect(</a:t>
             </a:r>
           </a:p>
@@ -42591,7 +43046,7 @@
                 </a:solidFill>
                 <a:latin typeface="Consolas"/>
               </a:rPr>
-              <a:t>                    AlarmHandler  := LineFault);     // &lt;-- this</a:t>
+              <a:t>                    AlarmHandler  := QualityFlag);   // &lt;-- this</a:t>
             </a:r>
           </a:p>
           <a:p>
@@ -42600,111 +43055,12 @@
                 <a:spcPct val="125000"/>
               </a:lnSpc>
             </a:pPr>
-            <a:r>
-              <a:rPr sz="1300" b="0" i="0">
-                <a:solidFill>
-                  <a:srgbClr val="E6E8EB"/>
-                </a:solidFill>
-                <a:latin typeface="Consolas"/>
-              </a:rPr>
-              <a:t/>
-            </a:r>
-          </a:p>
-          <a:p>
-            <a:pPr algn="l">
-              <a:lnSpc>
-                <a:spcPct val="125000"/>
-              </a:lnSpc>
-            </a:pPr>
-            <a:r>
-              <a:rPr sz="1300" b="0" i="0">
-                <a:solidFill>
-                  <a:srgbClr val="E6E8EB"/>
-                </a:solidFill>
-                <a:latin typeface="Consolas"/>
-              </a:rPr>
-              <a:t>// Change to:</a:t>
-            </a:r>
-          </a:p>
-          <a:p>
-            <a:pPr algn="l">
-              <a:lnSpc>
-                <a:spcPct val="125000"/>
-              </a:lnSpc>
-            </a:pPr>
-            <a:r>
-              <a:rPr sz="1300" b="0" i="0">
-                <a:solidFill>
-                  <a:srgbClr val="E6E8EB"/>
-                </a:solidFill>
-                <a:latin typeface="Consolas"/>
-              </a:rPr>
-              <a:t/>
-            </a:r>
-          </a:p>
-          <a:p>
-            <a:pPr algn="l">
-              <a:lnSpc>
-                <a:spcPct val="125000"/>
-              </a:lnSpc>
-            </a:pPr>
-            <a:r>
-              <a:rPr sz="1300" b="0" i="0">
-                <a:solidFill>
-                  <a:srgbClr val="E6E8EB"/>
-                </a:solidFill>
-                <a:latin typeface="Consolas"/>
-              </a:rPr>
-              <a:t>Inspect       : FB_StationInspect(</a:t>
-            </a:r>
-          </a:p>
-          <a:p>
-            <a:pPr algn="l">
-              <a:lnSpc>
-                <a:spcPct val="125000"/>
-              </a:lnSpc>
-            </a:pPr>
-            <a:r>
-              <a:rPr sz="1300" b="0" i="0">
-                <a:solidFill>
-                  <a:srgbClr val="E6E8EB"/>
-                </a:solidFill>
-                <a:latin typeface="Consolas"/>
-              </a:rPr>
-              <a:t>                    ModeRef       := Mode,</a:t>
-            </a:r>
-          </a:p>
-          <a:p>
-            <a:pPr algn="l">
-              <a:lnSpc>
-                <a:spcPct val="125000"/>
-              </a:lnSpc>
-            </a:pPr>
-            <a:r>
-              <a:rPr sz="1300" b="0" i="0">
-                <a:solidFill>
-                  <a:srgbClr val="E6E8EB"/>
-                </a:solidFill>
-                <a:latin typeface="Consolas"/>
-              </a:rPr>
-              <a:t>                    AlarmHandler  := QualityFlag);   // &lt;-- this</a:t>
-            </a:r>
-          </a:p>
-          <a:p>
-            <a:pPr algn="l">
-              <a:lnSpc>
-                <a:spcPct val="125000"/>
-              </a:lnSpc>
-            </a:pPr>
-            <a:r>
-              <a:rPr sz="1300" b="0" i="0">
-                <a:solidFill>
-                  <a:srgbClr val="E6E8EB"/>
-                </a:solidFill>
-                <a:latin typeface="Consolas"/>
-              </a:rPr>
-              <a:t/>
-            </a:r>
+            <a:endParaRPr sz="1300" b="0" i="0">
+              <a:solidFill>
+                <a:srgbClr val="E6E8EB"/>
+              </a:solidFill>
+              <a:latin typeface="Consolas"/>
+            </a:endParaRPr>
           </a:p>
           <a:p>
             <a:pPr algn="l">
@@ -42781,7 +43137,7 @@
 </file>
 
 <file path=ppt/slides/slide51.xml><?xml version="1.0" encoding="utf-8"?>
-<p:sld xmlns:a="http://schemas.openxmlformats.org/drawingml/2006/main" xmlns:p="http://schemas.openxmlformats.org/presentationml/2006/main" xmlns:r="http://schemas.openxmlformats.org/officeDocument/2006/relationships">
+<p:sld xmlns:a="http://schemas.openxmlformats.org/drawingml/2006/main" xmlns:r="http://schemas.openxmlformats.org/officeDocument/2006/relationships" xmlns:p="http://schemas.openxmlformats.org/presentationml/2006/main">
   <p:cSld>
     <p:spTree>
       <p:nvGrpSpPr>
@@ -42789,7 +43145,14 @@
         <p:cNvGrpSpPr/>
         <p:nvPr/>
       </p:nvGrpSpPr>
-      <p:grpSpPr/>
+      <p:grpSpPr>
+        <a:xfrm>
+          <a:off x="0" y="0"/>
+          <a:ext cx="0" cy="0"/>
+          <a:chOff x="0" y="0"/>
+          <a:chExt cx="0" cy="0"/>
+        </a:xfrm>
+      </p:grpSpPr>
       <p:sp>
         <p:nvSpPr>
           <p:cNvPr id="2" name="Title 1"/>
@@ -42852,6 +43215,7 @@
           <a:lstStyle/>
           <a:p>
             <a:pPr algn="ctr"/>
+            <a:endParaRPr/>
           </a:p>
         </p:txBody>
       </p:sp>
@@ -42872,7 +43236,7 @@
           <a:noFill/>
         </p:spPr>
         <p:txBody>
-          <a:bodyPr wrap="square" lIns="0" rIns="0" tIns="0" bIns="0" anchor="t">
+          <a:bodyPr wrap="square" lIns="0" tIns="0" rIns="0" bIns="0" anchor="t">
             <a:spAutoFit/>
           </a:bodyPr>
           <a:lstStyle/>
@@ -42911,7 +43275,7 @@
           <a:noFill/>
         </p:spPr>
         <p:txBody>
-          <a:bodyPr wrap="square" lIns="0" rIns="0" tIns="0" bIns="0" anchor="t">
+          <a:bodyPr wrap="square" lIns="0" tIns="0" rIns="0" bIns="0" anchor="t">
             <a:spAutoFit/>
           </a:bodyPr>
           <a:lstStyle/>
@@ -42982,7 +43346,7 @@
           <a:noFill/>
         </p:spPr>
         <p:txBody>
-          <a:bodyPr wrap="square" lIns="0" rIns="0" tIns="0" bIns="0" anchor="t">
+          <a:bodyPr wrap="square" lIns="0" tIns="0" rIns="0" bIns="0" anchor="t">
             <a:spAutoFit/>
           </a:bodyPr>
           <a:lstStyle/>
@@ -43013,7 +43377,7 @@
 </file>
 
 <file path=ppt/slides/slide52.xml><?xml version="1.0" encoding="utf-8"?>
-<p:sld xmlns:a="http://schemas.openxmlformats.org/drawingml/2006/main" xmlns:p="http://schemas.openxmlformats.org/presentationml/2006/main" xmlns:r="http://schemas.openxmlformats.org/officeDocument/2006/relationships">
+<p:sld xmlns:a="http://schemas.openxmlformats.org/drawingml/2006/main" xmlns:r="http://schemas.openxmlformats.org/officeDocument/2006/relationships" xmlns:p="http://schemas.openxmlformats.org/presentationml/2006/main">
   <p:cSld>
     <p:spTree>
       <p:nvGrpSpPr>
@@ -43021,7 +43385,14 @@
         <p:cNvGrpSpPr/>
         <p:nvPr/>
       </p:nvGrpSpPr>
-      <p:grpSpPr/>
+      <p:grpSpPr>
+        <a:xfrm>
+          <a:off x="0" y="0"/>
+          <a:ext cx="0" cy="0"/>
+          <a:chOff x="0" y="0"/>
+          <a:chExt cx="0" cy="0"/>
+        </a:xfrm>
+      </p:grpSpPr>
       <p:sp>
         <p:nvSpPr>
           <p:cNvPr id="2" name="Text Placeholder 1"/>
@@ -43029,7 +43400,7 @@
             <a:spLocks noGrp="1"/>
           </p:cNvSpPr>
           <p:nvPr>
-            <p:ph type="body" idx="15" sz="quarter"/>
+            <p:ph type="body" sz="quarter" idx="15"/>
           </p:nvPr>
         </p:nvSpPr>
         <p:spPr/>
@@ -43194,7 +43565,7 @@
           <a:noFill/>
         </p:spPr>
         <p:txBody>
-          <a:bodyPr wrap="square" lIns="0" rIns="0" tIns="0" bIns="0" anchor="t">
+          <a:bodyPr wrap="square" lIns="0" tIns="0" rIns="0" bIns="0" anchor="t">
             <a:spAutoFit/>
           </a:bodyPr>
           <a:lstStyle/>
@@ -43225,7 +43596,7 @@
 </file>
 
 <file path=ppt/slides/slide53.xml><?xml version="1.0" encoding="utf-8"?>
-<p:sld xmlns:a="http://schemas.openxmlformats.org/drawingml/2006/main" xmlns:p="http://schemas.openxmlformats.org/presentationml/2006/main" xmlns:r="http://schemas.openxmlformats.org/officeDocument/2006/relationships">
+<p:sld xmlns:a="http://schemas.openxmlformats.org/drawingml/2006/main" xmlns:r="http://schemas.openxmlformats.org/officeDocument/2006/relationships" xmlns:p="http://schemas.openxmlformats.org/presentationml/2006/main">
   <p:cSld>
     <p:spTree>
       <p:nvGrpSpPr>
@@ -43233,7 +43604,14 @@
         <p:cNvGrpSpPr/>
         <p:nvPr/>
       </p:nvGrpSpPr>
-      <p:grpSpPr/>
+      <p:grpSpPr>
+        <a:xfrm>
+          <a:off x="0" y="0"/>
+          <a:ext cx="0" cy="0"/>
+          <a:chOff x="0" y="0"/>
+          <a:chExt cx="0" cy="0"/>
+        </a:xfrm>
+      </p:grpSpPr>
       <p:sp>
         <p:nvSpPr>
           <p:cNvPr id="2" name="Title 1"/>
@@ -43272,7 +43650,7 @@
           <a:noFill/>
         </p:spPr>
         <p:txBody>
-          <a:bodyPr wrap="square" lIns="0" rIns="0" tIns="0" bIns="0" anchor="t">
+          <a:bodyPr wrap="square" lIns="0" tIns="0" rIns="0" bIns="0" anchor="t">
             <a:spAutoFit/>
           </a:bodyPr>
           <a:lstStyle/>
@@ -43311,7 +43689,7 @@
           <a:noFill/>
         </p:spPr>
         <p:txBody>
-          <a:bodyPr wrap="square" lIns="0" rIns="0" tIns="0" bIns="0" anchor="t">
+          <a:bodyPr wrap="square" lIns="0" tIns="0" rIns="0" bIns="0" anchor="t">
             <a:spAutoFit/>
           </a:bodyPr>
           <a:lstStyle/>
@@ -43350,7 +43728,7 @@
           <a:noFill/>
         </p:spPr>
         <p:txBody>
-          <a:bodyPr wrap="square" lIns="0" rIns="0" tIns="0" bIns="0" anchor="t">
+          <a:bodyPr wrap="square" lIns="0" tIns="0" rIns="0" bIns="0" anchor="t">
             <a:spAutoFit/>
           </a:bodyPr>
           <a:lstStyle/>
@@ -43413,6 +43791,7 @@
           <a:lstStyle/>
           <a:p>
             <a:pPr algn="ctr"/>
+            <a:endParaRPr/>
           </a:p>
         </p:txBody>
       </p:sp>
@@ -43433,7 +43812,7 @@
           <a:noFill/>
         </p:spPr>
         <p:txBody>
-          <a:bodyPr wrap="square" lIns="0" rIns="0" tIns="0" bIns="0">
+          <a:bodyPr wrap="square" lIns="0" tIns="0" rIns="0" bIns="0">
             <a:spAutoFit/>
           </a:bodyPr>
           <a:lstStyle/>
@@ -43547,7 +43926,7 @@
 </file>
 
 <file path=ppt/slides/slide54.xml><?xml version="1.0" encoding="utf-8"?>
-<p:sld xmlns:a="http://schemas.openxmlformats.org/drawingml/2006/main" xmlns:p="http://schemas.openxmlformats.org/presentationml/2006/main" xmlns:r="http://schemas.openxmlformats.org/officeDocument/2006/relationships">
+<p:sld xmlns:a="http://schemas.openxmlformats.org/drawingml/2006/main" xmlns:r="http://schemas.openxmlformats.org/officeDocument/2006/relationships" xmlns:p="http://schemas.openxmlformats.org/presentationml/2006/main">
   <p:cSld>
     <p:spTree>
       <p:nvGrpSpPr>
@@ -43555,7 +43934,14 @@
         <p:cNvGrpSpPr/>
         <p:nvPr/>
       </p:nvGrpSpPr>
-      <p:grpSpPr/>
+      <p:grpSpPr>
+        <a:xfrm>
+          <a:off x="0" y="0"/>
+          <a:ext cx="0" cy="0"/>
+          <a:chOff x="0" y="0"/>
+          <a:chExt cx="0" cy="0"/>
+        </a:xfrm>
+      </p:grpSpPr>
       <p:sp>
         <p:nvSpPr>
           <p:cNvPr id="2" name="Text Placeholder 1"/>
@@ -43563,7 +43949,7 @@
             <a:spLocks noGrp="1"/>
           </p:cNvSpPr>
           <p:nvPr>
-            <p:ph type="body" idx="15" sz="quarter"/>
+            <p:ph type="body" sz="quarter" idx="15"/>
           </p:nvPr>
         </p:nvSpPr>
         <p:spPr/>
@@ -43728,7 +44114,7 @@
           <a:noFill/>
         </p:spPr>
         <p:txBody>
-          <a:bodyPr wrap="square" lIns="0" rIns="0" tIns="0" bIns="0" anchor="t">
+          <a:bodyPr wrap="square" lIns="0" tIns="0" rIns="0" bIns="0" anchor="t">
             <a:spAutoFit/>
           </a:bodyPr>
           <a:lstStyle/>
@@ -43759,7 +44145,7 @@
 </file>
 
 <file path=ppt/slides/slide55.xml><?xml version="1.0" encoding="utf-8"?>
-<p:sld xmlns:a="http://schemas.openxmlformats.org/drawingml/2006/main" xmlns:p="http://schemas.openxmlformats.org/presentationml/2006/main" xmlns:r="http://schemas.openxmlformats.org/officeDocument/2006/relationships">
+<p:sld xmlns:a="http://schemas.openxmlformats.org/drawingml/2006/main" xmlns:r="http://schemas.openxmlformats.org/officeDocument/2006/relationships" xmlns:p="http://schemas.openxmlformats.org/presentationml/2006/main">
   <p:cSld>
     <p:spTree>
       <p:nvGrpSpPr>
@@ -43767,7 +44153,14 @@
         <p:cNvGrpSpPr/>
         <p:nvPr/>
       </p:nvGrpSpPr>
-      <p:grpSpPr/>
+      <p:grpSpPr>
+        <a:xfrm>
+          <a:off x="0" y="0"/>
+          <a:ext cx="0" cy="0"/>
+          <a:chOff x="0" y="0"/>
+          <a:chExt cx="0" cy="0"/>
+        </a:xfrm>
+      </p:grpSpPr>
       <p:sp>
         <p:nvSpPr>
           <p:cNvPr id="3" name="Title 2"/>
@@ -43830,6 +44223,7 @@
           <a:lstStyle/>
           <a:p>
             <a:pPr algn="ctr"/>
+            <a:endParaRPr/>
           </a:p>
         </p:txBody>
       </p:sp>
@@ -43850,7 +44244,7 @@
           <a:noFill/>
         </p:spPr>
         <p:txBody>
-          <a:bodyPr wrap="square" lIns="0" rIns="0" tIns="0" bIns="0" anchor="t">
+          <a:bodyPr wrap="square" lIns="0" tIns="0" rIns="0" bIns="0" anchor="t">
             <a:spAutoFit/>
           </a:bodyPr>
           <a:lstStyle/>
@@ -43889,7 +44283,7 @@
           <a:noFill/>
         </p:spPr>
         <p:txBody>
-          <a:bodyPr wrap="square" lIns="0" rIns="0" tIns="0" bIns="0" anchor="t">
+          <a:bodyPr wrap="square" lIns="0" tIns="0" rIns="0" bIns="0" anchor="t">
             <a:spAutoFit/>
           </a:bodyPr>
           <a:lstStyle/>
@@ -43928,7 +44322,7 @@
           <a:noFill/>
         </p:spPr>
         <p:txBody>
-          <a:bodyPr wrap="square" lIns="0" rIns="0" tIns="0" bIns="0" anchor="t">
+          <a:bodyPr wrap="square" lIns="0" tIns="0" rIns="0" bIns="0" anchor="t">
             <a:spAutoFit/>
           </a:bodyPr>
           <a:lstStyle/>
@@ -43975,7 +44369,7 @@
 </file>
 
 <file path=ppt/slides/slide56.xml><?xml version="1.0" encoding="utf-8"?>
-<p:sld xmlns:a="http://schemas.openxmlformats.org/drawingml/2006/main" xmlns:p="http://schemas.openxmlformats.org/presentationml/2006/main" xmlns:r="http://schemas.openxmlformats.org/officeDocument/2006/relationships">
+<p:sld xmlns:a="http://schemas.openxmlformats.org/drawingml/2006/main" xmlns:r="http://schemas.openxmlformats.org/officeDocument/2006/relationships" xmlns:p="http://schemas.openxmlformats.org/presentationml/2006/main">
   <p:cSld>
     <p:spTree>
       <p:nvGrpSpPr>
@@ -43983,7 +44377,14 @@
         <p:cNvGrpSpPr/>
         <p:nvPr/>
       </p:nvGrpSpPr>
-      <p:grpSpPr/>
+      <p:grpSpPr>
+        <a:xfrm>
+          <a:off x="0" y="0"/>
+          <a:ext cx="0" cy="0"/>
+          <a:chOff x="0" y="0"/>
+          <a:chExt cx="0" cy="0"/>
+        </a:xfrm>
+      </p:grpSpPr>
       <p:sp>
         <p:nvSpPr>
           <p:cNvPr id="2" name="Title 1"/>
@@ -44022,7 +44423,7 @@
           <a:noFill/>
         </p:spPr>
         <p:txBody>
-          <a:bodyPr wrap="square" lIns="0" rIns="0" tIns="0" bIns="0" anchor="t">
+          <a:bodyPr wrap="square" lIns="0" tIns="0" rIns="0" bIns="0" anchor="t">
             <a:spAutoFit/>
           </a:bodyPr>
           <a:lstStyle/>
@@ -44085,6 +44486,7 @@
           <a:lstStyle/>
           <a:p>
             <a:pPr algn="ctr"/>
+            <a:endParaRPr/>
           </a:p>
         </p:txBody>
       </p:sp>
@@ -44105,7 +44507,7 @@
           <a:noFill/>
         </p:spPr>
         <p:txBody>
-          <a:bodyPr wrap="square" lIns="0" rIns="0" tIns="0" bIns="0" anchor="t">
+          <a:bodyPr wrap="square" lIns="0" tIns="0" rIns="0" bIns="0" anchor="t">
             <a:spAutoFit/>
           </a:bodyPr>
           <a:lstStyle/>
@@ -44168,6 +44570,7 @@
           <a:lstStyle/>
           <a:p>
             <a:pPr algn="ctr"/>
+            <a:endParaRPr/>
           </a:p>
         </p:txBody>
       </p:sp>
@@ -44188,7 +44591,7 @@
           <a:noFill/>
         </p:spPr>
         <p:txBody>
-          <a:bodyPr wrap="square" lIns="0" rIns="0" tIns="0" bIns="0" anchor="t">
+          <a:bodyPr wrap="square" lIns="0" tIns="0" rIns="0" bIns="0" anchor="t">
             <a:spAutoFit/>
           </a:bodyPr>
           <a:lstStyle/>
@@ -44251,6 +44654,7 @@
           <a:lstStyle/>
           <a:p>
             <a:pPr algn="ctr"/>
+            <a:endParaRPr/>
           </a:p>
         </p:txBody>
       </p:sp>
@@ -44271,7 +44675,7 @@
           <a:noFill/>
         </p:spPr>
         <p:txBody>
-          <a:bodyPr wrap="square" lIns="0" rIns="0" tIns="0" bIns="0" anchor="t">
+          <a:bodyPr wrap="square" lIns="0" tIns="0" rIns="0" bIns="0" anchor="t">
             <a:spAutoFit/>
           </a:bodyPr>
           <a:lstStyle/>
@@ -44336,6 +44740,7 @@
           <a:lstStyle/>
           <a:p>
             <a:pPr algn="ctr"/>
+            <a:endParaRPr/>
           </a:p>
         </p:txBody>
       </p:sp>
@@ -44356,7 +44761,7 @@
           <a:noFill/>
         </p:spPr>
         <p:txBody>
-          <a:bodyPr wrap="square" lIns="0" rIns="0" tIns="0" bIns="0" anchor="t">
+          <a:bodyPr wrap="square" lIns="0" tIns="0" rIns="0" bIns="0" anchor="t">
             <a:spAutoFit/>
           </a:bodyPr>
           <a:lstStyle/>
@@ -44421,6 +44826,7 @@
           <a:lstStyle/>
           <a:p>
             <a:pPr algn="ctr"/>
+            <a:endParaRPr/>
           </a:p>
         </p:txBody>
       </p:sp>
@@ -44441,7 +44847,7 @@
           <a:noFill/>
         </p:spPr>
         <p:txBody>
-          <a:bodyPr wrap="square" lIns="0" rIns="0" tIns="0" bIns="0" anchor="t">
+          <a:bodyPr wrap="square" lIns="0" tIns="0" rIns="0" bIns="0" anchor="t">
             <a:spAutoFit/>
           </a:bodyPr>
           <a:lstStyle/>
@@ -44522,6 +44928,7 @@
           <a:lstStyle/>
           <a:p>
             <a:pPr algn="ctr"/>
+            <a:endParaRPr/>
           </a:p>
         </p:txBody>
       </p:sp>
@@ -44542,7 +44949,7 @@
           <a:noFill/>
         </p:spPr>
         <p:txBody>
-          <a:bodyPr wrap="square" lIns="0" rIns="0" tIns="0" bIns="0" anchor="t">
+          <a:bodyPr wrap="square" lIns="0" tIns="0" rIns="0" bIns="0" anchor="t">
             <a:spAutoFit/>
           </a:bodyPr>
           <a:lstStyle/>
@@ -44623,6 +45030,7 @@
           <a:lstStyle/>
           <a:p>
             <a:pPr algn="ctr"/>
+            <a:endParaRPr/>
           </a:p>
         </p:txBody>
       </p:sp>
@@ -44643,7 +45051,7 @@
           <a:noFill/>
         </p:spPr>
         <p:txBody>
-          <a:bodyPr wrap="square" lIns="0" rIns="0" tIns="0" bIns="0" anchor="t">
+          <a:bodyPr wrap="square" lIns="0" tIns="0" rIns="0" bIns="0" anchor="t">
             <a:spAutoFit/>
           </a:bodyPr>
           <a:lstStyle/>
@@ -44724,6 +45132,7 @@
           <a:lstStyle/>
           <a:p>
             <a:pPr algn="ctr"/>
+            <a:endParaRPr/>
           </a:p>
         </p:txBody>
       </p:sp>
@@ -44744,7 +45153,7 @@
           <a:noFill/>
         </p:spPr>
         <p:txBody>
-          <a:bodyPr wrap="square" lIns="0" rIns="0" tIns="0" bIns="0" anchor="t">
+          <a:bodyPr wrap="square" lIns="0" tIns="0" rIns="0" bIns="0" anchor="t">
             <a:spAutoFit/>
           </a:bodyPr>
           <a:lstStyle/>
@@ -44809,6 +45218,7 @@
           <a:lstStyle/>
           <a:p>
             <a:pPr algn="ctr"/>
+            <a:endParaRPr/>
           </a:p>
         </p:txBody>
       </p:sp>
@@ -44829,7 +45239,7 @@
           <a:noFill/>
         </p:spPr>
         <p:txBody>
-          <a:bodyPr wrap="square" lIns="0" rIns="0" tIns="0" bIns="0" anchor="t">
+          <a:bodyPr wrap="square" lIns="0" tIns="0" rIns="0" bIns="0" anchor="t">
             <a:spAutoFit/>
           </a:bodyPr>
           <a:lstStyle/>
@@ -44910,6 +45320,7 @@
           <a:lstStyle/>
           <a:p>
             <a:pPr algn="ctr"/>
+            <a:endParaRPr/>
           </a:p>
         </p:txBody>
       </p:sp>
@@ -44930,7 +45341,7 @@
           <a:noFill/>
         </p:spPr>
         <p:txBody>
-          <a:bodyPr wrap="square" lIns="0" rIns="0" tIns="0" bIns="0" anchor="t">
+          <a:bodyPr wrap="square" lIns="0" tIns="0" rIns="0" bIns="0" anchor="t">
             <a:spAutoFit/>
           </a:bodyPr>
           <a:lstStyle/>
@@ -45011,6 +45422,7 @@
           <a:lstStyle/>
           <a:p>
             <a:pPr algn="ctr"/>
+            <a:endParaRPr/>
           </a:p>
         </p:txBody>
       </p:sp>
@@ -45031,7 +45443,7 @@
           <a:noFill/>
         </p:spPr>
         <p:txBody>
-          <a:bodyPr wrap="square" lIns="0" rIns="0" tIns="0" bIns="0" anchor="t">
+          <a:bodyPr wrap="square" lIns="0" tIns="0" rIns="0" bIns="0" anchor="t">
             <a:spAutoFit/>
           </a:bodyPr>
           <a:lstStyle/>
@@ -45112,6 +45524,7 @@
           <a:lstStyle/>
           <a:p>
             <a:pPr algn="ctr"/>
+            <a:endParaRPr/>
           </a:p>
         </p:txBody>
       </p:sp>
@@ -45132,7 +45545,7 @@
           <a:noFill/>
         </p:spPr>
         <p:txBody>
-          <a:bodyPr wrap="square" lIns="0" rIns="0" tIns="0" bIns="0" anchor="t">
+          <a:bodyPr wrap="square" lIns="0" tIns="0" rIns="0" bIns="0" anchor="t">
             <a:spAutoFit/>
           </a:bodyPr>
           <a:lstStyle/>
@@ -45197,6 +45610,7 @@
           <a:lstStyle/>
           <a:p>
             <a:pPr algn="ctr"/>
+            <a:endParaRPr/>
           </a:p>
         </p:txBody>
       </p:sp>
@@ -45217,7 +45631,7 @@
           <a:noFill/>
         </p:spPr>
         <p:txBody>
-          <a:bodyPr wrap="square" lIns="0" rIns="0" tIns="0" bIns="0" anchor="t">
+          <a:bodyPr wrap="square" lIns="0" tIns="0" rIns="0" bIns="0" anchor="t">
             <a:spAutoFit/>
           </a:bodyPr>
           <a:lstStyle/>
@@ -45298,6 +45712,7 @@
           <a:lstStyle/>
           <a:p>
             <a:pPr algn="ctr"/>
+            <a:endParaRPr/>
           </a:p>
         </p:txBody>
       </p:sp>
@@ -45318,7 +45733,7 @@
           <a:noFill/>
         </p:spPr>
         <p:txBody>
-          <a:bodyPr wrap="square" lIns="0" rIns="0" tIns="0" bIns="0" anchor="t">
+          <a:bodyPr wrap="square" lIns="0" tIns="0" rIns="0" bIns="0" anchor="t">
             <a:spAutoFit/>
           </a:bodyPr>
           <a:lstStyle/>
@@ -45399,6 +45814,7 @@
           <a:lstStyle/>
           <a:p>
             <a:pPr algn="ctr"/>
+            <a:endParaRPr/>
           </a:p>
         </p:txBody>
       </p:sp>
@@ -45419,7 +45835,7 @@
           <a:noFill/>
         </p:spPr>
         <p:txBody>
-          <a:bodyPr wrap="square" lIns="0" rIns="0" tIns="0" bIns="0" anchor="t">
+          <a:bodyPr wrap="square" lIns="0" tIns="0" rIns="0" bIns="0" anchor="t">
             <a:spAutoFit/>
           </a:bodyPr>
           <a:lstStyle/>
@@ -45474,7 +45890,7 @@
           <a:noFill/>
         </p:spPr>
         <p:txBody>
-          <a:bodyPr wrap="square" lIns="0" rIns="0" tIns="0" bIns="0" anchor="t">
+          <a:bodyPr wrap="square" lIns="0" tIns="0" rIns="0" bIns="0" anchor="t">
             <a:spAutoFit/>
           </a:bodyPr>
           <a:lstStyle/>
@@ -45505,7 +45921,7 @@
 </file>
 
 <file path=ppt/slides/slide57.xml><?xml version="1.0" encoding="utf-8"?>
-<p:sld xmlns:a="http://schemas.openxmlformats.org/drawingml/2006/main" xmlns:p="http://schemas.openxmlformats.org/presentationml/2006/main" xmlns:r="http://schemas.openxmlformats.org/officeDocument/2006/relationships">
+<p:sld xmlns:a="http://schemas.openxmlformats.org/drawingml/2006/main" xmlns:r="http://schemas.openxmlformats.org/officeDocument/2006/relationships" xmlns:p="http://schemas.openxmlformats.org/presentationml/2006/main">
   <p:cSld>
     <p:spTree>
       <p:nvGrpSpPr>
@@ -45513,7 +45929,14 @@
         <p:cNvGrpSpPr/>
         <p:nvPr/>
       </p:nvGrpSpPr>
-      <p:grpSpPr/>
+      <p:grpSpPr>
+        <a:xfrm>
+          <a:off x="0" y="0"/>
+          <a:ext cx="0" cy="0"/>
+          <a:chOff x="0" y="0"/>
+          <a:chExt cx="0" cy="0"/>
+        </a:xfrm>
+      </p:grpSpPr>
       <p:sp>
         <p:nvSpPr>
           <p:cNvPr id="2" name="Text Placeholder 1"/>
@@ -45521,7 +45944,7 @@
             <a:spLocks noGrp="1"/>
           </p:cNvSpPr>
           <p:nvPr>
-            <p:ph type="body" idx="15" sz="quarter"/>
+            <p:ph type="body" sz="quarter" idx="15"/>
           </p:nvPr>
         </p:nvSpPr>
         <p:spPr/>
@@ -45676,7 +46099,7 @@
           <a:noFill/>
         </p:spPr>
         <p:txBody>
-          <a:bodyPr wrap="square" lIns="0" rIns="0" tIns="0" bIns="0" anchor="t">
+          <a:bodyPr wrap="square" lIns="0" tIns="0" rIns="0" bIns="0" anchor="t">
             <a:spAutoFit/>
           </a:bodyPr>
           <a:lstStyle/>
@@ -45707,7 +46130,7 @@
 </file>
 
 <file path=ppt/slides/slide58.xml><?xml version="1.0" encoding="utf-8"?>
-<p:sld xmlns:a="http://schemas.openxmlformats.org/drawingml/2006/main" xmlns:p="http://schemas.openxmlformats.org/presentationml/2006/main" xmlns:r="http://schemas.openxmlformats.org/officeDocument/2006/relationships">
+<p:sld xmlns:a="http://schemas.openxmlformats.org/drawingml/2006/main" xmlns:r="http://schemas.openxmlformats.org/officeDocument/2006/relationships" xmlns:p="http://schemas.openxmlformats.org/presentationml/2006/main">
   <p:cSld>
     <p:spTree>
       <p:nvGrpSpPr>
@@ -45715,7 +46138,14 @@
         <p:cNvGrpSpPr/>
         <p:nvPr/>
       </p:nvGrpSpPr>
-      <p:grpSpPr/>
+      <p:grpSpPr>
+        <a:xfrm>
+          <a:off x="0" y="0"/>
+          <a:ext cx="0" cy="0"/>
+          <a:chOff x="0" y="0"/>
+          <a:chExt cx="0" cy="0"/>
+        </a:xfrm>
+      </p:grpSpPr>
       <p:sp>
         <p:nvSpPr>
           <p:cNvPr id="2" name="Text Placeholder 1"/>
@@ -45723,7 +46153,7 @@
             <a:spLocks noGrp="1"/>
           </p:cNvSpPr>
           <p:nvPr>
-            <p:ph type="body" idx="15" sz="quarter"/>
+            <p:ph type="body" sz="quarter" idx="15"/>
           </p:nvPr>
         </p:nvSpPr>
         <p:spPr/>
@@ -45943,7 +46373,7 @@
           <a:noFill/>
         </p:spPr>
         <p:txBody>
-          <a:bodyPr wrap="square" lIns="0" rIns="0" tIns="0" bIns="0" anchor="t">
+          <a:bodyPr wrap="square" lIns="0" tIns="0" rIns="0" bIns="0" anchor="t">
             <a:spAutoFit/>
           </a:bodyPr>
           <a:lstStyle/>
@@ -45974,7 +46404,7 @@
 </file>
 
 <file path=ppt/slides/slide59.xml><?xml version="1.0" encoding="utf-8"?>
-<p:sld xmlns:a="http://schemas.openxmlformats.org/drawingml/2006/main" xmlns:p="http://schemas.openxmlformats.org/presentationml/2006/main" xmlns:r="http://schemas.openxmlformats.org/officeDocument/2006/relationships">
+<p:sld xmlns:a="http://schemas.openxmlformats.org/drawingml/2006/main" xmlns:r="http://schemas.openxmlformats.org/officeDocument/2006/relationships" xmlns:p="http://schemas.openxmlformats.org/presentationml/2006/main">
   <p:cSld>
     <p:spTree>
       <p:nvGrpSpPr>
@@ -45982,7 +46412,14 @@
         <p:cNvGrpSpPr/>
         <p:nvPr/>
       </p:nvGrpSpPr>
-      <p:grpSpPr/>
+      <p:grpSpPr>
+        <a:xfrm>
+          <a:off x="0" y="0"/>
+          <a:ext cx="0" cy="0"/>
+          <a:chOff x="0" y="0"/>
+          <a:chExt cx="0" cy="0"/>
+        </a:xfrm>
+      </p:grpSpPr>
       <p:sp>
         <p:nvSpPr>
           <p:cNvPr id="2" name="Title 1"/>
@@ -46021,7 +46458,7 @@
           <a:noFill/>
         </p:spPr>
         <p:txBody>
-          <a:bodyPr wrap="square" lIns="0" rIns="0" tIns="0" bIns="0" anchor="t">
+          <a:bodyPr wrap="square" lIns="0" tIns="0" rIns="0" bIns="0" anchor="t">
             <a:spAutoFit/>
           </a:bodyPr>
           <a:lstStyle/>
@@ -46084,6 +46521,7 @@
           <a:lstStyle/>
           <a:p>
             <a:pPr algn="ctr"/>
+            <a:endParaRPr/>
           </a:p>
         </p:txBody>
       </p:sp>
@@ -46104,7 +46542,7 @@
           <a:noFill/>
         </p:spPr>
         <p:txBody>
-          <a:bodyPr wrap="square" lIns="0" rIns="0" tIns="0" bIns="0" anchor="t">
+          <a:bodyPr wrap="square" lIns="0" tIns="0" rIns="0" bIns="0" anchor="t">
             <a:spAutoFit/>
           </a:bodyPr>
           <a:lstStyle/>
@@ -46143,7 +46581,7 @@
           <a:noFill/>
         </p:spPr>
         <p:txBody>
-          <a:bodyPr wrap="square" lIns="0" rIns="0" tIns="0" bIns="0">
+          <a:bodyPr wrap="square" lIns="0" tIns="0" rIns="0" bIns="0">
             <a:spAutoFit/>
           </a:bodyPr>
           <a:lstStyle/>
@@ -46327,6 +46765,7 @@
           <a:lstStyle/>
           <a:p>
             <a:pPr algn="ctr"/>
+            <a:endParaRPr/>
           </a:p>
         </p:txBody>
       </p:sp>
@@ -46371,6 +46810,7 @@
           <a:lstStyle/>
           <a:p>
             <a:pPr algn="ctr"/>
+            <a:endParaRPr/>
           </a:p>
         </p:txBody>
       </p:sp>
@@ -46391,7 +46831,7 @@
           <a:noFill/>
         </p:spPr>
         <p:txBody>
-          <a:bodyPr wrap="square" lIns="0" rIns="0" tIns="0" bIns="0" anchor="t">
+          <a:bodyPr wrap="square" lIns="0" tIns="0" rIns="0" bIns="0" anchor="t">
             <a:spAutoFit/>
           </a:bodyPr>
           <a:lstStyle/>
@@ -46430,7 +46870,7 @@
           <a:noFill/>
         </p:spPr>
         <p:txBody>
-          <a:bodyPr wrap="square" lIns="0" rIns="0" tIns="0" bIns="0">
+          <a:bodyPr wrap="square" lIns="0" tIns="0" rIns="0" bIns="0">
             <a:spAutoFit/>
           </a:bodyPr>
           <a:lstStyle/>
@@ -46586,6 +47026,7 @@
           <a:lstStyle/>
           <a:p>
             <a:pPr algn="ctr"/>
+            <a:endParaRPr/>
           </a:p>
         </p:txBody>
       </p:sp>
@@ -46630,6 +47071,7 @@
           <a:lstStyle/>
           <a:p>
             <a:pPr algn="ctr"/>
+            <a:endParaRPr/>
           </a:p>
         </p:txBody>
       </p:sp>
@@ -46650,7 +47092,7 @@
           <a:noFill/>
         </p:spPr>
         <p:txBody>
-          <a:bodyPr wrap="square" lIns="0" rIns="0" tIns="0" bIns="0" anchor="t">
+          <a:bodyPr wrap="square" lIns="0" tIns="0" rIns="0" bIns="0" anchor="t">
             <a:spAutoFit/>
           </a:bodyPr>
           <a:lstStyle/>
@@ -46689,7 +47131,7 @@
           <a:noFill/>
         </p:spPr>
         <p:txBody>
-          <a:bodyPr wrap="square" lIns="0" rIns="0" tIns="0" bIns="0">
+          <a:bodyPr wrap="square" lIns="0" tIns="0" rIns="0" bIns="0">
             <a:spAutoFit/>
           </a:bodyPr>
           <a:lstStyle/>
@@ -46841,7 +47283,7 @@
 </file>
 
 <file path=ppt/slides/slide6.xml><?xml version="1.0" encoding="utf-8"?>
-<p:sld xmlns:a="http://schemas.openxmlformats.org/drawingml/2006/main" xmlns:p="http://schemas.openxmlformats.org/presentationml/2006/main" xmlns:r="http://schemas.openxmlformats.org/officeDocument/2006/relationships">
+<p:sld xmlns:a="http://schemas.openxmlformats.org/drawingml/2006/main" xmlns:r="http://schemas.openxmlformats.org/officeDocument/2006/relationships" xmlns:p="http://schemas.openxmlformats.org/presentationml/2006/main">
   <p:cSld>
     <p:spTree>
       <p:nvGrpSpPr>
@@ -46849,7 +47291,14 @@
         <p:cNvGrpSpPr/>
         <p:nvPr/>
       </p:nvGrpSpPr>
-      <p:grpSpPr/>
+      <p:grpSpPr>
+        <a:xfrm>
+          <a:off x="0" y="0"/>
+          <a:ext cx="0" cy="0"/>
+          <a:chOff x="0" y="0"/>
+          <a:chExt cx="0" cy="0"/>
+        </a:xfrm>
+      </p:grpSpPr>
       <p:sp>
         <p:nvSpPr>
           <p:cNvPr id="2" name="Text Placeholder 1"/>
@@ -46857,7 +47306,7 @@
             <a:spLocks noGrp="1"/>
           </p:cNvSpPr>
           <p:nvPr>
-            <p:ph type="body" idx="15" sz="quarter"/>
+            <p:ph type="body" sz="quarter" idx="15"/>
           </p:nvPr>
         </p:nvSpPr>
         <p:spPr/>
@@ -47049,7 +47498,7 @@
           <a:noFill/>
         </p:spPr>
         <p:txBody>
-          <a:bodyPr wrap="square" lIns="0" rIns="0" tIns="0" bIns="0" anchor="t">
+          <a:bodyPr wrap="square" lIns="0" tIns="0" rIns="0" bIns="0" anchor="t">
             <a:spAutoFit/>
           </a:bodyPr>
           <a:lstStyle/>
@@ -47080,7 +47529,7 @@
 </file>
 
 <file path=ppt/slides/slide60.xml><?xml version="1.0" encoding="utf-8"?>
-<p:sld xmlns:a="http://schemas.openxmlformats.org/drawingml/2006/main" xmlns:p="http://schemas.openxmlformats.org/presentationml/2006/main" xmlns:r="http://schemas.openxmlformats.org/officeDocument/2006/relationships">
+<p:sld xmlns:a="http://schemas.openxmlformats.org/drawingml/2006/main" xmlns:r="http://schemas.openxmlformats.org/officeDocument/2006/relationships" xmlns:p="http://schemas.openxmlformats.org/presentationml/2006/main">
   <p:cSld>
     <p:spTree>
       <p:nvGrpSpPr>
@@ -47088,7 +47537,14 @@
         <p:cNvGrpSpPr/>
         <p:nvPr/>
       </p:nvGrpSpPr>
-      <p:grpSpPr/>
+      <p:grpSpPr>
+        <a:xfrm>
+          <a:off x="0" y="0"/>
+          <a:ext cx="0" cy="0"/>
+          <a:chOff x="0" y="0"/>
+          <a:chExt cx="0" cy="0"/>
+        </a:xfrm>
+      </p:grpSpPr>
       <p:sp>
         <p:nvSpPr>
           <p:cNvPr id="2" name="Text Placeholder 1"/>
@@ -47096,7 +47552,7 @@
             <a:spLocks noGrp="1"/>
           </p:cNvSpPr>
           <p:nvPr>
-            <p:ph type="body" idx="15" sz="quarter"/>
+            <p:ph type="body" sz="quarter" idx="15"/>
           </p:nvPr>
         </p:nvSpPr>
         <p:spPr/>
@@ -47252,7 +47708,7 @@
           <a:noFill/>
         </p:spPr>
         <p:txBody>
-          <a:bodyPr wrap="square" lIns="0" rIns="0" tIns="0" bIns="0" anchor="t">
+          <a:bodyPr wrap="square" lIns="0" tIns="0" rIns="0" bIns="0" anchor="t">
             <a:spAutoFit/>
           </a:bodyPr>
           <a:lstStyle/>
@@ -47283,7 +47739,7 @@
 </file>
 
 <file path=ppt/slides/slide61.xml><?xml version="1.0" encoding="utf-8"?>
-<p:sld xmlns:a="http://schemas.openxmlformats.org/drawingml/2006/main" xmlns:p="http://schemas.openxmlformats.org/presentationml/2006/main" xmlns:r="http://schemas.openxmlformats.org/officeDocument/2006/relationships">
+<p:sld xmlns:a="http://schemas.openxmlformats.org/drawingml/2006/main" xmlns:r="http://schemas.openxmlformats.org/officeDocument/2006/relationships" xmlns:p="http://schemas.openxmlformats.org/presentationml/2006/main">
   <p:cSld>
     <p:spTree>
       <p:nvGrpSpPr>
@@ -47291,7 +47747,14 @@
         <p:cNvGrpSpPr/>
         <p:nvPr/>
       </p:nvGrpSpPr>
-      <p:grpSpPr/>
+      <p:grpSpPr>
+        <a:xfrm>
+          <a:off x="0" y="0"/>
+          <a:ext cx="0" cy="0"/>
+          <a:chOff x="0" y="0"/>
+          <a:chExt cx="0" cy="0"/>
+        </a:xfrm>
+      </p:grpSpPr>
       <p:sp>
         <p:nvSpPr>
           <p:cNvPr id="2" name="Text Placeholder 1"/>
@@ -47299,7 +47762,7 @@
             <a:spLocks noGrp="1"/>
           </p:cNvSpPr>
           <p:nvPr>
-            <p:ph type="body" idx="15" sz="quarter"/>
+            <p:ph type="body" sz="quarter" idx="15"/>
           </p:nvPr>
         </p:nvSpPr>
         <p:spPr/>
@@ -47482,7 +47945,7 @@
           <a:noFill/>
         </p:spPr>
         <p:txBody>
-          <a:bodyPr wrap="square" lIns="0" rIns="0" tIns="0" bIns="0" anchor="t">
+          <a:bodyPr wrap="square" lIns="0" tIns="0" rIns="0" bIns="0" anchor="t">
             <a:spAutoFit/>
           </a:bodyPr>
           <a:lstStyle/>
@@ -47513,7 +47976,7 @@
 </file>
 
 <file path=ppt/slides/slide62.xml><?xml version="1.0" encoding="utf-8"?>
-<p:sld xmlns:a="http://schemas.openxmlformats.org/drawingml/2006/main" xmlns:p="http://schemas.openxmlformats.org/presentationml/2006/main" xmlns:r="http://schemas.openxmlformats.org/officeDocument/2006/relationships">
+<p:sld xmlns:a="http://schemas.openxmlformats.org/drawingml/2006/main" xmlns:r="http://schemas.openxmlformats.org/officeDocument/2006/relationships" xmlns:p="http://schemas.openxmlformats.org/presentationml/2006/main">
   <p:cSld>
     <p:spTree>
       <p:nvGrpSpPr>
@@ -47521,7 +47984,14 @@
         <p:cNvGrpSpPr/>
         <p:nvPr/>
       </p:nvGrpSpPr>
-      <p:grpSpPr/>
+      <p:grpSpPr>
+        <a:xfrm>
+          <a:off x="0" y="0"/>
+          <a:ext cx="0" cy="0"/>
+          <a:chOff x="0" y="0"/>
+          <a:chExt cx="0" cy="0"/>
+        </a:xfrm>
+      </p:grpSpPr>
       <p:sp>
         <p:nvSpPr>
           <p:cNvPr id="2" name="Text Placeholder 1"/>
@@ -47529,7 +47999,7 @@
             <a:spLocks noGrp="1"/>
           </p:cNvSpPr>
           <p:nvPr>
-            <p:ph type="body" idx="15" sz="quarter"/>
+            <p:ph type="body" sz="quarter" idx="15"/>
           </p:nvPr>
         </p:nvSpPr>
         <p:spPr/>
@@ -47712,7 +48182,7 @@
           <a:noFill/>
         </p:spPr>
         <p:txBody>
-          <a:bodyPr wrap="square" lIns="0" rIns="0" tIns="0" bIns="0" anchor="t">
+          <a:bodyPr wrap="square" lIns="0" tIns="0" rIns="0" bIns="0" anchor="t">
             <a:spAutoFit/>
           </a:bodyPr>
           <a:lstStyle/>
@@ -47743,7 +48213,7 @@
 </file>
 
 <file path=ppt/slides/slide63.xml><?xml version="1.0" encoding="utf-8"?>
-<p:sld xmlns:a="http://schemas.openxmlformats.org/drawingml/2006/main" xmlns:p="http://schemas.openxmlformats.org/presentationml/2006/main" xmlns:r="http://schemas.openxmlformats.org/officeDocument/2006/relationships">
+<p:sld xmlns:a="http://schemas.openxmlformats.org/drawingml/2006/main" xmlns:r="http://schemas.openxmlformats.org/officeDocument/2006/relationships" xmlns:p="http://schemas.openxmlformats.org/presentationml/2006/main">
   <p:cSld>
     <p:spTree>
       <p:nvGrpSpPr>
@@ -47751,7 +48221,14 @@
         <p:cNvGrpSpPr/>
         <p:nvPr/>
       </p:nvGrpSpPr>
-      <p:grpSpPr/>
+      <p:grpSpPr>
+        <a:xfrm>
+          <a:off x="0" y="0"/>
+          <a:ext cx="0" cy="0"/>
+          <a:chOff x="0" y="0"/>
+          <a:chExt cx="0" cy="0"/>
+        </a:xfrm>
+      </p:grpSpPr>
       <p:sp>
         <p:nvSpPr>
           <p:cNvPr id="2" name="Title 1"/>
@@ -47814,6 +48291,7 @@
           <a:lstStyle/>
           <a:p>
             <a:pPr algn="ctr"/>
+            <a:endParaRPr/>
           </a:p>
         </p:txBody>
       </p:sp>
@@ -47834,7 +48312,7 @@
           <a:noFill/>
         </p:spPr>
         <p:txBody>
-          <a:bodyPr wrap="square" lIns="0" rIns="0" tIns="0" bIns="0" anchor="t">
+          <a:bodyPr wrap="square" lIns="0" tIns="0" rIns="0" bIns="0" anchor="t">
             <a:spAutoFit/>
           </a:bodyPr>
           <a:lstStyle/>
@@ -47873,7 +48351,7 @@
           <a:noFill/>
         </p:spPr>
         <p:txBody>
-          <a:bodyPr wrap="square" lIns="0" rIns="0" tIns="0" bIns="0" anchor="t">
+          <a:bodyPr wrap="square" lIns="0" tIns="0" rIns="0" bIns="0" anchor="t">
             <a:spAutoFit/>
           </a:bodyPr>
           <a:lstStyle/>
@@ -47912,7 +48390,7 @@
           <a:noFill/>
         </p:spPr>
         <p:txBody>
-          <a:bodyPr wrap="square" lIns="0" rIns="0" tIns="0" bIns="0" anchor="t">
+          <a:bodyPr wrap="square" lIns="0" tIns="0" rIns="0" bIns="0" anchor="t">
             <a:spAutoFit/>
           </a:bodyPr>
           <a:lstStyle/>
@@ -47938,6 +48416,19 @@
                 <a:spcPct val="140000"/>
               </a:lnSpc>
             </a:pPr>
+            <a:endParaRPr sz="1800" b="0" i="1">
+              <a:solidFill>
+                <a:srgbClr val="E5E8EC"/>
+              </a:solidFill>
+              <a:latin typeface="Arial"/>
+            </a:endParaRPr>
+          </a:p>
+          <a:p>
+            <a:pPr algn="l">
+              <a:lnSpc>
+                <a:spcPct val="140000"/>
+              </a:lnSpc>
+            </a:pPr>
             <a:r>
               <a:rPr sz="1800" b="0" i="1">
                 <a:solidFill>
@@ -47945,7 +48436,7 @@
                 </a:solidFill>
                 <a:latin typeface="Arial"/>
               </a:rPr>
-              <a:t/>
+              <a:t>The teacher part requires three more things: run a shorter version yourself within a month; adapt the script to your audience; track customer pushback you hear that isn't in this material — send it back.</a:t>
             </a:r>
           </a:p>
           <a:p>
@@ -47954,31 +48445,12 @@
                 <a:spcPct val="140000"/>
               </a:lnSpc>
             </a:pPr>
-            <a:r>
-              <a:rPr sz="1800" b="0" i="1">
-                <a:solidFill>
-                  <a:srgbClr val="E5E8EC"/>
-                </a:solidFill>
-                <a:latin typeface="Arial"/>
-              </a:rPr>
-              <a:t>The teacher part requires three more things: run a shorter version yourself within a month; adapt the script to your audience; track customer pushback you hear that isn't in this material — send it back.</a:t>
-            </a:r>
-          </a:p>
-          <a:p>
-            <a:pPr algn="l">
-              <a:lnSpc>
-                <a:spcPct val="140000"/>
-              </a:lnSpc>
-            </a:pPr>
-            <a:r>
-              <a:rPr sz="1800" b="0" i="1">
-                <a:solidFill>
-                  <a:srgbClr val="E5E8EC"/>
-                </a:solidFill>
-                <a:latin typeface="Arial"/>
-              </a:rPr>
-              <a:t/>
-            </a:r>
+            <a:endParaRPr sz="1800" b="0" i="1">
+              <a:solidFill>
+                <a:srgbClr val="E5E8EC"/>
+              </a:solidFill>
+              <a:latin typeface="Arial"/>
+            </a:endParaRPr>
           </a:p>
           <a:p>
             <a:pPr algn="l">
@@ -48015,7 +48487,7 @@
           <a:noFill/>
         </p:spPr>
         <p:txBody>
-          <a:bodyPr wrap="square" lIns="0" rIns="0" tIns="0" bIns="0" anchor="t">
+          <a:bodyPr wrap="square" lIns="0" tIns="0" rIns="0" bIns="0" anchor="t">
             <a:spAutoFit/>
           </a:bodyPr>
           <a:lstStyle/>
@@ -48046,7 +48518,7 @@
 </file>
 
 <file path=ppt/slides/slide64.xml><?xml version="1.0" encoding="utf-8"?>
-<p:sld xmlns:a="http://schemas.openxmlformats.org/drawingml/2006/main" xmlns:p="http://schemas.openxmlformats.org/presentationml/2006/main" xmlns:r="http://schemas.openxmlformats.org/officeDocument/2006/relationships">
+<p:sld xmlns:a="http://schemas.openxmlformats.org/drawingml/2006/main" xmlns:r="http://schemas.openxmlformats.org/officeDocument/2006/relationships" xmlns:p="http://schemas.openxmlformats.org/presentationml/2006/main">
   <p:cSld>
     <p:spTree>
       <p:nvGrpSpPr>
@@ -48054,7 +48526,14 @@
         <p:cNvGrpSpPr/>
         <p:nvPr/>
       </p:nvGrpSpPr>
-      <p:grpSpPr/>
+      <p:grpSpPr>
+        <a:xfrm>
+          <a:off x="0" y="0"/>
+          <a:ext cx="0" cy="0"/>
+          <a:chOff x="0" y="0"/>
+          <a:chExt cx="0" cy="0"/>
+        </a:xfrm>
+      </p:grpSpPr>
       <p:sp>
         <p:nvSpPr>
           <p:cNvPr id="3" name="Title 2"/>
@@ -48117,6 +48596,7 @@
           <a:lstStyle/>
           <a:p>
             <a:pPr algn="ctr"/>
+            <a:endParaRPr/>
           </a:p>
         </p:txBody>
       </p:sp>
@@ -48137,7 +48617,7 @@
           <a:noFill/>
         </p:spPr>
         <p:txBody>
-          <a:bodyPr wrap="square" lIns="0" rIns="0" tIns="0" bIns="0" anchor="t">
+          <a:bodyPr wrap="square" lIns="0" tIns="0" rIns="0" bIns="0" anchor="t">
             <a:spAutoFit/>
           </a:bodyPr>
           <a:lstStyle/>
@@ -48176,7 +48656,7 @@
           <a:noFill/>
         </p:spPr>
         <p:txBody>
-          <a:bodyPr wrap="square" lIns="0" rIns="0" tIns="0" bIns="0" anchor="t">
+          <a:bodyPr wrap="square" lIns="0" tIns="0" rIns="0" bIns="0" anchor="t">
             <a:spAutoFit/>
           </a:bodyPr>
           <a:lstStyle/>
@@ -48215,7 +48695,7 @@
           <a:noFill/>
         </p:spPr>
         <p:txBody>
-          <a:bodyPr wrap="square" lIns="0" rIns="0" tIns="0" bIns="0" anchor="t">
+          <a:bodyPr wrap="square" lIns="0" tIns="0" rIns="0" bIns="0" anchor="t">
             <a:spAutoFit/>
           </a:bodyPr>
           <a:lstStyle/>
@@ -48246,7 +48726,7 @@
 </file>
 
 <file path=ppt/slides/slide65.xml><?xml version="1.0" encoding="utf-8"?>
-<p:sld xmlns:a="http://schemas.openxmlformats.org/drawingml/2006/main" xmlns:p="http://schemas.openxmlformats.org/presentationml/2006/main" xmlns:r="http://schemas.openxmlformats.org/officeDocument/2006/relationships">
+<p:sld xmlns:a="http://schemas.openxmlformats.org/drawingml/2006/main" xmlns:r="http://schemas.openxmlformats.org/officeDocument/2006/relationships" xmlns:p="http://schemas.openxmlformats.org/presentationml/2006/main">
   <p:cSld>
     <p:spTree>
       <p:nvGrpSpPr>
@@ -48254,7 +48734,14 @@
         <p:cNvGrpSpPr/>
         <p:nvPr/>
       </p:nvGrpSpPr>
-      <p:grpSpPr/>
+      <p:grpSpPr>
+        <a:xfrm>
+          <a:off x="0" y="0"/>
+          <a:ext cx="0" cy="0"/>
+          <a:chOff x="0" y="0"/>
+          <a:chExt cx="0" cy="0"/>
+        </a:xfrm>
+      </p:grpSpPr>
       <p:sp>
         <p:nvSpPr>
           <p:cNvPr id="2" name="Title 1"/>
@@ -48293,7 +48780,7 @@
           <a:noFill/>
         </p:spPr>
         <p:txBody>
-          <a:bodyPr wrap="square" lIns="0" rIns="0" tIns="0" bIns="0" anchor="t">
+          <a:bodyPr wrap="square" lIns="0" tIns="0" rIns="0" bIns="0" anchor="t">
             <a:spAutoFit/>
           </a:bodyPr>
           <a:lstStyle/>
@@ -48356,6 +48843,7 @@
           <a:lstStyle/>
           <a:p>
             <a:pPr algn="ctr"/>
+            <a:endParaRPr/>
           </a:p>
         </p:txBody>
       </p:sp>
@@ -48376,7 +48864,7 @@
           <a:noFill/>
         </p:spPr>
         <p:txBody>
-          <a:bodyPr wrap="square" lIns="0" rIns="0" tIns="0" bIns="0" anchor="t">
+          <a:bodyPr wrap="square" lIns="0" tIns="0" rIns="0" bIns="0" anchor="t">
             <a:spAutoFit/>
           </a:bodyPr>
           <a:lstStyle/>
@@ -48415,7 +48903,7 @@
           <a:noFill/>
         </p:spPr>
         <p:txBody>
-          <a:bodyPr wrap="square" lIns="0" rIns="0" tIns="0" bIns="0">
+          <a:bodyPr wrap="square" lIns="0" tIns="0" rIns="0" bIns="0">
             <a:spAutoFit/>
           </a:bodyPr>
           <a:lstStyle/>
@@ -48583,7 +49071,7 @@
           <a:noFill/>
         </p:spPr>
         <p:txBody>
-          <a:bodyPr wrap="square" lIns="0" rIns="0" tIns="0" bIns="0" anchor="t">
+          <a:bodyPr wrap="square" lIns="0" tIns="0" rIns="0" bIns="0" anchor="t">
             <a:spAutoFit/>
           </a:bodyPr>
           <a:lstStyle/>
@@ -48622,7 +49110,7 @@
           <a:noFill/>
         </p:spPr>
         <p:txBody>
-          <a:bodyPr wrap="square" lIns="0" rIns="0" tIns="0" bIns="0">
+          <a:bodyPr wrap="square" lIns="0" tIns="0" rIns="0" bIns="0">
             <a:spAutoFit/>
           </a:bodyPr>
           <a:lstStyle/>
@@ -48782,7 +49270,7 @@
 </file>
 
 <file path=ppt/slides/slide66.xml><?xml version="1.0" encoding="utf-8"?>
-<p:sld xmlns:a="http://schemas.openxmlformats.org/drawingml/2006/main" xmlns:p="http://schemas.openxmlformats.org/presentationml/2006/main" xmlns:r="http://schemas.openxmlformats.org/officeDocument/2006/relationships">
+<p:sld xmlns:a="http://schemas.openxmlformats.org/drawingml/2006/main" xmlns:r="http://schemas.openxmlformats.org/officeDocument/2006/relationships" xmlns:p="http://schemas.openxmlformats.org/presentationml/2006/main">
   <p:cSld>
     <p:spTree>
       <p:nvGrpSpPr>
@@ -48790,7 +49278,14 @@
         <p:cNvGrpSpPr/>
         <p:nvPr/>
       </p:nvGrpSpPr>
-      <p:grpSpPr/>
+      <p:grpSpPr>
+        <a:xfrm>
+          <a:off x="0" y="0"/>
+          <a:ext cx="0" cy="0"/>
+          <a:chOff x="0" y="0"/>
+          <a:chExt cx="0" cy="0"/>
+        </a:xfrm>
+      </p:grpSpPr>
       <p:sp>
         <p:nvSpPr>
           <p:cNvPr id="2" name="Text Placeholder 1"/>
@@ -48798,7 +49293,7 @@
             <a:spLocks noGrp="1"/>
           </p:cNvSpPr>
           <p:nvPr>
-            <p:ph type="body" idx="15" sz="quarter"/>
+            <p:ph type="body" sz="quarter" idx="15"/>
           </p:nvPr>
         </p:nvSpPr>
         <p:spPr/>
@@ -49101,7 +49596,7 @@
           <a:noFill/>
         </p:spPr>
         <p:txBody>
-          <a:bodyPr wrap="square" lIns="0" rIns="0" tIns="0" bIns="0" anchor="t">
+          <a:bodyPr wrap="square" lIns="0" tIns="0" rIns="0" bIns="0" anchor="t">
             <a:spAutoFit/>
           </a:bodyPr>
           <a:lstStyle/>
@@ -49132,7 +49627,7 @@
 </file>
 
 <file path=ppt/slides/slide67.xml><?xml version="1.0" encoding="utf-8"?>
-<p:sld xmlns:a="http://schemas.openxmlformats.org/drawingml/2006/main" xmlns:p="http://schemas.openxmlformats.org/presentationml/2006/main" xmlns:r="http://schemas.openxmlformats.org/officeDocument/2006/relationships">
+<p:sld xmlns:a="http://schemas.openxmlformats.org/drawingml/2006/main" xmlns:r="http://schemas.openxmlformats.org/officeDocument/2006/relationships" xmlns:p="http://schemas.openxmlformats.org/presentationml/2006/main">
   <p:cSld>
     <p:spTree>
       <p:nvGrpSpPr>
@@ -49140,7 +49635,14 @@
         <p:cNvGrpSpPr/>
         <p:nvPr/>
       </p:nvGrpSpPr>
-      <p:grpSpPr/>
+      <p:grpSpPr>
+        <a:xfrm>
+          <a:off x="0" y="0"/>
+          <a:ext cx="0" cy="0"/>
+          <a:chOff x="0" y="0"/>
+          <a:chExt cx="0" cy="0"/>
+        </a:xfrm>
+      </p:grpSpPr>
       <p:sp>
         <p:nvSpPr>
           <p:cNvPr id="2" name="Title 1"/>
@@ -49179,7 +49681,7 @@
           <a:noFill/>
         </p:spPr>
         <p:txBody>
-          <a:bodyPr wrap="square" lIns="0" rIns="0" tIns="0" bIns="0" anchor="t">
+          <a:bodyPr wrap="square" lIns="0" tIns="0" rIns="0" bIns="0" anchor="t">
             <a:spAutoFit/>
           </a:bodyPr>
           <a:lstStyle/>
@@ -49242,6 +49744,7 @@
           <a:lstStyle/>
           <a:p>
             <a:pPr algn="ctr"/>
+            <a:endParaRPr/>
           </a:p>
         </p:txBody>
       </p:sp>
@@ -49262,7 +49765,7 @@
           <a:noFill/>
         </p:spPr>
         <p:txBody>
-          <a:bodyPr wrap="square" lIns="0" rIns="0" tIns="0" bIns="0" anchor="t">
+          <a:bodyPr wrap="square" lIns="0" tIns="0" rIns="0" bIns="0" anchor="t">
             <a:spAutoFit/>
           </a:bodyPr>
           <a:lstStyle/>
@@ -49301,7 +49804,7 @@
           <a:noFill/>
         </p:spPr>
         <p:txBody>
-          <a:bodyPr wrap="square" lIns="0" rIns="0" tIns="0" bIns="0">
+          <a:bodyPr wrap="square" lIns="0" tIns="0" rIns="0" bIns="0">
             <a:spAutoFit/>
           </a:bodyPr>
           <a:lstStyle/>
@@ -49498,7 +50001,7 @@
           <a:noFill/>
         </p:spPr>
         <p:txBody>
-          <a:bodyPr wrap="square" lIns="0" rIns="0" tIns="0" bIns="0" anchor="t">
+          <a:bodyPr wrap="square" lIns="0" tIns="0" rIns="0" bIns="0" anchor="t">
             <a:spAutoFit/>
           </a:bodyPr>
           <a:lstStyle/>
@@ -49537,7 +50040,7 @@
           <a:noFill/>
         </p:spPr>
         <p:txBody>
-          <a:bodyPr wrap="square" lIns="0" rIns="0" tIns="0" bIns="0">
+          <a:bodyPr wrap="square" lIns="0" tIns="0" rIns="0" bIns="0">
             <a:spAutoFit/>
           </a:bodyPr>
           <a:lstStyle/>
@@ -49670,7 +50173,7 @@
 </file>
 
 <file path=ppt/slides/slide68.xml><?xml version="1.0" encoding="utf-8"?>
-<p:sld xmlns:a="http://schemas.openxmlformats.org/drawingml/2006/main" xmlns:p="http://schemas.openxmlformats.org/presentationml/2006/main" xmlns:r="http://schemas.openxmlformats.org/officeDocument/2006/relationships">
+<p:sld xmlns:a="http://schemas.openxmlformats.org/drawingml/2006/main" xmlns:r="http://schemas.openxmlformats.org/officeDocument/2006/relationships" xmlns:p="http://schemas.openxmlformats.org/presentationml/2006/main">
   <p:cSld>
     <p:spTree>
       <p:nvGrpSpPr>
@@ -49678,7 +50181,14 @@
         <p:cNvGrpSpPr/>
         <p:nvPr/>
       </p:nvGrpSpPr>
-      <p:grpSpPr/>
+      <p:grpSpPr>
+        <a:xfrm>
+          <a:off x="0" y="0"/>
+          <a:ext cx="0" cy="0"/>
+          <a:chOff x="0" y="0"/>
+          <a:chExt cx="0" cy="0"/>
+        </a:xfrm>
+      </p:grpSpPr>
       <p:sp>
         <p:nvSpPr>
           <p:cNvPr id="2" name="Text Placeholder 1"/>
@@ -49686,7 +50196,7 @@
             <a:spLocks noGrp="1"/>
           </p:cNvSpPr>
           <p:nvPr>
-            <p:ph type="body" idx="15" sz="quarter"/>
+            <p:ph type="body" sz="quarter" idx="15"/>
           </p:nvPr>
         </p:nvSpPr>
         <p:spPr/>
@@ -49878,7 +50388,7 @@
           <a:noFill/>
         </p:spPr>
         <p:txBody>
-          <a:bodyPr wrap="square" lIns="0" rIns="0" tIns="0" bIns="0" anchor="t">
+          <a:bodyPr wrap="square" lIns="0" tIns="0" rIns="0" bIns="0" anchor="t">
             <a:spAutoFit/>
           </a:bodyPr>
           <a:lstStyle/>
@@ -49909,7 +50419,7 @@
 </file>
 
 <file path=ppt/slides/slide7.xml><?xml version="1.0" encoding="utf-8"?>
-<p:sld xmlns:a="http://schemas.openxmlformats.org/drawingml/2006/main" xmlns:p="http://schemas.openxmlformats.org/presentationml/2006/main" xmlns:r="http://schemas.openxmlformats.org/officeDocument/2006/relationships">
+<p:sld xmlns:a="http://schemas.openxmlformats.org/drawingml/2006/main" xmlns:r="http://schemas.openxmlformats.org/officeDocument/2006/relationships" xmlns:p="http://schemas.openxmlformats.org/presentationml/2006/main">
   <p:cSld>
     <p:spTree>
       <p:nvGrpSpPr>
@@ -49917,7 +50427,14 @@
         <p:cNvGrpSpPr/>
         <p:nvPr/>
       </p:nvGrpSpPr>
-      <p:grpSpPr/>
+      <p:grpSpPr>
+        <a:xfrm>
+          <a:off x="0" y="0"/>
+          <a:ext cx="0" cy="0"/>
+          <a:chOff x="0" y="0"/>
+          <a:chExt cx="0" cy="0"/>
+        </a:xfrm>
+      </p:grpSpPr>
       <p:sp>
         <p:nvSpPr>
           <p:cNvPr id="2" name="Text Placeholder 1"/>
@@ -49925,7 +50442,7 @@
             <a:spLocks noGrp="1"/>
           </p:cNvSpPr>
           <p:nvPr>
-            <p:ph type="body" idx="15" sz="quarter"/>
+            <p:ph type="body" sz="quarter" idx="15"/>
           </p:nvPr>
         </p:nvSpPr>
         <p:spPr/>
@@ -50154,7 +50671,7 @@
           <a:noFill/>
         </p:spPr>
         <p:txBody>
-          <a:bodyPr wrap="square" lIns="0" rIns="0" tIns="0" bIns="0" anchor="t">
+          <a:bodyPr wrap="square" lIns="0" tIns="0" rIns="0" bIns="0" anchor="t">
             <a:spAutoFit/>
           </a:bodyPr>
           <a:lstStyle/>
@@ -50185,7 +50702,7 @@
 </file>
 
 <file path=ppt/slides/slide8.xml><?xml version="1.0" encoding="utf-8"?>
-<p:sld xmlns:a="http://schemas.openxmlformats.org/drawingml/2006/main" xmlns:p="http://schemas.openxmlformats.org/presentationml/2006/main" xmlns:r="http://schemas.openxmlformats.org/officeDocument/2006/relationships">
+<p:sld xmlns:a="http://schemas.openxmlformats.org/drawingml/2006/main" xmlns:r="http://schemas.openxmlformats.org/officeDocument/2006/relationships" xmlns:p="http://schemas.openxmlformats.org/presentationml/2006/main">
   <p:cSld>
     <p:spTree>
       <p:nvGrpSpPr>
@@ -50193,7 +50710,14 @@
         <p:cNvGrpSpPr/>
         <p:nvPr/>
       </p:nvGrpSpPr>
-      <p:grpSpPr/>
+      <p:grpSpPr>
+        <a:xfrm>
+          <a:off x="0" y="0"/>
+          <a:ext cx="0" cy="0"/>
+          <a:chOff x="0" y="0"/>
+          <a:chExt cx="0" cy="0"/>
+        </a:xfrm>
+      </p:grpSpPr>
       <p:sp>
         <p:nvSpPr>
           <p:cNvPr id="2" name="Text Placeholder 1"/>
@@ -50201,7 +50725,7 @@
             <a:spLocks noGrp="1"/>
           </p:cNvSpPr>
           <p:nvPr>
-            <p:ph type="body" idx="15" sz="quarter"/>
+            <p:ph type="body" sz="quarter" idx="15"/>
           </p:nvPr>
         </p:nvSpPr>
         <p:spPr/>
@@ -50356,7 +50880,7 @@
           <a:noFill/>
         </p:spPr>
         <p:txBody>
-          <a:bodyPr wrap="square" lIns="0" rIns="0" tIns="0" bIns="0" anchor="t">
+          <a:bodyPr wrap="square" lIns="0" tIns="0" rIns="0" bIns="0" anchor="t">
             <a:spAutoFit/>
           </a:bodyPr>
           <a:lstStyle/>
@@ -50387,7 +50911,7 @@
 </file>
 
 <file path=ppt/slides/slide9.xml><?xml version="1.0" encoding="utf-8"?>
-<p:sld xmlns:a="http://schemas.openxmlformats.org/drawingml/2006/main" xmlns:p="http://schemas.openxmlformats.org/presentationml/2006/main" xmlns:r="http://schemas.openxmlformats.org/officeDocument/2006/relationships">
+<p:sld xmlns:a="http://schemas.openxmlformats.org/drawingml/2006/main" xmlns:r="http://schemas.openxmlformats.org/officeDocument/2006/relationships" xmlns:p="http://schemas.openxmlformats.org/presentationml/2006/main">
   <p:cSld>
     <p:spTree>
       <p:nvGrpSpPr>
@@ -50395,7 +50919,14 @@
         <p:cNvGrpSpPr/>
         <p:nvPr/>
       </p:nvGrpSpPr>
-      <p:grpSpPr/>
+      <p:grpSpPr>
+        <a:xfrm>
+          <a:off x="0" y="0"/>
+          <a:ext cx="0" cy="0"/>
+          <a:chOff x="0" y="0"/>
+          <a:chExt cx="0" cy="0"/>
+        </a:xfrm>
+      </p:grpSpPr>
       <p:sp>
         <p:nvSpPr>
           <p:cNvPr id="2" name="Title 1"/>
@@ -50434,7 +50965,7 @@
           <a:noFill/>
         </p:spPr>
         <p:txBody>
-          <a:bodyPr wrap="square" lIns="0" rIns="0" tIns="0" bIns="0" anchor="t">
+          <a:bodyPr wrap="square" lIns="0" tIns="0" rIns="0" bIns="0" anchor="t">
             <a:spAutoFit/>
           </a:bodyPr>
           <a:lstStyle/>
@@ -50497,6 +51028,7 @@
           <a:lstStyle/>
           <a:p>
             <a:pPr algn="ctr"/>
+            <a:endParaRPr/>
           </a:p>
         </p:txBody>
       </p:sp>
@@ -50517,7 +51049,7 @@
           <a:noFill/>
         </p:spPr>
         <p:txBody>
-          <a:bodyPr wrap="square" lIns="0" rIns="0" tIns="0" bIns="0" anchor="t">
+          <a:bodyPr wrap="square" lIns="0" tIns="0" rIns="0" bIns="0" anchor="t">
             <a:spAutoFit/>
           </a:bodyPr>
           <a:lstStyle/>
@@ -50556,7 +51088,7 @@
           <a:noFill/>
         </p:spPr>
         <p:txBody>
-          <a:bodyPr wrap="square" lIns="0" rIns="0" tIns="0" bIns="0" anchor="t">
+          <a:bodyPr wrap="square" lIns="0" tIns="0" rIns="0" bIns="0" anchor="t">
             <a:spAutoFit/>
           </a:bodyPr>
           <a:lstStyle/>
@@ -50662,6 +51194,19 @@
                 <a:spcPct val="125000"/>
               </a:lnSpc>
             </a:pPr>
+            <a:endParaRPr sz="1300" b="0" i="0">
+              <a:solidFill>
+                <a:srgbClr val="E6E8EB"/>
+              </a:solidFill>
+              <a:latin typeface="Consolas"/>
+            </a:endParaRPr>
+          </a:p>
+          <a:p>
+            <a:pPr algn="l">
+              <a:lnSpc>
+                <a:spcPct val="125000"/>
+              </a:lnSpc>
+            </a:pPr>
             <a:r>
               <a:rPr sz="1300" b="0" i="0">
                 <a:solidFill>
@@ -50669,7 +51214,7 @@
                 </a:solidFill>
                 <a:latin typeface="Consolas"/>
               </a:rPr>
-              <a:t/>
+              <a:t>// FB_StationCap — uses level (held-high)</a:t>
             </a:r>
           </a:p>
           <a:p>
@@ -50685,7 +51230,7 @@
                 </a:solidFill>
                 <a:latin typeface="Consolas"/>
               </a:rPr>
-              <a:t>// FB_StationCap — uses level (held-high)</a:t>
+              <a:t>IF AlarmAck AND AlarmActive THEN</a:t>
             </a:r>
           </a:p>
           <a:p>
@@ -50701,7 +51246,7 @@
                 </a:solidFill>
                 <a:latin typeface="Consolas"/>
               </a:rPr>
-              <a:t>IF AlarmAck AND AlarmActive THEN</a:t>
+              <a:t>    AlarmActive := FALSE;</a:t>
             </a:r>
           </a:p>
           <a:p>
@@ -50717,7 +51262,7 @@
                 </a:solidFill>
                 <a:latin typeface="Consolas"/>
               </a:rPr>
-              <a:t>    AlarmActive := FALSE;</a:t>
+              <a:t>    AlarmCode   := 0;</a:t>
             </a:r>
           </a:p>
           <a:p>
@@ -50733,7 +51278,7 @@
                 </a:solidFill>
                 <a:latin typeface="Consolas"/>
               </a:rPr>
-              <a:t>    AlarmCode   := 0;</a:t>
+              <a:t>END_IF</a:t>
             </a:r>
           </a:p>
           <a:p>
@@ -50742,31 +51287,12 @@
                 <a:spcPct val="125000"/>
               </a:lnSpc>
             </a:pPr>
-            <a:r>
-              <a:rPr sz="1300" b="0" i="0">
-                <a:solidFill>
-                  <a:srgbClr val="E6E8EB"/>
-                </a:solidFill>
-                <a:latin typeface="Consolas"/>
-              </a:rPr>
-              <a:t>END_IF</a:t>
-            </a:r>
-          </a:p>
-          <a:p>
-            <a:pPr algn="l">
-              <a:lnSpc>
-                <a:spcPct val="125000"/>
-              </a:lnSpc>
-            </a:pPr>
-            <a:r>
-              <a:rPr sz="1300" b="0" i="0">
-                <a:solidFill>
-                  <a:srgbClr val="E6E8EB"/>
-                </a:solidFill>
-                <a:latin typeface="Consolas"/>
-              </a:rPr>
-              <a:t/>
-            </a:r>
+            <a:endParaRPr sz="1300" b="0" i="0">
+              <a:solidFill>
+                <a:srgbClr val="E6E8EB"/>
+              </a:solidFill>
+              <a:latin typeface="Consolas"/>
+            </a:endParaRPr>
           </a:p>
           <a:p>
             <a:pPr algn="l">
@@ -52017,26 +52543,6 @@
 </file>
 
 <file path=customXml/item1.xml><?xml version="1.0" encoding="utf-8"?>
-<p:properties xmlns:p="http://schemas.microsoft.com/office/2006/metadata/properties" xmlns:xsi="http://www.w3.org/2001/XMLSchema-instance" xmlns:pc="http://schemas.microsoft.com/office/infopath/2007/PartnerControls">
-  <documentManagement>
-    <lcf76f155ced4ddcb4097134ff3c332f xmlns="7e78f3b6-85d7-48de-b8c3-ce09674901c9">
-      <Terms xmlns="http://schemas.microsoft.com/office/infopath/2007/PartnerControls"/>
-    </lcf76f155ced4ddcb4097134ff3c332f>
-    <TaxCatchAll xmlns="15aa4692-043f-4a54-8684-6febd4759cd0" xsi:nil="true"/>
-  </documentManagement>
-</p:properties>
-</file>
-
-<file path=customXml/item2.xml><?xml version="1.0" encoding="utf-8"?>
-<?mso-contentType ?>
-<FormTemplates xmlns="http://schemas.microsoft.com/sharepoint/v3/contenttype/forms">
-  <Display>DocumentLibraryForm</Display>
-  <Edit>DocumentLibraryForm</Edit>
-  <New>DocumentLibraryForm</New>
-</FormTemplates>
-</file>
-
-<file path=customXml/item3.xml><?xml version="1.0" encoding="utf-8"?>
 <ct:contentTypeSchema xmlns:ct="http://schemas.microsoft.com/office/2006/metadata/contentType" xmlns:ma="http://schemas.microsoft.com/office/2006/metadata/properties/metaAttributes" ct:_="" ma:_="" ma:contentTypeName="Document" ma:contentTypeID="0x010100F102CB21EE8FB44ABFDE80AD0BE6E8B0" ma:contentTypeVersion="16" ma:contentTypeDescription="Create a new document." ma:contentTypeScope="" ma:versionID="96609790f52b922f1b79e8e7aba0f86d">
   <xsd:schema xmlns:xsd="http://www.w3.org/2001/XMLSchema" xmlns:xs="http://www.w3.org/2001/XMLSchema" xmlns:p="http://schemas.microsoft.com/office/2006/metadata/properties" xmlns:ns2="7e78f3b6-85d7-48de-b8c3-ce09674901c9" xmlns:ns3="15aa4692-043f-4a54-8684-6febd4759cd0" targetNamespace="http://schemas.microsoft.com/office/2006/metadata/properties" ma:root="true" ma:fieldsID="ba434503414a3ef9c46bdc7d6fef4b74" ns2:_="" ns3:_="">
     <xsd:import namespace="7e78f3b6-85d7-48de-b8c3-ce09674901c9"/>
@@ -52277,26 +52783,27 @@
 </ct:contentTypeSchema>
 </file>
 
-<file path=customXml/itemProps1.xml><?xml version="1.0" encoding="utf-8"?>
-<ds:datastoreItem xmlns:ds="http://schemas.openxmlformats.org/officeDocument/2006/customXml" ds:itemID="{537D0283-4ACD-4372-88C8-5000D7DCE9A4}">
-  <ds:schemaRefs>
-    <ds:schemaRef ds:uri="http://schemas.microsoft.com/office/2006/metadata/properties"/>
-    <ds:schemaRef ds:uri="http://schemas.microsoft.com/office/infopath/2007/PartnerControls"/>
-    <ds:schemaRef ds:uri="7e78f3b6-85d7-48de-b8c3-ce09674901c9"/>
-    <ds:schemaRef ds:uri="15aa4692-043f-4a54-8684-6febd4759cd0"/>
-  </ds:schemaRefs>
-</ds:datastoreItem>
+<file path=customXml/item2.xml><?xml version="1.0" encoding="utf-8"?>
+<p:properties xmlns:p="http://schemas.microsoft.com/office/2006/metadata/properties" xmlns:xsi="http://www.w3.org/2001/XMLSchema-instance" xmlns:pc="http://schemas.microsoft.com/office/infopath/2007/PartnerControls">
+  <documentManagement>
+    <lcf76f155ced4ddcb4097134ff3c332f xmlns="7e78f3b6-85d7-48de-b8c3-ce09674901c9">
+      <Terms xmlns="http://schemas.microsoft.com/office/infopath/2007/PartnerControls"/>
+    </lcf76f155ced4ddcb4097134ff3c332f>
+    <TaxCatchAll xmlns="15aa4692-043f-4a54-8684-6febd4759cd0" xsi:nil="true"/>
+  </documentManagement>
+</p:properties>
 </file>
 
-<file path=customXml/itemProps2.xml><?xml version="1.0" encoding="utf-8"?>
-<ds:datastoreItem xmlns:ds="http://schemas.openxmlformats.org/officeDocument/2006/customXml" ds:itemID="{AAC35E82-ADCC-45D0-AF16-1A6166EE5086}">
-  <ds:schemaRefs>
-    <ds:schemaRef ds:uri="http://schemas.microsoft.com/sharepoint/v3/contenttype/forms"/>
-  </ds:schemaRefs>
-</ds:datastoreItem>
+<file path=customXml/item3.xml><?xml version="1.0" encoding="utf-8"?>
+<?mso-contentType ?>
+<FormTemplates xmlns="http://schemas.microsoft.com/sharepoint/v3/contenttype/forms">
+  <Display>DocumentLibraryForm</Display>
+  <Edit>DocumentLibraryForm</Edit>
+  <New>DocumentLibraryForm</New>
+</FormTemplates>
 </file>
 
-<file path=customXml/itemProps3.xml><?xml version="1.0" encoding="utf-8"?>
+<file path=customXml/itemProps1.xml><?xml version="1.0" encoding="utf-8"?>
 <ds:datastoreItem xmlns:ds="http://schemas.openxmlformats.org/officeDocument/2006/customXml" ds:itemID="{0101661A-36B8-4E9E-93E3-7C9902136C7B}">
   <ds:schemaRefs>
     <ds:schemaRef ds:uri="http://schemas.microsoft.com/office/2006/metadata/contentType"/>
@@ -52313,4 +52820,23 @@
     <ds:schemaRef ds:uri="http://schemas.microsoft.com/internal/obd"/>
   </ds:schemaRefs>
 </ds:datastoreItem>
+</file>
+
+<file path=customXml/itemProps2.xml><?xml version="1.0" encoding="utf-8"?>
+<ds:datastoreItem xmlns:ds="http://schemas.openxmlformats.org/officeDocument/2006/customXml" ds:itemID="{537D0283-4ACD-4372-88C8-5000D7DCE9A4}">
+  <ds:schemaRefs>
+    <ds:schemaRef ds:uri="http://schemas.microsoft.com/office/2006/metadata/properties"/>
+    <ds:schemaRef ds:uri="http://schemas.microsoft.com/office/infopath/2007/PartnerControls"/>
+    <ds:schemaRef ds:uri="7e78f3b6-85d7-48de-b8c3-ce09674901c9"/>
+    <ds:schemaRef ds:uri="15aa4692-043f-4a54-8684-6febd4759cd0"/>
+  </ds:schemaRefs>
+</ds:datastoreItem>
+</file>
+
+<file path=customXml/itemProps3.xml><?xml version="1.0" encoding="utf-8"?>
+<ds:datastoreItem xmlns:ds="http://schemas.openxmlformats.org/officeDocument/2006/customXml" ds:itemID="{AAC35E82-ADCC-45D0-AF16-1A6166EE5086}">
+  <ds:schemaRefs>
+    <ds:schemaRef ds:uri="http://schemas.microsoft.com/sharepoint/v3/contenttype/forms"/>
+  </ds:schemaRefs>
+</ds:datastoreItem>
 </file>